--- a/formations/output/biostat-module-2-comparaisons.pptx
+++ b/formations/output/biostat-module-2-comparaisons.pptx
@@ -9933,7 +9933,7 @@
         <p:spPr>
           <a:xfrm>
             <a:off x="640080" y="1828800"/>
-            <a:ext cx="10972800" cy="1280160"/>
+            <a:ext cx="10972800" cy="914400"/>
           </a:xfrm>
           <a:prstGeom prst="rect">
             <a:avLst/>
@@ -9974,12 +9974,12 @@
         </p:nvSpPr>
         <p:spPr>
           <a:xfrm>
-            <a:off x="640080" y="3246120"/>
-            <a:ext cx="5486400" cy="2606040"/>
+            <a:off x="640080" y="2926080"/>
+            <a:ext cx="3931920" cy="2926080"/>
           </a:xfrm>
           <a:prstGeom prst="roundRect">
             <a:avLst>
-              <a:gd name="adj" fmla="val 1754"/>
+              <a:gd name="adj" fmla="val 1563"/>
             </a:avLst>
           </a:prstGeom>
           <a:solidFill>
@@ -10001,7 +10001,7 @@
         </p:nvSpPr>
         <p:spPr>
           <a:xfrm>
-            <a:off x="777240" y="3355848"/>
+            <a:off x="777240" y="3035808"/>
             <a:ext cx="365760" cy="256032"/>
           </a:xfrm>
           <a:prstGeom prst="roundRect">
@@ -10023,7 +10023,7 @@
         </p:nvSpPr>
         <p:spPr>
           <a:xfrm>
-            <a:off x="777240" y="3355848"/>
+            <a:off x="777240" y="3035808"/>
             <a:ext cx="365760" cy="256032"/>
           </a:xfrm>
           <a:prstGeom prst="rect">
@@ -10062,8 +10062,8 @@
         </p:nvSpPr>
         <p:spPr>
           <a:xfrm>
-            <a:off x="822960" y="3703320"/>
-            <a:ext cx="5212080" cy="2057400"/>
+            <a:off x="822960" y="3383280"/>
+            <a:ext cx="3657600" cy="2377440"/>
           </a:xfrm>
           <a:prstGeom prst="rect">
             <a:avLst/>
@@ -10090,7 +10090,7 @@
                 <a:ea typeface="Consolas" pitchFamily="34" charset="-122"/>
                 <a:cs typeface="Consolas" pitchFamily="34" charset="-120"/>
               </a:rPr>
-              <a:t># Welch : pas d'hypothèse sur les variances</a:t>
+              <a:t># Welch sans hypothèse</a:t>
             </a:r>
             <a:endParaRPr lang="en-US" sz="1050" dirty="0"/>
           </a:p>
@@ -10110,7 +10110,7 @@
                 <a:ea typeface="Consolas" pitchFamily="34" charset="-122"/>
                 <a:cs typeface="Consolas" pitchFamily="34" charset="-120"/>
               </a:rPr>
-              <a:t>t.test(hba1c ~ groupe, data = donnees,</a:t>
+              <a:t># sur les variances</a:t>
             </a:r>
             <a:endParaRPr lang="en-US" sz="1050" dirty="0"/>
           </a:p>
@@ -10130,6 +10130,46 @@
                 <a:ea typeface="Consolas" pitchFamily="34" charset="-122"/>
                 <a:cs typeface="Consolas" pitchFamily="34" charset="-120"/>
               </a:rPr>
+              <a:t>t.test(hba1c ~ groupe,</a:t>
+            </a:r>
+            <a:endParaRPr lang="en-US" sz="1050" dirty="0"/>
+          </a:p>
+          <a:p>
+            <a:pPr indent="0" marL="0">
+              <a:lnSpc>
+                <a:spcPct val="140000"/>
+              </a:lnSpc>
+              <a:buNone/>
+            </a:pPr>
+            <a:r>
+              <a:rPr lang="en-US" sz="1050" dirty="0">
+                <a:solidFill>
+                  <a:srgbClr val="E8EAED"/>
+                </a:solidFill>
+                <a:latin typeface="Consolas" pitchFamily="34" charset="0"/>
+                <a:ea typeface="Consolas" pitchFamily="34" charset="-122"/>
+                <a:cs typeface="Consolas" pitchFamily="34" charset="-120"/>
+              </a:rPr>
+              <a:t>       data = donnees,</a:t>
+            </a:r>
+            <a:endParaRPr lang="en-US" sz="1050" dirty="0"/>
+          </a:p>
+          <a:p>
+            <a:pPr indent="0" marL="0">
+              <a:lnSpc>
+                <a:spcPct val="140000"/>
+              </a:lnSpc>
+              <a:buNone/>
+            </a:pPr>
+            <a:r>
+              <a:rPr lang="en-US" sz="1050" dirty="0">
+                <a:solidFill>
+                  <a:srgbClr val="E8EAED"/>
+                </a:solidFill>
+                <a:latin typeface="Consolas" pitchFamily="34" charset="0"/>
+                <a:ea typeface="Consolas" pitchFamily="34" charset="-122"/>
+                <a:cs typeface="Consolas" pitchFamily="34" charset="-120"/>
+              </a:rPr>
               <a:t>       var.equal = FALSE)</a:t>
             </a:r>
             <a:endParaRPr lang="en-US" sz="1050" dirty="0"/>
@@ -10159,7 +10199,7 @@
                 <a:ea typeface="Consolas" pitchFamily="34" charset="-122"/>
                 <a:cs typeface="Consolas" pitchFamily="34" charset="-120"/>
               </a:rPr>
-              <a:t># Cohen's d pour la taille d'effet</a:t>
+              <a:t># Taille d'effet</a:t>
             </a:r>
             <a:endParaRPr lang="en-US" sz="1050" dirty="0"/>
           </a:p>
@@ -10199,7 +10239,27 @@
                 <a:ea typeface="Consolas" pitchFamily="34" charset="-122"/>
                 <a:cs typeface="Consolas" pitchFamily="34" charset="-120"/>
               </a:rPr>
-              <a:t>cohen.d(hba1c ~ groupe, data = donnees)</a:t>
+              <a:t>cohen.d(hba1c ~ groupe,</a:t>
+            </a:r>
+            <a:endParaRPr lang="en-US" sz="1050" dirty="0"/>
+          </a:p>
+          <a:p>
+            <a:pPr indent="0" marL="0">
+              <a:lnSpc>
+                <a:spcPct val="140000"/>
+              </a:lnSpc>
+              <a:buNone/>
+            </a:pPr>
+            <a:r>
+              <a:rPr lang="en-US" sz="1050" dirty="0">
+                <a:solidFill>
+                  <a:srgbClr val="E8EAED"/>
+                </a:solidFill>
+                <a:latin typeface="Consolas" pitchFamily="34" charset="0"/>
+                <a:ea typeface="Consolas" pitchFamily="34" charset="-122"/>
+                <a:cs typeface="Consolas" pitchFamily="34" charset="-120"/>
+              </a:rPr>
+              <a:t>        data = donnees)</a:t>
             </a:r>
             <a:endParaRPr lang="en-US" sz="1050" dirty="0"/>
           </a:p>
@@ -10213,12 +10273,12 @@
         </p:nvSpPr>
         <p:spPr>
           <a:xfrm>
-            <a:off x="6400800" y="3246120"/>
-            <a:ext cx="5330952" cy="2606040"/>
+            <a:off x="4709160" y="2926080"/>
+            <a:ext cx="2560320" cy="2926080"/>
           </a:xfrm>
           <a:prstGeom prst="roundRect">
             <a:avLst>
-              <a:gd name="adj" fmla="val 1754"/>
+              <a:gd name="adj" fmla="val 1786"/>
             </a:avLst>
           </a:prstGeom>
           <a:solidFill>
@@ -10240,7 +10300,7 @@
         </p:nvSpPr>
         <p:spPr>
           <a:xfrm>
-            <a:off x="6537960" y="3337560"/>
+            <a:off x="4846320" y="3017520"/>
             <a:ext cx="914400" cy="228600"/>
           </a:xfrm>
           <a:prstGeom prst="rect">
@@ -10279,8 +10339,8 @@
         </p:nvSpPr>
         <p:spPr>
           <a:xfrm>
-            <a:off x="6583680" y="3611880"/>
-            <a:ext cx="5056632" cy="2148840"/>
+            <a:off x="4892040" y="3291840"/>
+            <a:ext cx="2286000" cy="2468880"/>
           </a:xfrm>
           <a:prstGeom prst="rect">
             <a:avLst/>
@@ -10307,7 +10367,7 @@
                 <a:ea typeface="Consolas" pitchFamily="34" charset="-122"/>
                 <a:cs typeface="Consolas" pitchFamily="34" charset="-120"/>
               </a:rPr>
-              <a:t>Welch Two Sample t-test</a:t>
+              <a:t>Welch t-test</a:t>
             </a:r>
             <a:endParaRPr lang="en-US" sz="1050" dirty="0"/>
           </a:p>
@@ -10336,7 +10396,7 @@
                 <a:ea typeface="Consolas" pitchFamily="34" charset="-122"/>
                 <a:cs typeface="Consolas" pitchFamily="34" charset="-120"/>
               </a:rPr>
-              <a:t>t = -3.42, df = 47.8, p = 0.0013</a:t>
+              <a:t>t = -3.42</a:t>
             </a:r>
             <a:endParaRPr lang="en-US" sz="1050" dirty="0"/>
           </a:p>
@@ -10356,7 +10416,7 @@
                 <a:ea typeface="Consolas" pitchFamily="34" charset="-122"/>
                 <a:cs typeface="Consolas" pitchFamily="34" charset="-120"/>
               </a:rPr>
-              <a:t>IC95% [-1.42, -0.36]</a:t>
+              <a:t>p = 0.0013</a:t>
             </a:r>
             <a:endParaRPr lang="en-US" sz="1050" dirty="0"/>
           </a:p>
@@ -10376,7 +10436,7 @@
                 <a:ea typeface="Consolas" pitchFamily="34" charset="-122"/>
                 <a:cs typeface="Consolas" pitchFamily="34" charset="-120"/>
               </a:rPr>
-              <a:t>mean grp A = 7.1, grp B = 8.0</a:t>
+              <a:t>IC95%</a:t>
             </a:r>
             <a:endParaRPr lang="en-US" sz="1050" dirty="0"/>
           </a:p>
@@ -10387,6 +10447,17 @@
               </a:lnSpc>
               <a:buNone/>
             </a:pPr>
+            <a:r>
+              <a:rPr lang="en-US" sz="1050" dirty="0">
+                <a:solidFill>
+                  <a:srgbClr val="FFFFFF"/>
+                </a:solidFill>
+                <a:latin typeface="Consolas" pitchFamily="34" charset="0"/>
+                <a:ea typeface="Consolas" pitchFamily="34" charset="-122"/>
+                <a:cs typeface="Consolas" pitchFamily="34" charset="-120"/>
+              </a:rPr>
+              <a:t>[-1.42, -0.36]</a:t>
+            </a:r>
             <a:endParaRPr lang="en-US" sz="1050" dirty="0"/>
           </a:p>
           <a:p>
@@ -10396,6 +10467,15 @@
               </a:lnSpc>
               <a:buNone/>
             </a:pPr>
+            <a:endParaRPr lang="en-US" sz="1050" dirty="0"/>
+          </a:p>
+          <a:p>
+            <a:pPr indent="0" marL="0">
+              <a:lnSpc>
+                <a:spcPct val="130000"/>
+              </a:lnSpc>
+              <a:buNone/>
+            </a:pPr>
             <a:r>
               <a:rPr lang="en-US" sz="1050" dirty="0">
                 <a:solidFill>
@@ -10405,7 +10485,7 @@
                 <a:ea typeface="Consolas" pitchFamily="34" charset="-122"/>
                 <a:cs typeface="Consolas" pitchFamily="34" charset="-120"/>
               </a:rPr>
-              <a:t>Cohen's d: -0.78 (medium-large)</a:t>
+              <a:t>Cohen's d = -0.78</a:t>
             </a:r>
             <a:endParaRPr lang="en-US" sz="1050" dirty="0"/>
           </a:p>
@@ -10425,35 +10505,561 @@
                 <a:ea typeface="Consolas" pitchFamily="34" charset="-122"/>
                 <a:cs typeface="Consolas" pitchFamily="34" charset="-120"/>
               </a:rPr>
-              <a:t>→ Différence significative et</a:t>
-            </a:r>
-            <a:endParaRPr lang="en-US" sz="1050" dirty="0"/>
-          </a:p>
-          <a:p>
-            <a:pPr indent="0" marL="0">
-              <a:lnSpc>
-                <a:spcPct val="130000"/>
-              </a:lnSpc>
-              <a:buNone/>
-            </a:pPr>
-            <a:r>
-              <a:rPr lang="en-US" sz="1050" dirty="0">
-                <a:solidFill>
-                  <a:srgbClr val="FFFFFF"/>
-                </a:solidFill>
-                <a:latin typeface="Consolas" pitchFamily="34" charset="0"/>
-                <a:ea typeface="Consolas" pitchFamily="34" charset="-122"/>
-                <a:cs typeface="Consolas" pitchFamily="34" charset="-120"/>
-              </a:rPr>
-              <a:t>  cliniquement pertinente.</a:t>
-            </a:r>
-            <a:endParaRPr lang="en-US" sz="1050" dirty="0"/>
-          </a:p>
-        </p:txBody>
-      </p:sp>
-      <p:sp>
-        <p:nvSpPr>
-          <p:cNvPr id="14" name="Text 12"/>
+              <a:t>(moyen-fort)</a:t>
+            </a:r>
+            <a:endParaRPr lang="en-US" sz="1050" dirty="0"/>
+          </a:p>
+        </p:txBody>
+      </p:sp>
+      <p:sp>
+        <p:nvSpPr>
+          <p:cNvPr id="14" name="Shape 12"/>
+          <p:cNvSpPr/>
+          <p:nvPr/>
+        </p:nvSpPr>
+        <p:spPr>
+          <a:xfrm>
+            <a:off x="7406640" y="2926080"/>
+            <a:ext cx="4325112" cy="2926080"/>
+          </a:xfrm>
+          <a:prstGeom prst="rect">
+            <a:avLst/>
+          </a:prstGeom>
+          <a:solidFill>
+            <a:srgbClr val="FFFFFF"/>
+          </a:solidFill>
+          <a:ln w="6350">
+            <a:solidFill>
+              <a:srgbClr val="D6CFB8"/>
+            </a:solidFill>
+            <a:prstDash val="solid"/>
+          </a:ln>
+        </p:spPr>
+      </p:sp>
+      <p:sp>
+        <p:nvSpPr>
+          <p:cNvPr id="15" name="Text 13"/>
+          <p:cNvSpPr/>
+          <p:nvPr/>
+        </p:nvSpPr>
+        <p:spPr>
+          <a:xfrm>
+            <a:off x="7498080" y="2962656"/>
+            <a:ext cx="4142232" cy="228600"/>
+          </a:xfrm>
+          <a:prstGeom prst="rect">
+            <a:avLst/>
+          </a:prstGeom>
+          <a:noFill/>
+          <a:ln/>
+        </p:spPr>
+        <p:txBody>
+          <a:bodyPr wrap="square" rtlCol="0" anchor="ctr"/>
+          <a:lstStyle/>
+          <a:p>
+            <a:pPr algn="ctr" indent="0" marL="0">
+              <a:buNone/>
+            </a:pPr>
+            <a:r>
+              <a:rPr lang="en-US" sz="900" b="1" dirty="0">
+                <a:solidFill>
+                  <a:srgbClr val="15233F"/>
+                </a:solidFill>
+                <a:latin typeface="Calibri" pitchFamily="34" charset="0"/>
+                <a:ea typeface="Calibri" pitchFamily="34" charset="-122"/>
+                <a:cs typeface="Calibri" pitchFamily="34" charset="-120"/>
+              </a:rPr>
+              <a:t>HbA1c · bras A vs bras B</a:t>
+            </a:r>
+            <a:endParaRPr lang="en-US" sz="900" dirty="0"/>
+          </a:p>
+        </p:txBody>
+      </p:sp>
+      <p:sp>
+        <p:nvSpPr>
+          <p:cNvPr id="16" name="Shape 14"/>
+          <p:cNvSpPr/>
+          <p:nvPr/>
+        </p:nvSpPr>
+        <p:spPr>
+          <a:xfrm>
+            <a:off x="7818120" y="5486400"/>
+            <a:ext cx="3776472" cy="0"/>
+          </a:xfrm>
+          <a:prstGeom prst="line">
+            <a:avLst/>
+          </a:prstGeom>
+          <a:noFill/>
+          <a:ln w="9525">
+            <a:solidFill>
+              <a:srgbClr val="0E1729"/>
+            </a:solidFill>
+            <a:prstDash val="solid"/>
+          </a:ln>
+        </p:spPr>
+      </p:sp>
+      <p:sp>
+        <p:nvSpPr>
+          <p:cNvPr id="17" name="Shape 15"/>
+          <p:cNvSpPr/>
+          <p:nvPr/>
+        </p:nvSpPr>
+        <p:spPr>
+          <a:xfrm>
+            <a:off x="7818120" y="3246120"/>
+            <a:ext cx="0" cy="2240280"/>
+          </a:xfrm>
+          <a:prstGeom prst="line">
+            <a:avLst/>
+          </a:prstGeom>
+          <a:noFill/>
+          <a:ln w="9525">
+            <a:solidFill>
+              <a:srgbClr val="0E1729"/>
+            </a:solidFill>
+            <a:prstDash val="solid"/>
+          </a:ln>
+        </p:spPr>
+      </p:sp>
+      <p:sp>
+        <p:nvSpPr>
+          <p:cNvPr id="18" name="Text 16"/>
+          <p:cNvSpPr/>
+          <p:nvPr/>
+        </p:nvSpPr>
+        <p:spPr>
+          <a:xfrm>
+            <a:off x="7818120" y="5577840"/>
+            <a:ext cx="3776472" cy="201168"/>
+          </a:xfrm>
+          <a:prstGeom prst="rect">
+            <a:avLst/>
+          </a:prstGeom>
+          <a:noFill/>
+          <a:ln/>
+        </p:spPr>
+        <p:txBody>
+          <a:bodyPr wrap="square" rtlCol="0" anchor="ctr"/>
+          <a:lstStyle/>
+          <a:p>
+            <a:pPr algn="ctr" indent="0" marL="0">
+              <a:buNone/>
+            </a:pPr>
+            <a:r>
+              <a:rPr lang="en-US" sz="800" i="1" dirty="0">
+                <a:solidFill>
+                  <a:srgbClr val="6B7280"/>
+                </a:solidFill>
+                <a:latin typeface="Calibri" pitchFamily="34" charset="0"/>
+                <a:ea typeface="Calibri" pitchFamily="34" charset="-122"/>
+                <a:cs typeface="Calibri" pitchFamily="34" charset="-120"/>
+              </a:rPr>
+              <a:t>Groupes</a:t>
+            </a:r>
+            <a:endParaRPr lang="en-US" sz="800" dirty="0"/>
+          </a:p>
+        </p:txBody>
+      </p:sp>
+      <p:sp>
+        <p:nvSpPr>
+          <p:cNvPr id="19" name="Text 17"/>
+          <p:cNvSpPr/>
+          <p:nvPr/>
+        </p:nvSpPr>
+        <p:spPr>
+          <a:xfrm rot="-5400000">
+            <a:off x="7424928" y="3246120"/>
+            <a:ext cx="365760" cy="2240280"/>
+          </a:xfrm>
+          <a:prstGeom prst="rect">
+            <a:avLst/>
+          </a:prstGeom>
+          <a:noFill/>
+          <a:ln/>
+        </p:spPr>
+        <p:txBody>
+          <a:bodyPr wrap="square" rtlCol="0" anchor="ctr"/>
+          <a:lstStyle/>
+          <a:p>
+            <a:pPr algn="l" indent="0" marL="0">
+              <a:buNone/>
+            </a:pPr>
+            <a:r>
+              <a:rPr lang="en-US" sz="800" i="1" dirty="0">
+                <a:solidFill>
+                  <a:srgbClr val="6B7280"/>
+                </a:solidFill>
+                <a:latin typeface="Calibri" pitchFamily="34" charset="0"/>
+                <a:ea typeface="Calibri" pitchFamily="34" charset="-122"/>
+                <a:cs typeface="Calibri" pitchFamily="34" charset="-120"/>
+              </a:rPr>
+              <a:t>Valeur</a:t>
+            </a:r>
+            <a:endParaRPr lang="en-US" sz="800" dirty="0"/>
+          </a:p>
+        </p:txBody>
+      </p:sp>
+      <p:sp>
+        <p:nvSpPr>
+          <p:cNvPr id="20" name="Shape 18"/>
+          <p:cNvSpPr/>
+          <p:nvPr/>
+        </p:nvSpPr>
+        <p:spPr>
+          <a:xfrm>
+            <a:off x="8762238" y="5486400"/>
+            <a:ext cx="0" cy="-461234"/>
+          </a:xfrm>
+          <a:prstGeom prst="line">
+            <a:avLst/>
+          </a:prstGeom>
+          <a:noFill/>
+          <a:ln w="9525">
+            <a:solidFill>
+              <a:srgbClr val="6B7280"/>
+            </a:solidFill>
+            <a:prstDash val="solid"/>
+          </a:ln>
+        </p:spPr>
+      </p:sp>
+      <p:sp>
+        <p:nvSpPr>
+          <p:cNvPr id="21" name="Shape 19"/>
+          <p:cNvSpPr/>
+          <p:nvPr/>
+        </p:nvSpPr>
+        <p:spPr>
+          <a:xfrm>
+            <a:off x="8526209" y="5486400"/>
+            <a:ext cx="472059" cy="0"/>
+          </a:xfrm>
+          <a:prstGeom prst="line">
+            <a:avLst/>
+          </a:prstGeom>
+          <a:noFill/>
+          <a:ln w="9525">
+            <a:solidFill>
+              <a:srgbClr val="6B7280"/>
+            </a:solidFill>
+            <a:prstDash val="solid"/>
+          </a:ln>
+        </p:spPr>
+      </p:sp>
+      <p:sp>
+        <p:nvSpPr>
+          <p:cNvPr id="22" name="Shape 20"/>
+          <p:cNvSpPr/>
+          <p:nvPr/>
+        </p:nvSpPr>
+        <p:spPr>
+          <a:xfrm>
+            <a:off x="8762238" y="4432151"/>
+            <a:ext cx="0" cy="-527125"/>
+          </a:xfrm>
+          <a:prstGeom prst="line">
+            <a:avLst/>
+          </a:prstGeom>
+          <a:noFill/>
+          <a:ln w="9525">
+            <a:solidFill>
+              <a:srgbClr val="6B7280"/>
+            </a:solidFill>
+            <a:prstDash val="solid"/>
+          </a:ln>
+        </p:spPr>
+      </p:sp>
+      <p:sp>
+        <p:nvSpPr>
+          <p:cNvPr id="23" name="Shape 21"/>
+          <p:cNvSpPr/>
+          <p:nvPr/>
+        </p:nvSpPr>
+        <p:spPr>
+          <a:xfrm>
+            <a:off x="8526209" y="3905026"/>
+            <a:ext cx="472059" cy="0"/>
+          </a:xfrm>
+          <a:prstGeom prst="line">
+            <a:avLst/>
+          </a:prstGeom>
+          <a:noFill/>
+          <a:ln w="9525">
+            <a:solidFill>
+              <a:srgbClr val="6B7280"/>
+            </a:solidFill>
+            <a:prstDash val="solid"/>
+          </a:ln>
+        </p:spPr>
+      </p:sp>
+      <p:sp>
+        <p:nvSpPr>
+          <p:cNvPr id="24" name="Shape 22"/>
+          <p:cNvSpPr/>
+          <p:nvPr/>
+        </p:nvSpPr>
+        <p:spPr>
+          <a:xfrm>
+            <a:off x="8290179" y="4432151"/>
+            <a:ext cx="944118" cy="593015"/>
+          </a:xfrm>
+          <a:prstGeom prst="rect">
+            <a:avLst/>
+          </a:prstGeom>
+          <a:solidFill>
+            <a:srgbClr val="FFFFFF"/>
+          </a:solidFill>
+          <a:ln w="12700">
+            <a:solidFill>
+              <a:srgbClr val="0E1729"/>
+            </a:solidFill>
+            <a:prstDash val="solid"/>
+          </a:ln>
+        </p:spPr>
+      </p:sp>
+      <p:sp>
+        <p:nvSpPr>
+          <p:cNvPr id="25" name="Shape 23"/>
+          <p:cNvSpPr/>
+          <p:nvPr/>
+        </p:nvSpPr>
+        <p:spPr>
+          <a:xfrm>
+            <a:off x="8290179" y="4761604"/>
+            <a:ext cx="944118" cy="0"/>
+          </a:xfrm>
+          <a:prstGeom prst="line">
+            <a:avLst/>
+          </a:prstGeom>
+          <a:noFill/>
+          <a:ln w="19050">
+            <a:solidFill>
+              <a:srgbClr val="0E1729"/>
+            </a:solidFill>
+            <a:prstDash val="solid"/>
+          </a:ln>
+        </p:spPr>
+      </p:sp>
+      <p:sp>
+        <p:nvSpPr>
+          <p:cNvPr id="26" name="Text 24"/>
+          <p:cNvSpPr/>
+          <p:nvPr/>
+        </p:nvSpPr>
+        <p:spPr>
+          <a:xfrm>
+            <a:off x="7818120" y="5532120"/>
+            <a:ext cx="1888236" cy="182880"/>
+          </a:xfrm>
+          <a:prstGeom prst="rect">
+            <a:avLst/>
+          </a:prstGeom>
+          <a:noFill/>
+          <a:ln/>
+        </p:spPr>
+        <p:txBody>
+          <a:bodyPr wrap="square" rtlCol="0" anchor="ctr"/>
+          <a:lstStyle/>
+          <a:p>
+            <a:pPr algn="ctr" indent="0" marL="0">
+              <a:buNone/>
+            </a:pPr>
+            <a:r>
+              <a:rPr lang="en-US" sz="800" b="1" dirty="0">
+                <a:solidFill>
+                  <a:srgbClr val="15233F"/>
+                </a:solidFill>
+                <a:latin typeface="Calibri" pitchFamily="34" charset="0"/>
+                <a:ea typeface="Calibri" pitchFamily="34" charset="-122"/>
+                <a:cs typeface="Calibri" pitchFamily="34" charset="-120"/>
+              </a:rPr>
+              <a:t>A</a:t>
+            </a:r>
+            <a:endParaRPr lang="en-US" sz="800" dirty="0"/>
+          </a:p>
+        </p:txBody>
+      </p:sp>
+      <p:sp>
+        <p:nvSpPr>
+          <p:cNvPr id="27" name="Shape 25"/>
+          <p:cNvSpPr/>
+          <p:nvPr/>
+        </p:nvSpPr>
+        <p:spPr>
+          <a:xfrm>
+            <a:off x="10650474" y="4893385"/>
+            <a:ext cx="0" cy="-395344"/>
+          </a:xfrm>
+          <a:prstGeom prst="line">
+            <a:avLst/>
+          </a:prstGeom>
+          <a:noFill/>
+          <a:ln w="9525">
+            <a:solidFill>
+              <a:srgbClr val="6B7280"/>
+            </a:solidFill>
+            <a:prstDash val="solid"/>
+          </a:ln>
+        </p:spPr>
+      </p:sp>
+      <p:sp>
+        <p:nvSpPr>
+          <p:cNvPr id="28" name="Shape 26"/>
+          <p:cNvSpPr/>
+          <p:nvPr/>
+        </p:nvSpPr>
+        <p:spPr>
+          <a:xfrm>
+            <a:off x="10414445" y="4893385"/>
+            <a:ext cx="472059" cy="0"/>
+          </a:xfrm>
+          <a:prstGeom prst="line">
+            <a:avLst/>
+          </a:prstGeom>
+          <a:noFill/>
+          <a:ln w="9525">
+            <a:solidFill>
+              <a:srgbClr val="6B7280"/>
+            </a:solidFill>
+            <a:prstDash val="solid"/>
+          </a:ln>
+        </p:spPr>
+      </p:sp>
+      <p:sp>
+        <p:nvSpPr>
+          <p:cNvPr id="29" name="Shape 27"/>
+          <p:cNvSpPr/>
+          <p:nvPr/>
+        </p:nvSpPr>
+        <p:spPr>
+          <a:xfrm>
+            <a:off x="10650474" y="3839135"/>
+            <a:ext cx="0" cy="-593015"/>
+          </a:xfrm>
+          <a:prstGeom prst="line">
+            <a:avLst/>
+          </a:prstGeom>
+          <a:noFill/>
+          <a:ln w="9525">
+            <a:solidFill>
+              <a:srgbClr val="6B7280"/>
+            </a:solidFill>
+            <a:prstDash val="solid"/>
+          </a:ln>
+        </p:spPr>
+      </p:sp>
+      <p:sp>
+        <p:nvSpPr>
+          <p:cNvPr id="30" name="Shape 28"/>
+          <p:cNvSpPr/>
+          <p:nvPr/>
+        </p:nvSpPr>
+        <p:spPr>
+          <a:xfrm>
+            <a:off x="10414445" y="3246120"/>
+            <a:ext cx="472059" cy="0"/>
+          </a:xfrm>
+          <a:prstGeom prst="line">
+            <a:avLst/>
+          </a:prstGeom>
+          <a:noFill/>
+          <a:ln w="9525">
+            <a:solidFill>
+              <a:srgbClr val="6B7280"/>
+            </a:solidFill>
+            <a:prstDash val="solid"/>
+          </a:ln>
+        </p:spPr>
+      </p:sp>
+      <p:sp>
+        <p:nvSpPr>
+          <p:cNvPr id="31" name="Shape 29"/>
+          <p:cNvSpPr/>
+          <p:nvPr/>
+        </p:nvSpPr>
+        <p:spPr>
+          <a:xfrm>
+            <a:off x="10178415" y="3839135"/>
+            <a:ext cx="944118" cy="658906"/>
+          </a:xfrm>
+          <a:prstGeom prst="rect">
+            <a:avLst/>
+          </a:prstGeom>
+          <a:solidFill>
+            <a:srgbClr val="F09042"/>
+          </a:solidFill>
+          <a:ln w="12700">
+            <a:solidFill>
+              <a:srgbClr val="F09042"/>
+            </a:solidFill>
+            <a:prstDash val="solid"/>
+          </a:ln>
+        </p:spPr>
+      </p:sp>
+      <p:sp>
+        <p:nvSpPr>
+          <p:cNvPr id="32" name="Shape 30"/>
+          <p:cNvSpPr/>
+          <p:nvPr/>
+        </p:nvSpPr>
+        <p:spPr>
+          <a:xfrm>
+            <a:off x="10178415" y="4168588"/>
+            <a:ext cx="944118" cy="0"/>
+          </a:xfrm>
+          <a:prstGeom prst="line">
+            <a:avLst/>
+          </a:prstGeom>
+          <a:noFill/>
+          <a:ln w="19050">
+            <a:solidFill>
+              <a:srgbClr val="F09042"/>
+            </a:solidFill>
+            <a:prstDash val="solid"/>
+          </a:ln>
+        </p:spPr>
+      </p:sp>
+      <p:sp>
+        <p:nvSpPr>
+          <p:cNvPr id="33" name="Text 31"/>
+          <p:cNvSpPr/>
+          <p:nvPr/>
+        </p:nvSpPr>
+        <p:spPr>
+          <a:xfrm>
+            <a:off x="9706356" y="5532120"/>
+            <a:ext cx="1888236" cy="182880"/>
+          </a:xfrm>
+          <a:prstGeom prst="rect">
+            <a:avLst/>
+          </a:prstGeom>
+          <a:noFill/>
+          <a:ln/>
+        </p:spPr>
+        <p:txBody>
+          <a:bodyPr wrap="square" rtlCol="0" anchor="ctr"/>
+          <a:lstStyle/>
+          <a:p>
+            <a:pPr algn="ctr" indent="0" marL="0">
+              <a:buNone/>
+            </a:pPr>
+            <a:r>
+              <a:rPr lang="en-US" sz="800" b="1" dirty="0">
+                <a:solidFill>
+                  <a:srgbClr val="15233F"/>
+                </a:solidFill>
+                <a:latin typeface="Calibri" pitchFamily="34" charset="0"/>
+                <a:ea typeface="Calibri" pitchFamily="34" charset="-122"/>
+                <a:cs typeface="Calibri" pitchFamily="34" charset="-120"/>
+              </a:rPr>
+              <a:t>B</a:t>
+            </a:r>
+            <a:endParaRPr lang="en-US" sz="800" dirty="0"/>
+          </a:p>
+        </p:txBody>
+      </p:sp>
+      <p:sp>
+        <p:nvSpPr>
+          <p:cNvPr id="34" name="Text 32"/>
           <p:cNvSpPr/>
           <p:nvPr/>
         </p:nvSpPr>
@@ -12277,7 +12883,7 @@
         <p:spPr>
           <a:xfrm>
             <a:off x="640080" y="1828800"/>
-            <a:ext cx="10972800" cy="1280160"/>
+            <a:ext cx="10972800" cy="914400"/>
           </a:xfrm>
           <a:prstGeom prst="rect">
             <a:avLst/>
@@ -12304,7 +12910,7 @@
                 <a:ea typeface="Calibri" pitchFamily="34" charset="-122"/>
                 <a:cs typeface="Calibri" pitchFamily="34" charset="-120"/>
               </a:rPr>
-              <a:t>ANOVA répond à « y a-t-il une différence quelque part ? ». Si oui, elle ne te dit pas entre quels groupes. C'est Tukey HSD (post-hoc) qui le précise — sans Tukey, ton ANOVA significative n'est pas utilisable pour conclure.</a:t>
+              <a:t>ANOVA répond à « y a-t-il une différence quelque part ? ». Si oui, elle ne te dit pas entre quels groupes — c'est Tukey HSD (post-hoc) qui le précise. Sans Tukey, ton ANOVA significative n'est pas utilisable pour conclure.</a:t>
             </a:r>
             <a:endParaRPr lang="en-US" sz="1300" dirty="0"/>
           </a:p>
@@ -12318,12 +12924,12 @@
         </p:nvSpPr>
         <p:spPr>
           <a:xfrm>
-            <a:off x="640080" y="3246120"/>
-            <a:ext cx="5486400" cy="2606040"/>
+            <a:off x="640080" y="2926080"/>
+            <a:ext cx="3931920" cy="2926080"/>
           </a:xfrm>
           <a:prstGeom prst="roundRect">
             <a:avLst>
-              <a:gd name="adj" fmla="val 1754"/>
+              <a:gd name="adj" fmla="val 1563"/>
             </a:avLst>
           </a:prstGeom>
           <a:solidFill>
@@ -12345,7 +12951,7 @@
         </p:nvSpPr>
         <p:spPr>
           <a:xfrm>
-            <a:off x="777240" y="3355848"/>
+            <a:off x="777240" y="3035808"/>
             <a:ext cx="365760" cy="256032"/>
           </a:xfrm>
           <a:prstGeom prst="roundRect">
@@ -12367,7 +12973,7 @@
         </p:nvSpPr>
         <p:spPr>
           <a:xfrm>
-            <a:off x="777240" y="3355848"/>
+            <a:off x="777240" y="3035808"/>
             <a:ext cx="365760" cy="256032"/>
           </a:xfrm>
           <a:prstGeom prst="rect">
@@ -12406,8 +13012,8 @@
         </p:nvSpPr>
         <p:spPr>
           <a:xfrm>
-            <a:off x="822960" y="3703320"/>
-            <a:ext cx="5212080" cy="2057400"/>
+            <a:off x="822960" y="3383280"/>
+            <a:ext cx="3657600" cy="2377440"/>
           </a:xfrm>
           <a:prstGeom prst="rect">
             <a:avLst/>
@@ -12474,7 +13080,7 @@
                 <a:ea typeface="Consolas" pitchFamily="34" charset="-122"/>
                 <a:cs typeface="Consolas" pitchFamily="34" charset="-120"/>
               </a:rPr>
-              <a:t>leveneTest(score ~ region, data = donnees)</a:t>
+              <a:t>leveneTest(score ~ region,</a:t>
             </a:r>
             <a:endParaRPr lang="en-US" sz="1050" dirty="0"/>
           </a:p>
@@ -12485,6 +13091,17 @@
               </a:lnSpc>
               <a:buNone/>
             </a:pPr>
+            <a:r>
+              <a:rPr lang="en-US" sz="1050" dirty="0">
+                <a:solidFill>
+                  <a:srgbClr val="E8EAED"/>
+                </a:solidFill>
+                <a:latin typeface="Consolas" pitchFamily="34" charset="0"/>
+                <a:ea typeface="Consolas" pitchFamily="34" charset="-122"/>
+                <a:cs typeface="Consolas" pitchFamily="34" charset="-120"/>
+              </a:rPr>
+              <a:t>           data = donnees)</a:t>
+            </a:r>
             <a:endParaRPr lang="en-US" sz="1050" dirty="0"/>
           </a:p>
           <a:p>
@@ -12494,6 +13111,15 @@
               </a:lnSpc>
               <a:buNone/>
             </a:pPr>
+            <a:endParaRPr lang="en-US" sz="1050" dirty="0"/>
+          </a:p>
+          <a:p>
+            <a:pPr indent="0" marL="0">
+              <a:lnSpc>
+                <a:spcPct val="140000"/>
+              </a:lnSpc>
+              <a:buNone/>
+            </a:pPr>
             <a:r>
               <a:rPr lang="en-US" sz="1050" dirty="0">
                 <a:solidFill>
@@ -12523,7 +13149,7 @@
                 <a:ea typeface="Consolas" pitchFamily="34" charset="-122"/>
                 <a:cs typeface="Consolas" pitchFamily="34" charset="-120"/>
               </a:rPr>
-              <a:t>modele &lt;- aov(score ~ region, data = donnees)</a:t>
+              <a:t>modele &lt;- aov(score ~ region,</a:t>
             </a:r>
             <a:endParaRPr lang="en-US" sz="1050" dirty="0"/>
           </a:p>
@@ -12543,6 +13169,26 @@
                 <a:ea typeface="Consolas" pitchFamily="34" charset="-122"/>
                 <a:cs typeface="Consolas" pitchFamily="34" charset="-120"/>
               </a:rPr>
+              <a:t>              data = donnees)</a:t>
+            </a:r>
+            <a:endParaRPr lang="en-US" sz="1050" dirty="0"/>
+          </a:p>
+          <a:p>
+            <a:pPr indent="0" marL="0">
+              <a:lnSpc>
+                <a:spcPct val="140000"/>
+              </a:lnSpc>
+              <a:buNone/>
+            </a:pPr>
+            <a:r>
+              <a:rPr lang="en-US" sz="1050" dirty="0">
+                <a:solidFill>
+                  <a:srgbClr val="E8EAED"/>
+                </a:solidFill>
+                <a:latin typeface="Consolas" pitchFamily="34" charset="0"/>
+                <a:ea typeface="Consolas" pitchFamily="34" charset="-122"/>
+                <a:cs typeface="Consolas" pitchFamily="34" charset="-120"/>
+              </a:rPr>
               <a:t>summary(modele)</a:t>
             </a:r>
             <a:endParaRPr lang="en-US" sz="1050" dirty="0"/>
@@ -12606,12 +13252,12 @@
         </p:nvSpPr>
         <p:spPr>
           <a:xfrm>
-            <a:off x="6400800" y="3246120"/>
-            <a:ext cx="5330952" cy="2606040"/>
+            <a:off x="4709160" y="2926080"/>
+            <a:ext cx="2560320" cy="2926080"/>
           </a:xfrm>
           <a:prstGeom prst="roundRect">
             <a:avLst>
-              <a:gd name="adj" fmla="val 1754"/>
+              <a:gd name="adj" fmla="val 1786"/>
             </a:avLst>
           </a:prstGeom>
           <a:solidFill>
@@ -12633,7 +13279,7 @@
         </p:nvSpPr>
         <p:spPr>
           <a:xfrm>
-            <a:off x="6537960" y="3337560"/>
+            <a:off x="4846320" y="3017520"/>
             <a:ext cx="914400" cy="228600"/>
           </a:xfrm>
           <a:prstGeom prst="rect">
@@ -12672,8 +13318,8 @@
         </p:nvSpPr>
         <p:spPr>
           <a:xfrm>
-            <a:off x="6583680" y="3611880"/>
-            <a:ext cx="5056632" cy="2148840"/>
+            <a:off x="4892040" y="3291840"/>
+            <a:ext cx="2286000" cy="2468880"/>
           </a:xfrm>
           <a:prstGeom prst="rect">
             <a:avLst/>
@@ -12700,7 +13346,7 @@
                 <a:ea typeface="Consolas" pitchFamily="34" charset="-122"/>
                 <a:cs typeface="Consolas" pitchFamily="34" charset="-120"/>
               </a:rPr>
-              <a:t>Df  Sum Sq  F value  Pr(&gt;F)</a:t>
+              <a:t>ANOVA</a:t>
             </a:r>
             <a:endParaRPr lang="en-US" sz="1050" dirty="0"/>
           </a:p>
@@ -12720,7 +13366,7 @@
                 <a:ea typeface="Consolas" pitchFamily="34" charset="-122"/>
                 <a:cs typeface="Consolas" pitchFamily="34" charset="-120"/>
               </a:rPr>
-              <a:t>region       2  124.5   8.31    0.0006 ***</a:t>
+              <a:t>F = 8.31</a:t>
             </a:r>
             <a:endParaRPr lang="en-US" sz="1050" dirty="0"/>
           </a:p>
@@ -12740,7 +13386,7 @@
                 <a:ea typeface="Consolas" pitchFamily="34" charset="-122"/>
                 <a:cs typeface="Consolas" pitchFamily="34" charset="-120"/>
               </a:rPr>
-              <a:t>Residuals   87  650.8</a:t>
+              <a:t>p = 0.0006</a:t>
             </a:r>
             <a:endParaRPr lang="en-US" sz="1050" dirty="0"/>
           </a:p>
@@ -12769,7 +13415,7 @@
                 <a:ea typeface="Consolas" pitchFamily="34" charset="-122"/>
                 <a:cs typeface="Consolas" pitchFamily="34" charset="-120"/>
               </a:rPr>
-              <a:t>$region (Tukey HSD)</a:t>
+              <a:t>Tukey HSD</a:t>
             </a:r>
             <a:endParaRPr lang="en-US" sz="1050" dirty="0"/>
           </a:p>
@@ -12789,7 +13435,7 @@
                 <a:ea typeface="Consolas" pitchFamily="34" charset="-122"/>
                 <a:cs typeface="Consolas" pitchFamily="34" charset="-120"/>
               </a:rPr>
-              <a:t>          diff    p adj</a:t>
+              <a:t>B-A  diff +1.2</a:t>
             </a:r>
             <a:endParaRPr lang="en-US" sz="1050" dirty="0"/>
           </a:p>
@@ -12809,7 +13455,7 @@
                 <a:ea typeface="Consolas" pitchFamily="34" charset="-122"/>
                 <a:cs typeface="Consolas" pitchFamily="34" charset="-120"/>
               </a:rPr>
-              <a:t>B-A      1.2     0.012 *</a:t>
+              <a:t>     p = 0.012</a:t>
             </a:r>
             <a:endParaRPr lang="en-US" sz="1050" dirty="0"/>
           </a:p>
@@ -12829,7 +13475,7 @@
                 <a:ea typeface="Consolas" pitchFamily="34" charset="-122"/>
                 <a:cs typeface="Consolas" pitchFamily="34" charset="-120"/>
               </a:rPr>
-              <a:t>C-A      2.4     0.0003 ***</a:t>
+              <a:t>C-A  diff +2.4</a:t>
             </a:r>
             <a:endParaRPr lang="en-US" sz="1050" dirty="0"/>
           </a:p>
@@ -12849,15 +13495,780 @@
                 <a:ea typeface="Consolas" pitchFamily="34" charset="-122"/>
                 <a:cs typeface="Consolas" pitchFamily="34" charset="-120"/>
               </a:rPr>
-              <a:t>C-B      1.2     0.014 *</a:t>
-            </a:r>
-            <a:endParaRPr lang="en-US" sz="1050" dirty="0"/>
-          </a:p>
-        </p:txBody>
-      </p:sp>
-      <p:sp>
-        <p:nvSpPr>
-          <p:cNvPr id="14" name="Text 12"/>
+              <a:t>     p &lt; 0.001</a:t>
+            </a:r>
+            <a:endParaRPr lang="en-US" sz="1050" dirty="0"/>
+          </a:p>
+          <a:p>
+            <a:pPr indent="0" marL="0">
+              <a:lnSpc>
+                <a:spcPct val="130000"/>
+              </a:lnSpc>
+              <a:buNone/>
+            </a:pPr>
+            <a:r>
+              <a:rPr lang="en-US" sz="1050" dirty="0">
+                <a:solidFill>
+                  <a:srgbClr val="FFFFFF"/>
+                </a:solidFill>
+                <a:latin typeface="Consolas" pitchFamily="34" charset="0"/>
+                <a:ea typeface="Consolas" pitchFamily="34" charset="-122"/>
+                <a:cs typeface="Consolas" pitchFamily="34" charset="-120"/>
+              </a:rPr>
+              <a:t>C-B  diff +1.2</a:t>
+            </a:r>
+            <a:endParaRPr lang="en-US" sz="1050" dirty="0"/>
+          </a:p>
+          <a:p>
+            <a:pPr indent="0" marL="0">
+              <a:lnSpc>
+                <a:spcPct val="130000"/>
+              </a:lnSpc>
+              <a:buNone/>
+            </a:pPr>
+            <a:r>
+              <a:rPr lang="en-US" sz="1050" dirty="0">
+                <a:solidFill>
+                  <a:srgbClr val="FFFFFF"/>
+                </a:solidFill>
+                <a:latin typeface="Consolas" pitchFamily="34" charset="0"/>
+                <a:ea typeface="Consolas" pitchFamily="34" charset="-122"/>
+                <a:cs typeface="Consolas" pitchFamily="34" charset="-120"/>
+              </a:rPr>
+              <a:t>     p = 0.014</a:t>
+            </a:r>
+            <a:endParaRPr lang="en-US" sz="1050" dirty="0"/>
+          </a:p>
+        </p:txBody>
+      </p:sp>
+      <p:sp>
+        <p:nvSpPr>
+          <p:cNvPr id="14" name="Shape 12"/>
+          <p:cNvSpPr/>
+          <p:nvPr/>
+        </p:nvSpPr>
+        <p:spPr>
+          <a:xfrm>
+            <a:off x="7406640" y="2926080"/>
+            <a:ext cx="4325112" cy="2926080"/>
+          </a:xfrm>
+          <a:prstGeom prst="rect">
+            <a:avLst/>
+          </a:prstGeom>
+          <a:solidFill>
+            <a:srgbClr val="FFFFFF"/>
+          </a:solidFill>
+          <a:ln w="6350">
+            <a:solidFill>
+              <a:srgbClr val="D6CFB8"/>
+            </a:solidFill>
+            <a:prstDash val="solid"/>
+          </a:ln>
+        </p:spPr>
+      </p:sp>
+      <p:sp>
+        <p:nvSpPr>
+          <p:cNvPr id="15" name="Text 13"/>
+          <p:cNvSpPr/>
+          <p:nvPr/>
+        </p:nvSpPr>
+        <p:spPr>
+          <a:xfrm>
+            <a:off x="7498080" y="2962656"/>
+            <a:ext cx="4142232" cy="228600"/>
+          </a:xfrm>
+          <a:prstGeom prst="rect">
+            <a:avLst/>
+          </a:prstGeom>
+          <a:noFill/>
+          <a:ln/>
+        </p:spPr>
+        <p:txBody>
+          <a:bodyPr wrap="square" rtlCol="0" anchor="ctr"/>
+          <a:lstStyle/>
+          <a:p>
+            <a:pPr algn="ctr" indent="0" marL="0">
+              <a:buNone/>
+            </a:pPr>
+            <a:r>
+              <a:rPr lang="en-US" sz="900" b="1" dirty="0">
+                <a:solidFill>
+                  <a:srgbClr val="15233F"/>
+                </a:solidFill>
+                <a:latin typeface="Calibri" pitchFamily="34" charset="0"/>
+                <a:ea typeface="Calibri" pitchFamily="34" charset="-122"/>
+                <a:cs typeface="Calibri" pitchFamily="34" charset="-120"/>
+              </a:rPr>
+              <a:t>Score par région · A &lt; B &lt; C</a:t>
+            </a:r>
+            <a:endParaRPr lang="en-US" sz="900" dirty="0"/>
+          </a:p>
+        </p:txBody>
+      </p:sp>
+      <p:sp>
+        <p:nvSpPr>
+          <p:cNvPr id="16" name="Shape 14"/>
+          <p:cNvSpPr/>
+          <p:nvPr/>
+        </p:nvSpPr>
+        <p:spPr>
+          <a:xfrm>
+            <a:off x="7818120" y="5486400"/>
+            <a:ext cx="3776472" cy="0"/>
+          </a:xfrm>
+          <a:prstGeom prst="line">
+            <a:avLst/>
+          </a:prstGeom>
+          <a:noFill/>
+          <a:ln w="9525">
+            <a:solidFill>
+              <a:srgbClr val="0E1729"/>
+            </a:solidFill>
+            <a:prstDash val="solid"/>
+          </a:ln>
+        </p:spPr>
+      </p:sp>
+      <p:sp>
+        <p:nvSpPr>
+          <p:cNvPr id="17" name="Shape 15"/>
+          <p:cNvSpPr/>
+          <p:nvPr/>
+        </p:nvSpPr>
+        <p:spPr>
+          <a:xfrm>
+            <a:off x="7818120" y="3246120"/>
+            <a:ext cx="0" cy="2240280"/>
+          </a:xfrm>
+          <a:prstGeom prst="line">
+            <a:avLst/>
+          </a:prstGeom>
+          <a:noFill/>
+          <a:ln w="9525">
+            <a:solidFill>
+              <a:srgbClr val="0E1729"/>
+            </a:solidFill>
+            <a:prstDash val="solid"/>
+          </a:ln>
+        </p:spPr>
+      </p:sp>
+      <p:sp>
+        <p:nvSpPr>
+          <p:cNvPr id="18" name="Text 16"/>
+          <p:cNvSpPr/>
+          <p:nvPr/>
+        </p:nvSpPr>
+        <p:spPr>
+          <a:xfrm>
+            <a:off x="7818120" y="5577840"/>
+            <a:ext cx="3776472" cy="201168"/>
+          </a:xfrm>
+          <a:prstGeom prst="rect">
+            <a:avLst/>
+          </a:prstGeom>
+          <a:noFill/>
+          <a:ln/>
+        </p:spPr>
+        <p:txBody>
+          <a:bodyPr wrap="square" rtlCol="0" anchor="ctr"/>
+          <a:lstStyle/>
+          <a:p>
+            <a:pPr algn="ctr" indent="0" marL="0">
+              <a:buNone/>
+            </a:pPr>
+            <a:r>
+              <a:rPr lang="en-US" sz="800" i="1" dirty="0">
+                <a:solidFill>
+                  <a:srgbClr val="6B7280"/>
+                </a:solidFill>
+                <a:latin typeface="Calibri" pitchFamily="34" charset="0"/>
+                <a:ea typeface="Calibri" pitchFamily="34" charset="-122"/>
+                <a:cs typeface="Calibri" pitchFamily="34" charset="-120"/>
+              </a:rPr>
+              <a:t>Groupes</a:t>
+            </a:r>
+            <a:endParaRPr lang="en-US" sz="800" dirty="0"/>
+          </a:p>
+        </p:txBody>
+      </p:sp>
+      <p:sp>
+        <p:nvSpPr>
+          <p:cNvPr id="19" name="Text 17"/>
+          <p:cNvSpPr/>
+          <p:nvPr/>
+        </p:nvSpPr>
+        <p:spPr>
+          <a:xfrm rot="-5400000">
+            <a:off x="7424928" y="3246120"/>
+            <a:ext cx="365760" cy="2240280"/>
+          </a:xfrm>
+          <a:prstGeom prst="rect">
+            <a:avLst/>
+          </a:prstGeom>
+          <a:noFill/>
+          <a:ln/>
+        </p:spPr>
+        <p:txBody>
+          <a:bodyPr wrap="square" rtlCol="0" anchor="ctr"/>
+          <a:lstStyle/>
+          <a:p>
+            <a:pPr algn="l" indent="0" marL="0">
+              <a:buNone/>
+            </a:pPr>
+            <a:r>
+              <a:rPr lang="en-US" sz="800" i="1" dirty="0">
+                <a:solidFill>
+                  <a:srgbClr val="6B7280"/>
+                </a:solidFill>
+                <a:latin typeface="Calibri" pitchFamily="34" charset="0"/>
+                <a:ea typeface="Calibri" pitchFamily="34" charset="-122"/>
+                <a:cs typeface="Calibri" pitchFamily="34" charset="-120"/>
+              </a:rPr>
+              <a:t>Valeur</a:t>
+            </a:r>
+            <a:endParaRPr lang="en-US" sz="800" dirty="0"/>
+          </a:p>
+        </p:txBody>
+      </p:sp>
+      <p:sp>
+        <p:nvSpPr>
+          <p:cNvPr id="20" name="Shape 18"/>
+          <p:cNvSpPr/>
+          <p:nvPr/>
+        </p:nvSpPr>
+        <p:spPr>
+          <a:xfrm>
+            <a:off x="8447532" y="5486400"/>
+            <a:ext cx="0" cy="-373380"/>
+          </a:xfrm>
+          <a:prstGeom prst="line">
+            <a:avLst/>
+          </a:prstGeom>
+          <a:noFill/>
+          <a:ln w="9525">
+            <a:solidFill>
+              <a:srgbClr val="6B7280"/>
+            </a:solidFill>
+            <a:prstDash val="solid"/>
+          </a:ln>
+        </p:spPr>
+      </p:sp>
+      <p:sp>
+        <p:nvSpPr>
+          <p:cNvPr id="21" name="Shape 19"/>
+          <p:cNvSpPr/>
+          <p:nvPr/>
+        </p:nvSpPr>
+        <p:spPr>
+          <a:xfrm>
+            <a:off x="8290179" y="5486400"/>
+            <a:ext cx="314706" cy="0"/>
+          </a:xfrm>
+          <a:prstGeom prst="line">
+            <a:avLst/>
+          </a:prstGeom>
+          <a:noFill/>
+          <a:ln w="9525">
+            <a:solidFill>
+              <a:srgbClr val="6B7280"/>
+            </a:solidFill>
+            <a:prstDash val="solid"/>
+          </a:ln>
+        </p:spPr>
+      </p:sp>
+      <p:sp>
+        <p:nvSpPr>
+          <p:cNvPr id="22" name="Shape 20"/>
+          <p:cNvSpPr/>
+          <p:nvPr/>
+        </p:nvSpPr>
+        <p:spPr>
+          <a:xfrm>
+            <a:off x="8447532" y="4573693"/>
+            <a:ext cx="0" cy="-331893"/>
+          </a:xfrm>
+          <a:prstGeom prst="line">
+            <a:avLst/>
+          </a:prstGeom>
+          <a:noFill/>
+          <a:ln w="9525">
+            <a:solidFill>
+              <a:srgbClr val="6B7280"/>
+            </a:solidFill>
+            <a:prstDash val="solid"/>
+          </a:ln>
+        </p:spPr>
+      </p:sp>
+      <p:sp>
+        <p:nvSpPr>
+          <p:cNvPr id="23" name="Shape 21"/>
+          <p:cNvSpPr/>
+          <p:nvPr/>
+        </p:nvSpPr>
+        <p:spPr>
+          <a:xfrm>
+            <a:off x="8290179" y="4241800"/>
+            <a:ext cx="314706" cy="0"/>
+          </a:xfrm>
+          <a:prstGeom prst="line">
+            <a:avLst/>
+          </a:prstGeom>
+          <a:noFill/>
+          <a:ln w="9525">
+            <a:solidFill>
+              <a:srgbClr val="6B7280"/>
+            </a:solidFill>
+            <a:prstDash val="solid"/>
+          </a:ln>
+        </p:spPr>
+      </p:sp>
+      <p:sp>
+        <p:nvSpPr>
+          <p:cNvPr id="24" name="Shape 22"/>
+          <p:cNvSpPr/>
+          <p:nvPr/>
+        </p:nvSpPr>
+        <p:spPr>
+          <a:xfrm>
+            <a:off x="8132826" y="4573693"/>
+            <a:ext cx="629412" cy="539327"/>
+          </a:xfrm>
+          <a:prstGeom prst="rect">
+            <a:avLst/>
+          </a:prstGeom>
+          <a:solidFill>
+            <a:srgbClr val="FFFFFF"/>
+          </a:solidFill>
+          <a:ln w="12700">
+            <a:solidFill>
+              <a:srgbClr val="0E1729"/>
+            </a:solidFill>
+            <a:prstDash val="solid"/>
+          </a:ln>
+        </p:spPr>
+      </p:sp>
+      <p:sp>
+        <p:nvSpPr>
+          <p:cNvPr id="25" name="Shape 23"/>
+          <p:cNvSpPr/>
+          <p:nvPr/>
+        </p:nvSpPr>
+        <p:spPr>
+          <a:xfrm>
+            <a:off x="8132826" y="4864100"/>
+            <a:ext cx="629412" cy="0"/>
+          </a:xfrm>
+          <a:prstGeom prst="line">
+            <a:avLst/>
+          </a:prstGeom>
+          <a:noFill/>
+          <a:ln w="19050">
+            <a:solidFill>
+              <a:srgbClr val="0E1729"/>
+            </a:solidFill>
+            <a:prstDash val="solid"/>
+          </a:ln>
+        </p:spPr>
+      </p:sp>
+      <p:sp>
+        <p:nvSpPr>
+          <p:cNvPr id="26" name="Text 24"/>
+          <p:cNvSpPr/>
+          <p:nvPr/>
+        </p:nvSpPr>
+        <p:spPr>
+          <a:xfrm>
+            <a:off x="7818120" y="5532120"/>
+            <a:ext cx="1258824" cy="182880"/>
+          </a:xfrm>
+          <a:prstGeom prst="rect">
+            <a:avLst/>
+          </a:prstGeom>
+          <a:noFill/>
+          <a:ln/>
+        </p:spPr>
+        <p:txBody>
+          <a:bodyPr wrap="square" rtlCol="0" anchor="ctr"/>
+          <a:lstStyle/>
+          <a:p>
+            <a:pPr algn="ctr" indent="0" marL="0">
+              <a:buNone/>
+            </a:pPr>
+            <a:r>
+              <a:rPr lang="en-US" sz="800" b="1" dirty="0">
+                <a:solidFill>
+                  <a:srgbClr val="15233F"/>
+                </a:solidFill>
+                <a:latin typeface="Calibri" pitchFamily="34" charset="0"/>
+                <a:ea typeface="Calibri" pitchFamily="34" charset="-122"/>
+                <a:cs typeface="Calibri" pitchFamily="34" charset="-120"/>
+              </a:rPr>
+              <a:t>A</a:t>
+            </a:r>
+            <a:endParaRPr lang="en-US" sz="800" dirty="0"/>
+          </a:p>
+        </p:txBody>
+      </p:sp>
+      <p:sp>
+        <p:nvSpPr>
+          <p:cNvPr id="27" name="Shape 25"/>
+          <p:cNvSpPr/>
+          <p:nvPr/>
+        </p:nvSpPr>
+        <p:spPr>
+          <a:xfrm>
+            <a:off x="9706356" y="5071533"/>
+            <a:ext cx="0" cy="-414867"/>
+          </a:xfrm>
+          <a:prstGeom prst="line">
+            <a:avLst/>
+          </a:prstGeom>
+          <a:noFill/>
+          <a:ln w="9525">
+            <a:solidFill>
+              <a:srgbClr val="6B7280"/>
+            </a:solidFill>
+            <a:prstDash val="solid"/>
+          </a:ln>
+        </p:spPr>
+      </p:sp>
+      <p:sp>
+        <p:nvSpPr>
+          <p:cNvPr id="28" name="Shape 26"/>
+          <p:cNvSpPr/>
+          <p:nvPr/>
+        </p:nvSpPr>
+        <p:spPr>
+          <a:xfrm>
+            <a:off x="9549003" y="5071533"/>
+            <a:ext cx="314706" cy="0"/>
+          </a:xfrm>
+          <a:prstGeom prst="line">
+            <a:avLst/>
+          </a:prstGeom>
+          <a:noFill/>
+          <a:ln w="9525">
+            <a:solidFill>
+              <a:srgbClr val="6B7280"/>
+            </a:solidFill>
+            <a:prstDash val="solid"/>
+          </a:ln>
+        </p:spPr>
+      </p:sp>
+      <p:sp>
+        <p:nvSpPr>
+          <p:cNvPr id="29" name="Shape 27"/>
+          <p:cNvSpPr/>
+          <p:nvPr/>
+        </p:nvSpPr>
+        <p:spPr>
+          <a:xfrm>
+            <a:off x="9706356" y="4034367"/>
+            <a:ext cx="0" cy="-331893"/>
+          </a:xfrm>
+          <a:prstGeom prst="line">
+            <a:avLst/>
+          </a:prstGeom>
+          <a:noFill/>
+          <a:ln w="9525">
+            <a:solidFill>
+              <a:srgbClr val="6B7280"/>
+            </a:solidFill>
+            <a:prstDash val="solid"/>
+          </a:ln>
+        </p:spPr>
+      </p:sp>
+      <p:sp>
+        <p:nvSpPr>
+          <p:cNvPr id="30" name="Shape 28"/>
+          <p:cNvSpPr/>
+          <p:nvPr/>
+        </p:nvSpPr>
+        <p:spPr>
+          <a:xfrm>
+            <a:off x="9549003" y="3702473"/>
+            <a:ext cx="314706" cy="0"/>
+          </a:xfrm>
+          <a:prstGeom prst="line">
+            <a:avLst/>
+          </a:prstGeom>
+          <a:noFill/>
+          <a:ln w="9525">
+            <a:solidFill>
+              <a:srgbClr val="6B7280"/>
+            </a:solidFill>
+            <a:prstDash val="solid"/>
+          </a:ln>
+        </p:spPr>
+      </p:sp>
+      <p:sp>
+        <p:nvSpPr>
+          <p:cNvPr id="31" name="Shape 29"/>
+          <p:cNvSpPr/>
+          <p:nvPr/>
+        </p:nvSpPr>
+        <p:spPr>
+          <a:xfrm>
+            <a:off x="9391650" y="4034367"/>
+            <a:ext cx="629412" cy="622300"/>
+          </a:xfrm>
+          <a:prstGeom prst="rect">
+            <a:avLst/>
+          </a:prstGeom>
+          <a:solidFill>
+            <a:srgbClr val="FFFFFF"/>
+          </a:solidFill>
+          <a:ln w="12700">
+            <a:solidFill>
+              <a:srgbClr val="0E1729"/>
+            </a:solidFill>
+            <a:prstDash val="solid"/>
+          </a:ln>
+        </p:spPr>
+      </p:sp>
+      <p:sp>
+        <p:nvSpPr>
+          <p:cNvPr id="32" name="Shape 30"/>
+          <p:cNvSpPr/>
+          <p:nvPr/>
+        </p:nvSpPr>
+        <p:spPr>
+          <a:xfrm>
+            <a:off x="9391650" y="4366260"/>
+            <a:ext cx="629412" cy="0"/>
+          </a:xfrm>
+          <a:prstGeom prst="line">
+            <a:avLst/>
+          </a:prstGeom>
+          <a:noFill/>
+          <a:ln w="19050">
+            <a:solidFill>
+              <a:srgbClr val="0E1729"/>
+            </a:solidFill>
+            <a:prstDash val="solid"/>
+          </a:ln>
+        </p:spPr>
+      </p:sp>
+      <p:sp>
+        <p:nvSpPr>
+          <p:cNvPr id="33" name="Text 31"/>
+          <p:cNvSpPr/>
+          <p:nvPr/>
+        </p:nvSpPr>
+        <p:spPr>
+          <a:xfrm>
+            <a:off x="9076944" y="5532120"/>
+            <a:ext cx="1258824" cy="182880"/>
+          </a:xfrm>
+          <a:prstGeom prst="rect">
+            <a:avLst/>
+          </a:prstGeom>
+          <a:noFill/>
+          <a:ln/>
+        </p:spPr>
+        <p:txBody>
+          <a:bodyPr wrap="square" rtlCol="0" anchor="ctr"/>
+          <a:lstStyle/>
+          <a:p>
+            <a:pPr algn="ctr" indent="0" marL="0">
+              <a:buNone/>
+            </a:pPr>
+            <a:r>
+              <a:rPr lang="en-US" sz="800" b="1" dirty="0">
+                <a:solidFill>
+                  <a:srgbClr val="15233F"/>
+                </a:solidFill>
+                <a:latin typeface="Calibri" pitchFamily="34" charset="0"/>
+                <a:ea typeface="Calibri" pitchFamily="34" charset="-122"/>
+                <a:cs typeface="Calibri" pitchFamily="34" charset="-120"/>
+              </a:rPr>
+              <a:t>B</a:t>
+            </a:r>
+            <a:endParaRPr lang="en-US" sz="800" dirty="0"/>
+          </a:p>
+        </p:txBody>
+      </p:sp>
+      <p:sp>
+        <p:nvSpPr>
+          <p:cNvPr id="34" name="Shape 32"/>
+          <p:cNvSpPr/>
+          <p:nvPr/>
+        </p:nvSpPr>
+        <p:spPr>
+          <a:xfrm>
+            <a:off x="10965180" y="4656667"/>
+            <a:ext cx="0" cy="-497840"/>
+          </a:xfrm>
+          <a:prstGeom prst="line">
+            <a:avLst/>
+          </a:prstGeom>
+          <a:noFill/>
+          <a:ln w="9525">
+            <a:solidFill>
+              <a:srgbClr val="6B7280"/>
+            </a:solidFill>
+            <a:prstDash val="solid"/>
+          </a:ln>
+        </p:spPr>
+      </p:sp>
+      <p:sp>
+        <p:nvSpPr>
+          <p:cNvPr id="35" name="Shape 33"/>
+          <p:cNvSpPr/>
+          <p:nvPr/>
+        </p:nvSpPr>
+        <p:spPr>
+          <a:xfrm>
+            <a:off x="10807827" y="4656667"/>
+            <a:ext cx="314706" cy="0"/>
+          </a:xfrm>
+          <a:prstGeom prst="line">
+            <a:avLst/>
+          </a:prstGeom>
+          <a:noFill/>
+          <a:ln w="9525">
+            <a:solidFill>
+              <a:srgbClr val="6B7280"/>
+            </a:solidFill>
+            <a:prstDash val="solid"/>
+          </a:ln>
+        </p:spPr>
+      </p:sp>
+      <p:sp>
+        <p:nvSpPr>
+          <p:cNvPr id="36" name="Shape 34"/>
+          <p:cNvSpPr/>
+          <p:nvPr/>
+        </p:nvSpPr>
+        <p:spPr>
+          <a:xfrm>
+            <a:off x="10965180" y="3578013"/>
+            <a:ext cx="0" cy="-331893"/>
+          </a:xfrm>
+          <a:prstGeom prst="line">
+            <a:avLst/>
+          </a:prstGeom>
+          <a:noFill/>
+          <a:ln w="9525">
+            <a:solidFill>
+              <a:srgbClr val="6B7280"/>
+            </a:solidFill>
+            <a:prstDash val="solid"/>
+          </a:ln>
+        </p:spPr>
+      </p:sp>
+      <p:sp>
+        <p:nvSpPr>
+          <p:cNvPr id="37" name="Shape 35"/>
+          <p:cNvSpPr/>
+          <p:nvPr/>
+        </p:nvSpPr>
+        <p:spPr>
+          <a:xfrm>
+            <a:off x="10807827" y="3246120"/>
+            <a:ext cx="314706" cy="0"/>
+          </a:xfrm>
+          <a:prstGeom prst="line">
+            <a:avLst/>
+          </a:prstGeom>
+          <a:noFill/>
+          <a:ln w="9525">
+            <a:solidFill>
+              <a:srgbClr val="6B7280"/>
+            </a:solidFill>
+            <a:prstDash val="solid"/>
+          </a:ln>
+        </p:spPr>
+      </p:sp>
+      <p:sp>
+        <p:nvSpPr>
+          <p:cNvPr id="38" name="Shape 36"/>
+          <p:cNvSpPr/>
+          <p:nvPr/>
+        </p:nvSpPr>
+        <p:spPr>
+          <a:xfrm>
+            <a:off x="10650474" y="3578013"/>
+            <a:ext cx="629412" cy="580813"/>
+          </a:xfrm>
+          <a:prstGeom prst="rect">
+            <a:avLst/>
+          </a:prstGeom>
+          <a:solidFill>
+            <a:srgbClr val="F09042"/>
+          </a:solidFill>
+          <a:ln w="12700">
+            <a:solidFill>
+              <a:srgbClr val="F09042"/>
+            </a:solidFill>
+            <a:prstDash val="solid"/>
+          </a:ln>
+        </p:spPr>
+      </p:sp>
+      <p:sp>
+        <p:nvSpPr>
+          <p:cNvPr id="39" name="Shape 37"/>
+          <p:cNvSpPr/>
+          <p:nvPr/>
+        </p:nvSpPr>
+        <p:spPr>
+          <a:xfrm>
+            <a:off x="10650474" y="3868420"/>
+            <a:ext cx="629412" cy="0"/>
+          </a:xfrm>
+          <a:prstGeom prst="line">
+            <a:avLst/>
+          </a:prstGeom>
+          <a:noFill/>
+          <a:ln w="19050">
+            <a:solidFill>
+              <a:srgbClr val="F09042"/>
+            </a:solidFill>
+            <a:prstDash val="solid"/>
+          </a:ln>
+        </p:spPr>
+      </p:sp>
+      <p:sp>
+        <p:nvSpPr>
+          <p:cNvPr id="40" name="Text 38"/>
+          <p:cNvSpPr/>
+          <p:nvPr/>
+        </p:nvSpPr>
+        <p:spPr>
+          <a:xfrm>
+            <a:off x="10335768" y="5532120"/>
+            <a:ext cx="1258824" cy="182880"/>
+          </a:xfrm>
+          <a:prstGeom prst="rect">
+            <a:avLst/>
+          </a:prstGeom>
+          <a:noFill/>
+          <a:ln/>
+        </p:spPr>
+        <p:txBody>
+          <a:bodyPr wrap="square" rtlCol="0" anchor="ctr"/>
+          <a:lstStyle/>
+          <a:p>
+            <a:pPr algn="ctr" indent="0" marL="0">
+              <a:buNone/>
+            </a:pPr>
+            <a:r>
+              <a:rPr lang="en-US" sz="800" b="1" dirty="0">
+                <a:solidFill>
+                  <a:srgbClr val="15233F"/>
+                </a:solidFill>
+                <a:latin typeface="Calibri" pitchFamily="34" charset="0"/>
+                <a:ea typeface="Calibri" pitchFamily="34" charset="-122"/>
+                <a:cs typeface="Calibri" pitchFamily="34" charset="-120"/>
+              </a:rPr>
+              <a:t>C</a:t>
+            </a:r>
+            <a:endParaRPr lang="en-US" sz="800" dirty="0"/>
+          </a:p>
+        </p:txBody>
+      </p:sp>
+      <p:sp>
+        <p:nvSpPr>
+          <p:cNvPr id="41" name="Text 39"/>
           <p:cNvSpPr/>
           <p:nvPr/>
         </p:nvSpPr>

--- a/formations/output/biostat-module-2-comparaisons.pptx
+++ b/formations/output/biostat-module-2-comparaisons.pptx
@@ -2607,7 +2607,7 @@
         <p:spPr>
           <a:xfrm>
             <a:off x="640080" y="1828800"/>
-            <a:ext cx="10972800" cy="1280160"/>
+            <a:ext cx="10972800" cy="914400"/>
           </a:xfrm>
           <a:prstGeom prst="rect">
             <a:avLst/>
@@ -2648,12 +2648,12 @@
         </p:nvSpPr>
         <p:spPr>
           <a:xfrm>
-            <a:off x="640080" y="3246120"/>
-            <a:ext cx="5486400" cy="2606040"/>
+            <a:off x="640080" y="2926080"/>
+            <a:ext cx="5486400" cy="2926080"/>
           </a:xfrm>
           <a:prstGeom prst="roundRect">
             <a:avLst>
-              <a:gd name="adj" fmla="val 1754"/>
+              <a:gd name="adj" fmla="val 1563"/>
             </a:avLst>
           </a:prstGeom>
           <a:solidFill>
@@ -2675,7 +2675,7 @@
         </p:nvSpPr>
         <p:spPr>
           <a:xfrm>
-            <a:off x="777240" y="3355848"/>
+            <a:off x="777240" y="3035808"/>
             <a:ext cx="365760" cy="256032"/>
           </a:xfrm>
           <a:prstGeom prst="roundRect">
@@ -2697,7 +2697,7 @@
         </p:nvSpPr>
         <p:spPr>
           <a:xfrm>
-            <a:off x="777240" y="3355848"/>
+            <a:off x="777240" y="3035808"/>
             <a:ext cx="365760" cy="256032"/>
           </a:xfrm>
           <a:prstGeom prst="rect">
@@ -2736,8 +2736,8 @@
         </p:nvSpPr>
         <p:spPr>
           <a:xfrm>
-            <a:off x="822960" y="3703320"/>
-            <a:ext cx="5212080" cy="2057400"/>
+            <a:off x="822960" y="3383280"/>
+            <a:ext cx="5212080" cy="2377440"/>
           </a:xfrm>
           <a:prstGeom prst="rect">
             <a:avLst/>
@@ -2882,7 +2882,7 @@
                 <a:ea typeface="Consolas" pitchFamily="34" charset="-122"/>
                 <a:cs typeface="Consolas" pitchFamily="34" charset="-120"/>
               </a:rPr>
-              <a:t># Pour des tableaux plus</a:t>
+              <a:t># Pour des tableaux plus grands</a:t>
             </a:r>
             <a:endParaRPr lang="en-US" sz="1050" dirty="0"/>
           </a:p>
@@ -2902,7 +2902,7 @@
                 <a:ea typeface="Consolas" pitchFamily="34" charset="-122"/>
                 <a:cs typeface="Consolas" pitchFamily="34" charset="-120"/>
               </a:rPr>
-              <a:t># grands, simulate.p.value</a:t>
+              <a:t>fisher.test(tab,</a:t>
             </a:r>
             <a:endParaRPr lang="en-US" sz="1050" dirty="0"/>
           </a:p>
@@ -2922,30 +2922,10 @@
                 <a:ea typeface="Consolas" pitchFamily="34" charset="-122"/>
                 <a:cs typeface="Consolas" pitchFamily="34" charset="-120"/>
               </a:rPr>
-              <a:t>fisher.test(tab,</a:t>
+              <a:t>  simulate.p.value = TRUE)</a:t>
             </a:r>
             <a:endParaRPr lang="en-US" sz="1050" dirty="0"/>
           </a:p>
-          <a:p>
-            <a:pPr indent="0" marL="0">
-              <a:lnSpc>
-                <a:spcPct val="140000"/>
-              </a:lnSpc>
-              <a:buNone/>
-            </a:pPr>
-            <a:r>
-              <a:rPr lang="en-US" sz="1050" dirty="0">
-                <a:solidFill>
-                  <a:srgbClr val="E8EAED"/>
-                </a:solidFill>
-                <a:latin typeface="Consolas" pitchFamily="34" charset="0"/>
-                <a:ea typeface="Consolas" pitchFamily="34" charset="-122"/>
-                <a:cs typeface="Consolas" pitchFamily="34" charset="-120"/>
-              </a:rPr>
-              <a:t>            simulate.p.value = TRUE)</a:t>
-            </a:r>
-            <a:endParaRPr lang="en-US" sz="1050" dirty="0"/>
-          </a:p>
         </p:txBody>
       </p:sp>
       <p:sp>
@@ -2956,12 +2936,12 @@
         </p:nvSpPr>
         <p:spPr>
           <a:xfrm>
-            <a:off x="6400800" y="3246120"/>
-            <a:ext cx="5330952" cy="2606040"/>
+            <a:off x="6400800" y="2926080"/>
+            <a:ext cx="5330952" cy="2926080"/>
           </a:xfrm>
           <a:prstGeom prst="roundRect">
             <a:avLst>
-              <a:gd name="adj" fmla="val 1754"/>
+              <a:gd name="adj" fmla="val 1563"/>
             </a:avLst>
           </a:prstGeom>
           <a:solidFill>
@@ -2983,7 +2963,7 @@
         </p:nvSpPr>
         <p:spPr>
           <a:xfrm>
-            <a:off x="6537960" y="3337560"/>
+            <a:off x="6537960" y="3017520"/>
             <a:ext cx="914400" cy="228600"/>
           </a:xfrm>
           <a:prstGeom prst="rect">
@@ -3022,8 +3002,8 @@
         </p:nvSpPr>
         <p:spPr>
           <a:xfrm>
-            <a:off x="6583680" y="3611880"/>
-            <a:ext cx="5056632" cy="2148840"/>
+            <a:off x="6583680" y="3291840"/>
+            <a:ext cx="5056632" cy="2468880"/>
           </a:xfrm>
           <a:prstGeom prst="rect">
             <a:avLst/>
@@ -3050,8 +3030,17 @@
                 <a:ea typeface="Consolas" pitchFamily="34" charset="-122"/>
                 <a:cs typeface="Consolas" pitchFamily="34" charset="-120"/>
               </a:rPr>
-              <a:t>Fisher's Exact Test for</a:t>
-            </a:r>
+              <a:t>Fisher's Exact Test</a:t>
+            </a:r>
+            <a:endParaRPr lang="en-US" sz="1050" dirty="0"/>
+          </a:p>
+          <a:p>
+            <a:pPr indent="0" marL="0">
+              <a:lnSpc>
+                <a:spcPct val="130000"/>
+              </a:lnSpc>
+              <a:buNone/>
+            </a:pPr>
             <a:endParaRPr lang="en-US" sz="1050" dirty="0"/>
           </a:p>
           <a:p>
@@ -3070,17 +3059,8 @@
                 <a:ea typeface="Consolas" pitchFamily="34" charset="-122"/>
                 <a:cs typeface="Consolas" pitchFamily="34" charset="-120"/>
               </a:rPr>
-              <a:t>Count Data</a:t>
-            </a:r>
-            <a:endParaRPr lang="en-US" sz="1050" dirty="0"/>
-          </a:p>
-          <a:p>
-            <a:pPr indent="0" marL="0">
-              <a:lnSpc>
-                <a:spcPct val="130000"/>
-              </a:lnSpc>
-              <a:buNone/>
-            </a:pPr>
+              <a:t>p-value = 0.027</a:t>
+            </a:r>
             <a:endParaRPr lang="en-US" sz="1050" dirty="0"/>
           </a:p>
           <a:p>
@@ -3099,7 +3079,7 @@
                 <a:ea typeface="Consolas" pitchFamily="34" charset="-122"/>
                 <a:cs typeface="Consolas" pitchFamily="34" charset="-120"/>
               </a:rPr>
-              <a:t>p-value = 0.027</a:t>
+              <a:t>alternative hypothesis:</a:t>
             </a:r>
             <a:endParaRPr lang="en-US" sz="1050" dirty="0"/>
           </a:p>
@@ -3119,7 +3099,7 @@
                 <a:ea typeface="Consolas" pitchFamily="34" charset="-122"/>
                 <a:cs typeface="Consolas" pitchFamily="34" charset="-120"/>
               </a:rPr>
-              <a:t>alternative hypothesis:</a:t>
+              <a:t>  true odds ratio is not</a:t>
             </a:r>
             <a:endParaRPr lang="en-US" sz="1050" dirty="0"/>
           </a:p>
@@ -3139,8 +3119,17 @@
                 <a:ea typeface="Consolas" pitchFamily="34" charset="-122"/>
                 <a:cs typeface="Consolas" pitchFamily="34" charset="-120"/>
               </a:rPr>
-              <a:t>  true odds ratio is not</a:t>
-            </a:r>
+              <a:t>  equal to 1</a:t>
+            </a:r>
+            <a:endParaRPr lang="en-US" sz="1050" dirty="0"/>
+          </a:p>
+          <a:p>
+            <a:pPr indent="0" marL="0">
+              <a:lnSpc>
+                <a:spcPct val="130000"/>
+              </a:lnSpc>
+              <a:buNone/>
+            </a:pPr>
             <a:endParaRPr lang="en-US" sz="1050" dirty="0"/>
           </a:p>
           <a:p>
@@ -3159,17 +3148,8 @@
                 <a:ea typeface="Consolas" pitchFamily="34" charset="-122"/>
                 <a:cs typeface="Consolas" pitchFamily="34" charset="-120"/>
               </a:rPr>
-              <a:t>  equal to 1</a:t>
-            </a:r>
-            <a:endParaRPr lang="en-US" sz="1050" dirty="0"/>
-          </a:p>
-          <a:p>
-            <a:pPr indent="0" marL="0">
-              <a:lnSpc>
-                <a:spcPct val="130000"/>
-              </a:lnSpc>
-              <a:buNone/>
-            </a:pPr>
+              <a:t>95% CI: [1.02, 47.5]</a:t>
+            </a:r>
             <a:endParaRPr lang="en-US" sz="1050" dirty="0"/>
           </a:p>
           <a:p>
@@ -3188,8 +3168,17 @@
                 <a:ea typeface="Consolas" pitchFamily="34" charset="-122"/>
                 <a:cs typeface="Consolas" pitchFamily="34" charset="-120"/>
               </a:rPr>
-              <a:t>95% CI: [1.02, 47.5]</a:t>
-            </a:r>
+              <a:t>sample OR estimate: 4.86</a:t>
+            </a:r>
+            <a:endParaRPr lang="en-US" sz="1050" dirty="0"/>
+          </a:p>
+          <a:p>
+            <a:pPr indent="0" marL="0">
+              <a:lnSpc>
+                <a:spcPct val="130000"/>
+              </a:lnSpc>
+              <a:buNone/>
+            </a:pPr>
             <a:endParaRPr lang="en-US" sz="1050" dirty="0"/>
           </a:p>
           <a:p>
@@ -3208,7 +3197,47 @@
                 <a:ea typeface="Consolas" pitchFamily="34" charset="-122"/>
                 <a:cs typeface="Consolas" pitchFamily="34" charset="-120"/>
               </a:rPr>
-              <a:t>sample OR estimate: 4.86</a:t>
+              <a:t>→ IC95% large → petit</a:t>
+            </a:r>
+            <a:endParaRPr lang="en-US" sz="1050" dirty="0"/>
+          </a:p>
+          <a:p>
+            <a:pPr indent="0" marL="0">
+              <a:lnSpc>
+                <a:spcPct val="130000"/>
+              </a:lnSpc>
+              <a:buNone/>
+            </a:pPr>
+            <a:r>
+              <a:rPr lang="en-US" sz="1050" dirty="0">
+                <a:solidFill>
+                  <a:srgbClr val="FFFFFF"/>
+                </a:solidFill>
+                <a:latin typeface="Consolas" pitchFamily="34" charset="0"/>
+                <a:ea typeface="Consolas" pitchFamily="34" charset="-122"/>
+                <a:cs typeface="Consolas" pitchFamily="34" charset="-120"/>
+              </a:rPr>
+              <a:t>  échantillon. Effet probable</a:t>
+            </a:r>
+            <a:endParaRPr lang="en-US" sz="1050" dirty="0"/>
+          </a:p>
+          <a:p>
+            <a:pPr indent="0" marL="0">
+              <a:lnSpc>
+                <a:spcPct val="130000"/>
+              </a:lnSpc>
+              <a:buNone/>
+            </a:pPr>
+            <a:r>
+              <a:rPr lang="en-US" sz="1050" dirty="0">
+                <a:solidFill>
+                  <a:srgbClr val="FFFFFF"/>
+                </a:solidFill>
+                <a:latin typeface="Consolas" pitchFamily="34" charset="0"/>
+                <a:ea typeface="Consolas" pitchFamily="34" charset="-122"/>
+                <a:cs typeface="Consolas" pitchFamily="34" charset="-120"/>
+              </a:rPr>
+              <a:t>  mais magnitude imprécise.</a:t>
             </a:r>
             <a:endParaRPr lang="en-US" sz="1050" dirty="0"/>
           </a:p>
@@ -3247,7 +3276,7 @@
                 <a:ea typeface="Calibri" pitchFamily="34" charset="-122"/>
                 <a:cs typeface="Calibri" pitchFamily="34" charset="-120"/>
               </a:rPr>
-              <a:t>L'IC95% large signale ici un petit échantillon. Conclusion à nuancer — l'effet existe peut-être, mais sa magnitude est imprécise.</a:t>
+              <a:t>Fisher est valide quelle que soit la taille de l'échantillon. Tu peux l'utiliser par défaut sur du 2×2.</a:t>
             </a:r>
             <a:endParaRPr lang="en-US" sz="1100" dirty="0"/>
           </a:p>
@@ -3453,7 +3482,7 @@
         <p:spPr>
           <a:xfrm>
             <a:off x="640080" y="1828800"/>
-            <a:ext cx="10972800" cy="1280160"/>
+            <a:ext cx="10972800" cy="1097280"/>
           </a:xfrm>
           <a:prstGeom prst="rect">
             <a:avLst/>
@@ -3480,7 +3509,7 @@
                 <a:ea typeface="Calibri" pitchFamily="34" charset="-122"/>
                 <a:cs typeface="Calibri" pitchFamily="34" charset="-120"/>
               </a:rPr>
-              <a:t>Quand chaque sujet est mesuré à deux moments (test A vs test B sur les mêmes patients, dépistage avant vs après formation), McNemar compare uniquement les discordances. C'est l'équivalent du t-test apparié, mais pour les proportions.</a:t>
+              <a:t>Quand chaque sujet est mesuré à deux moments, McNemar compare uniquement les discordances. C'est l'équivalent du t-test apparié pour les proportions — il ignore les sujets qui n'ont pas changé.</a:t>
             </a:r>
             <a:endParaRPr lang="en-US" sz="1300" dirty="0"/>
           </a:p>
@@ -3494,12 +3523,12 @@
         </p:nvSpPr>
         <p:spPr>
           <a:xfrm>
-            <a:off x="640080" y="3246120"/>
-            <a:ext cx="5486400" cy="2606040"/>
+            <a:off x="640080" y="3108960"/>
+            <a:ext cx="3931920" cy="2743200"/>
           </a:xfrm>
           <a:prstGeom prst="roundRect">
             <a:avLst>
-              <a:gd name="adj" fmla="val 1754"/>
+              <a:gd name="adj" fmla="val 1667"/>
             </a:avLst>
           </a:prstGeom>
           <a:solidFill>
@@ -3521,7 +3550,7 @@
         </p:nvSpPr>
         <p:spPr>
           <a:xfrm>
-            <a:off x="777240" y="3355848"/>
+            <a:off x="777240" y="3218688"/>
             <a:ext cx="365760" cy="256032"/>
           </a:xfrm>
           <a:prstGeom prst="roundRect">
@@ -3543,7 +3572,7 @@
         </p:nvSpPr>
         <p:spPr>
           <a:xfrm>
-            <a:off x="777240" y="3355848"/>
+            <a:off x="777240" y="3218688"/>
             <a:ext cx="365760" cy="256032"/>
           </a:xfrm>
           <a:prstGeom prst="rect">
@@ -3582,8 +3611,8 @@
         </p:nvSpPr>
         <p:spPr>
           <a:xfrm>
-            <a:off x="822960" y="3703320"/>
-            <a:ext cx="5212080" cy="2057400"/>
+            <a:off x="822960" y="3566160"/>
+            <a:ext cx="3657600" cy="2194560"/>
           </a:xfrm>
           <a:prstGeom prst="rect">
             <a:avLst/>
@@ -3630,7 +3659,7 @@
                 <a:ea typeface="Consolas" pitchFamily="34" charset="-122"/>
                 <a:cs typeface="Consolas" pitchFamily="34" charset="-120"/>
               </a:rPr>
-              <a:t># Lignes = avant, Colonnes = après</a:t>
+              <a:t># Lignes = avant</a:t>
             </a:r>
             <a:endParaRPr lang="en-US" sz="1050" dirty="0"/>
           </a:p>
@@ -3650,7 +3679,7 @@
                 <a:ea typeface="Consolas" pitchFamily="34" charset="-122"/>
                 <a:cs typeface="Consolas" pitchFamily="34" charset="-120"/>
               </a:rPr>
-              <a:t># (++) (+-)</a:t>
+              <a:t># Colonnes = après</a:t>
             </a:r>
             <a:endParaRPr lang="en-US" sz="1050" dirty="0"/>
           </a:p>
@@ -3670,7 +3699,7 @@
                 <a:ea typeface="Consolas" pitchFamily="34" charset="-122"/>
                 <a:cs typeface="Consolas" pitchFamily="34" charset="-120"/>
               </a:rPr>
-              <a:t># (-+) (--)</a:t>
+              <a:t>tab &lt;- matrix(</a:t>
             </a:r>
             <a:endParaRPr lang="en-US" sz="1050" dirty="0"/>
           </a:p>
@@ -3690,7 +3719,7 @@
                 <a:ea typeface="Consolas" pitchFamily="34" charset="-122"/>
                 <a:cs typeface="Consolas" pitchFamily="34" charset="-120"/>
               </a:rPr>
-              <a:t>tab &lt;- matrix(c(45, 12,</a:t>
+              <a:t>  c(45, 12,</a:t>
             </a:r>
             <a:endParaRPr lang="en-US" sz="1050" dirty="0"/>
           </a:p>
@@ -3710,17 +3739,8 @@
                 <a:ea typeface="Consolas" pitchFamily="34" charset="-122"/>
                 <a:cs typeface="Consolas" pitchFamily="34" charset="-120"/>
               </a:rPr>
-              <a:t>                28, 15), nrow = 2)</a:t>
-            </a:r>
-            <a:endParaRPr lang="en-US" sz="1050" dirty="0"/>
-          </a:p>
-          <a:p>
-            <a:pPr indent="0" marL="0">
-              <a:lnSpc>
-                <a:spcPct val="140000"/>
-              </a:lnSpc>
-              <a:buNone/>
-            </a:pPr>
+              <a:t>    28, 15),</a:t>
+            </a:r>
             <a:endParaRPr lang="en-US" sz="1050" dirty="0"/>
           </a:p>
           <a:p>
@@ -3739,8 +3759,17 @@
                 <a:ea typeface="Consolas" pitchFamily="34" charset="-122"/>
                 <a:cs typeface="Consolas" pitchFamily="34" charset="-120"/>
               </a:rPr>
-              <a:t>mcnemar.test(tab,</a:t>
-            </a:r>
+              <a:t>  nrow = 2)</a:t>
+            </a:r>
+            <a:endParaRPr lang="en-US" sz="1050" dirty="0"/>
+          </a:p>
+          <a:p>
+            <a:pPr indent="0" marL="0">
+              <a:lnSpc>
+                <a:spcPct val="140000"/>
+              </a:lnSpc>
+              <a:buNone/>
+            </a:pPr>
             <a:endParaRPr lang="en-US" sz="1050" dirty="0"/>
           </a:p>
           <a:p>
@@ -3759,6 +3788,26 @@
                 <a:ea typeface="Consolas" pitchFamily="34" charset="-122"/>
                 <a:cs typeface="Consolas" pitchFamily="34" charset="-120"/>
               </a:rPr>
+              <a:t>mcnemar.test(tab,</a:t>
+            </a:r>
+            <a:endParaRPr lang="en-US" sz="1050" dirty="0"/>
+          </a:p>
+          <a:p>
+            <a:pPr indent="0" marL="0">
+              <a:lnSpc>
+                <a:spcPct val="140000"/>
+              </a:lnSpc>
+              <a:buNone/>
+            </a:pPr>
+            <a:r>
+              <a:rPr lang="en-US" sz="1050" dirty="0">
+                <a:solidFill>
+                  <a:srgbClr val="E8EAED"/>
+                </a:solidFill>
+                <a:latin typeface="Consolas" pitchFamily="34" charset="0"/>
+                <a:ea typeface="Consolas" pitchFamily="34" charset="-122"/>
+                <a:cs typeface="Consolas" pitchFamily="34" charset="-120"/>
+              </a:rPr>
               <a:t>             correct = TRUE)</a:t>
             </a:r>
             <a:endParaRPr lang="en-US" sz="1050" dirty="0"/>
@@ -3767,41 +3816,14 @@
       </p:sp>
       <p:sp>
         <p:nvSpPr>
-          <p:cNvPr id="11" name="Shape 9"/>
-          <p:cNvSpPr/>
-          <p:nvPr/>
-        </p:nvSpPr>
-        <p:spPr>
-          <a:xfrm>
-            <a:off x="6400800" y="3246120"/>
-            <a:ext cx="5330952" cy="2606040"/>
-          </a:xfrm>
-          <a:prstGeom prst="roundRect">
-            <a:avLst>
-              <a:gd name="adj" fmla="val 1754"/>
-            </a:avLst>
-          </a:prstGeom>
-          <a:solidFill>
-            <a:srgbClr val="1A2541"/>
-          </a:solidFill>
-          <a:ln w="6350">
-            <a:solidFill>
-              <a:srgbClr val="6B7280"/>
-            </a:solidFill>
-            <a:prstDash val="dash"/>
-          </a:ln>
-        </p:spPr>
-      </p:sp>
-      <p:sp>
-        <p:nvSpPr>
-          <p:cNvPr id="12" name="Text 10"/>
-          <p:cNvSpPr/>
-          <p:nvPr/>
-        </p:nvSpPr>
-        <p:spPr>
-          <a:xfrm>
-            <a:off x="6537960" y="3337560"/>
-            <a:ext cx="914400" cy="228600"/>
+          <p:cNvPr id="11" name="Text 9"/>
+          <p:cNvSpPr/>
+          <p:nvPr/>
+        </p:nvSpPr>
+        <p:spPr>
+          <a:xfrm>
+            <a:off x="4709160" y="3108960"/>
+            <a:ext cx="7022592" cy="274320"/>
           </a:xfrm>
           <a:prstGeom prst="rect">
             <a:avLst/>
@@ -3813,21 +3835,60 @@
           <a:bodyPr wrap="square" rtlCol="0" anchor="ctr"/>
           <a:lstStyle/>
           <a:p>
-            <a:pPr indent="0" marL="0">
-              <a:buNone/>
-            </a:pPr>
-            <a:r>
-              <a:rPr lang="en-US" sz="900" b="1" spc="300" kern="0" dirty="0">
-                <a:solidFill>
-                  <a:srgbClr val="C9CFDC"/>
+            <a:pPr algn="ctr" indent="0" marL="0">
+              <a:buNone/>
+            </a:pPr>
+            <a:r>
+              <a:rPr lang="en-US" sz="1100" b="1" dirty="0">
+                <a:solidFill>
+                  <a:srgbClr val="15233F"/>
                 </a:solidFill>
                 <a:latin typeface="Calibri" pitchFamily="34" charset="0"/>
                 <a:ea typeface="Calibri" pitchFamily="34" charset="-122"/>
                 <a:cs typeface="Calibri" pitchFamily="34" charset="-120"/>
               </a:rPr>
-              <a:t>SORTIE</a:t>
-            </a:r>
-            <a:endParaRPr lang="en-US" sz="900" dirty="0"/>
+              <a:t>Tableau apparié visualisé</a:t>
+            </a:r>
+            <a:endParaRPr lang="en-US" sz="1100" dirty="0"/>
+          </a:p>
+        </p:txBody>
+      </p:sp>
+      <p:sp>
+        <p:nvSpPr>
+          <p:cNvPr id="12" name="Text 10"/>
+          <p:cNvSpPr/>
+          <p:nvPr/>
+        </p:nvSpPr>
+        <p:spPr>
+          <a:xfrm>
+            <a:off x="6583680" y="3246120"/>
+            <a:ext cx="1554480" cy="228600"/>
+          </a:xfrm>
+          <a:prstGeom prst="rect">
+            <a:avLst/>
+          </a:prstGeom>
+          <a:noFill/>
+          <a:ln/>
+        </p:spPr>
+        <p:txBody>
+          <a:bodyPr wrap="square" rtlCol="0" anchor="ctr"/>
+          <a:lstStyle/>
+          <a:p>
+            <a:pPr algn="ctr" indent="0" marL="0">
+              <a:buNone/>
+            </a:pPr>
+            <a:r>
+              <a:rPr lang="en-US" sz="1000" b="1" dirty="0">
+                <a:solidFill>
+                  <a:srgbClr val="15233F"/>
+                </a:solidFill>
+                <a:latin typeface="Calibri" pitchFamily="34" charset="0"/>
+                <a:ea typeface="Calibri" pitchFamily="34" charset="-122"/>
+                <a:cs typeface="Calibri" pitchFamily="34" charset="-120"/>
+              </a:rPr>
+              <a:t>Après +</a:t>
+            </a:r>
+            <a:endParaRPr lang="en-US" sz="1000" dirty="0"/>
           </a:p>
         </p:txBody>
       </p:sp>
@@ -3839,212 +3900,600 @@
         </p:nvSpPr>
         <p:spPr>
           <a:xfrm>
-            <a:off x="6583680" y="3611880"/>
-            <a:ext cx="5056632" cy="2148840"/>
-          </a:xfrm>
-          <a:prstGeom prst="rect">
-            <a:avLst/>
-          </a:prstGeom>
-          <a:noFill/>
-          <a:ln/>
-        </p:spPr>
-        <p:txBody>
-          <a:bodyPr wrap="square" rtlCol="0" anchor="t"/>
-          <a:lstStyle/>
-          <a:p>
-            <a:pPr indent="0" marL="0">
-              <a:lnSpc>
-                <a:spcPct val="130000"/>
-              </a:lnSpc>
-              <a:buNone/>
-            </a:pPr>
-            <a:r>
-              <a:rPr lang="en-US" sz="1050" dirty="0">
-                <a:solidFill>
-                  <a:srgbClr val="FFFFFF"/>
+            <a:off x="8138160" y="3246120"/>
+            <a:ext cx="1554480" cy="228600"/>
+          </a:xfrm>
+          <a:prstGeom prst="rect">
+            <a:avLst/>
+          </a:prstGeom>
+          <a:noFill/>
+          <a:ln/>
+        </p:spPr>
+        <p:txBody>
+          <a:bodyPr wrap="square" rtlCol="0" anchor="ctr"/>
+          <a:lstStyle/>
+          <a:p>
+            <a:pPr algn="ctr" indent="0" marL="0">
+              <a:buNone/>
+            </a:pPr>
+            <a:r>
+              <a:rPr lang="en-US" sz="1000" b="1" dirty="0">
+                <a:solidFill>
+                  <a:srgbClr val="15233F"/>
+                </a:solidFill>
+                <a:latin typeface="Calibri" pitchFamily="34" charset="0"/>
+                <a:ea typeface="Calibri" pitchFamily="34" charset="-122"/>
+                <a:cs typeface="Calibri" pitchFamily="34" charset="-120"/>
+              </a:rPr>
+              <a:t>Après −</a:t>
+            </a:r>
+            <a:endParaRPr lang="en-US" sz="1000" dirty="0"/>
+          </a:p>
+        </p:txBody>
+      </p:sp>
+      <p:sp>
+        <p:nvSpPr>
+          <p:cNvPr id="14" name="Text 12"/>
+          <p:cNvSpPr/>
+          <p:nvPr/>
+        </p:nvSpPr>
+        <p:spPr>
+          <a:xfrm>
+            <a:off x="4114800" y="3886200"/>
+            <a:ext cx="914400" cy="228600"/>
+          </a:xfrm>
+          <a:prstGeom prst="rect">
+            <a:avLst/>
+          </a:prstGeom>
+          <a:noFill/>
+          <a:ln/>
+        </p:spPr>
+        <p:txBody>
+          <a:bodyPr wrap="square" rtlCol="0" anchor="ctr"/>
+          <a:lstStyle/>
+          <a:p>
+            <a:pPr algn="r" indent="0" marL="0">
+              <a:buNone/>
+            </a:pPr>
+            <a:r>
+              <a:rPr lang="en-US" sz="1000" b="1" dirty="0">
+                <a:solidFill>
+                  <a:srgbClr val="15233F"/>
+                </a:solidFill>
+                <a:latin typeface="Calibri" pitchFamily="34" charset="0"/>
+                <a:ea typeface="Calibri" pitchFamily="34" charset="-122"/>
+                <a:cs typeface="Calibri" pitchFamily="34" charset="-120"/>
+              </a:rPr>
+              <a:t>Avant +</a:t>
+            </a:r>
+            <a:endParaRPr lang="en-US" sz="1000" dirty="0"/>
+          </a:p>
+        </p:txBody>
+      </p:sp>
+      <p:sp>
+        <p:nvSpPr>
+          <p:cNvPr id="15" name="Text 13"/>
+          <p:cNvSpPr/>
+          <p:nvPr/>
+        </p:nvSpPr>
+        <p:spPr>
+          <a:xfrm>
+            <a:off x="4114800" y="4800600"/>
+            <a:ext cx="914400" cy="228600"/>
+          </a:xfrm>
+          <a:prstGeom prst="rect">
+            <a:avLst/>
+          </a:prstGeom>
+          <a:noFill/>
+          <a:ln/>
+        </p:spPr>
+        <p:txBody>
+          <a:bodyPr wrap="square" rtlCol="0" anchor="ctr"/>
+          <a:lstStyle/>
+          <a:p>
+            <a:pPr algn="r" indent="0" marL="0">
+              <a:buNone/>
+            </a:pPr>
+            <a:r>
+              <a:rPr lang="en-US" sz="1000" b="1" dirty="0">
+                <a:solidFill>
+                  <a:srgbClr val="15233F"/>
+                </a:solidFill>
+                <a:latin typeface="Calibri" pitchFamily="34" charset="0"/>
+                <a:ea typeface="Calibri" pitchFamily="34" charset="-122"/>
+                <a:cs typeface="Calibri" pitchFamily="34" charset="-120"/>
+              </a:rPr>
+              <a:t>Avant −</a:t>
+            </a:r>
+            <a:endParaRPr lang="en-US" sz="1000" dirty="0"/>
+          </a:p>
+        </p:txBody>
+      </p:sp>
+      <p:sp>
+        <p:nvSpPr>
+          <p:cNvPr id="16" name="Shape 14"/>
+          <p:cNvSpPr/>
+          <p:nvPr/>
+        </p:nvSpPr>
+        <p:spPr>
+          <a:xfrm>
+            <a:off x="6583680" y="3520440"/>
+            <a:ext cx="1554480" cy="914400"/>
+          </a:xfrm>
+          <a:prstGeom prst="rect">
+            <a:avLst/>
+          </a:prstGeom>
+          <a:solidFill>
+            <a:srgbClr val="C9CFDC"/>
+          </a:solidFill>
+          <a:ln w="12700">
+            <a:solidFill>
+              <a:srgbClr val="D6CFB8"/>
+            </a:solidFill>
+            <a:prstDash val="solid"/>
+          </a:ln>
+        </p:spPr>
+      </p:sp>
+      <p:sp>
+        <p:nvSpPr>
+          <p:cNvPr id="17" name="Text 15"/>
+          <p:cNvSpPr/>
+          <p:nvPr/>
+        </p:nvSpPr>
+        <p:spPr>
+          <a:xfrm>
+            <a:off x="6583680" y="3566160"/>
+            <a:ext cx="1554480" cy="457200"/>
+          </a:xfrm>
+          <a:prstGeom prst="rect">
+            <a:avLst/>
+          </a:prstGeom>
+          <a:noFill/>
+          <a:ln/>
+        </p:spPr>
+        <p:txBody>
+          <a:bodyPr wrap="square" rtlCol="0" anchor="ctr"/>
+          <a:lstStyle/>
+          <a:p>
+            <a:pPr algn="ctr" indent="0" marL="0">
+              <a:buNone/>
+            </a:pPr>
+            <a:r>
+              <a:rPr lang="en-US" sz="2200" b="1" dirty="0">
+                <a:solidFill>
+                  <a:srgbClr val="15233F"/>
                 </a:solidFill>
                 <a:latin typeface="Consolas" pitchFamily="34" charset="0"/>
                 <a:ea typeface="Consolas" pitchFamily="34" charset="-122"/>
                 <a:cs typeface="Consolas" pitchFamily="34" charset="-120"/>
               </a:rPr>
-              <a:t>McNemar's Chi-squared test</a:t>
-            </a:r>
-            <a:endParaRPr lang="en-US" sz="1050" dirty="0"/>
-          </a:p>
-          <a:p>
-            <a:pPr indent="0" marL="0">
-              <a:lnSpc>
-                <a:spcPct val="130000"/>
-              </a:lnSpc>
-              <a:buNone/>
-            </a:pPr>
-            <a:r>
-              <a:rPr lang="en-US" sz="1050" dirty="0">
-                <a:solidFill>
-                  <a:srgbClr val="FFFFFF"/>
+              <a:t>45</a:t>
+            </a:r>
+            <a:endParaRPr lang="en-US" sz="2200" dirty="0"/>
+          </a:p>
+        </p:txBody>
+      </p:sp>
+      <p:sp>
+        <p:nvSpPr>
+          <p:cNvPr id="18" name="Text 16"/>
+          <p:cNvSpPr/>
+          <p:nvPr/>
+        </p:nvSpPr>
+        <p:spPr>
+          <a:xfrm>
+            <a:off x="6583680" y="4023360"/>
+            <a:ext cx="1554480" cy="365760"/>
+          </a:xfrm>
+          <a:prstGeom prst="rect">
+            <a:avLst/>
+          </a:prstGeom>
+          <a:noFill/>
+          <a:ln/>
+        </p:spPr>
+        <p:txBody>
+          <a:bodyPr wrap="square" rtlCol="0" anchor="ctr"/>
+          <a:lstStyle/>
+          <a:p>
+            <a:pPr algn="ctr" indent="0" marL="0">
+              <a:buNone/>
+            </a:pPr>
+            <a:r>
+              <a:rPr lang="en-US" sz="900" i="1" dirty="0">
+                <a:solidFill>
+                  <a:srgbClr val="15233F"/>
+                </a:solidFill>
+                <a:latin typeface="Calibri" pitchFamily="34" charset="0"/>
+                <a:ea typeface="Calibri" pitchFamily="34" charset="-122"/>
+                <a:cs typeface="Calibri" pitchFamily="34" charset="-120"/>
+              </a:rPr>
+              <a:t>concordant</a:t>
+            </a:r>
+            <a:endParaRPr lang="en-US" sz="900" dirty="0"/>
+          </a:p>
+        </p:txBody>
+      </p:sp>
+      <p:sp>
+        <p:nvSpPr>
+          <p:cNvPr id="19" name="Shape 17"/>
+          <p:cNvSpPr/>
+          <p:nvPr/>
+        </p:nvSpPr>
+        <p:spPr>
+          <a:xfrm>
+            <a:off x="8138160" y="3520440"/>
+            <a:ext cx="1554480" cy="914400"/>
+          </a:xfrm>
+          <a:prstGeom prst="rect">
+            <a:avLst/>
+          </a:prstGeom>
+          <a:solidFill>
+            <a:srgbClr val="F09042"/>
+          </a:solidFill>
+          <a:ln w="12700">
+            <a:solidFill>
+              <a:srgbClr val="D6CFB8"/>
+            </a:solidFill>
+            <a:prstDash val="solid"/>
+          </a:ln>
+        </p:spPr>
+      </p:sp>
+      <p:sp>
+        <p:nvSpPr>
+          <p:cNvPr id="20" name="Text 18"/>
+          <p:cNvSpPr/>
+          <p:nvPr/>
+        </p:nvSpPr>
+        <p:spPr>
+          <a:xfrm>
+            <a:off x="8138160" y="3566160"/>
+            <a:ext cx="1554480" cy="457200"/>
+          </a:xfrm>
+          <a:prstGeom prst="rect">
+            <a:avLst/>
+          </a:prstGeom>
+          <a:noFill/>
+          <a:ln/>
+        </p:spPr>
+        <p:txBody>
+          <a:bodyPr wrap="square" rtlCol="0" anchor="ctr"/>
+          <a:lstStyle/>
+          <a:p>
+            <a:pPr algn="ctr" indent="0" marL="0">
+              <a:buNone/>
+            </a:pPr>
+            <a:r>
+              <a:rPr lang="en-US" sz="2200" b="1" dirty="0">
+                <a:solidFill>
+                  <a:srgbClr val="0E1729"/>
                 </a:solidFill>
                 <a:latin typeface="Consolas" pitchFamily="34" charset="0"/>
                 <a:ea typeface="Consolas" pitchFamily="34" charset="-122"/>
                 <a:cs typeface="Consolas" pitchFamily="34" charset="-120"/>
               </a:rPr>
-              <a:t>with continuity correction</a:t>
-            </a:r>
-            <a:endParaRPr lang="en-US" sz="1050" dirty="0"/>
-          </a:p>
-          <a:p>
-            <a:pPr indent="0" marL="0">
-              <a:lnSpc>
-                <a:spcPct val="130000"/>
-              </a:lnSpc>
-              <a:buNone/>
-            </a:pPr>
-            <a:endParaRPr lang="en-US" sz="1050" dirty="0"/>
-          </a:p>
-          <a:p>
-            <a:pPr indent="0" marL="0">
-              <a:lnSpc>
-                <a:spcPct val="130000"/>
-              </a:lnSpc>
-              <a:buNone/>
-            </a:pPr>
-            <a:r>
-              <a:rPr lang="en-US" sz="1050" dirty="0">
-                <a:solidFill>
-                  <a:srgbClr val="FFFFFF"/>
+              <a:t>12</a:t>
+            </a:r>
+            <a:endParaRPr lang="en-US" sz="2200" dirty="0"/>
+          </a:p>
+        </p:txBody>
+      </p:sp>
+      <p:sp>
+        <p:nvSpPr>
+          <p:cNvPr id="21" name="Text 19"/>
+          <p:cNvSpPr/>
+          <p:nvPr/>
+        </p:nvSpPr>
+        <p:spPr>
+          <a:xfrm>
+            <a:off x="8138160" y="4023360"/>
+            <a:ext cx="1554480" cy="365760"/>
+          </a:xfrm>
+          <a:prstGeom prst="rect">
+            <a:avLst/>
+          </a:prstGeom>
+          <a:noFill/>
+          <a:ln/>
+        </p:spPr>
+        <p:txBody>
+          <a:bodyPr wrap="square" rtlCol="0" anchor="ctr"/>
+          <a:lstStyle/>
+          <a:p>
+            <a:pPr algn="ctr" indent="0" marL="0">
+              <a:buNone/>
+            </a:pPr>
+            <a:r>
+              <a:rPr lang="en-US" sz="900" i="1" dirty="0">
+                <a:solidFill>
+                  <a:srgbClr val="0E1729"/>
+                </a:solidFill>
+                <a:latin typeface="Calibri" pitchFamily="34" charset="0"/>
+                <a:ea typeface="Calibri" pitchFamily="34" charset="-122"/>
+                <a:cs typeface="Calibri" pitchFamily="34" charset="-120"/>
+              </a:rPr>
+              <a:t>discordant</a:t>
+            </a:r>
+            <a:endParaRPr lang="en-US" sz="900" dirty="0"/>
+          </a:p>
+        </p:txBody>
+      </p:sp>
+      <p:sp>
+        <p:nvSpPr>
+          <p:cNvPr id="22" name="Shape 20"/>
+          <p:cNvSpPr/>
+          <p:nvPr/>
+        </p:nvSpPr>
+        <p:spPr>
+          <a:xfrm>
+            <a:off x="6583680" y="4434840"/>
+            <a:ext cx="1554480" cy="914400"/>
+          </a:xfrm>
+          <a:prstGeom prst="rect">
+            <a:avLst/>
+          </a:prstGeom>
+          <a:solidFill>
+            <a:srgbClr val="F09042"/>
+          </a:solidFill>
+          <a:ln w="12700">
+            <a:solidFill>
+              <a:srgbClr val="D6CFB8"/>
+            </a:solidFill>
+            <a:prstDash val="solid"/>
+          </a:ln>
+        </p:spPr>
+      </p:sp>
+      <p:sp>
+        <p:nvSpPr>
+          <p:cNvPr id="23" name="Text 21"/>
+          <p:cNvSpPr/>
+          <p:nvPr/>
+        </p:nvSpPr>
+        <p:spPr>
+          <a:xfrm>
+            <a:off x="6583680" y="4480560"/>
+            <a:ext cx="1554480" cy="457200"/>
+          </a:xfrm>
+          <a:prstGeom prst="rect">
+            <a:avLst/>
+          </a:prstGeom>
+          <a:noFill/>
+          <a:ln/>
+        </p:spPr>
+        <p:txBody>
+          <a:bodyPr wrap="square" rtlCol="0" anchor="ctr"/>
+          <a:lstStyle/>
+          <a:p>
+            <a:pPr algn="ctr" indent="0" marL="0">
+              <a:buNone/>
+            </a:pPr>
+            <a:r>
+              <a:rPr lang="en-US" sz="2200" b="1" dirty="0">
+                <a:solidFill>
+                  <a:srgbClr val="0E1729"/>
                 </a:solidFill>
                 <a:latin typeface="Consolas" pitchFamily="34" charset="0"/>
                 <a:ea typeface="Consolas" pitchFamily="34" charset="-122"/>
                 <a:cs typeface="Consolas" pitchFamily="34" charset="-120"/>
               </a:rPr>
-              <a:t>data:  tab</a:t>
-            </a:r>
-            <a:endParaRPr lang="en-US" sz="1050" dirty="0"/>
-          </a:p>
-          <a:p>
-            <a:pPr indent="0" marL="0">
-              <a:lnSpc>
-                <a:spcPct val="130000"/>
-              </a:lnSpc>
-              <a:buNone/>
-            </a:pPr>
-            <a:r>
-              <a:rPr lang="en-US" sz="1050" dirty="0">
-                <a:solidFill>
-                  <a:srgbClr val="FFFFFF"/>
+              <a:t>28</a:t>
+            </a:r>
+            <a:endParaRPr lang="en-US" sz="2200" dirty="0"/>
+          </a:p>
+        </p:txBody>
+      </p:sp>
+      <p:sp>
+        <p:nvSpPr>
+          <p:cNvPr id="24" name="Text 22"/>
+          <p:cNvSpPr/>
+          <p:nvPr/>
+        </p:nvSpPr>
+        <p:spPr>
+          <a:xfrm>
+            <a:off x="6583680" y="4937760"/>
+            <a:ext cx="1554480" cy="365760"/>
+          </a:xfrm>
+          <a:prstGeom prst="rect">
+            <a:avLst/>
+          </a:prstGeom>
+          <a:noFill/>
+          <a:ln/>
+        </p:spPr>
+        <p:txBody>
+          <a:bodyPr wrap="square" rtlCol="0" anchor="ctr"/>
+          <a:lstStyle/>
+          <a:p>
+            <a:pPr algn="ctr" indent="0" marL="0">
+              <a:buNone/>
+            </a:pPr>
+            <a:r>
+              <a:rPr lang="en-US" sz="900" i="1" dirty="0">
+                <a:solidFill>
+                  <a:srgbClr val="0E1729"/>
+                </a:solidFill>
+                <a:latin typeface="Calibri" pitchFamily="34" charset="0"/>
+                <a:ea typeface="Calibri" pitchFamily="34" charset="-122"/>
+                <a:cs typeface="Calibri" pitchFamily="34" charset="-120"/>
+              </a:rPr>
+              <a:t>discordant</a:t>
+            </a:r>
+            <a:endParaRPr lang="en-US" sz="900" dirty="0"/>
+          </a:p>
+        </p:txBody>
+      </p:sp>
+      <p:sp>
+        <p:nvSpPr>
+          <p:cNvPr id="25" name="Shape 23"/>
+          <p:cNvSpPr/>
+          <p:nvPr/>
+        </p:nvSpPr>
+        <p:spPr>
+          <a:xfrm>
+            <a:off x="8138160" y="4434840"/>
+            <a:ext cx="1554480" cy="914400"/>
+          </a:xfrm>
+          <a:prstGeom prst="rect">
+            <a:avLst/>
+          </a:prstGeom>
+          <a:solidFill>
+            <a:srgbClr val="C9CFDC"/>
+          </a:solidFill>
+          <a:ln w="12700">
+            <a:solidFill>
+              <a:srgbClr val="D6CFB8"/>
+            </a:solidFill>
+            <a:prstDash val="solid"/>
+          </a:ln>
+        </p:spPr>
+      </p:sp>
+      <p:sp>
+        <p:nvSpPr>
+          <p:cNvPr id="26" name="Text 24"/>
+          <p:cNvSpPr/>
+          <p:nvPr/>
+        </p:nvSpPr>
+        <p:spPr>
+          <a:xfrm>
+            <a:off x="8138160" y="4480560"/>
+            <a:ext cx="1554480" cy="457200"/>
+          </a:xfrm>
+          <a:prstGeom prst="rect">
+            <a:avLst/>
+          </a:prstGeom>
+          <a:noFill/>
+          <a:ln/>
+        </p:spPr>
+        <p:txBody>
+          <a:bodyPr wrap="square" rtlCol="0" anchor="ctr"/>
+          <a:lstStyle/>
+          <a:p>
+            <a:pPr algn="ctr" indent="0" marL="0">
+              <a:buNone/>
+            </a:pPr>
+            <a:r>
+              <a:rPr lang="en-US" sz="2200" b="1" dirty="0">
+                <a:solidFill>
+                  <a:srgbClr val="15233F"/>
                 </a:solidFill>
                 <a:latin typeface="Consolas" pitchFamily="34" charset="0"/>
                 <a:ea typeface="Consolas" pitchFamily="34" charset="-122"/>
                 <a:cs typeface="Consolas" pitchFamily="34" charset="-120"/>
               </a:rPr>
-              <a:t>McNemar's chi² = 5.625</a:t>
-            </a:r>
-            <a:endParaRPr lang="en-US" sz="1050" dirty="0"/>
-          </a:p>
-          <a:p>
-            <a:pPr indent="0" marL="0">
-              <a:lnSpc>
-                <a:spcPct val="130000"/>
-              </a:lnSpc>
-              <a:buNone/>
-            </a:pPr>
-            <a:r>
-              <a:rPr lang="en-US" sz="1050" dirty="0">
-                <a:solidFill>
-                  <a:srgbClr val="FFFFFF"/>
+              <a:t>15</a:t>
+            </a:r>
+            <a:endParaRPr lang="en-US" sz="2200" dirty="0"/>
+          </a:p>
+        </p:txBody>
+      </p:sp>
+      <p:sp>
+        <p:nvSpPr>
+          <p:cNvPr id="27" name="Text 25"/>
+          <p:cNvSpPr/>
+          <p:nvPr/>
+        </p:nvSpPr>
+        <p:spPr>
+          <a:xfrm>
+            <a:off x="8138160" y="4937760"/>
+            <a:ext cx="1554480" cy="365760"/>
+          </a:xfrm>
+          <a:prstGeom prst="rect">
+            <a:avLst/>
+          </a:prstGeom>
+          <a:noFill/>
+          <a:ln/>
+        </p:spPr>
+        <p:txBody>
+          <a:bodyPr wrap="square" rtlCol="0" anchor="ctr"/>
+          <a:lstStyle/>
+          <a:p>
+            <a:pPr algn="ctr" indent="0" marL="0">
+              <a:buNone/>
+            </a:pPr>
+            <a:r>
+              <a:rPr lang="en-US" sz="900" i="1" dirty="0">
+                <a:solidFill>
+                  <a:srgbClr val="15233F"/>
+                </a:solidFill>
+                <a:latin typeface="Calibri" pitchFamily="34" charset="0"/>
+                <a:ea typeface="Calibri" pitchFamily="34" charset="-122"/>
+                <a:cs typeface="Calibri" pitchFamily="34" charset="-120"/>
+              </a:rPr>
+              <a:t>concordant</a:t>
+            </a:r>
+            <a:endParaRPr lang="en-US" sz="900" dirty="0"/>
+          </a:p>
+        </p:txBody>
+      </p:sp>
+      <p:sp>
+        <p:nvSpPr>
+          <p:cNvPr id="28" name="Text 26"/>
+          <p:cNvSpPr/>
+          <p:nvPr/>
+        </p:nvSpPr>
+        <p:spPr>
+          <a:xfrm>
+            <a:off x="4709160" y="5486400"/>
+            <a:ext cx="7022592" cy="411480"/>
+          </a:xfrm>
+          <a:prstGeom prst="rect">
+            <a:avLst/>
+          </a:prstGeom>
+          <a:noFill/>
+          <a:ln/>
+        </p:spPr>
+        <p:txBody>
+          <a:bodyPr wrap="square" rtlCol="0" anchor="ctr"/>
+          <a:lstStyle/>
+          <a:p>
+            <a:pPr algn="ctr" indent="0" marL="0">
+              <a:buNone/>
+            </a:pPr>
+            <a:r>
+              <a:rPr lang="en-US" sz="1100" i="1" dirty="0">
+                <a:solidFill>
+                  <a:srgbClr val="6B7280"/>
+                </a:solidFill>
+                <a:latin typeface="Calibri" pitchFamily="34" charset="0"/>
+                <a:ea typeface="Calibri" pitchFamily="34" charset="-122"/>
+                <a:cs typeface="Calibri" pitchFamily="34" charset="-120"/>
+              </a:rPr>
+              <a:t>McNemar utilise UNIQUEMENT les cases orange (discordances). Les concordances (gris) sont ignorées.</a:t>
+            </a:r>
+            <a:endParaRPr lang="en-US" sz="1100" dirty="0"/>
+          </a:p>
+        </p:txBody>
+      </p:sp>
+      <p:sp>
+        <p:nvSpPr>
+          <p:cNvPr id="29" name="Text 27"/>
+          <p:cNvSpPr/>
+          <p:nvPr/>
+        </p:nvSpPr>
+        <p:spPr>
+          <a:xfrm>
+            <a:off x="640080" y="5989320"/>
+            <a:ext cx="10972800" cy="365760"/>
+          </a:xfrm>
+          <a:prstGeom prst="rect">
+            <a:avLst/>
+          </a:prstGeom>
+          <a:noFill/>
+          <a:ln/>
+        </p:spPr>
+        <p:txBody>
+          <a:bodyPr wrap="square" rtlCol="0" anchor="ctr"/>
+          <a:lstStyle/>
+          <a:p>
+            <a:pPr algn="ctr" indent="0" marL="0">
+              <a:buNone/>
+            </a:pPr>
+            <a:r>
+              <a:rPr lang="en-US" sz="1100" b="1" dirty="0">
+                <a:solidFill>
+                  <a:srgbClr val="F09042"/>
                 </a:solidFill>
                 <a:latin typeface="Consolas" pitchFamily="34" charset="0"/>
                 <a:ea typeface="Consolas" pitchFamily="34" charset="-122"/>
                 <a:cs typeface="Consolas" pitchFamily="34" charset="-120"/>
               </a:rPr>
-              <a:t>df = 1, p-value = 0.0177</a:t>
-            </a:r>
-            <a:endParaRPr lang="en-US" sz="1050" dirty="0"/>
-          </a:p>
-          <a:p>
-            <a:pPr indent="0" marL="0">
-              <a:lnSpc>
-                <a:spcPct val="130000"/>
-              </a:lnSpc>
-              <a:buNone/>
-            </a:pPr>
-            <a:endParaRPr lang="en-US" sz="1050" dirty="0"/>
-          </a:p>
-          <a:p>
-            <a:pPr indent="0" marL="0">
-              <a:lnSpc>
-                <a:spcPct val="130000"/>
-              </a:lnSpc>
-              <a:buNone/>
-            </a:pPr>
-            <a:r>
-              <a:rPr lang="en-US" sz="1050" dirty="0">
-                <a:solidFill>
-                  <a:srgbClr val="FFFFFF"/>
-                </a:solidFill>
-                <a:latin typeface="Consolas" pitchFamily="34" charset="0"/>
-                <a:ea typeface="Consolas" pitchFamily="34" charset="-122"/>
-                <a:cs typeface="Consolas" pitchFamily="34" charset="-120"/>
-              </a:rPr>
-              <a:t>→ Différence significative</a:t>
-            </a:r>
-            <a:endParaRPr lang="en-US" sz="1050" dirty="0"/>
-          </a:p>
-          <a:p>
-            <a:pPr indent="0" marL="0">
-              <a:lnSpc>
-                <a:spcPct val="130000"/>
-              </a:lnSpc>
-              <a:buNone/>
-            </a:pPr>
-            <a:r>
-              <a:rPr lang="en-US" sz="1050" dirty="0">
-                <a:solidFill>
-                  <a:srgbClr val="FFFFFF"/>
-                </a:solidFill>
-                <a:latin typeface="Consolas" pitchFamily="34" charset="0"/>
-                <a:ea typeface="Consolas" pitchFamily="34" charset="-122"/>
-                <a:cs typeface="Consolas" pitchFamily="34" charset="-120"/>
-              </a:rPr>
-              <a:t>  entre les deux moments.</a:t>
-            </a:r>
-            <a:endParaRPr lang="en-US" sz="1050" dirty="0"/>
-          </a:p>
-        </p:txBody>
-      </p:sp>
-      <p:sp>
-        <p:nvSpPr>
-          <p:cNvPr id="14" name="Text 12"/>
-          <p:cNvSpPr/>
-          <p:nvPr/>
-        </p:nvSpPr>
-        <p:spPr>
-          <a:xfrm>
-            <a:off x="640080" y="5989320"/>
-            <a:ext cx="10972800" cy="365760"/>
-          </a:xfrm>
-          <a:prstGeom prst="rect">
-            <a:avLst/>
-          </a:prstGeom>
-          <a:noFill/>
-          <a:ln/>
-        </p:spPr>
-        <p:txBody>
-          <a:bodyPr wrap="square" rtlCol="0" anchor="ctr"/>
-          <a:lstStyle/>
-          <a:p>
-            <a:pPr algn="ctr" indent="0" marL="0">
-              <a:buNone/>
-            </a:pPr>
-            <a:r>
-              <a:rPr lang="en-US" sz="1100" i="1" dirty="0">
-                <a:solidFill>
-                  <a:srgbClr val="6B7280"/>
-                </a:solidFill>
-                <a:latin typeface="Calibri" pitchFamily="34" charset="0"/>
-                <a:ea typeface="Calibri" pitchFamily="34" charset="-122"/>
-                <a:cs typeface="Calibri" pitchFamily="34" charset="-120"/>
-              </a:rPr>
-              <a:t>McNemar ignore les concordances (cellules ++ et --) — seules les bascules (+− et −+) portent l'information. C'est subtil et il faut le savoir.</a:t>
+              <a:t>McNemar : χ² = 5.625, df = 1, p = 0.0177  →  différence significative entre les deux moments.</a:t>
             </a:r>
             <a:endParaRPr lang="en-US" sz="1100" dirty="0"/>
           </a:p>
@@ -4249,7 +4698,7 @@
         </p:nvSpPr>
         <p:spPr>
           <a:xfrm>
-            <a:off x="640080" y="1874520"/>
+            <a:off x="640080" y="1828800"/>
             <a:ext cx="10972800" cy="1371600"/>
           </a:xfrm>
           <a:prstGeom prst="rect">
@@ -5305,7 +5754,7 @@
                 <a:ea typeface="Consolas" pitchFamily="34" charset="-122"/>
                 <a:cs typeface="Consolas" pitchFamily="34" charset="-120"/>
               </a:rPr>
-              <a:t>Tous ces packages s'installent une fois pour toutes : install.packages(c("effsize", "rstatix", "effectsize", "epitools"))</a:t>
+              <a:t>install.packages(c("effsize", "rstatix", "effectsize", "epitools"))</a:t>
             </a:r>
             <a:endParaRPr lang="en-US" sz="1100" dirty="0"/>
           </a:p>
@@ -5488,7 +5937,7 @@
               <a:buNone/>
             </a:pPr>
             <a:r>
-              <a:rPr lang="en-US" sz="3000" b="1" spc="-100" kern="0" dirty="0">
+              <a:rPr lang="en-US" sz="2800" b="1" spc="-100" kern="0" dirty="0">
                 <a:solidFill>
                   <a:srgbClr val="15233F"/>
                 </a:solidFill>
@@ -5498,7 +5947,7 @@
               </a:rPr>
               <a:t>Un essai randomisé de A à Z.</a:t>
             </a:r>
-            <a:endParaRPr lang="en-US" sz="3000" dirty="0"/>
+            <a:endParaRPr lang="en-US" sz="2800" dirty="0"/>
           </a:p>
         </p:txBody>
       </p:sp>
@@ -5511,7 +5960,7 @@
         <p:spPr>
           <a:xfrm>
             <a:off x="640080" y="1828800"/>
-            <a:ext cx="10972800" cy="914400"/>
+            <a:ext cx="10972800" cy="822960"/>
           </a:xfrm>
           <a:prstGeom prst="rect">
             <a:avLst/>
@@ -5538,7 +5987,7 @@
                 <a:ea typeface="Calibri" pitchFamily="34" charset="-122"/>
                 <a:cs typeface="Calibri" pitchFamily="34" charset="-120"/>
               </a:rPr>
-              <a:t>Scénario : essai bras A (nouveau) vs bras B (standard) chez 60 patients diabétiques. Variable principale = HbA1c à 12 semaines. Voici exactement ce que tu présentes au jury — workflow et résultat.</a:t>
+              <a:t>Scénario : essai bras A (nouveau) vs bras B (standard) chez 60 patients diabétiques. Variable principale = HbA1c à 12 semaines. Voici le workflow et le visuel final attendu.</a:t>
             </a:r>
             <a:endParaRPr lang="en-US" sz="1300" dirty="0"/>
           </a:p>
@@ -5552,8 +6001,8 @@
         </p:nvSpPr>
         <p:spPr>
           <a:xfrm>
-            <a:off x="640080" y="2834640"/>
-            <a:ext cx="6858000" cy="3429000"/>
+            <a:off x="640080" y="2788920"/>
+            <a:ext cx="6766560" cy="3429000"/>
           </a:xfrm>
           <a:prstGeom prst="roundRect">
             <a:avLst>
@@ -5579,7 +6028,7 @@
         </p:nvSpPr>
         <p:spPr>
           <a:xfrm>
-            <a:off x="777240" y="2944368"/>
+            <a:off x="777240" y="2898648"/>
             <a:ext cx="365760" cy="256032"/>
           </a:xfrm>
           <a:prstGeom prst="roundRect">
@@ -5601,7 +6050,7 @@
         </p:nvSpPr>
         <p:spPr>
           <a:xfrm>
-            <a:off x="777240" y="2944368"/>
+            <a:off x="777240" y="2898648"/>
             <a:ext cx="365760" cy="256032"/>
           </a:xfrm>
           <a:prstGeom prst="rect">
@@ -5640,8 +6089,8 @@
         </p:nvSpPr>
         <p:spPr>
           <a:xfrm>
-            <a:off x="822960" y="3291840"/>
-            <a:ext cx="6583680" cy="2880360"/>
+            <a:off x="822960" y="3246120"/>
+            <a:ext cx="6492240" cy="2880360"/>
           </a:xfrm>
           <a:prstGeom prst="rect">
             <a:avLst/>
@@ -5788,6 +6237,15 @@
               </a:lnSpc>
               <a:buNone/>
             </a:pPr>
+            <a:endParaRPr lang="en-US" sz="1050" dirty="0"/>
+          </a:p>
+          <a:p>
+            <a:pPr indent="0" marL="0">
+              <a:lnSpc>
+                <a:spcPct val="140000"/>
+              </a:lnSpc>
+              <a:buNone/>
+            </a:pPr>
             <a:r>
               <a:rPr lang="en-US" sz="1050" dirty="0">
                 <a:solidFill>
@@ -5797,7 +6255,7 @@
                 <a:ea typeface="Consolas" pitchFamily="34" charset="-122"/>
                 <a:cs typeface="Consolas" pitchFamily="34" charset="-120"/>
               </a:rPr>
-              <a:t>library(car)</a:t>
+              <a:t># 3. Test principal</a:t>
             </a:r>
             <a:endParaRPr lang="en-US" sz="1050" dirty="0"/>
           </a:p>
@@ -5817,17 +6275,8 @@
                 <a:ea typeface="Consolas" pitchFamily="34" charset="-122"/>
                 <a:cs typeface="Consolas" pitchFamily="34" charset="-120"/>
               </a:rPr>
-              <a:t>leveneTest(hba1c ~ bras, data = donnees)</a:t>
-            </a:r>
-            <a:endParaRPr lang="en-US" sz="1050" dirty="0"/>
-          </a:p>
-          <a:p>
-            <a:pPr indent="0" marL="0">
-              <a:lnSpc>
-                <a:spcPct val="140000"/>
-              </a:lnSpc>
-              <a:buNone/>
-            </a:pPr>
+              <a:t>t.test(hba1c ~ bras, data = donnees,</a:t>
+            </a:r>
             <a:endParaRPr lang="en-US" sz="1050" dirty="0"/>
           </a:p>
           <a:p>
@@ -5846,8 +6295,17 @@
                 <a:ea typeface="Consolas" pitchFamily="34" charset="-122"/>
                 <a:cs typeface="Consolas" pitchFamily="34" charset="-120"/>
               </a:rPr>
-              <a:t># 3. Test principal (Welch direct)</a:t>
-            </a:r>
+              <a:t>       var.equal = FALSE)</a:t>
+            </a:r>
+            <a:endParaRPr lang="en-US" sz="1050" dirty="0"/>
+          </a:p>
+          <a:p>
+            <a:pPr indent="0" marL="0">
+              <a:lnSpc>
+                <a:spcPct val="140000"/>
+              </a:lnSpc>
+              <a:buNone/>
+            </a:pPr>
             <a:endParaRPr lang="en-US" sz="1050" dirty="0"/>
           </a:p>
           <a:p>
@@ -5866,7 +6324,7 @@
                 <a:ea typeface="Consolas" pitchFamily="34" charset="-122"/>
                 <a:cs typeface="Consolas" pitchFamily="34" charset="-120"/>
               </a:rPr>
-              <a:t>t.test(hba1c ~ bras, data = donnees,</a:t>
+              <a:t># 4. Taille d'effet</a:t>
             </a:r>
             <a:endParaRPr lang="en-US" sz="1050" dirty="0"/>
           </a:p>
@@ -5886,17 +6344,8 @@
                 <a:ea typeface="Consolas" pitchFamily="34" charset="-122"/>
                 <a:cs typeface="Consolas" pitchFamily="34" charset="-120"/>
               </a:rPr>
-              <a:t>       var.equal = FALSE)</a:t>
-            </a:r>
-            <a:endParaRPr lang="en-US" sz="1050" dirty="0"/>
-          </a:p>
-          <a:p>
-            <a:pPr indent="0" marL="0">
-              <a:lnSpc>
-                <a:spcPct val="140000"/>
-              </a:lnSpc>
-              <a:buNone/>
-            </a:pPr>
+              <a:t>library(effsize)</a:t>
+            </a:r>
             <a:endParaRPr lang="en-US" sz="1050" dirty="0"/>
           </a:p>
           <a:p>
@@ -5915,50 +6364,10 @@
                 <a:ea typeface="Consolas" pitchFamily="34" charset="-122"/>
                 <a:cs typeface="Consolas" pitchFamily="34" charset="-120"/>
               </a:rPr>
-              <a:t># 4. Taille d'effet</a:t>
+              <a:t>cohen.d(hba1c ~ bras, data = donnees)</a:t>
             </a:r>
             <a:endParaRPr lang="en-US" sz="1050" dirty="0"/>
           </a:p>
-          <a:p>
-            <a:pPr indent="0" marL="0">
-              <a:lnSpc>
-                <a:spcPct val="140000"/>
-              </a:lnSpc>
-              <a:buNone/>
-            </a:pPr>
-            <a:r>
-              <a:rPr lang="en-US" sz="1050" dirty="0">
-                <a:solidFill>
-                  <a:srgbClr val="E8EAED"/>
-                </a:solidFill>
-                <a:latin typeface="Consolas" pitchFamily="34" charset="0"/>
-                <a:ea typeface="Consolas" pitchFamily="34" charset="-122"/>
-                <a:cs typeface="Consolas" pitchFamily="34" charset="-120"/>
-              </a:rPr>
-              <a:t>library(effsize)</a:t>
-            </a:r>
-            <a:endParaRPr lang="en-US" sz="1050" dirty="0"/>
-          </a:p>
-          <a:p>
-            <a:pPr indent="0" marL="0">
-              <a:lnSpc>
-                <a:spcPct val="140000"/>
-              </a:lnSpc>
-              <a:buNone/>
-            </a:pPr>
-            <a:r>
-              <a:rPr lang="en-US" sz="1050" dirty="0">
-                <a:solidFill>
-                  <a:srgbClr val="E8EAED"/>
-                </a:solidFill>
-                <a:latin typeface="Consolas" pitchFamily="34" charset="0"/>
-                <a:ea typeface="Consolas" pitchFamily="34" charset="-122"/>
-                <a:cs typeface="Consolas" pitchFamily="34" charset="-120"/>
-              </a:rPr>
-              <a:t>cohen.d(hba1c ~ bras, data = donnees)</a:t>
-            </a:r>
-            <a:endParaRPr lang="en-US" sz="1050" dirty="0"/>
-          </a:p>
         </p:txBody>
       </p:sp>
       <p:sp>
@@ -5969,18 +6378,21 @@
         </p:nvSpPr>
         <p:spPr>
           <a:xfrm>
-            <a:off x="7680960" y="2834640"/>
-            <a:ext cx="4050792" cy="3429000"/>
-          </a:xfrm>
-          <a:prstGeom prst="roundRect">
-            <a:avLst>
-              <a:gd name="adj" fmla="val 2667"/>
-            </a:avLst>
+            <a:off x="7589520" y="2788920"/>
+            <a:ext cx="4142232" cy="3429000"/>
+          </a:xfrm>
+          <a:prstGeom prst="rect">
+            <a:avLst/>
           </a:prstGeom>
           <a:solidFill>
-            <a:srgbClr val="0E1729"/>
+            <a:srgbClr val="FFFFFF"/>
           </a:solidFill>
-          <a:ln/>
+          <a:ln w="6350">
+            <a:solidFill>
+              <a:srgbClr val="D6CFB8"/>
+            </a:solidFill>
+            <a:prstDash val="solid"/>
+          </a:ln>
         </p:spPr>
       </p:sp>
       <p:sp>
@@ -5991,8 +6403,8 @@
         </p:nvSpPr>
         <p:spPr>
           <a:xfrm>
-            <a:off x="7863840" y="2971800"/>
-            <a:ext cx="3749040" cy="320040"/>
+            <a:off x="7680960" y="2825496"/>
+            <a:ext cx="3959352" cy="228600"/>
           </a:xfrm>
           <a:prstGeom prst="rect">
             <a:avLst/>
@@ -6004,34 +6416,80 @@
           <a:bodyPr wrap="square" rtlCol="0" anchor="ctr"/>
           <a:lstStyle/>
           <a:p>
-            <a:pPr indent="0" marL="0">
-              <a:buNone/>
-            </a:pPr>
-            <a:r>
-              <a:rPr lang="en-US" sz="1100" b="1" spc="300" kern="0" dirty="0">
-                <a:solidFill>
-                  <a:srgbClr val="F09042"/>
+            <a:pPr algn="ctr" indent="0" marL="0">
+              <a:buNone/>
+            </a:pPr>
+            <a:r>
+              <a:rPr lang="en-US" sz="900" b="1" dirty="0">
+                <a:solidFill>
+                  <a:srgbClr val="15233F"/>
                 </a:solidFill>
                 <a:latin typeface="Calibri" pitchFamily="34" charset="0"/>
                 <a:ea typeface="Calibri" pitchFamily="34" charset="-122"/>
                 <a:cs typeface="Calibri" pitchFamily="34" charset="-120"/>
               </a:rPr>
-              <a:t>CE QUI VA EN TABLEAU</a:t>
-            </a:r>
-            <a:endParaRPr lang="en-US" sz="1100" dirty="0"/>
-          </a:p>
-        </p:txBody>
-      </p:sp>
-      <p:sp>
-        <p:nvSpPr>
-          <p:cNvPr id="13" name="Text 11"/>
-          <p:cNvSpPr/>
-          <p:nvPr/>
-        </p:nvSpPr>
-        <p:spPr>
-          <a:xfrm>
-            <a:off x="7863840" y="3383280"/>
-            <a:ext cx="3749040" cy="914400"/>
+              <a:t>Résultat : HbA1c bras A vs bras B</a:t>
+            </a:r>
+            <a:endParaRPr lang="en-US" sz="900" dirty="0"/>
+          </a:p>
+        </p:txBody>
+      </p:sp>
+      <p:sp>
+        <p:nvSpPr>
+          <p:cNvPr id="13" name="Shape 11"/>
+          <p:cNvSpPr/>
+          <p:nvPr/>
+        </p:nvSpPr>
+        <p:spPr>
+          <a:xfrm>
+            <a:off x="8001000" y="5852160"/>
+            <a:ext cx="3593592" cy="0"/>
+          </a:xfrm>
+          <a:prstGeom prst="line">
+            <a:avLst/>
+          </a:prstGeom>
+          <a:noFill/>
+          <a:ln w="9525">
+            <a:solidFill>
+              <a:srgbClr val="0E1729"/>
+            </a:solidFill>
+            <a:prstDash val="solid"/>
+          </a:ln>
+        </p:spPr>
+      </p:sp>
+      <p:sp>
+        <p:nvSpPr>
+          <p:cNvPr id="14" name="Shape 12"/>
+          <p:cNvSpPr/>
+          <p:nvPr/>
+        </p:nvSpPr>
+        <p:spPr>
+          <a:xfrm>
+            <a:off x="8001000" y="3108960"/>
+            <a:ext cx="0" cy="2743200"/>
+          </a:xfrm>
+          <a:prstGeom prst="line">
+            <a:avLst/>
+          </a:prstGeom>
+          <a:noFill/>
+          <a:ln w="9525">
+            <a:solidFill>
+              <a:srgbClr val="0E1729"/>
+            </a:solidFill>
+            <a:prstDash val="solid"/>
+          </a:ln>
+        </p:spPr>
+      </p:sp>
+      <p:sp>
+        <p:nvSpPr>
+          <p:cNvPr id="15" name="Text 13"/>
+          <p:cNvSpPr/>
+          <p:nvPr/>
+        </p:nvSpPr>
+        <p:spPr>
+          <a:xfrm>
+            <a:off x="8001000" y="5943600"/>
+            <a:ext cx="3593592" cy="201168"/>
           </a:xfrm>
           <a:prstGeom prst="rect">
             <a:avLst/>
@@ -6043,57 +6501,165 @@
           <a:bodyPr wrap="square" rtlCol="0" anchor="ctr"/>
           <a:lstStyle/>
           <a:p>
-            <a:pPr indent="0" marL="0">
-              <a:lnSpc>
-                <a:spcPct val="140000"/>
-              </a:lnSpc>
-              <a:buNone/>
-            </a:pPr>
-            <a:r>
-              <a:rPr lang="en-US" sz="1100" dirty="0">
-                <a:solidFill>
-                  <a:srgbClr val="FFFFFF"/>
+            <a:pPr algn="ctr" indent="0" marL="0">
+              <a:buNone/>
+            </a:pPr>
+            <a:r>
+              <a:rPr lang="en-US" sz="800" i="1" dirty="0">
+                <a:solidFill>
+                  <a:srgbClr val="6B7280"/>
                 </a:solidFill>
                 <a:latin typeface="Calibri" pitchFamily="34" charset="0"/>
                 <a:ea typeface="Calibri" pitchFamily="34" charset="-122"/>
                 <a:cs typeface="Calibri" pitchFamily="34" charset="-120"/>
               </a:rPr>
-              <a:t>Bras A · n = 30 · HbA1c moy. 7,1 (ET 0,8)</a:t>
-            </a:r>
-            <a:endParaRPr lang="en-US" sz="1100" dirty="0"/>
-          </a:p>
-          <a:p>
-            <a:pPr indent="0" marL="0">
-              <a:lnSpc>
-                <a:spcPct val="140000"/>
-              </a:lnSpc>
-              <a:buNone/>
-            </a:pPr>
-            <a:r>
-              <a:rPr lang="en-US" sz="1100" dirty="0">
-                <a:solidFill>
-                  <a:srgbClr val="FFFFFF"/>
+              <a:t>Groupes</a:t>
+            </a:r>
+            <a:endParaRPr lang="en-US" sz="800" dirty="0"/>
+          </a:p>
+        </p:txBody>
+      </p:sp>
+      <p:sp>
+        <p:nvSpPr>
+          <p:cNvPr id="16" name="Text 14"/>
+          <p:cNvSpPr/>
+          <p:nvPr/>
+        </p:nvSpPr>
+        <p:spPr>
+          <a:xfrm rot="-5400000">
+            <a:off x="7607808" y="3108960"/>
+            <a:ext cx="365760" cy="2743200"/>
+          </a:xfrm>
+          <a:prstGeom prst="rect">
+            <a:avLst/>
+          </a:prstGeom>
+          <a:noFill/>
+          <a:ln/>
+        </p:spPr>
+        <p:txBody>
+          <a:bodyPr wrap="square" rtlCol="0" anchor="ctr"/>
+          <a:lstStyle/>
+          <a:p>
+            <a:pPr algn="l" indent="0" marL="0">
+              <a:buNone/>
+            </a:pPr>
+            <a:r>
+              <a:rPr lang="en-US" sz="800" i="1" dirty="0">
+                <a:solidFill>
+                  <a:srgbClr val="6B7280"/>
                 </a:solidFill>
                 <a:latin typeface="Calibri" pitchFamily="34" charset="0"/>
                 <a:ea typeface="Calibri" pitchFamily="34" charset="-122"/>
                 <a:cs typeface="Calibri" pitchFamily="34" charset="-120"/>
               </a:rPr>
-              <a:t>Bras B · n = 30 · HbA1c moy. 8,0 (ET 0,9)</a:t>
-            </a:r>
-            <a:endParaRPr lang="en-US" sz="1100" dirty="0"/>
-          </a:p>
-        </p:txBody>
-      </p:sp>
-      <p:sp>
-        <p:nvSpPr>
-          <p:cNvPr id="14" name="Shape 12"/>
-          <p:cNvSpPr/>
-          <p:nvPr/>
-        </p:nvSpPr>
-        <p:spPr>
-          <a:xfrm>
-            <a:off x="7863840" y="4434840"/>
-            <a:ext cx="3749040" cy="18288"/>
+              <a:t>Valeur</a:t>
+            </a:r>
+            <a:endParaRPr lang="en-US" sz="800" dirty="0"/>
+          </a:p>
+        </p:txBody>
+      </p:sp>
+      <p:sp>
+        <p:nvSpPr>
+          <p:cNvPr id="17" name="Shape 15"/>
+          <p:cNvSpPr/>
+          <p:nvPr/>
+        </p:nvSpPr>
+        <p:spPr>
+          <a:xfrm>
+            <a:off x="8899398" y="5852160"/>
+            <a:ext cx="0" cy="-533400"/>
+          </a:xfrm>
+          <a:prstGeom prst="line">
+            <a:avLst/>
+          </a:prstGeom>
+          <a:noFill/>
+          <a:ln w="9525">
+            <a:solidFill>
+              <a:srgbClr val="6B7280"/>
+            </a:solidFill>
+            <a:prstDash val="solid"/>
+          </a:ln>
+        </p:spPr>
+      </p:sp>
+      <p:sp>
+        <p:nvSpPr>
+          <p:cNvPr id="18" name="Shape 16"/>
+          <p:cNvSpPr/>
+          <p:nvPr/>
+        </p:nvSpPr>
+        <p:spPr>
+          <a:xfrm>
+            <a:off x="8674799" y="5852160"/>
+            <a:ext cx="449199" cy="0"/>
+          </a:xfrm>
+          <a:prstGeom prst="line">
+            <a:avLst/>
+          </a:prstGeom>
+          <a:noFill/>
+          <a:ln w="9525">
+            <a:solidFill>
+              <a:srgbClr val="6B7280"/>
+            </a:solidFill>
+            <a:prstDash val="solid"/>
+          </a:ln>
+        </p:spPr>
+      </p:sp>
+      <p:sp>
+        <p:nvSpPr>
+          <p:cNvPr id="19" name="Shape 17"/>
+          <p:cNvSpPr/>
+          <p:nvPr/>
+        </p:nvSpPr>
+        <p:spPr>
+          <a:xfrm>
+            <a:off x="8899398" y="4480560"/>
+            <a:ext cx="0" cy="-762000"/>
+          </a:xfrm>
+          <a:prstGeom prst="line">
+            <a:avLst/>
+          </a:prstGeom>
+          <a:noFill/>
+          <a:ln w="9525">
+            <a:solidFill>
+              <a:srgbClr val="6B7280"/>
+            </a:solidFill>
+            <a:prstDash val="solid"/>
+          </a:ln>
+        </p:spPr>
+      </p:sp>
+      <p:sp>
+        <p:nvSpPr>
+          <p:cNvPr id="20" name="Shape 18"/>
+          <p:cNvSpPr/>
+          <p:nvPr/>
+        </p:nvSpPr>
+        <p:spPr>
+          <a:xfrm>
+            <a:off x="8674799" y="3718560"/>
+            <a:ext cx="449199" cy="0"/>
+          </a:xfrm>
+          <a:prstGeom prst="line">
+            <a:avLst/>
+          </a:prstGeom>
+          <a:noFill/>
+          <a:ln w="9525">
+            <a:solidFill>
+              <a:srgbClr val="6B7280"/>
+            </a:solidFill>
+            <a:prstDash val="solid"/>
+          </a:ln>
+        </p:spPr>
+      </p:sp>
+      <p:sp>
+        <p:nvSpPr>
+          <p:cNvPr id="21" name="Shape 19"/>
+          <p:cNvSpPr/>
+          <p:nvPr/>
+        </p:nvSpPr>
+        <p:spPr>
+          <a:xfrm>
+            <a:off x="8450199" y="4480560"/>
+            <a:ext cx="898398" cy="838200"/>
           </a:xfrm>
           <a:prstGeom prst="rect">
             <a:avLst/>
@@ -6101,19 +6667,47 @@
           <a:solidFill>
             <a:srgbClr val="F09042"/>
           </a:solidFill>
-          <a:ln/>
-        </p:spPr>
-      </p:sp>
-      <p:sp>
-        <p:nvSpPr>
-          <p:cNvPr id="15" name="Text 13"/>
-          <p:cNvSpPr/>
-          <p:nvPr/>
-        </p:nvSpPr>
-        <p:spPr>
-          <a:xfrm>
-            <a:off x="7863840" y="4572000"/>
-            <a:ext cx="3749040" cy="1463040"/>
+          <a:ln w="12700">
+            <a:solidFill>
+              <a:srgbClr val="F09042"/>
+            </a:solidFill>
+            <a:prstDash val="solid"/>
+          </a:ln>
+        </p:spPr>
+      </p:sp>
+      <p:sp>
+        <p:nvSpPr>
+          <p:cNvPr id="22" name="Shape 20"/>
+          <p:cNvSpPr/>
+          <p:nvPr/>
+        </p:nvSpPr>
+        <p:spPr>
+          <a:xfrm>
+            <a:off x="8450199" y="4861560"/>
+            <a:ext cx="898398" cy="0"/>
+          </a:xfrm>
+          <a:prstGeom prst="line">
+            <a:avLst/>
+          </a:prstGeom>
+          <a:noFill/>
+          <a:ln w="19050">
+            <a:solidFill>
+              <a:srgbClr val="F09042"/>
+            </a:solidFill>
+            <a:prstDash val="solid"/>
+          </a:ln>
+        </p:spPr>
+      </p:sp>
+      <p:sp>
+        <p:nvSpPr>
+          <p:cNvPr id="23" name="Text 21"/>
+          <p:cNvSpPr/>
+          <p:nvPr/>
+        </p:nvSpPr>
+        <p:spPr>
+          <a:xfrm>
+            <a:off x="8001000" y="5897880"/>
+            <a:ext cx="1796796" cy="182880"/>
           </a:xfrm>
           <a:prstGeom prst="rect">
             <a:avLst/>
@@ -6125,166 +6719,200 @@
           <a:bodyPr wrap="square" rtlCol="0" anchor="ctr"/>
           <a:lstStyle/>
           <a:p>
-            <a:pPr indent="0" marL="0">
-              <a:lnSpc>
-                <a:spcPct val="140000"/>
-              </a:lnSpc>
-              <a:buNone/>
-            </a:pPr>
-            <a:r>
-              <a:rPr lang="en-US" sz="1100" dirty="0">
-                <a:solidFill>
-                  <a:srgbClr val="FFFFFF"/>
+            <a:pPr algn="ctr" indent="0" marL="0">
+              <a:buNone/>
+            </a:pPr>
+            <a:r>
+              <a:rPr lang="en-US" sz="800" b="1" dirty="0">
+                <a:solidFill>
+                  <a:srgbClr val="15233F"/>
                 </a:solidFill>
                 <a:latin typeface="Calibri" pitchFamily="34" charset="0"/>
                 <a:ea typeface="Calibri" pitchFamily="34" charset="-122"/>
                 <a:cs typeface="Calibri" pitchFamily="34" charset="-120"/>
               </a:rPr>
-              <a:t>Différence moyenne −0,9</a:t>
-            </a:r>
-            <a:endParaRPr lang="en-US" sz="1100" dirty="0"/>
-          </a:p>
-          <a:p>
-            <a:pPr indent="0" marL="0">
-              <a:lnSpc>
-                <a:spcPct val="140000"/>
-              </a:lnSpc>
-              <a:buNone/>
-            </a:pPr>
-            <a:r>
-              <a:rPr lang="en-US" sz="1100" dirty="0">
-                <a:solidFill>
-                  <a:srgbClr val="FFFFFF"/>
+              <a:t>A nouveau</a:t>
+            </a:r>
+            <a:endParaRPr lang="en-US" sz="800" dirty="0"/>
+          </a:p>
+        </p:txBody>
+      </p:sp>
+      <p:sp>
+        <p:nvSpPr>
+          <p:cNvPr id="24" name="Shape 22"/>
+          <p:cNvSpPr/>
+          <p:nvPr/>
+        </p:nvSpPr>
+        <p:spPr>
+          <a:xfrm>
+            <a:off x="10696194" y="5090160"/>
+            <a:ext cx="0" cy="-533400"/>
+          </a:xfrm>
+          <a:prstGeom prst="line">
+            <a:avLst/>
+          </a:prstGeom>
+          <a:noFill/>
+          <a:ln w="9525">
+            <a:solidFill>
+              <a:srgbClr val="6B7280"/>
+            </a:solidFill>
+            <a:prstDash val="solid"/>
+          </a:ln>
+        </p:spPr>
+      </p:sp>
+      <p:sp>
+        <p:nvSpPr>
+          <p:cNvPr id="25" name="Shape 23"/>
+          <p:cNvSpPr/>
+          <p:nvPr/>
+        </p:nvSpPr>
+        <p:spPr>
+          <a:xfrm>
+            <a:off x="10471595" y="5090160"/>
+            <a:ext cx="449199" cy="0"/>
+          </a:xfrm>
+          <a:prstGeom prst="line">
+            <a:avLst/>
+          </a:prstGeom>
+          <a:noFill/>
+          <a:ln w="9525">
+            <a:solidFill>
+              <a:srgbClr val="6B7280"/>
+            </a:solidFill>
+            <a:prstDash val="solid"/>
+          </a:ln>
+        </p:spPr>
+      </p:sp>
+      <p:sp>
+        <p:nvSpPr>
+          <p:cNvPr id="26" name="Shape 24"/>
+          <p:cNvSpPr/>
+          <p:nvPr/>
+        </p:nvSpPr>
+        <p:spPr>
+          <a:xfrm>
+            <a:off x="10696194" y="3718560"/>
+            <a:ext cx="0" cy="-609600"/>
+          </a:xfrm>
+          <a:prstGeom prst="line">
+            <a:avLst/>
+          </a:prstGeom>
+          <a:noFill/>
+          <a:ln w="9525">
+            <a:solidFill>
+              <a:srgbClr val="6B7280"/>
+            </a:solidFill>
+            <a:prstDash val="solid"/>
+          </a:ln>
+        </p:spPr>
+      </p:sp>
+      <p:sp>
+        <p:nvSpPr>
+          <p:cNvPr id="27" name="Shape 25"/>
+          <p:cNvSpPr/>
+          <p:nvPr/>
+        </p:nvSpPr>
+        <p:spPr>
+          <a:xfrm>
+            <a:off x="10471595" y="3108960"/>
+            <a:ext cx="449199" cy="0"/>
+          </a:xfrm>
+          <a:prstGeom prst="line">
+            <a:avLst/>
+          </a:prstGeom>
+          <a:noFill/>
+          <a:ln w="9525">
+            <a:solidFill>
+              <a:srgbClr val="6B7280"/>
+            </a:solidFill>
+            <a:prstDash val="solid"/>
+          </a:ln>
+        </p:spPr>
+      </p:sp>
+      <p:sp>
+        <p:nvSpPr>
+          <p:cNvPr id="28" name="Shape 26"/>
+          <p:cNvSpPr/>
+          <p:nvPr/>
+        </p:nvSpPr>
+        <p:spPr>
+          <a:xfrm>
+            <a:off x="10246995" y="3718560"/>
+            <a:ext cx="898398" cy="838200"/>
+          </a:xfrm>
+          <a:prstGeom prst="rect">
+            <a:avLst/>
+          </a:prstGeom>
+          <a:solidFill>
+            <a:srgbClr val="FFFFFF"/>
+          </a:solidFill>
+          <a:ln w="12700">
+            <a:solidFill>
+              <a:srgbClr val="0E1729"/>
+            </a:solidFill>
+            <a:prstDash val="solid"/>
+          </a:ln>
+        </p:spPr>
+      </p:sp>
+      <p:sp>
+        <p:nvSpPr>
+          <p:cNvPr id="29" name="Shape 27"/>
+          <p:cNvSpPr/>
+          <p:nvPr/>
+        </p:nvSpPr>
+        <p:spPr>
+          <a:xfrm>
+            <a:off x="10246995" y="4175760"/>
+            <a:ext cx="898398" cy="0"/>
+          </a:xfrm>
+          <a:prstGeom prst="line">
+            <a:avLst/>
+          </a:prstGeom>
+          <a:noFill/>
+          <a:ln w="19050">
+            <a:solidFill>
+              <a:srgbClr val="0E1729"/>
+            </a:solidFill>
+            <a:prstDash val="solid"/>
+          </a:ln>
+        </p:spPr>
+      </p:sp>
+      <p:sp>
+        <p:nvSpPr>
+          <p:cNvPr id="30" name="Text 28"/>
+          <p:cNvSpPr/>
+          <p:nvPr/>
+        </p:nvSpPr>
+        <p:spPr>
+          <a:xfrm>
+            <a:off x="9797796" y="5897880"/>
+            <a:ext cx="1796796" cy="182880"/>
+          </a:xfrm>
+          <a:prstGeom prst="rect">
+            <a:avLst/>
+          </a:prstGeom>
+          <a:noFill/>
+          <a:ln/>
+        </p:spPr>
+        <p:txBody>
+          <a:bodyPr wrap="square" rtlCol="0" anchor="ctr"/>
+          <a:lstStyle/>
+          <a:p>
+            <a:pPr algn="ctr" indent="0" marL="0">
+              <a:buNone/>
+            </a:pPr>
+            <a:r>
+              <a:rPr lang="en-US" sz="800" b="1" dirty="0">
+                <a:solidFill>
+                  <a:srgbClr val="15233F"/>
                 </a:solidFill>
                 <a:latin typeface="Calibri" pitchFamily="34" charset="0"/>
                 <a:ea typeface="Calibri" pitchFamily="34" charset="-122"/>
                 <a:cs typeface="Calibri" pitchFamily="34" charset="-120"/>
               </a:rPr>
-              <a:t>IC95% [−1,42 ; −0,36]</a:t>
-            </a:r>
-            <a:endParaRPr lang="en-US" sz="1100" dirty="0"/>
-          </a:p>
-          <a:p>
-            <a:pPr indent="0" marL="0">
-              <a:lnSpc>
-                <a:spcPct val="140000"/>
-              </a:lnSpc>
-              <a:buNone/>
-            </a:pPr>
-            <a:r>
-              <a:rPr lang="en-US" sz="1100" dirty="0">
-                <a:solidFill>
-                  <a:srgbClr val="FFFFFF"/>
-                </a:solidFill>
-                <a:latin typeface="Calibri" pitchFamily="34" charset="0"/>
-                <a:ea typeface="Calibri" pitchFamily="34" charset="-122"/>
-                <a:cs typeface="Calibri" pitchFamily="34" charset="-120"/>
-              </a:rPr>
-              <a:t>p = 0,0013 (Welch)</a:t>
-            </a:r>
-            <a:endParaRPr lang="en-US" sz="1100" dirty="0"/>
-          </a:p>
-          <a:p>
-            <a:pPr indent="0" marL="0">
-              <a:lnSpc>
-                <a:spcPct val="140000"/>
-              </a:lnSpc>
-              <a:buNone/>
-            </a:pPr>
-            <a:r>
-              <a:rPr lang="en-US" sz="1100" dirty="0">
-                <a:solidFill>
-                  <a:srgbClr val="FFFFFF"/>
-                </a:solidFill>
-                <a:latin typeface="Calibri" pitchFamily="34" charset="0"/>
-                <a:ea typeface="Calibri" pitchFamily="34" charset="-122"/>
-                <a:cs typeface="Calibri" pitchFamily="34" charset="-120"/>
-              </a:rPr>
-              <a:t>Cohen's d = −0,78 (effet moyen-fort)</a:t>
-            </a:r>
-            <a:endParaRPr lang="en-US" sz="1100" dirty="0"/>
-          </a:p>
-        </p:txBody>
-      </p:sp>
-      <p:sp>
-        <p:nvSpPr>
-          <p:cNvPr id="16" name="Shape 14"/>
-          <p:cNvSpPr/>
-          <p:nvPr/>
-        </p:nvSpPr>
-        <p:spPr>
-          <a:xfrm>
-            <a:off x="7863840" y="5943600"/>
-            <a:ext cx="3749040" cy="18288"/>
-          </a:xfrm>
-          <a:prstGeom prst="rect">
-            <a:avLst/>
-          </a:prstGeom>
-          <a:solidFill>
-            <a:srgbClr val="F09042"/>
-          </a:solidFill>
-          <a:ln/>
-        </p:spPr>
-      </p:sp>
-      <p:sp>
-        <p:nvSpPr>
-          <p:cNvPr id="17" name="Text 15"/>
-          <p:cNvSpPr/>
-          <p:nvPr/>
-        </p:nvSpPr>
-        <p:spPr>
-          <a:xfrm>
-            <a:off x="7863840" y="5989320"/>
-            <a:ext cx="3749040" cy="457200"/>
-          </a:xfrm>
-          <a:prstGeom prst="rect">
-            <a:avLst/>
-          </a:prstGeom>
-          <a:noFill/>
-          <a:ln/>
-        </p:spPr>
-        <p:txBody>
-          <a:bodyPr wrap="square" rtlCol="0" anchor="ctr"/>
-          <a:lstStyle/>
-          <a:p>
-            <a:pPr indent="0" marL="0">
-              <a:lnSpc>
-                <a:spcPct val="130000"/>
-              </a:lnSpc>
-              <a:buNone/>
-            </a:pPr>
-            <a:r>
-              <a:rPr lang="en-US" sz="1100" i="1" dirty="0">
-                <a:solidFill>
-                  <a:srgbClr val="C9CFDC"/>
-                </a:solidFill>
-                <a:latin typeface="Calibri" pitchFamily="34" charset="0"/>
-                <a:ea typeface="Calibri" pitchFamily="34" charset="-122"/>
-                <a:cs typeface="Calibri" pitchFamily="34" charset="-120"/>
-              </a:rPr>
-              <a:t>Conclusion : effet cliniquement</a:t>
-            </a:r>
-            <a:endParaRPr lang="en-US" sz="1100" dirty="0"/>
-          </a:p>
-          <a:p>
-            <a:pPr indent="0" marL="0">
-              <a:lnSpc>
-                <a:spcPct val="130000"/>
-              </a:lnSpc>
-              <a:buNone/>
-            </a:pPr>
-            <a:r>
-              <a:rPr lang="en-US" sz="1100" i="1" dirty="0">
-                <a:solidFill>
-                  <a:srgbClr val="C9CFDC"/>
-                </a:solidFill>
-                <a:latin typeface="Calibri" pitchFamily="34" charset="0"/>
-                <a:ea typeface="Calibri" pitchFamily="34" charset="-122"/>
-                <a:cs typeface="Calibri" pitchFamily="34" charset="-120"/>
-              </a:rPr>
-              <a:t>pertinent (HbA1c −0,9 %).</a:t>
-            </a:r>
-            <a:endParaRPr lang="en-US" sz="1100" dirty="0"/>
+              <a:t>B standard</a:t>
+            </a:r>
+            <a:endParaRPr lang="en-US" sz="800" dirty="0"/>
           </a:p>
         </p:txBody>
       </p:sp>
@@ -8021,7 +8649,7 @@
               <a:buNone/>
             </a:pPr>
             <a:r>
-              <a:rPr lang="en-US" sz="3000" b="1" spc="-100" kern="0" dirty="0">
+              <a:rPr lang="en-US" sz="2800" b="1" spc="-100" kern="0" dirty="0">
                 <a:solidFill>
                   <a:srgbClr val="15233F"/>
                 </a:solidFill>
@@ -8029,9 +8657,9 @@
                 <a:ea typeface="Calibri" pitchFamily="34" charset="-122"/>
                 <a:cs typeface="Calibri" pitchFamily="34" charset="-120"/>
               </a:rPr>
-              <a:t>Ton mémoire compare. Voilà ce qui se joue.</a:t>
-            </a:r>
-            <a:endParaRPr lang="en-US" sz="3000" dirty="0"/>
+              <a:t>Du descriptif au comparatif. C'est là que ton mémoire bascule.</a:t>
+            </a:r>
+            <a:endParaRPr lang="en-US" sz="2800" dirty="0"/>
           </a:p>
         </p:txBody>
       </p:sp>
@@ -8043,8 +8671,8 @@
         </p:nvSpPr>
         <p:spPr>
           <a:xfrm>
-            <a:off x="640080" y="1920240"/>
-            <a:ext cx="7040880" cy="1645920"/>
+            <a:off x="640080" y="1828800"/>
+            <a:ext cx="10972800" cy="1371600"/>
           </a:xfrm>
           <a:prstGeom prst="rect">
             <a:avLst/>
@@ -8071,7 +8699,7 @@
                 <a:ea typeface="Calibri" pitchFamily="34" charset="-122"/>
                 <a:cs typeface="Calibri" pitchFamily="34" charset="-120"/>
               </a:rPr>
-              <a:t>La majorité des mémoires en santé publique et en médecine sont des études comparatives — deux traitements, deux populations, un avant/après, plusieurs centres. C'est mathématiquement la situation où on te demandera le plus de comptes en soutenance.</a:t>
+              <a:t>Comparer deux traitements, deux régions, un avant/après — c'est mathématiquement la situation où on te demandera le plus de comptes en soutenance. Un mauvais choix de test invalide une conclusion principale. Pas un détail méthodo — la conclusion.</a:t>
             </a:r>
             <a:endParaRPr lang="en-US" sz="1400" dirty="0"/>
           </a:p>
@@ -8085,27 +8713,24 @@
         </p:nvSpPr>
         <p:spPr>
           <a:xfrm>
-            <a:off x="640080" y="3657600"/>
-            <a:ext cx="7040880" cy="2011680"/>
-          </a:xfrm>
-          <a:prstGeom prst="rect">
-            <a:avLst/>
-          </a:prstGeom>
-          <a:noFill/>
-          <a:ln/>
-        </p:spPr>
-        <p:txBody>
-          <a:bodyPr wrap="square" rtlCol="0" anchor="t"/>
-          <a:lstStyle/>
-          <a:p>
-            <a:pPr indent="0" marL="0">
-              <a:lnSpc>
-                <a:spcPct val="140000"/>
-              </a:lnSpc>
-              <a:buNone/>
-            </a:pPr>
-            <a:r>
-              <a:rPr lang="en-US" sz="1400" dirty="0">
+            <a:off x="640080" y="3474720"/>
+            <a:ext cx="11091672" cy="274320"/>
+          </a:xfrm>
+          <a:prstGeom prst="rect">
+            <a:avLst/>
+          </a:prstGeom>
+          <a:noFill/>
+          <a:ln/>
+        </p:spPr>
+        <p:txBody>
+          <a:bodyPr wrap="square" rtlCol="0" anchor="ctr"/>
+          <a:lstStyle/>
+          <a:p>
+            <a:pPr algn="ctr" indent="0" marL="0">
+              <a:buNone/>
+            </a:pPr>
+            <a:r>
+              <a:rPr lang="en-US" sz="1100" b="1" dirty="0">
                 <a:solidFill>
                   <a:srgbClr val="15233F"/>
                 </a:solidFill>
@@ -8113,9 +8738,9 @@
                 <a:ea typeface="Calibri" pitchFamily="34" charset="-122"/>
                 <a:cs typeface="Calibri" pitchFamily="34" charset="-120"/>
               </a:rPr>
-              <a:t>Et c'est aussi là que les erreurs coûtent le plus cher : un mauvais choix de test invalide une conclusion principale. Pas un détail méthodologique annexe — la conclusion. Le jury le sait. Il sait aussi quels pièges chercher.</a:t>
-            </a:r>
-            <a:endParaRPr lang="en-US" sz="1400" dirty="0"/>
+              <a:t>Ce module entre dans la phase « comparer »</a:t>
+            </a:r>
+            <a:endParaRPr lang="en-US" sz="1100" dirty="0"/>
           </a:p>
         </p:txBody>
       </p:sp>
@@ -8127,18 +8752,23 @@
         </p:nvSpPr>
         <p:spPr>
           <a:xfrm>
-            <a:off x="7955280" y="1920240"/>
-            <a:ext cx="3794760" cy="4023360"/>
+            <a:off x="640080" y="3794760"/>
+            <a:ext cx="3514344" cy="1143000"/>
           </a:xfrm>
           <a:prstGeom prst="roundRect">
             <a:avLst>
-              <a:gd name="adj" fmla="val 2410"/>
+              <a:gd name="adj" fmla="val 6400"/>
             </a:avLst>
           </a:prstGeom>
           <a:solidFill>
-            <a:srgbClr val="0E1729"/>
+            <a:srgbClr val="FFFFFF"/>
           </a:solidFill>
-          <a:ln/>
+          <a:ln w="12700">
+            <a:solidFill>
+              <a:srgbClr val="D6CFB8"/>
+            </a:solidFill>
+            <a:prstDash val="solid"/>
+          </a:ln>
         </p:spPr>
       </p:sp>
       <p:sp>
@@ -8149,8 +8779,8 @@
         </p:nvSpPr>
         <p:spPr>
           <a:xfrm>
-            <a:off x="8138160" y="2103120"/>
-            <a:ext cx="3474720" cy="320040"/>
+            <a:off x="731520" y="3931920"/>
+            <a:ext cx="3331464" cy="457200"/>
           </a:xfrm>
           <a:prstGeom prst="rect">
             <a:avLst/>
@@ -8162,19 +8792,22 @@
           <a:bodyPr wrap="square" rtlCol="0" anchor="ctr"/>
           <a:lstStyle/>
           <a:p>
-            <a:pPr indent="0" marL="0">
-              <a:buNone/>
-            </a:pPr>
-            <a:r>
-              <a:rPr lang="en-US" sz="1100" b="1" spc="300" kern="0" dirty="0">
-                <a:solidFill>
-                  <a:srgbClr val="F09042"/>
+            <a:pPr algn="ctr" indent="0" marL="0">
+              <a:lnSpc>
+                <a:spcPct val="115000"/>
+              </a:lnSpc>
+              <a:buNone/>
+            </a:pPr>
+            <a:r>
+              <a:rPr lang="en-US" sz="1100" b="1" dirty="0">
+                <a:solidFill>
+                  <a:srgbClr val="15233F"/>
                 </a:solidFill>
                 <a:latin typeface="Calibri" pitchFamily="34" charset="0"/>
                 <a:ea typeface="Calibri" pitchFamily="34" charset="-122"/>
                 <a:cs typeface="Calibri" pitchFamily="34" charset="-120"/>
               </a:rPr>
-              <a:t>CE MODULE COUVRE</a:t>
+              <a:t>Décrire</a:t>
             </a:r>
             <a:endParaRPr lang="en-US" sz="1100" dirty="0"/>
           </a:p>
@@ -8188,118 +8821,102 @@
         </p:nvSpPr>
         <p:spPr>
           <a:xfrm>
-            <a:off x="8138160" y="2514600"/>
-            <a:ext cx="3474720" cy="1005840"/>
-          </a:xfrm>
-          <a:prstGeom prst="rect">
-            <a:avLst/>
-          </a:prstGeom>
-          <a:noFill/>
-          <a:ln/>
-        </p:spPr>
-        <p:txBody>
-          <a:bodyPr wrap="square" rtlCol="0" anchor="ctr"/>
-          <a:lstStyle/>
-          <a:p>
-            <a:pPr indent="0" marL="0">
-              <a:buNone/>
-            </a:pPr>
-            <a:r>
-              <a:rPr lang="en-US" sz="9000" b="1" dirty="0">
-                <a:solidFill>
-                  <a:srgbClr val="F09042"/>
-                </a:solidFill>
-                <a:latin typeface="Consolas" pitchFamily="34" charset="0"/>
-                <a:ea typeface="Consolas" pitchFamily="34" charset="-122"/>
-                <a:cs typeface="Consolas" pitchFamily="34" charset="-120"/>
-              </a:rPr>
-              <a:t>9</a:t>
-            </a:r>
-            <a:endParaRPr lang="en-US" sz="9000" dirty="0"/>
-          </a:p>
-        </p:txBody>
-      </p:sp>
-      <p:sp>
-        <p:nvSpPr>
-          <p:cNvPr id="11" name="Text 9"/>
-          <p:cNvSpPr/>
-          <p:nvPr/>
-        </p:nvSpPr>
-        <p:spPr>
-          <a:xfrm>
-            <a:off x="8138160" y="3566160"/>
-            <a:ext cx="3474720" cy="1280160"/>
-          </a:xfrm>
-          <a:prstGeom prst="rect">
-            <a:avLst/>
-          </a:prstGeom>
-          <a:noFill/>
-          <a:ln/>
-        </p:spPr>
-        <p:txBody>
-          <a:bodyPr wrap="square" rtlCol="0" anchor="ctr"/>
-          <a:lstStyle/>
-          <a:p>
-            <a:pPr indent="0" marL="0">
-              <a:lnSpc>
-                <a:spcPct val="135000"/>
-              </a:lnSpc>
-              <a:buNone/>
-            </a:pPr>
-            <a:r>
-              <a:rPr lang="en-US" sz="1400" dirty="0">
-                <a:solidFill>
-                  <a:srgbClr val="FFFFFF"/>
+            <a:off x="731520" y="4434840"/>
+            <a:ext cx="3331464" cy="365760"/>
+          </a:xfrm>
+          <a:prstGeom prst="rect">
+            <a:avLst/>
+          </a:prstGeom>
+          <a:noFill/>
+          <a:ln/>
+        </p:spPr>
+        <p:txBody>
+          <a:bodyPr wrap="square" rtlCol="0" anchor="t"/>
+          <a:lstStyle/>
+          <a:p>
+            <a:pPr algn="ctr" indent="0" marL="0">
+              <a:lnSpc>
+                <a:spcPct val="130000"/>
+              </a:lnSpc>
+              <a:buNone/>
+            </a:pPr>
+            <a:r>
+              <a:rPr lang="en-US" sz="900" i="1" dirty="0">
+                <a:solidFill>
+                  <a:srgbClr val="15233F"/>
                 </a:solidFill>
                 <a:latin typeface="Calibri" pitchFamily="34" charset="0"/>
                 <a:ea typeface="Calibri" pitchFamily="34" charset="-122"/>
                 <a:cs typeface="Calibri" pitchFamily="34" charset="-120"/>
               </a:rPr>
-              <a:t>tests qui couvrent</a:t>
-            </a:r>
-            <a:endParaRPr lang="en-US" sz="1400" dirty="0"/>
-          </a:p>
-          <a:p>
-            <a:pPr indent="0" marL="0">
-              <a:lnSpc>
-                <a:spcPct val="135000"/>
-              </a:lnSpc>
-              <a:buNone/>
-            </a:pPr>
-            <a:r>
-              <a:rPr lang="en-US" sz="1400" dirty="0">
-                <a:solidFill>
-                  <a:srgbClr val="FFFFFF"/>
+              <a:t>Médianes</a:t>
+            </a:r>
+            <a:endParaRPr lang="en-US" sz="900" dirty="0"/>
+          </a:p>
+          <a:p>
+            <a:pPr algn="ctr" indent="0" marL="0">
+              <a:lnSpc>
+                <a:spcPct val="130000"/>
+              </a:lnSpc>
+              <a:buNone/>
+            </a:pPr>
+            <a:r>
+              <a:rPr lang="en-US" sz="900" i="1" dirty="0">
+                <a:solidFill>
+                  <a:srgbClr val="15233F"/>
                 </a:solidFill>
                 <a:latin typeface="Calibri" pitchFamily="34" charset="0"/>
                 <a:ea typeface="Calibri" pitchFamily="34" charset="-122"/>
                 <a:cs typeface="Calibri" pitchFamily="34" charset="-120"/>
               </a:rPr>
-              <a:t>90 % des comparaisons</a:t>
-            </a:r>
-            <a:endParaRPr lang="en-US" sz="1400" dirty="0"/>
-          </a:p>
-          <a:p>
-            <a:pPr indent="0" marL="0">
-              <a:lnSpc>
-                <a:spcPct val="135000"/>
-              </a:lnSpc>
-              <a:buNone/>
-            </a:pPr>
-            <a:r>
-              <a:rPr lang="en-US" sz="1400" dirty="0">
-                <a:solidFill>
-                  <a:srgbClr val="FFFFFF"/>
+              <a:t>Proportions</a:t>
+            </a:r>
+            <a:endParaRPr lang="en-US" sz="900" dirty="0"/>
+          </a:p>
+          <a:p>
+            <a:pPr algn="ctr" indent="0" marL="0">
+              <a:lnSpc>
+                <a:spcPct val="130000"/>
+              </a:lnSpc>
+              <a:buNone/>
+            </a:pPr>
+            <a:r>
+              <a:rPr lang="en-US" sz="900" i="1" dirty="0">
+                <a:solidFill>
+                  <a:srgbClr val="15233F"/>
                 </a:solidFill>
                 <a:latin typeface="Calibri" pitchFamily="34" charset="0"/>
                 <a:ea typeface="Calibri" pitchFamily="34" charset="-122"/>
                 <a:cs typeface="Calibri" pitchFamily="34" charset="-120"/>
               </a:rPr>
-              <a:t>rencontrées en mémoire.</a:t>
-            </a:r>
-            <a:endParaRPr lang="en-US" sz="1400" dirty="0"/>
-          </a:p>
-        </p:txBody>
+              <a:t>Distributions</a:t>
+            </a:r>
+            <a:endParaRPr lang="en-US" sz="900" dirty="0"/>
+          </a:p>
+        </p:txBody>
+      </p:sp>
+      <p:sp>
+        <p:nvSpPr>
+          <p:cNvPr id="11" name="Shape 9"/>
+          <p:cNvSpPr/>
+          <p:nvPr/>
+        </p:nvSpPr>
+        <p:spPr>
+          <a:xfrm>
+            <a:off x="4200144" y="4366260"/>
+            <a:ext cx="182880" cy="0"/>
+          </a:xfrm>
+          <a:prstGeom prst="line">
+            <a:avLst/>
+          </a:prstGeom>
+          <a:noFill/>
+          <a:ln w="19050">
+            <a:solidFill>
+              <a:srgbClr val="F09042"/>
+            </a:solidFill>
+            <a:prstDash val="solid"/>
+          </a:ln>
+        </p:spPr>
       </p:sp>
       <p:sp>
         <p:nvSpPr>
@@ -8309,28 +8926,301 @@
         </p:nvSpPr>
         <p:spPr>
           <a:xfrm>
-            <a:off x="8138160" y="5029200"/>
-            <a:ext cx="3383280" cy="18288"/>
-          </a:xfrm>
-          <a:prstGeom prst="rect">
-            <a:avLst/>
+            <a:off x="4309872" y="4293108"/>
+            <a:ext cx="73152" cy="73152"/>
+          </a:xfrm>
+          <a:prstGeom prst="line">
+            <a:avLst/>
+          </a:prstGeom>
+          <a:noFill/>
+          <a:ln w="19050">
+            <a:solidFill>
+              <a:srgbClr val="F09042"/>
+            </a:solidFill>
+            <a:prstDash val="solid"/>
+          </a:ln>
+        </p:spPr>
+      </p:sp>
+      <p:sp>
+        <p:nvSpPr>
+          <p:cNvPr id="13" name="Shape 11"/>
+          <p:cNvSpPr/>
+          <p:nvPr/>
+        </p:nvSpPr>
+        <p:spPr>
+          <a:xfrm>
+            <a:off x="4309872" y="4439412"/>
+            <a:ext cx="73152" cy="-73152"/>
+          </a:xfrm>
+          <a:prstGeom prst="line">
+            <a:avLst/>
+          </a:prstGeom>
+          <a:noFill/>
+          <a:ln w="19050">
+            <a:solidFill>
+              <a:srgbClr val="F09042"/>
+            </a:solidFill>
+            <a:prstDash val="solid"/>
+          </a:ln>
+        </p:spPr>
+      </p:sp>
+      <p:sp>
+        <p:nvSpPr>
+          <p:cNvPr id="14" name="Shape 12"/>
+          <p:cNvSpPr/>
+          <p:nvPr/>
+        </p:nvSpPr>
+        <p:spPr>
+          <a:xfrm>
+            <a:off x="4428744" y="3794760"/>
+            <a:ext cx="3514344" cy="1143000"/>
+          </a:xfrm>
+          <a:prstGeom prst="roundRect">
+            <a:avLst>
+              <a:gd name="adj" fmla="val 6400"/>
+            </a:avLst>
+          </a:prstGeom>
+          <a:solidFill>
+            <a:srgbClr val="FFFFFF"/>
+          </a:solidFill>
+          <a:ln w="12700">
+            <a:solidFill>
+              <a:srgbClr val="D6CFB8"/>
+            </a:solidFill>
+            <a:prstDash val="solid"/>
+          </a:ln>
+        </p:spPr>
+      </p:sp>
+      <p:sp>
+        <p:nvSpPr>
+          <p:cNvPr id="15" name="Text 13"/>
+          <p:cNvSpPr/>
+          <p:nvPr/>
+        </p:nvSpPr>
+        <p:spPr>
+          <a:xfrm>
+            <a:off x="4520184" y="3931920"/>
+            <a:ext cx="3331464" cy="457200"/>
+          </a:xfrm>
+          <a:prstGeom prst="rect">
+            <a:avLst/>
+          </a:prstGeom>
+          <a:noFill/>
+          <a:ln/>
+        </p:spPr>
+        <p:txBody>
+          <a:bodyPr wrap="square" rtlCol="0" anchor="ctr"/>
+          <a:lstStyle/>
+          <a:p>
+            <a:pPr algn="ctr" indent="0" marL="0">
+              <a:lnSpc>
+                <a:spcPct val="115000"/>
+              </a:lnSpc>
+              <a:buNone/>
+            </a:pPr>
+            <a:r>
+              <a:rPr lang="en-US" sz="1100" b="1" dirty="0">
+                <a:solidFill>
+                  <a:srgbClr val="15233F"/>
+                </a:solidFill>
+                <a:latin typeface="Calibri" pitchFamily="34" charset="0"/>
+                <a:ea typeface="Calibri" pitchFamily="34" charset="-122"/>
+                <a:cs typeface="Calibri" pitchFamily="34" charset="-120"/>
+              </a:rPr>
+              <a:t>Comparer</a:t>
+            </a:r>
+            <a:endParaRPr lang="en-US" sz="1100" dirty="0"/>
+          </a:p>
+        </p:txBody>
+      </p:sp>
+      <p:sp>
+        <p:nvSpPr>
+          <p:cNvPr id="16" name="Text 14"/>
+          <p:cNvSpPr/>
+          <p:nvPr/>
+        </p:nvSpPr>
+        <p:spPr>
+          <a:xfrm>
+            <a:off x="4520184" y="4434840"/>
+            <a:ext cx="3331464" cy="365760"/>
+          </a:xfrm>
+          <a:prstGeom prst="rect">
+            <a:avLst/>
+          </a:prstGeom>
+          <a:noFill/>
+          <a:ln/>
+        </p:spPr>
+        <p:txBody>
+          <a:bodyPr wrap="square" rtlCol="0" anchor="t"/>
+          <a:lstStyle/>
+          <a:p>
+            <a:pPr algn="ctr" indent="0" marL="0">
+              <a:lnSpc>
+                <a:spcPct val="130000"/>
+              </a:lnSpc>
+              <a:buNone/>
+            </a:pPr>
+            <a:r>
+              <a:rPr lang="en-US" sz="900" i="1" dirty="0">
+                <a:solidFill>
+                  <a:srgbClr val="15233F"/>
+                </a:solidFill>
+                <a:latin typeface="Calibri" pitchFamily="34" charset="0"/>
+                <a:ea typeface="Calibri" pitchFamily="34" charset="-122"/>
+                <a:cs typeface="Calibri" pitchFamily="34" charset="-120"/>
+              </a:rPr>
+              <a:t>t-test · ANOVA</a:t>
+            </a:r>
+            <a:endParaRPr lang="en-US" sz="900" dirty="0"/>
+          </a:p>
+          <a:p>
+            <a:pPr algn="ctr" indent="0" marL="0">
+              <a:lnSpc>
+                <a:spcPct val="130000"/>
+              </a:lnSpc>
+              <a:buNone/>
+            </a:pPr>
+            <a:r>
+              <a:rPr lang="en-US" sz="900" i="1" dirty="0">
+                <a:solidFill>
+                  <a:srgbClr val="15233F"/>
+                </a:solidFill>
+                <a:latin typeface="Calibri" pitchFamily="34" charset="0"/>
+                <a:ea typeface="Calibri" pitchFamily="34" charset="-122"/>
+                <a:cs typeface="Calibri" pitchFamily="34" charset="-120"/>
+              </a:rPr>
+              <a:t>χ² · Mann-Whitney</a:t>
+            </a:r>
+            <a:endParaRPr lang="en-US" sz="900" dirty="0"/>
+          </a:p>
+          <a:p>
+            <a:pPr algn="ctr" indent="0" marL="0">
+              <a:lnSpc>
+                <a:spcPct val="130000"/>
+              </a:lnSpc>
+              <a:buNone/>
+            </a:pPr>
+            <a:r>
+              <a:rPr lang="en-US" sz="900" i="1" dirty="0">
+                <a:solidFill>
+                  <a:srgbClr val="15233F"/>
+                </a:solidFill>
+                <a:latin typeface="Calibri" pitchFamily="34" charset="0"/>
+                <a:ea typeface="Calibri" pitchFamily="34" charset="-122"/>
+                <a:cs typeface="Calibri" pitchFamily="34" charset="-120"/>
+              </a:rPr>
+              <a:t>McNemar · Fisher</a:t>
+            </a:r>
+            <a:endParaRPr lang="en-US" sz="900" dirty="0"/>
+          </a:p>
+        </p:txBody>
+      </p:sp>
+      <p:sp>
+        <p:nvSpPr>
+          <p:cNvPr id="17" name="Shape 15"/>
+          <p:cNvSpPr/>
+          <p:nvPr/>
+        </p:nvSpPr>
+        <p:spPr>
+          <a:xfrm>
+            <a:off x="7988808" y="4366260"/>
+            <a:ext cx="182880" cy="0"/>
+          </a:xfrm>
+          <a:prstGeom prst="line">
+            <a:avLst/>
+          </a:prstGeom>
+          <a:noFill/>
+          <a:ln w="19050">
+            <a:solidFill>
+              <a:srgbClr val="F09042"/>
+            </a:solidFill>
+            <a:prstDash val="solid"/>
+          </a:ln>
+        </p:spPr>
+      </p:sp>
+      <p:sp>
+        <p:nvSpPr>
+          <p:cNvPr id="18" name="Shape 16"/>
+          <p:cNvSpPr/>
+          <p:nvPr/>
+        </p:nvSpPr>
+        <p:spPr>
+          <a:xfrm>
+            <a:off x="8098536" y="4293108"/>
+            <a:ext cx="73152" cy="73152"/>
+          </a:xfrm>
+          <a:prstGeom prst="line">
+            <a:avLst/>
+          </a:prstGeom>
+          <a:noFill/>
+          <a:ln w="19050">
+            <a:solidFill>
+              <a:srgbClr val="F09042"/>
+            </a:solidFill>
+            <a:prstDash val="solid"/>
+          </a:ln>
+        </p:spPr>
+      </p:sp>
+      <p:sp>
+        <p:nvSpPr>
+          <p:cNvPr id="19" name="Shape 17"/>
+          <p:cNvSpPr/>
+          <p:nvPr/>
+        </p:nvSpPr>
+        <p:spPr>
+          <a:xfrm>
+            <a:off x="8098536" y="4439412"/>
+            <a:ext cx="73152" cy="-73152"/>
+          </a:xfrm>
+          <a:prstGeom prst="line">
+            <a:avLst/>
+          </a:prstGeom>
+          <a:noFill/>
+          <a:ln w="19050">
+            <a:solidFill>
+              <a:srgbClr val="F09042"/>
+            </a:solidFill>
+            <a:prstDash val="solid"/>
+          </a:ln>
+        </p:spPr>
+      </p:sp>
+      <p:sp>
+        <p:nvSpPr>
+          <p:cNvPr id="20" name="Shape 18"/>
+          <p:cNvSpPr/>
+          <p:nvPr/>
+        </p:nvSpPr>
+        <p:spPr>
+          <a:xfrm>
+            <a:off x="8217408" y="3794760"/>
+            <a:ext cx="3514344" cy="1143000"/>
+          </a:xfrm>
+          <a:prstGeom prst="roundRect">
+            <a:avLst>
+              <a:gd name="adj" fmla="val 6400"/>
+            </a:avLst>
           </a:prstGeom>
           <a:solidFill>
             <a:srgbClr val="F09042"/>
           </a:solidFill>
-          <a:ln/>
-        </p:spPr>
-      </p:sp>
-      <p:sp>
-        <p:nvSpPr>
-          <p:cNvPr id="13" name="Text 11"/>
-          <p:cNvSpPr/>
-          <p:nvPr/>
-        </p:nvSpPr>
-        <p:spPr>
-          <a:xfrm>
-            <a:off x="8138160" y="5166360"/>
-            <a:ext cx="3474720" cy="777240"/>
+          <a:ln w="12700">
+            <a:solidFill>
+              <a:srgbClr val="D9772B"/>
+            </a:solidFill>
+            <a:prstDash val="solid"/>
+          </a:ln>
+        </p:spPr>
+      </p:sp>
+      <p:sp>
+        <p:nvSpPr>
+          <p:cNvPr id="21" name="Text 19"/>
+          <p:cNvSpPr/>
+          <p:nvPr/>
+        </p:nvSpPr>
+        <p:spPr>
+          <a:xfrm>
+            <a:off x="8308848" y="3931920"/>
+            <a:ext cx="3331464" cy="457200"/>
           </a:xfrm>
           <a:prstGeom prst="rect">
             <a:avLst/>
@@ -8342,24 +9232,168 @@
           <a:bodyPr wrap="square" rtlCol="0" anchor="ctr"/>
           <a:lstStyle/>
           <a:p>
-            <a:pPr indent="0" marL="0">
-              <a:lnSpc>
-                <a:spcPct val="130000"/>
-              </a:lnSpc>
-              <a:buNone/>
-            </a:pPr>
-            <a:r>
-              <a:rPr lang="en-US" sz="1100" i="1" dirty="0">
-                <a:solidFill>
-                  <a:srgbClr val="C9CFDC"/>
+            <a:pPr algn="ctr" indent="0" marL="0">
+              <a:lnSpc>
+                <a:spcPct val="115000"/>
+              </a:lnSpc>
+              <a:buNone/>
+            </a:pPr>
+            <a:r>
+              <a:rPr lang="en-US" sz="1100" b="1" dirty="0">
+                <a:solidFill>
+                  <a:srgbClr val="0E1729"/>
                 </a:solidFill>
                 <a:latin typeface="Calibri" pitchFamily="34" charset="0"/>
                 <a:ea typeface="Calibri" pitchFamily="34" charset="-122"/>
                 <a:cs typeface="Calibri" pitchFamily="34" charset="-120"/>
               </a:rPr>
-              <a:t>Pour chacun : quand l'utiliser, comment le coder, comment lire la sortie, ce que le jury va demander.</a:t>
+              <a:t>Conclure</a:t>
             </a:r>
             <a:endParaRPr lang="en-US" sz="1100" dirty="0"/>
+          </a:p>
+        </p:txBody>
+      </p:sp>
+      <p:sp>
+        <p:nvSpPr>
+          <p:cNvPr id="22" name="Text 20"/>
+          <p:cNvSpPr/>
+          <p:nvPr/>
+        </p:nvSpPr>
+        <p:spPr>
+          <a:xfrm>
+            <a:off x="8308848" y="4434840"/>
+            <a:ext cx="3331464" cy="365760"/>
+          </a:xfrm>
+          <a:prstGeom prst="rect">
+            <a:avLst/>
+          </a:prstGeom>
+          <a:noFill/>
+          <a:ln/>
+        </p:spPr>
+        <p:txBody>
+          <a:bodyPr wrap="square" rtlCol="0" anchor="t"/>
+          <a:lstStyle/>
+          <a:p>
+            <a:pPr algn="ctr" indent="0" marL="0">
+              <a:lnSpc>
+                <a:spcPct val="130000"/>
+              </a:lnSpc>
+              <a:buNone/>
+            </a:pPr>
+            <a:r>
+              <a:rPr lang="en-US" sz="900" i="1" dirty="0">
+                <a:solidFill>
+                  <a:srgbClr val="0E1729"/>
+                </a:solidFill>
+                <a:latin typeface="Calibri" pitchFamily="34" charset="0"/>
+                <a:ea typeface="Calibri" pitchFamily="34" charset="-122"/>
+                <a:cs typeface="Calibri" pitchFamily="34" charset="-120"/>
+              </a:rPr>
+              <a:t>Taille d'effet</a:t>
+            </a:r>
+            <a:endParaRPr lang="en-US" sz="900" dirty="0"/>
+          </a:p>
+          <a:p>
+            <a:pPr algn="ctr" indent="0" marL="0">
+              <a:lnSpc>
+                <a:spcPct val="130000"/>
+              </a:lnSpc>
+              <a:buNone/>
+            </a:pPr>
+            <a:r>
+              <a:rPr lang="en-US" sz="900" i="1" dirty="0">
+                <a:solidFill>
+                  <a:srgbClr val="0E1729"/>
+                </a:solidFill>
+                <a:latin typeface="Calibri" pitchFamily="34" charset="0"/>
+                <a:ea typeface="Calibri" pitchFamily="34" charset="-122"/>
+                <a:cs typeface="Calibri" pitchFamily="34" charset="-120"/>
+              </a:rPr>
+              <a:t>IC95%</a:t>
+            </a:r>
+            <a:endParaRPr lang="en-US" sz="900" dirty="0"/>
+          </a:p>
+          <a:p>
+            <a:pPr algn="ctr" indent="0" marL="0">
+              <a:lnSpc>
+                <a:spcPct val="130000"/>
+              </a:lnSpc>
+              <a:buNone/>
+            </a:pPr>
+            <a:r>
+              <a:rPr lang="en-US" sz="900" i="1" dirty="0">
+                <a:solidFill>
+                  <a:srgbClr val="0E1729"/>
+                </a:solidFill>
+                <a:latin typeface="Calibri" pitchFamily="34" charset="0"/>
+                <a:ea typeface="Calibri" pitchFamily="34" charset="-122"/>
+                <a:cs typeface="Calibri" pitchFamily="34" charset="-120"/>
+              </a:rPr>
+              <a:t>Pertinence</a:t>
+            </a:r>
+            <a:endParaRPr lang="en-US" sz="900" dirty="0"/>
+          </a:p>
+        </p:txBody>
+      </p:sp>
+      <p:sp>
+        <p:nvSpPr>
+          <p:cNvPr id="23" name="Shape 21"/>
+          <p:cNvSpPr/>
+          <p:nvPr/>
+        </p:nvSpPr>
+        <p:spPr>
+          <a:xfrm>
+            <a:off x="640080" y="5212080"/>
+            <a:ext cx="54864" cy="1005840"/>
+          </a:xfrm>
+          <a:prstGeom prst="rect">
+            <a:avLst/>
+          </a:prstGeom>
+          <a:solidFill>
+            <a:srgbClr val="F09042"/>
+          </a:solidFill>
+          <a:ln/>
+        </p:spPr>
+      </p:sp>
+      <p:sp>
+        <p:nvSpPr>
+          <p:cNvPr id="24" name="Text 22"/>
+          <p:cNvSpPr/>
+          <p:nvPr/>
+        </p:nvSpPr>
+        <p:spPr>
+          <a:xfrm>
+            <a:off x="868680" y="5257800"/>
+            <a:ext cx="10972800" cy="1005840"/>
+          </a:xfrm>
+          <a:prstGeom prst="rect">
+            <a:avLst/>
+          </a:prstGeom>
+          <a:noFill/>
+          <a:ln/>
+        </p:spPr>
+        <p:txBody>
+          <a:bodyPr wrap="square" rtlCol="0" anchor="ctr"/>
+          <a:lstStyle/>
+          <a:p>
+            <a:pPr indent="0" marL="0">
+              <a:lnSpc>
+                <a:spcPct val="140000"/>
+              </a:lnSpc>
+              <a:buNone/>
+            </a:pPr>
+            <a:r>
+              <a:rPr lang="en-US" sz="1300" i="1" dirty="0">
+                <a:solidFill>
+                  <a:srgbClr val="15233F"/>
+                </a:solidFill>
+                <a:latin typeface="Calibri" pitchFamily="34" charset="0"/>
+                <a:ea typeface="Calibri" pitchFamily="34" charset="-122"/>
+                <a:cs typeface="Calibri" pitchFamily="34" charset="-120"/>
+              </a:rPr>
+              <a:t>Le module couvre 9 tests qui couvrent 90 % des comparaisons en mémoire/thèse. Pour chacun : quand l'utiliser, comment le coder, comment lire la sortie, ce que le jury va creuser.</a:t>
+            </a:r>
+            <a:endParaRPr lang="en-US" sz="1300" dirty="0"/>
           </a:p>
         </p:txBody>
       </p:sp>
@@ -8540,7 +9574,7 @@
               <a:buNone/>
             </a:pPr>
             <a:r>
-              <a:rPr lang="en-US" sz="3000" b="1" spc="-100" kern="0" dirty="0">
+              <a:rPr lang="en-US" sz="2800" b="1" spc="-100" kern="0" dirty="0">
                 <a:solidFill>
                   <a:srgbClr val="15233F"/>
                 </a:solidFill>
@@ -8550,7 +9584,7 @@
               </a:rPr>
               <a:t>Choisir en trois questions.</a:t>
             </a:r>
-            <a:endParaRPr lang="en-US" sz="3000" dirty="0"/>
+            <a:endParaRPr lang="en-US" sz="2800" dirty="0"/>
           </a:p>
         </p:txBody>
       </p:sp>
@@ -8875,7 +9909,7 @@
                 <a:ea typeface="Consolas" pitchFamily="34" charset="-122"/>
                 <a:cs typeface="Consolas" pitchFamily="34" charset="-120"/>
               </a:rPr>
-              <a:t>Mann-Whitney (slide 5)</a:t>
+              <a:t>Mann-Whitney (5)</a:t>
             </a:r>
             <a:endParaRPr lang="en-US" sz="1200" dirty="0"/>
           </a:p>
@@ -8956,7 +9990,7 @@
                 <a:ea typeface="Consolas" pitchFamily="34" charset="-122"/>
                 <a:cs typeface="Consolas" pitchFamily="34" charset="-120"/>
               </a:rPr>
-              <a:t>Chi² · Fisher (8, 9)</a:t>
+              <a:t>Chi² · Fisher (9, 10)</a:t>
             </a:r>
             <a:endParaRPr lang="en-US" sz="1200" dirty="0"/>
           </a:p>
@@ -9322,7 +10356,7 @@
                 <a:ea typeface="Consolas" pitchFamily="34" charset="-122"/>
                 <a:cs typeface="Consolas" pitchFamily="34" charset="-120"/>
               </a:rPr>
-              <a:t>McNemar (slide 10)</a:t>
+              <a:t>McNemar (11)</a:t>
             </a:r>
             <a:endParaRPr lang="en-US" sz="1200" dirty="0"/>
           </a:p>
@@ -9691,45 +10725,6 @@
               <a:t>Chi² d'homogénéité</a:t>
             </a:r>
             <a:endParaRPr lang="en-US" sz="1200" dirty="0"/>
-          </a:p>
-        </p:txBody>
-      </p:sp>
-      <p:sp>
-        <p:nvSpPr>
-          <p:cNvPr id="37" name="Text 35"/>
-          <p:cNvSpPr/>
-          <p:nvPr/>
-        </p:nvSpPr>
-        <p:spPr>
-          <a:xfrm>
-            <a:off x="640080" y="6400800"/>
-            <a:ext cx="10972800" cy="274320"/>
-          </a:xfrm>
-          <a:prstGeom prst="rect">
-            <a:avLst/>
-          </a:prstGeom>
-          <a:noFill/>
-          <a:ln/>
-        </p:spPr>
-        <p:txBody>
-          <a:bodyPr wrap="square" rtlCol="0" anchor="ctr"/>
-          <a:lstStyle/>
-          <a:p>
-            <a:pPr algn="ctr" indent="0" marL="0">
-              <a:buNone/>
-            </a:pPr>
-            <a:r>
-              <a:rPr lang="en-US" sz="1000" i="1" dirty="0">
-                <a:solidFill>
-                  <a:srgbClr val="6B7280"/>
-                </a:solidFill>
-                <a:latin typeface="Calibri" pitchFamily="34" charset="0"/>
-                <a:ea typeface="Calibri" pitchFamily="34" charset="-122"/>
-                <a:cs typeface="Calibri" pitchFamily="34" charset="-120"/>
-              </a:rPr>
-              <a:t>Les numéros entre parenthèses pointent vers les slides où chaque test est détaillé.</a:t>
-            </a:r>
-            <a:endParaRPr lang="en-US" sz="1000" dirty="0"/>
           </a:p>
         </p:txBody>
       </p:sp>
@@ -11296,7 +12291,7 @@
         <p:spPr>
           <a:xfrm>
             <a:off x="640080" y="1828800"/>
-            <a:ext cx="10972800" cy="1280160"/>
+            <a:ext cx="10972800" cy="914400"/>
           </a:xfrm>
           <a:prstGeom prst="rect">
             <a:avLst/>
@@ -11323,7 +12318,7 @@
                 <a:ea typeface="Calibri" pitchFamily="34" charset="-122"/>
                 <a:cs typeface="Calibri" pitchFamily="34" charset="-120"/>
               </a:rPr>
-              <a:t>Si Shapiro rejette et que le QQ-plot le confirme, Mann-Whitney prend le relais. Pas d'hypothèse de normalité, compare les rangs au lieu des moyennes. Aussi appelé Wilcoxon rank-sum — c'est le même test.</a:t>
+              <a:t>Si Shapiro rejette et que le QQ-plot le confirme, Mann-Whitney prend le relais. Pas d'hypothèse de normalité — compare les rangs au lieu des moyennes. Aussi appelé Wilcoxon rank-sum.</a:t>
             </a:r>
             <a:endParaRPr lang="en-US" sz="1300" dirty="0"/>
           </a:p>
@@ -11337,12 +12332,12 @@
         </p:nvSpPr>
         <p:spPr>
           <a:xfrm>
-            <a:off x="640080" y="3246120"/>
-            <a:ext cx="5486400" cy="2606040"/>
+            <a:off x="640080" y="2926080"/>
+            <a:ext cx="3931920" cy="2926080"/>
           </a:xfrm>
           <a:prstGeom prst="roundRect">
             <a:avLst>
-              <a:gd name="adj" fmla="val 1754"/>
+              <a:gd name="adj" fmla="val 1563"/>
             </a:avLst>
           </a:prstGeom>
           <a:solidFill>
@@ -11364,7 +12359,7 @@
         </p:nvSpPr>
         <p:spPr>
           <a:xfrm>
-            <a:off x="777240" y="3355848"/>
+            <a:off x="777240" y="3035808"/>
             <a:ext cx="365760" cy="256032"/>
           </a:xfrm>
           <a:prstGeom prst="roundRect">
@@ -11386,7 +12381,7 @@
         </p:nvSpPr>
         <p:spPr>
           <a:xfrm>
-            <a:off x="777240" y="3355848"/>
+            <a:off x="777240" y="3035808"/>
             <a:ext cx="365760" cy="256032"/>
           </a:xfrm>
           <a:prstGeom prst="rect">
@@ -11425,8 +12420,8 @@
         </p:nvSpPr>
         <p:spPr>
           <a:xfrm>
-            <a:off x="822960" y="3703320"/>
-            <a:ext cx="5212080" cy="2057400"/>
+            <a:off x="822960" y="3383280"/>
+            <a:ext cx="3657600" cy="2377440"/>
           </a:xfrm>
           <a:prstGeom prst="rect">
             <a:avLst/>
@@ -11453,7 +12448,7 @@
                 <a:ea typeface="Consolas" pitchFamily="34" charset="-122"/>
                 <a:cs typeface="Consolas" pitchFamily="34" charset="-120"/>
               </a:rPr>
-              <a:t># Mann-Whitney / Wilcoxon rank-sum</a:t>
+              <a:t># Mann-Whitney /</a:t>
             </a:r>
             <a:endParaRPr lang="en-US" sz="1050" dirty="0"/>
           </a:p>
@@ -11473,7 +12468,7 @@
                 <a:ea typeface="Consolas" pitchFamily="34" charset="-122"/>
                 <a:cs typeface="Consolas" pitchFamily="34" charset="-120"/>
               </a:rPr>
-              <a:t>wilcox.test(score ~ groupe,</a:t>
+              <a:t># Wilcoxon rank-sum</a:t>
             </a:r>
             <a:endParaRPr lang="en-US" sz="1050" dirty="0"/>
           </a:p>
@@ -11493,7 +12488,7 @@
                 <a:ea typeface="Consolas" pitchFamily="34" charset="-122"/>
                 <a:cs typeface="Consolas" pitchFamily="34" charset="-120"/>
               </a:rPr>
-              <a:t>            data = donnees,</a:t>
+              <a:t>wilcox.test(score ~ groupe,</a:t>
             </a:r>
             <a:endParaRPr lang="en-US" sz="1050" dirty="0"/>
           </a:p>
@@ -11513,17 +12508,8 @@
                 <a:ea typeface="Consolas" pitchFamily="34" charset="-122"/>
                 <a:cs typeface="Consolas" pitchFamily="34" charset="-120"/>
               </a:rPr>
-              <a:t>            conf.int = TRUE)</a:t>
-            </a:r>
-            <a:endParaRPr lang="en-US" sz="1050" dirty="0"/>
-          </a:p>
-          <a:p>
-            <a:pPr indent="0" marL="0">
-              <a:lnSpc>
-                <a:spcPct val="140000"/>
-              </a:lnSpc>
-              <a:buNone/>
-            </a:pPr>
+              <a:t>            data = donnees,</a:t>
+            </a:r>
             <a:endParaRPr lang="en-US" sz="1050" dirty="0"/>
           </a:p>
           <a:p>
@@ -11542,8 +12528,17 @@
                 <a:ea typeface="Consolas" pitchFamily="34" charset="-122"/>
                 <a:cs typeface="Consolas" pitchFamily="34" charset="-120"/>
               </a:rPr>
-              <a:t># Taille d'effet r = Z / sqrt(N)</a:t>
-            </a:r>
+              <a:t>            conf.int = TRUE)</a:t>
+            </a:r>
+            <a:endParaRPr lang="en-US" sz="1050" dirty="0"/>
+          </a:p>
+          <a:p>
+            <a:pPr indent="0" marL="0">
+              <a:lnSpc>
+                <a:spcPct val="140000"/>
+              </a:lnSpc>
+              <a:buNone/>
+            </a:pPr>
             <a:endParaRPr lang="en-US" sz="1050" dirty="0"/>
           </a:p>
           <a:p>
@@ -11582,10 +12577,30 @@
                 <a:ea typeface="Consolas" pitchFamily="34" charset="-122"/>
                 <a:cs typeface="Consolas" pitchFamily="34" charset="-120"/>
               </a:rPr>
-              <a:t>wilcox_effsize(donnees, score ~ groupe)</a:t>
+              <a:t>wilcox_effsize(donnees,</a:t>
             </a:r>
             <a:endParaRPr lang="en-US" sz="1050" dirty="0"/>
           </a:p>
+          <a:p>
+            <a:pPr indent="0" marL="0">
+              <a:lnSpc>
+                <a:spcPct val="140000"/>
+              </a:lnSpc>
+              <a:buNone/>
+            </a:pPr>
+            <a:r>
+              <a:rPr lang="en-US" sz="1050" dirty="0">
+                <a:solidFill>
+                  <a:srgbClr val="E8EAED"/>
+                </a:solidFill>
+                <a:latin typeface="Consolas" pitchFamily="34" charset="0"/>
+                <a:ea typeface="Consolas" pitchFamily="34" charset="-122"/>
+                <a:cs typeface="Consolas" pitchFamily="34" charset="-120"/>
+              </a:rPr>
+              <a:t>               score ~ groupe)</a:t>
+            </a:r>
+            <a:endParaRPr lang="en-US" sz="1050" dirty="0"/>
+          </a:p>
         </p:txBody>
       </p:sp>
       <p:sp>
@@ -11596,12 +12611,12 @@
         </p:nvSpPr>
         <p:spPr>
           <a:xfrm>
-            <a:off x="6400800" y="3246120"/>
-            <a:ext cx="5330952" cy="2606040"/>
+            <a:off x="4709160" y="2926080"/>
+            <a:ext cx="2560320" cy="2926080"/>
           </a:xfrm>
           <a:prstGeom prst="roundRect">
             <a:avLst>
-              <a:gd name="adj" fmla="val 1754"/>
+              <a:gd name="adj" fmla="val 1786"/>
             </a:avLst>
           </a:prstGeom>
           <a:solidFill>
@@ -11623,7 +12638,7 @@
         </p:nvSpPr>
         <p:spPr>
           <a:xfrm>
-            <a:off x="6537960" y="3337560"/>
+            <a:off x="4846320" y="3017520"/>
             <a:ext cx="914400" cy="228600"/>
           </a:xfrm>
           <a:prstGeom prst="rect">
@@ -11662,8 +12677,8 @@
         </p:nvSpPr>
         <p:spPr>
           <a:xfrm>
-            <a:off x="6583680" y="3611880"/>
-            <a:ext cx="5056632" cy="2148840"/>
+            <a:off x="4892040" y="3291840"/>
+            <a:ext cx="2286000" cy="2468880"/>
           </a:xfrm>
           <a:prstGeom prst="rect">
             <a:avLst/>
@@ -11690,8 +12705,17 @@
                 <a:ea typeface="Consolas" pitchFamily="34" charset="-122"/>
                 <a:cs typeface="Consolas" pitchFamily="34" charset="-120"/>
               </a:rPr>
-              <a:t>Wilcoxon rank sum test with</a:t>
-            </a:r>
+              <a:t>Wilcoxon rank-sum</a:t>
+            </a:r>
+            <a:endParaRPr lang="en-US" sz="1050" dirty="0"/>
+          </a:p>
+          <a:p>
+            <a:pPr indent="0" marL="0">
+              <a:lnSpc>
+                <a:spcPct val="130000"/>
+              </a:lnSpc>
+              <a:buNone/>
+            </a:pPr>
             <a:endParaRPr lang="en-US" sz="1050" dirty="0"/>
           </a:p>
           <a:p>
@@ -11710,17 +12734,8 @@
                 <a:ea typeface="Consolas" pitchFamily="34" charset="-122"/>
                 <a:cs typeface="Consolas" pitchFamily="34" charset="-120"/>
               </a:rPr>
-              <a:t>continuity correction</a:t>
-            </a:r>
-            <a:endParaRPr lang="en-US" sz="1050" dirty="0"/>
-          </a:p>
-          <a:p>
-            <a:pPr indent="0" marL="0">
-              <a:lnSpc>
-                <a:spcPct val="130000"/>
-              </a:lnSpc>
-              <a:buNone/>
-            </a:pPr>
+              <a:t>W = 312</a:t>
+            </a:r>
             <a:endParaRPr lang="en-US" sz="1050" dirty="0"/>
           </a:p>
           <a:p>
@@ -11739,7 +12754,7 @@
                 <a:ea typeface="Consolas" pitchFamily="34" charset="-122"/>
                 <a:cs typeface="Consolas" pitchFamily="34" charset="-120"/>
               </a:rPr>
-              <a:t>W = 312, p-value = 0.018</a:t>
+              <a:t>p = 0.018</a:t>
             </a:r>
             <a:endParaRPr lang="en-US" sz="1050" dirty="0"/>
           </a:p>
@@ -11759,7 +12774,7 @@
                 <a:ea typeface="Consolas" pitchFamily="34" charset="-122"/>
                 <a:cs typeface="Consolas" pitchFamily="34" charset="-120"/>
               </a:rPr>
-              <a:t>95% CI [-2.5, -0.3]</a:t>
+              <a:t>95% CI</a:t>
             </a:r>
             <a:endParaRPr lang="en-US" sz="1050" dirty="0"/>
           </a:p>
@@ -11779,7 +12794,7 @@
                 <a:ea typeface="Consolas" pitchFamily="34" charset="-122"/>
                 <a:cs typeface="Consolas" pitchFamily="34" charset="-120"/>
               </a:rPr>
-              <a:t>(différence des médianes)</a:t>
+              <a:t>[-2.5, -0.3]</a:t>
             </a:r>
             <a:endParaRPr lang="en-US" sz="1050" dirty="0"/>
           </a:p>
@@ -11808,22 +12823,67 @@
                 <a:ea typeface="Consolas" pitchFamily="34" charset="-122"/>
                 <a:cs typeface="Consolas" pitchFamily="34" charset="-120"/>
               </a:rPr>
-              <a:t>Effect size r = 0.31 (medium)</a:t>
+              <a:t>Effect r = 0.31</a:t>
             </a:r>
             <a:endParaRPr lang="en-US" sz="1050" dirty="0"/>
           </a:p>
-        </p:txBody>
-      </p:sp>
-      <p:sp>
-        <p:nvSpPr>
-          <p:cNvPr id="14" name="Text 12"/>
-          <p:cNvSpPr/>
-          <p:nvPr/>
-        </p:nvSpPr>
-        <p:spPr>
-          <a:xfrm>
-            <a:off x="640080" y="5989320"/>
-            <a:ext cx="10972800" cy="365760"/>
+          <a:p>
+            <a:pPr indent="0" marL="0">
+              <a:lnSpc>
+                <a:spcPct val="130000"/>
+              </a:lnSpc>
+              <a:buNone/>
+            </a:pPr>
+            <a:r>
+              <a:rPr lang="en-US" sz="1050" dirty="0">
+                <a:solidFill>
+                  <a:srgbClr val="FFFFFF"/>
+                </a:solidFill>
+                <a:latin typeface="Consolas" pitchFamily="34" charset="0"/>
+                <a:ea typeface="Consolas" pitchFamily="34" charset="-122"/>
+                <a:cs typeface="Consolas" pitchFamily="34" charset="-120"/>
+              </a:rPr>
+              <a:t>(medium)</a:t>
+            </a:r>
+            <a:endParaRPr lang="en-US" sz="1050" dirty="0"/>
+          </a:p>
+        </p:txBody>
+      </p:sp>
+      <p:sp>
+        <p:nvSpPr>
+          <p:cNvPr id="14" name="Shape 12"/>
+          <p:cNvSpPr/>
+          <p:nvPr/>
+        </p:nvSpPr>
+        <p:spPr>
+          <a:xfrm>
+            <a:off x="7406640" y="2926080"/>
+            <a:ext cx="4325112" cy="2926080"/>
+          </a:xfrm>
+          <a:prstGeom prst="rect">
+            <a:avLst/>
+          </a:prstGeom>
+          <a:solidFill>
+            <a:srgbClr val="FFFFFF"/>
+          </a:solidFill>
+          <a:ln w="6350">
+            <a:solidFill>
+              <a:srgbClr val="D6CFB8"/>
+            </a:solidFill>
+            <a:prstDash val="solid"/>
+          </a:ln>
+        </p:spPr>
+      </p:sp>
+      <p:sp>
+        <p:nvSpPr>
+          <p:cNvPr id="15" name="Text 13"/>
+          <p:cNvSpPr/>
+          <p:nvPr/>
+        </p:nvSpPr>
+        <p:spPr>
+          <a:xfrm>
+            <a:off x="7498080" y="2962656"/>
+            <a:ext cx="4142232" cy="228600"/>
           </a:xfrm>
           <a:prstGeom prst="rect">
             <a:avLst/>
@@ -11839,15 +12899,536 @@
               <a:buNone/>
             </a:pPr>
             <a:r>
-              <a:rPr lang="en-US" sz="1100" i="1" dirty="0">
-                <a:solidFill>
-                  <a:srgbClr val="6B7280"/>
+              <a:rPr lang="en-US" sz="900" b="1" dirty="0">
+                <a:solidFill>
+                  <a:srgbClr val="15233F"/>
                 </a:solidFill>
                 <a:latin typeface="Calibri" pitchFamily="34" charset="0"/>
                 <a:ea typeface="Calibri" pitchFamily="34" charset="-122"/>
                 <a:cs typeface="Calibri" pitchFamily="34" charset="-120"/>
               </a:rPr>
-              <a:t>En soutenance : « Vous avez utilisé Mann-Whitney parce que… ? » Réponse : « Shapiro p = 0.003, QQ-plot écart aux extrêmes — donc test non paramétrique. »</a:t>
+              <a:t>Score · médianes comparées (données asymétriques)</a:t>
+            </a:r>
+            <a:endParaRPr lang="en-US" sz="900" dirty="0"/>
+          </a:p>
+        </p:txBody>
+      </p:sp>
+      <p:sp>
+        <p:nvSpPr>
+          <p:cNvPr id="16" name="Shape 14"/>
+          <p:cNvSpPr/>
+          <p:nvPr/>
+        </p:nvSpPr>
+        <p:spPr>
+          <a:xfrm>
+            <a:off x="7818120" y="5486400"/>
+            <a:ext cx="3776472" cy="0"/>
+          </a:xfrm>
+          <a:prstGeom prst="line">
+            <a:avLst/>
+          </a:prstGeom>
+          <a:noFill/>
+          <a:ln w="9525">
+            <a:solidFill>
+              <a:srgbClr val="0E1729"/>
+            </a:solidFill>
+            <a:prstDash val="solid"/>
+          </a:ln>
+        </p:spPr>
+      </p:sp>
+      <p:sp>
+        <p:nvSpPr>
+          <p:cNvPr id="17" name="Shape 15"/>
+          <p:cNvSpPr/>
+          <p:nvPr/>
+        </p:nvSpPr>
+        <p:spPr>
+          <a:xfrm>
+            <a:off x="7818120" y="3246120"/>
+            <a:ext cx="0" cy="2240280"/>
+          </a:xfrm>
+          <a:prstGeom prst="line">
+            <a:avLst/>
+          </a:prstGeom>
+          <a:noFill/>
+          <a:ln w="9525">
+            <a:solidFill>
+              <a:srgbClr val="0E1729"/>
+            </a:solidFill>
+            <a:prstDash val="solid"/>
+          </a:ln>
+        </p:spPr>
+      </p:sp>
+      <p:sp>
+        <p:nvSpPr>
+          <p:cNvPr id="18" name="Text 16"/>
+          <p:cNvSpPr/>
+          <p:nvPr/>
+        </p:nvSpPr>
+        <p:spPr>
+          <a:xfrm>
+            <a:off x="7818120" y="5577840"/>
+            <a:ext cx="3776472" cy="201168"/>
+          </a:xfrm>
+          <a:prstGeom prst="rect">
+            <a:avLst/>
+          </a:prstGeom>
+          <a:noFill/>
+          <a:ln/>
+        </p:spPr>
+        <p:txBody>
+          <a:bodyPr wrap="square" rtlCol="0" anchor="ctr"/>
+          <a:lstStyle/>
+          <a:p>
+            <a:pPr algn="ctr" indent="0" marL="0">
+              <a:buNone/>
+            </a:pPr>
+            <a:r>
+              <a:rPr lang="en-US" sz="800" i="1" dirty="0">
+                <a:solidFill>
+                  <a:srgbClr val="6B7280"/>
+                </a:solidFill>
+                <a:latin typeface="Calibri" pitchFamily="34" charset="0"/>
+                <a:ea typeface="Calibri" pitchFamily="34" charset="-122"/>
+                <a:cs typeface="Calibri" pitchFamily="34" charset="-120"/>
+              </a:rPr>
+              <a:t>Groupes</a:t>
+            </a:r>
+            <a:endParaRPr lang="en-US" sz="800" dirty="0"/>
+          </a:p>
+        </p:txBody>
+      </p:sp>
+      <p:sp>
+        <p:nvSpPr>
+          <p:cNvPr id="19" name="Text 17"/>
+          <p:cNvSpPr/>
+          <p:nvPr/>
+        </p:nvSpPr>
+        <p:spPr>
+          <a:xfrm rot="-5400000">
+            <a:off x="7424928" y="3246120"/>
+            <a:ext cx="365760" cy="2240280"/>
+          </a:xfrm>
+          <a:prstGeom prst="rect">
+            <a:avLst/>
+          </a:prstGeom>
+          <a:noFill/>
+          <a:ln/>
+        </p:spPr>
+        <p:txBody>
+          <a:bodyPr wrap="square" rtlCol="0" anchor="ctr"/>
+          <a:lstStyle/>
+          <a:p>
+            <a:pPr algn="l" indent="0" marL="0">
+              <a:buNone/>
+            </a:pPr>
+            <a:r>
+              <a:rPr lang="en-US" sz="800" i="1" dirty="0">
+                <a:solidFill>
+                  <a:srgbClr val="6B7280"/>
+                </a:solidFill>
+                <a:latin typeface="Calibri" pitchFamily="34" charset="0"/>
+                <a:ea typeface="Calibri" pitchFamily="34" charset="-122"/>
+                <a:cs typeface="Calibri" pitchFamily="34" charset="-120"/>
+              </a:rPr>
+              <a:t>Valeur</a:t>
+            </a:r>
+            <a:endParaRPr lang="en-US" sz="800" dirty="0"/>
+          </a:p>
+        </p:txBody>
+      </p:sp>
+      <p:sp>
+        <p:nvSpPr>
+          <p:cNvPr id="20" name="Shape 18"/>
+          <p:cNvSpPr/>
+          <p:nvPr/>
+        </p:nvSpPr>
+        <p:spPr>
+          <a:xfrm>
+            <a:off x="8762238" y="5486400"/>
+            <a:ext cx="0" cy="-179222"/>
+          </a:xfrm>
+          <a:prstGeom prst="line">
+            <a:avLst/>
+          </a:prstGeom>
+          <a:noFill/>
+          <a:ln w="9525">
+            <a:solidFill>
+              <a:srgbClr val="6B7280"/>
+            </a:solidFill>
+            <a:prstDash val="solid"/>
+          </a:ln>
+        </p:spPr>
+      </p:sp>
+      <p:sp>
+        <p:nvSpPr>
+          <p:cNvPr id="21" name="Shape 19"/>
+          <p:cNvSpPr/>
+          <p:nvPr/>
+        </p:nvSpPr>
+        <p:spPr>
+          <a:xfrm>
+            <a:off x="8526209" y="5486400"/>
+            <a:ext cx="472059" cy="0"/>
+          </a:xfrm>
+          <a:prstGeom prst="line">
+            <a:avLst/>
+          </a:prstGeom>
+          <a:noFill/>
+          <a:ln w="9525">
+            <a:solidFill>
+              <a:srgbClr val="6B7280"/>
+            </a:solidFill>
+            <a:prstDash val="solid"/>
+          </a:ln>
+        </p:spPr>
+      </p:sp>
+      <p:sp>
+        <p:nvSpPr>
+          <p:cNvPr id="22" name="Shape 20"/>
+          <p:cNvSpPr/>
+          <p:nvPr/>
+        </p:nvSpPr>
+        <p:spPr>
+          <a:xfrm>
+            <a:off x="8762238" y="4702302"/>
+            <a:ext cx="0" cy="-1008126"/>
+          </a:xfrm>
+          <a:prstGeom prst="line">
+            <a:avLst/>
+          </a:prstGeom>
+          <a:noFill/>
+          <a:ln w="9525">
+            <a:solidFill>
+              <a:srgbClr val="6B7280"/>
+            </a:solidFill>
+            <a:prstDash val="solid"/>
+          </a:ln>
+        </p:spPr>
+      </p:sp>
+      <p:sp>
+        <p:nvSpPr>
+          <p:cNvPr id="23" name="Shape 21"/>
+          <p:cNvSpPr/>
+          <p:nvPr/>
+        </p:nvSpPr>
+        <p:spPr>
+          <a:xfrm>
+            <a:off x="8526209" y="3694176"/>
+            <a:ext cx="472059" cy="0"/>
+          </a:xfrm>
+          <a:prstGeom prst="line">
+            <a:avLst/>
+          </a:prstGeom>
+          <a:noFill/>
+          <a:ln w="9525">
+            <a:solidFill>
+              <a:srgbClr val="6B7280"/>
+            </a:solidFill>
+            <a:prstDash val="solid"/>
+          </a:ln>
+        </p:spPr>
+      </p:sp>
+      <p:sp>
+        <p:nvSpPr>
+          <p:cNvPr id="24" name="Shape 22"/>
+          <p:cNvSpPr/>
+          <p:nvPr/>
+        </p:nvSpPr>
+        <p:spPr>
+          <a:xfrm>
+            <a:off x="8290179" y="4702302"/>
+            <a:ext cx="944118" cy="604876"/>
+          </a:xfrm>
+          <a:prstGeom prst="rect">
+            <a:avLst/>
+          </a:prstGeom>
+          <a:solidFill>
+            <a:srgbClr val="FFFFFF"/>
+          </a:solidFill>
+          <a:ln w="12700">
+            <a:solidFill>
+              <a:srgbClr val="0E1729"/>
+            </a:solidFill>
+            <a:prstDash val="solid"/>
+          </a:ln>
+        </p:spPr>
+      </p:sp>
+      <p:sp>
+        <p:nvSpPr>
+          <p:cNvPr id="25" name="Shape 23"/>
+          <p:cNvSpPr/>
+          <p:nvPr/>
+        </p:nvSpPr>
+        <p:spPr>
+          <a:xfrm>
+            <a:off x="8290179" y="5150358"/>
+            <a:ext cx="944118" cy="0"/>
+          </a:xfrm>
+          <a:prstGeom prst="line">
+            <a:avLst/>
+          </a:prstGeom>
+          <a:noFill/>
+          <a:ln w="19050">
+            <a:solidFill>
+              <a:srgbClr val="0E1729"/>
+            </a:solidFill>
+            <a:prstDash val="solid"/>
+          </a:ln>
+        </p:spPr>
+      </p:sp>
+      <p:sp>
+        <p:nvSpPr>
+          <p:cNvPr id="26" name="Text 24"/>
+          <p:cNvSpPr/>
+          <p:nvPr/>
+        </p:nvSpPr>
+        <p:spPr>
+          <a:xfrm>
+            <a:off x="7818120" y="5532120"/>
+            <a:ext cx="1888236" cy="182880"/>
+          </a:xfrm>
+          <a:prstGeom prst="rect">
+            <a:avLst/>
+          </a:prstGeom>
+          <a:noFill/>
+          <a:ln/>
+        </p:spPr>
+        <p:txBody>
+          <a:bodyPr wrap="square" rtlCol="0" anchor="ctr"/>
+          <a:lstStyle/>
+          <a:p>
+            <a:pPr algn="ctr" indent="0" marL="0">
+              <a:buNone/>
+            </a:pPr>
+            <a:r>
+              <a:rPr lang="en-US" sz="800" b="1" dirty="0">
+                <a:solidFill>
+                  <a:srgbClr val="15233F"/>
+                </a:solidFill>
+                <a:latin typeface="Calibri" pitchFamily="34" charset="0"/>
+                <a:ea typeface="Calibri" pitchFamily="34" charset="-122"/>
+                <a:cs typeface="Calibri" pitchFamily="34" charset="-120"/>
+              </a:rPr>
+              <a:t>A</a:t>
+            </a:r>
+            <a:endParaRPr lang="en-US" sz="800" dirty="0"/>
+          </a:p>
+        </p:txBody>
+      </p:sp>
+      <p:sp>
+        <p:nvSpPr>
+          <p:cNvPr id="27" name="Shape 25"/>
+          <p:cNvSpPr/>
+          <p:nvPr/>
+        </p:nvSpPr>
+        <p:spPr>
+          <a:xfrm>
+            <a:off x="10650474" y="5374386"/>
+            <a:ext cx="0" cy="-291236"/>
+          </a:xfrm>
+          <a:prstGeom prst="line">
+            <a:avLst/>
+          </a:prstGeom>
+          <a:noFill/>
+          <a:ln w="9525">
+            <a:solidFill>
+              <a:srgbClr val="6B7280"/>
+            </a:solidFill>
+            <a:prstDash val="solid"/>
+          </a:ln>
+        </p:spPr>
+      </p:sp>
+      <p:sp>
+        <p:nvSpPr>
+          <p:cNvPr id="28" name="Shape 26"/>
+          <p:cNvSpPr/>
+          <p:nvPr/>
+        </p:nvSpPr>
+        <p:spPr>
+          <a:xfrm>
+            <a:off x="10414445" y="5374386"/>
+            <a:ext cx="472059" cy="0"/>
+          </a:xfrm>
+          <a:prstGeom prst="line">
+            <a:avLst/>
+          </a:prstGeom>
+          <a:noFill/>
+          <a:ln w="9525">
+            <a:solidFill>
+              <a:srgbClr val="6B7280"/>
+            </a:solidFill>
+            <a:prstDash val="solid"/>
+          </a:ln>
+        </p:spPr>
+      </p:sp>
+      <p:sp>
+        <p:nvSpPr>
+          <p:cNvPr id="29" name="Shape 27"/>
+          <p:cNvSpPr/>
+          <p:nvPr/>
+        </p:nvSpPr>
+        <p:spPr>
+          <a:xfrm>
+            <a:off x="10650474" y="4254246"/>
+            <a:ext cx="0" cy="-1008126"/>
+          </a:xfrm>
+          <a:prstGeom prst="line">
+            <a:avLst/>
+          </a:prstGeom>
+          <a:noFill/>
+          <a:ln w="9525">
+            <a:solidFill>
+              <a:srgbClr val="6B7280"/>
+            </a:solidFill>
+            <a:prstDash val="solid"/>
+          </a:ln>
+        </p:spPr>
+      </p:sp>
+      <p:sp>
+        <p:nvSpPr>
+          <p:cNvPr id="30" name="Shape 28"/>
+          <p:cNvSpPr/>
+          <p:nvPr/>
+        </p:nvSpPr>
+        <p:spPr>
+          <a:xfrm>
+            <a:off x="10414445" y="3246120"/>
+            <a:ext cx="472059" cy="0"/>
+          </a:xfrm>
+          <a:prstGeom prst="line">
+            <a:avLst/>
+          </a:prstGeom>
+          <a:noFill/>
+          <a:ln w="9525">
+            <a:solidFill>
+              <a:srgbClr val="6B7280"/>
+            </a:solidFill>
+            <a:prstDash val="solid"/>
+          </a:ln>
+        </p:spPr>
+      </p:sp>
+      <p:sp>
+        <p:nvSpPr>
+          <p:cNvPr id="31" name="Shape 29"/>
+          <p:cNvSpPr/>
+          <p:nvPr/>
+        </p:nvSpPr>
+        <p:spPr>
+          <a:xfrm>
+            <a:off x="10178415" y="4254246"/>
+            <a:ext cx="944118" cy="828904"/>
+          </a:xfrm>
+          <a:prstGeom prst="rect">
+            <a:avLst/>
+          </a:prstGeom>
+          <a:solidFill>
+            <a:srgbClr val="F09042"/>
+          </a:solidFill>
+          <a:ln w="12700">
+            <a:solidFill>
+              <a:srgbClr val="F09042"/>
+            </a:solidFill>
+            <a:prstDash val="solid"/>
+          </a:ln>
+        </p:spPr>
+      </p:sp>
+      <p:sp>
+        <p:nvSpPr>
+          <p:cNvPr id="32" name="Shape 30"/>
+          <p:cNvSpPr/>
+          <p:nvPr/>
+        </p:nvSpPr>
+        <p:spPr>
+          <a:xfrm>
+            <a:off x="10178415" y="4814316"/>
+            <a:ext cx="944118" cy="0"/>
+          </a:xfrm>
+          <a:prstGeom prst="line">
+            <a:avLst/>
+          </a:prstGeom>
+          <a:noFill/>
+          <a:ln w="19050">
+            <a:solidFill>
+              <a:srgbClr val="F09042"/>
+            </a:solidFill>
+            <a:prstDash val="solid"/>
+          </a:ln>
+        </p:spPr>
+      </p:sp>
+      <p:sp>
+        <p:nvSpPr>
+          <p:cNvPr id="33" name="Text 31"/>
+          <p:cNvSpPr/>
+          <p:nvPr/>
+        </p:nvSpPr>
+        <p:spPr>
+          <a:xfrm>
+            <a:off x="9706356" y="5532120"/>
+            <a:ext cx="1888236" cy="182880"/>
+          </a:xfrm>
+          <a:prstGeom prst="rect">
+            <a:avLst/>
+          </a:prstGeom>
+          <a:noFill/>
+          <a:ln/>
+        </p:spPr>
+        <p:txBody>
+          <a:bodyPr wrap="square" rtlCol="0" anchor="ctr"/>
+          <a:lstStyle/>
+          <a:p>
+            <a:pPr algn="ctr" indent="0" marL="0">
+              <a:buNone/>
+            </a:pPr>
+            <a:r>
+              <a:rPr lang="en-US" sz="800" b="1" dirty="0">
+                <a:solidFill>
+                  <a:srgbClr val="15233F"/>
+                </a:solidFill>
+                <a:latin typeface="Calibri" pitchFamily="34" charset="0"/>
+                <a:ea typeface="Calibri" pitchFamily="34" charset="-122"/>
+                <a:cs typeface="Calibri" pitchFamily="34" charset="-120"/>
+              </a:rPr>
+              <a:t>B</a:t>
+            </a:r>
+            <a:endParaRPr lang="en-US" sz="800" dirty="0"/>
+          </a:p>
+        </p:txBody>
+      </p:sp>
+      <p:sp>
+        <p:nvSpPr>
+          <p:cNvPr id="34" name="Text 32"/>
+          <p:cNvSpPr/>
+          <p:nvPr/>
+        </p:nvSpPr>
+        <p:spPr>
+          <a:xfrm>
+            <a:off x="640080" y="5989320"/>
+            <a:ext cx="10972800" cy="365760"/>
+          </a:xfrm>
+          <a:prstGeom prst="rect">
+            <a:avLst/>
+          </a:prstGeom>
+          <a:noFill/>
+          <a:ln/>
+        </p:spPr>
+        <p:txBody>
+          <a:bodyPr wrap="square" rtlCol="0" anchor="ctr"/>
+          <a:lstStyle/>
+          <a:p>
+            <a:pPr algn="ctr" indent="0" marL="0">
+              <a:buNone/>
+            </a:pPr>
+            <a:r>
+              <a:rPr lang="en-US" sz="1100" i="1" dirty="0">
+                <a:solidFill>
+                  <a:srgbClr val="6B7280"/>
+                </a:solidFill>
+                <a:latin typeface="Calibri" pitchFamily="34" charset="0"/>
+                <a:ea typeface="Calibri" pitchFamily="34" charset="-122"/>
+                <a:cs typeface="Calibri" pitchFamily="34" charset="-120"/>
+              </a:rPr>
+              <a:t>« Vous avez utilisé Mann-Whitney parce que… ? » Réponse : « Shapiro p = 0.003, QQ-plot écart aux extrêmes — donc test non paramétrique. »</a:t>
             </a:r>
             <a:endParaRPr lang="en-US" sz="1100" dirty="0"/>
           </a:p>
@@ -12030,7 +13611,7 @@
               <a:buNone/>
             </a:pPr>
             <a:r>
-              <a:rPr lang="en-US" sz="2600" b="1" spc="-100" kern="0" dirty="0">
+              <a:rPr lang="en-US" sz="2800" b="1" spc="-100" kern="0" dirty="0">
                 <a:solidFill>
                   <a:srgbClr val="15233F"/>
                 </a:solidFill>
@@ -12040,7 +13621,7 @@
               </a:rPr>
               <a:t>Avant / après, droite / gauche, deux observateurs.</a:t>
             </a:r>
-            <a:endParaRPr lang="en-US" sz="2600" dirty="0"/>
+            <a:endParaRPr lang="en-US" sz="2800" dirty="0"/>
           </a:p>
         </p:txBody>
       </p:sp>
@@ -12052,8 +13633,8 @@
         </p:nvSpPr>
         <p:spPr>
           <a:xfrm>
-            <a:off x="640080" y="1874520"/>
-            <a:ext cx="10972800" cy="1371600"/>
+            <a:off x="640080" y="1828800"/>
+            <a:ext cx="10972800" cy="1280160"/>
           </a:xfrm>
           <a:prstGeom prst="rect">
             <a:avLst/>
@@ -12080,7 +13661,7 @@
                 <a:ea typeface="Calibri" pitchFamily="34" charset="-122"/>
                 <a:cs typeface="Calibri" pitchFamily="34" charset="-120"/>
               </a:rPr>
-              <a:t>L'erreur N°1 sur les données appariées : appliquer un t-test indépendant. Tu détruis l'information de pairage et tu perds en puissance. Le jury va te le rappeler. Le bon test dépend de la normalité — des DIFFÉRENCES, pas des valeurs brutes.</a:t>
+              <a:t>L'erreur N°1 sur les données appariées : appliquer un t-test indépendant. Tu détruis l'information de pairage et tu perds en puissance. Le bon test dépend de la normalité — des DIFFÉRENCES, pas des valeurs brutes.</a:t>
             </a:r>
             <a:endParaRPr lang="en-US" sz="1300" dirty="0"/>
           </a:p>
@@ -12094,12 +13675,12 @@
         </p:nvSpPr>
         <p:spPr>
           <a:xfrm>
-            <a:off x="640080" y="3383280"/>
-            <a:ext cx="5486400" cy="2468880"/>
+            <a:off x="640080" y="3291840"/>
+            <a:ext cx="5486400" cy="2560320"/>
           </a:xfrm>
           <a:prstGeom prst="roundRect">
             <a:avLst>
-              <a:gd name="adj" fmla="val 1852"/>
+              <a:gd name="adj" fmla="val 1786"/>
             </a:avLst>
           </a:prstGeom>
           <a:solidFill>
@@ -12121,7 +13702,7 @@
         </p:nvSpPr>
         <p:spPr>
           <a:xfrm>
-            <a:off x="777240" y="3493008"/>
+            <a:off x="777240" y="3401568"/>
             <a:ext cx="365760" cy="256032"/>
           </a:xfrm>
           <a:prstGeom prst="roundRect">
@@ -12143,7 +13724,7 @@
         </p:nvSpPr>
         <p:spPr>
           <a:xfrm>
-            <a:off x="777240" y="3493008"/>
+            <a:off x="777240" y="3401568"/>
             <a:ext cx="365760" cy="256032"/>
           </a:xfrm>
           <a:prstGeom prst="rect">
@@ -12182,8 +13763,8 @@
         </p:nvSpPr>
         <p:spPr>
           <a:xfrm>
-            <a:off x="822960" y="3840480"/>
-            <a:ext cx="5212080" cy="1920240"/>
+            <a:off x="822960" y="3749040"/>
+            <a:ext cx="5212080" cy="2011680"/>
           </a:xfrm>
           <a:prstGeom prst="rect">
             <a:avLst/>
@@ -12373,12 +13954,12 @@
         </p:nvSpPr>
         <p:spPr>
           <a:xfrm>
-            <a:off x="6400800" y="3383280"/>
-            <a:ext cx="5330952" cy="2468880"/>
+            <a:off x="6400800" y="3291840"/>
+            <a:ext cx="5330952" cy="2560320"/>
           </a:xfrm>
           <a:prstGeom prst="roundRect">
             <a:avLst>
-              <a:gd name="adj" fmla="val 1852"/>
+              <a:gd name="adj" fmla="val 1786"/>
             </a:avLst>
           </a:prstGeom>
           <a:solidFill>
@@ -12400,7 +13981,7 @@
         </p:nvSpPr>
         <p:spPr>
           <a:xfrm>
-            <a:off x="6537960" y="3493008"/>
+            <a:off x="6537960" y="3401568"/>
             <a:ext cx="365760" cy="256032"/>
           </a:xfrm>
           <a:prstGeom prst="roundRect">
@@ -12422,7 +14003,7 @@
         </p:nvSpPr>
         <p:spPr>
           <a:xfrm>
-            <a:off x="6537960" y="3493008"/>
+            <a:off x="6537960" y="3401568"/>
             <a:ext cx="365760" cy="256032"/>
           </a:xfrm>
           <a:prstGeom prst="rect">
@@ -12461,8 +14042,8 @@
         </p:nvSpPr>
         <p:spPr>
           <a:xfrm>
-            <a:off x="6583680" y="3840480"/>
-            <a:ext cx="5056632" cy="1920240"/>
+            <a:off x="6583680" y="3749040"/>
+            <a:ext cx="5056632" cy="2011680"/>
           </a:xfrm>
           <a:prstGeom prst="rect">
             <a:avLst/>
@@ -13435,7 +15016,7 @@
                 <a:ea typeface="Consolas" pitchFamily="34" charset="-122"/>
                 <a:cs typeface="Consolas" pitchFamily="34" charset="-120"/>
               </a:rPr>
-              <a:t>B-A  diff +1.2</a:t>
+              <a:t>B-A  +1.2</a:t>
             </a:r>
             <a:endParaRPr lang="en-US" sz="1050" dirty="0"/>
           </a:p>
@@ -13455,7 +15036,7 @@
                 <a:ea typeface="Consolas" pitchFamily="34" charset="-122"/>
                 <a:cs typeface="Consolas" pitchFamily="34" charset="-120"/>
               </a:rPr>
-              <a:t>     p = 0.012</a:t>
+              <a:t>  p = 0.012</a:t>
             </a:r>
             <a:endParaRPr lang="en-US" sz="1050" dirty="0"/>
           </a:p>
@@ -13475,7 +15056,7 @@
                 <a:ea typeface="Consolas" pitchFamily="34" charset="-122"/>
                 <a:cs typeface="Consolas" pitchFamily="34" charset="-120"/>
               </a:rPr>
-              <a:t>C-A  diff +2.4</a:t>
+              <a:t>C-A  +2.4</a:t>
             </a:r>
             <a:endParaRPr lang="en-US" sz="1050" dirty="0"/>
           </a:p>
@@ -13495,7 +15076,7 @@
                 <a:ea typeface="Consolas" pitchFamily="34" charset="-122"/>
                 <a:cs typeface="Consolas" pitchFamily="34" charset="-120"/>
               </a:rPr>
-              <a:t>     p &lt; 0.001</a:t>
+              <a:t>  p &lt; 0.001</a:t>
             </a:r>
             <a:endParaRPr lang="en-US" sz="1050" dirty="0"/>
           </a:p>
@@ -13515,7 +15096,7 @@
                 <a:ea typeface="Consolas" pitchFamily="34" charset="-122"/>
                 <a:cs typeface="Consolas" pitchFamily="34" charset="-120"/>
               </a:rPr>
-              <a:t>C-B  diff +1.2</a:t>
+              <a:t>C-B  +1.2</a:t>
             </a:r>
             <a:endParaRPr lang="en-US" sz="1050" dirty="0"/>
           </a:p>
@@ -13535,7 +15116,7 @@
                 <a:ea typeface="Consolas" pitchFamily="34" charset="-122"/>
                 <a:cs typeface="Consolas" pitchFamily="34" charset="-120"/>
               </a:rPr>
-              <a:t>     p = 0.014</a:t>
+              <a:t>  p = 0.014</a:t>
             </a:r>
             <a:endParaRPr lang="en-US" sz="1050" dirty="0"/>
           </a:p>
@@ -14505,7 +16086,7 @@
         <p:spPr>
           <a:xfrm>
             <a:off x="640080" y="1828800"/>
-            <a:ext cx="10972800" cy="1280160"/>
+            <a:ext cx="10972800" cy="914400"/>
           </a:xfrm>
           <a:prstGeom prst="rect">
             <a:avLst/>
@@ -14532,7 +16113,7 @@
                 <a:ea typeface="Calibri" pitchFamily="34" charset="-122"/>
                 <a:cs typeface="Calibri" pitchFamily="34" charset="-120"/>
               </a:rPr>
-              <a:t>Même logique que ANOVA, sans hypothèse de normalité. Si Kruskal-Wallis rejette H₀, le post-hoc Dunn dit entre quels groupes la différence se trouve, avec ajustement pour les comparaisons multiples.</a:t>
+              <a:t>Même logique que ANOVA, sans hypothèse de normalité. Si Kruskal-Wallis rejette H₀, le post-hoc Dunn dit entre quels groupes, avec ajustement pour les comparaisons multiples.</a:t>
             </a:r>
             <a:endParaRPr lang="en-US" sz="1300" dirty="0"/>
           </a:p>
@@ -14546,12 +16127,12 @@
         </p:nvSpPr>
         <p:spPr>
           <a:xfrm>
-            <a:off x="640080" y="3246120"/>
-            <a:ext cx="5486400" cy="2606040"/>
+            <a:off x="640080" y="2926080"/>
+            <a:ext cx="3931920" cy="2926080"/>
           </a:xfrm>
           <a:prstGeom prst="roundRect">
             <a:avLst>
-              <a:gd name="adj" fmla="val 1754"/>
+              <a:gd name="adj" fmla="val 1563"/>
             </a:avLst>
           </a:prstGeom>
           <a:solidFill>
@@ -14573,7 +16154,7 @@
         </p:nvSpPr>
         <p:spPr>
           <a:xfrm>
-            <a:off x="777240" y="3355848"/>
+            <a:off x="777240" y="3035808"/>
             <a:ext cx="365760" cy="256032"/>
           </a:xfrm>
           <a:prstGeom prst="roundRect">
@@ -14595,7 +16176,7 @@
         </p:nvSpPr>
         <p:spPr>
           <a:xfrm>
-            <a:off x="777240" y="3355848"/>
+            <a:off x="777240" y="3035808"/>
             <a:ext cx="365760" cy="256032"/>
           </a:xfrm>
           <a:prstGeom prst="rect">
@@ -14634,8 +16215,8 @@
         </p:nvSpPr>
         <p:spPr>
           <a:xfrm>
-            <a:off x="822960" y="3703320"/>
-            <a:ext cx="5212080" cy="2057400"/>
+            <a:off x="822960" y="3383280"/>
+            <a:ext cx="3657600" cy="2377440"/>
           </a:xfrm>
           <a:prstGeom prst="rect">
             <a:avLst/>
@@ -14731,7 +16312,7 @@
                 <a:ea typeface="Consolas" pitchFamily="34" charset="-122"/>
                 <a:cs typeface="Consolas" pitchFamily="34" charset="-120"/>
               </a:rPr>
-              <a:t># Post-hoc Dunn (avec ajust.)</a:t>
+              <a:t># Post-hoc Dunn</a:t>
             </a:r>
             <a:endParaRPr lang="en-US" sz="1050" dirty="0"/>
           </a:p>
@@ -14825,12 +16406,12 @@
         </p:nvSpPr>
         <p:spPr>
           <a:xfrm>
-            <a:off x="6400800" y="3246120"/>
-            <a:ext cx="5330952" cy="2606040"/>
+            <a:off x="4709160" y="2926080"/>
+            <a:ext cx="2560320" cy="2926080"/>
           </a:xfrm>
           <a:prstGeom prst="roundRect">
             <a:avLst>
-              <a:gd name="adj" fmla="val 1754"/>
+              <a:gd name="adj" fmla="val 1786"/>
             </a:avLst>
           </a:prstGeom>
           <a:solidFill>
@@ -14852,7 +16433,7 @@
         </p:nvSpPr>
         <p:spPr>
           <a:xfrm>
-            <a:off x="6537960" y="3337560"/>
+            <a:off x="4846320" y="3017520"/>
             <a:ext cx="914400" cy="228600"/>
           </a:xfrm>
           <a:prstGeom prst="rect">
@@ -14891,8 +16472,8 @@
         </p:nvSpPr>
         <p:spPr>
           <a:xfrm>
-            <a:off x="6583680" y="3611880"/>
-            <a:ext cx="5056632" cy="2148840"/>
+            <a:off x="4892040" y="3291840"/>
+            <a:ext cx="2286000" cy="2468880"/>
           </a:xfrm>
           <a:prstGeom prst="rect">
             <a:avLst/>
@@ -14919,7 +16500,7 @@
                 <a:ea typeface="Consolas" pitchFamily="34" charset="-122"/>
                 <a:cs typeface="Consolas" pitchFamily="34" charset="-120"/>
               </a:rPr>
-              <a:t>Kruskal-Wallis rank sum test</a:t>
+              <a:t>Kruskal-Wallis</a:t>
             </a:r>
             <a:endParaRPr lang="en-US" sz="1050" dirty="0"/>
           </a:p>
@@ -14948,7 +16529,7 @@
                 <a:ea typeface="Consolas" pitchFamily="34" charset="-122"/>
                 <a:cs typeface="Consolas" pitchFamily="34" charset="-120"/>
               </a:rPr>
-              <a:t>Kruskal-Wallis chi² = 14.2</a:t>
+              <a:t>chi² = 14.2</a:t>
             </a:r>
             <a:endParaRPr lang="en-US" sz="1050" dirty="0"/>
           </a:p>
@@ -14968,17 +16549,8 @@
                 <a:ea typeface="Consolas" pitchFamily="34" charset="-122"/>
                 <a:cs typeface="Consolas" pitchFamily="34" charset="-120"/>
               </a:rPr>
-              <a:t>df = 2, p-value = 0.0008</a:t>
-            </a:r>
-            <a:endParaRPr lang="en-US" sz="1050" dirty="0"/>
-          </a:p>
-          <a:p>
-            <a:pPr indent="0" marL="0">
-              <a:lnSpc>
-                <a:spcPct val="130000"/>
-              </a:lnSpc>
-              <a:buNone/>
-            </a:pPr>
+              <a:t>df = 2</a:t>
+            </a:r>
             <a:endParaRPr lang="en-US" sz="1050" dirty="0"/>
           </a:p>
           <a:p>
@@ -14997,8 +16569,17 @@
                 <a:ea typeface="Consolas" pitchFamily="34" charset="-122"/>
                 <a:cs typeface="Consolas" pitchFamily="34" charset="-120"/>
               </a:rPr>
-              <a:t>Dunn (Benjamini-Hochberg)</a:t>
-            </a:r>
+              <a:t>p = 0.0008</a:t>
+            </a:r>
+            <a:endParaRPr lang="en-US" sz="1050" dirty="0"/>
+          </a:p>
+          <a:p>
+            <a:pPr indent="0" marL="0">
+              <a:lnSpc>
+                <a:spcPct val="130000"/>
+              </a:lnSpc>
+              <a:buNone/>
+            </a:pPr>
             <a:endParaRPr lang="en-US" sz="1050" dirty="0"/>
           </a:p>
           <a:p>
@@ -15017,7 +16598,7 @@
                 <a:ea typeface="Consolas" pitchFamily="34" charset="-122"/>
                 <a:cs typeface="Consolas" pitchFamily="34" charset="-120"/>
               </a:rPr>
-              <a:t>A-B : Z = 2.1, p_adj = 0.034</a:t>
+              <a:t>Dunn (BH adjusted)</a:t>
             </a:r>
             <a:endParaRPr lang="en-US" sz="1050" dirty="0"/>
           </a:p>
@@ -15037,7 +16618,7 @@
                 <a:ea typeface="Consolas" pitchFamily="34" charset="-122"/>
                 <a:cs typeface="Consolas" pitchFamily="34" charset="-120"/>
               </a:rPr>
-              <a:t>A-C : Z = 3.6, p_adj = 0.0009</a:t>
+              <a:t>A-B  p = 0.034</a:t>
             </a:r>
             <a:endParaRPr lang="en-US" sz="1050" dirty="0"/>
           </a:p>
@@ -15057,22 +16638,67 @@
                 <a:ea typeface="Consolas" pitchFamily="34" charset="-122"/>
                 <a:cs typeface="Consolas" pitchFamily="34" charset="-120"/>
               </a:rPr>
-              <a:t>B-C : Z = 1.8, p_adj = 0.052</a:t>
+              <a:t>A-C  p = 0.0009</a:t>
             </a:r>
             <a:endParaRPr lang="en-US" sz="1050" dirty="0"/>
           </a:p>
-        </p:txBody>
-      </p:sp>
-      <p:sp>
-        <p:nvSpPr>
-          <p:cNvPr id="14" name="Text 12"/>
-          <p:cNvSpPr/>
-          <p:nvPr/>
-        </p:nvSpPr>
-        <p:spPr>
-          <a:xfrm>
-            <a:off x="640080" y="5989320"/>
-            <a:ext cx="10972800" cy="365760"/>
+          <a:p>
+            <a:pPr indent="0" marL="0">
+              <a:lnSpc>
+                <a:spcPct val="130000"/>
+              </a:lnSpc>
+              <a:buNone/>
+            </a:pPr>
+            <a:r>
+              <a:rPr lang="en-US" sz="1050" dirty="0">
+                <a:solidFill>
+                  <a:srgbClr val="FFFFFF"/>
+                </a:solidFill>
+                <a:latin typeface="Consolas" pitchFamily="34" charset="0"/>
+                <a:ea typeface="Consolas" pitchFamily="34" charset="-122"/>
+                <a:cs typeface="Consolas" pitchFamily="34" charset="-120"/>
+              </a:rPr>
+              <a:t>B-C  p = 0.052</a:t>
+            </a:r>
+            <a:endParaRPr lang="en-US" sz="1050" dirty="0"/>
+          </a:p>
+        </p:txBody>
+      </p:sp>
+      <p:sp>
+        <p:nvSpPr>
+          <p:cNvPr id="14" name="Shape 12"/>
+          <p:cNvSpPr/>
+          <p:nvPr/>
+        </p:nvSpPr>
+        <p:spPr>
+          <a:xfrm>
+            <a:off x="7406640" y="2926080"/>
+            <a:ext cx="4325112" cy="2926080"/>
+          </a:xfrm>
+          <a:prstGeom prst="rect">
+            <a:avLst/>
+          </a:prstGeom>
+          <a:solidFill>
+            <a:srgbClr val="FFFFFF"/>
+          </a:solidFill>
+          <a:ln w="6350">
+            <a:solidFill>
+              <a:srgbClr val="D6CFB8"/>
+            </a:solidFill>
+            <a:prstDash val="solid"/>
+          </a:ln>
+        </p:spPr>
+      </p:sp>
+      <p:sp>
+        <p:nvSpPr>
+          <p:cNvPr id="15" name="Text 13"/>
+          <p:cNvSpPr/>
+          <p:nvPr/>
+        </p:nvSpPr>
+        <p:spPr>
+          <a:xfrm>
+            <a:off x="7498080" y="2962656"/>
+            <a:ext cx="4142232" cy="228600"/>
           </a:xfrm>
           <a:prstGeom prst="rect">
             <a:avLst/>
@@ -15088,15 +16714,715 @@
               <a:buNone/>
             </a:pPr>
             <a:r>
-              <a:rPr lang="en-US" sz="1100" i="1" dirty="0">
-                <a:solidFill>
-                  <a:srgbClr val="6B7280"/>
+              <a:rPr lang="en-US" sz="900" b="1" dirty="0">
+                <a:solidFill>
+                  <a:srgbClr val="15233F"/>
                 </a:solidFill>
                 <a:latin typeface="Calibri" pitchFamily="34" charset="0"/>
                 <a:ea typeface="Calibri" pitchFamily="34" charset="-122"/>
                 <a:cs typeface="Calibri" pitchFamily="34" charset="-120"/>
               </a:rPr>
-              <a:t>Dunn est l'équivalent de Tukey pour la version non-paramétrique. Le `method = "bh"` applique BH pour les comparaisons multiples.</a:t>
+              <a:t>Score · 3 régions, distributions asymétriques</a:t>
+            </a:r>
+            <a:endParaRPr lang="en-US" sz="900" dirty="0"/>
+          </a:p>
+        </p:txBody>
+      </p:sp>
+      <p:sp>
+        <p:nvSpPr>
+          <p:cNvPr id="16" name="Shape 14"/>
+          <p:cNvSpPr/>
+          <p:nvPr/>
+        </p:nvSpPr>
+        <p:spPr>
+          <a:xfrm>
+            <a:off x="7818120" y="5486400"/>
+            <a:ext cx="3776472" cy="0"/>
+          </a:xfrm>
+          <a:prstGeom prst="line">
+            <a:avLst/>
+          </a:prstGeom>
+          <a:noFill/>
+          <a:ln w="9525">
+            <a:solidFill>
+              <a:srgbClr val="0E1729"/>
+            </a:solidFill>
+            <a:prstDash val="solid"/>
+          </a:ln>
+        </p:spPr>
+      </p:sp>
+      <p:sp>
+        <p:nvSpPr>
+          <p:cNvPr id="17" name="Shape 15"/>
+          <p:cNvSpPr/>
+          <p:nvPr/>
+        </p:nvSpPr>
+        <p:spPr>
+          <a:xfrm>
+            <a:off x="7818120" y="3246120"/>
+            <a:ext cx="0" cy="2240280"/>
+          </a:xfrm>
+          <a:prstGeom prst="line">
+            <a:avLst/>
+          </a:prstGeom>
+          <a:noFill/>
+          <a:ln w="9525">
+            <a:solidFill>
+              <a:srgbClr val="0E1729"/>
+            </a:solidFill>
+            <a:prstDash val="solid"/>
+          </a:ln>
+        </p:spPr>
+      </p:sp>
+      <p:sp>
+        <p:nvSpPr>
+          <p:cNvPr id="18" name="Text 16"/>
+          <p:cNvSpPr/>
+          <p:nvPr/>
+        </p:nvSpPr>
+        <p:spPr>
+          <a:xfrm>
+            <a:off x="7818120" y="5577840"/>
+            <a:ext cx="3776472" cy="201168"/>
+          </a:xfrm>
+          <a:prstGeom prst="rect">
+            <a:avLst/>
+          </a:prstGeom>
+          <a:noFill/>
+          <a:ln/>
+        </p:spPr>
+        <p:txBody>
+          <a:bodyPr wrap="square" rtlCol="0" anchor="ctr"/>
+          <a:lstStyle/>
+          <a:p>
+            <a:pPr algn="ctr" indent="0" marL="0">
+              <a:buNone/>
+            </a:pPr>
+            <a:r>
+              <a:rPr lang="en-US" sz="800" i="1" dirty="0">
+                <a:solidFill>
+                  <a:srgbClr val="6B7280"/>
+                </a:solidFill>
+                <a:latin typeface="Calibri" pitchFamily="34" charset="0"/>
+                <a:ea typeface="Calibri" pitchFamily="34" charset="-122"/>
+                <a:cs typeface="Calibri" pitchFamily="34" charset="-120"/>
+              </a:rPr>
+              <a:t>Groupes</a:t>
+            </a:r>
+            <a:endParaRPr lang="en-US" sz="800" dirty="0"/>
+          </a:p>
+        </p:txBody>
+      </p:sp>
+      <p:sp>
+        <p:nvSpPr>
+          <p:cNvPr id="19" name="Text 17"/>
+          <p:cNvSpPr/>
+          <p:nvPr/>
+        </p:nvSpPr>
+        <p:spPr>
+          <a:xfrm rot="-5400000">
+            <a:off x="7424928" y="3246120"/>
+            <a:ext cx="365760" cy="2240280"/>
+          </a:xfrm>
+          <a:prstGeom prst="rect">
+            <a:avLst/>
+          </a:prstGeom>
+          <a:noFill/>
+          <a:ln/>
+        </p:spPr>
+        <p:txBody>
+          <a:bodyPr wrap="square" rtlCol="0" anchor="ctr"/>
+          <a:lstStyle/>
+          <a:p>
+            <a:pPr algn="l" indent="0" marL="0">
+              <a:buNone/>
+            </a:pPr>
+            <a:r>
+              <a:rPr lang="en-US" sz="800" i="1" dirty="0">
+                <a:solidFill>
+                  <a:srgbClr val="6B7280"/>
+                </a:solidFill>
+                <a:latin typeface="Calibri" pitchFamily="34" charset="0"/>
+                <a:ea typeface="Calibri" pitchFamily="34" charset="-122"/>
+                <a:cs typeface="Calibri" pitchFamily="34" charset="-120"/>
+              </a:rPr>
+              <a:t>Valeur</a:t>
+            </a:r>
+            <a:endParaRPr lang="en-US" sz="800" dirty="0"/>
+          </a:p>
+        </p:txBody>
+      </p:sp>
+      <p:sp>
+        <p:nvSpPr>
+          <p:cNvPr id="20" name="Shape 18"/>
+          <p:cNvSpPr/>
+          <p:nvPr/>
+        </p:nvSpPr>
+        <p:spPr>
+          <a:xfrm>
+            <a:off x="8447532" y="5486400"/>
+            <a:ext cx="0" cy="-320040"/>
+          </a:xfrm>
+          <a:prstGeom prst="line">
+            <a:avLst/>
+          </a:prstGeom>
+          <a:noFill/>
+          <a:ln w="9525">
+            <a:solidFill>
+              <a:srgbClr val="6B7280"/>
+            </a:solidFill>
+            <a:prstDash val="solid"/>
+          </a:ln>
+        </p:spPr>
+      </p:sp>
+      <p:sp>
+        <p:nvSpPr>
+          <p:cNvPr id="21" name="Shape 19"/>
+          <p:cNvSpPr/>
+          <p:nvPr/>
+        </p:nvSpPr>
+        <p:spPr>
+          <a:xfrm>
+            <a:off x="8290179" y="5486400"/>
+            <a:ext cx="314706" cy="0"/>
+          </a:xfrm>
+          <a:prstGeom prst="line">
+            <a:avLst/>
+          </a:prstGeom>
+          <a:noFill/>
+          <a:ln w="9525">
+            <a:solidFill>
+              <a:srgbClr val="6B7280"/>
+            </a:solidFill>
+            <a:prstDash val="solid"/>
+          </a:ln>
+        </p:spPr>
+      </p:sp>
+      <p:sp>
+        <p:nvSpPr>
+          <p:cNvPr id="22" name="Shape 20"/>
+          <p:cNvSpPr/>
+          <p:nvPr/>
+        </p:nvSpPr>
+        <p:spPr>
+          <a:xfrm>
+            <a:off x="8447532" y="4632960"/>
+            <a:ext cx="0" cy="-746760"/>
+          </a:xfrm>
+          <a:prstGeom prst="line">
+            <a:avLst/>
+          </a:prstGeom>
+          <a:noFill/>
+          <a:ln w="9525">
+            <a:solidFill>
+              <a:srgbClr val="6B7280"/>
+            </a:solidFill>
+            <a:prstDash val="solid"/>
+          </a:ln>
+        </p:spPr>
+      </p:sp>
+      <p:sp>
+        <p:nvSpPr>
+          <p:cNvPr id="23" name="Shape 21"/>
+          <p:cNvSpPr/>
+          <p:nvPr/>
+        </p:nvSpPr>
+        <p:spPr>
+          <a:xfrm>
+            <a:off x="8290179" y="3886200"/>
+            <a:ext cx="314706" cy="0"/>
+          </a:xfrm>
+          <a:prstGeom prst="line">
+            <a:avLst/>
+          </a:prstGeom>
+          <a:noFill/>
+          <a:ln w="9525">
+            <a:solidFill>
+              <a:srgbClr val="6B7280"/>
+            </a:solidFill>
+            <a:prstDash val="solid"/>
+          </a:ln>
+        </p:spPr>
+      </p:sp>
+      <p:sp>
+        <p:nvSpPr>
+          <p:cNvPr id="24" name="Shape 22"/>
+          <p:cNvSpPr/>
+          <p:nvPr/>
+        </p:nvSpPr>
+        <p:spPr>
+          <a:xfrm>
+            <a:off x="8132826" y="4632960"/>
+            <a:ext cx="629412" cy="533400"/>
+          </a:xfrm>
+          <a:prstGeom prst="rect">
+            <a:avLst/>
+          </a:prstGeom>
+          <a:solidFill>
+            <a:srgbClr val="FFFFFF"/>
+          </a:solidFill>
+          <a:ln w="12700">
+            <a:solidFill>
+              <a:srgbClr val="0E1729"/>
+            </a:solidFill>
+            <a:prstDash val="solid"/>
+          </a:ln>
+        </p:spPr>
+      </p:sp>
+      <p:sp>
+        <p:nvSpPr>
+          <p:cNvPr id="25" name="Shape 23"/>
+          <p:cNvSpPr/>
+          <p:nvPr/>
+        </p:nvSpPr>
+        <p:spPr>
+          <a:xfrm>
+            <a:off x="8132826" y="4953000"/>
+            <a:ext cx="629412" cy="0"/>
+          </a:xfrm>
+          <a:prstGeom prst="line">
+            <a:avLst/>
+          </a:prstGeom>
+          <a:noFill/>
+          <a:ln w="19050">
+            <a:solidFill>
+              <a:srgbClr val="0E1729"/>
+            </a:solidFill>
+            <a:prstDash val="solid"/>
+          </a:ln>
+        </p:spPr>
+      </p:sp>
+      <p:sp>
+        <p:nvSpPr>
+          <p:cNvPr id="26" name="Text 24"/>
+          <p:cNvSpPr/>
+          <p:nvPr/>
+        </p:nvSpPr>
+        <p:spPr>
+          <a:xfrm>
+            <a:off x="7818120" y="5532120"/>
+            <a:ext cx="1258824" cy="182880"/>
+          </a:xfrm>
+          <a:prstGeom prst="rect">
+            <a:avLst/>
+          </a:prstGeom>
+          <a:noFill/>
+          <a:ln/>
+        </p:spPr>
+        <p:txBody>
+          <a:bodyPr wrap="square" rtlCol="0" anchor="ctr"/>
+          <a:lstStyle/>
+          <a:p>
+            <a:pPr algn="ctr" indent="0" marL="0">
+              <a:buNone/>
+            </a:pPr>
+            <a:r>
+              <a:rPr lang="en-US" sz="800" b="1" dirty="0">
+                <a:solidFill>
+                  <a:srgbClr val="15233F"/>
+                </a:solidFill>
+                <a:latin typeface="Calibri" pitchFamily="34" charset="0"/>
+                <a:ea typeface="Calibri" pitchFamily="34" charset="-122"/>
+                <a:cs typeface="Calibri" pitchFamily="34" charset="-120"/>
+              </a:rPr>
+              <a:t>A</a:t>
+            </a:r>
+            <a:endParaRPr lang="en-US" sz="800" dirty="0"/>
+          </a:p>
+        </p:txBody>
+      </p:sp>
+      <p:sp>
+        <p:nvSpPr>
+          <p:cNvPr id="27" name="Shape 25"/>
+          <p:cNvSpPr/>
+          <p:nvPr/>
+        </p:nvSpPr>
+        <p:spPr>
+          <a:xfrm>
+            <a:off x="9706356" y="5273040"/>
+            <a:ext cx="0" cy="-426720"/>
+          </a:xfrm>
+          <a:prstGeom prst="line">
+            <a:avLst/>
+          </a:prstGeom>
+          <a:noFill/>
+          <a:ln w="9525">
+            <a:solidFill>
+              <a:srgbClr val="6B7280"/>
+            </a:solidFill>
+            <a:prstDash val="solid"/>
+          </a:ln>
+        </p:spPr>
+      </p:sp>
+      <p:sp>
+        <p:nvSpPr>
+          <p:cNvPr id="28" name="Shape 26"/>
+          <p:cNvSpPr/>
+          <p:nvPr/>
+        </p:nvSpPr>
+        <p:spPr>
+          <a:xfrm>
+            <a:off x="9549003" y="5273040"/>
+            <a:ext cx="314706" cy="0"/>
+          </a:xfrm>
+          <a:prstGeom prst="line">
+            <a:avLst/>
+          </a:prstGeom>
+          <a:noFill/>
+          <a:ln w="9525">
+            <a:solidFill>
+              <a:srgbClr val="6B7280"/>
+            </a:solidFill>
+            <a:prstDash val="solid"/>
+          </a:ln>
+        </p:spPr>
+      </p:sp>
+      <p:sp>
+        <p:nvSpPr>
+          <p:cNvPr id="29" name="Shape 27"/>
+          <p:cNvSpPr/>
+          <p:nvPr/>
+        </p:nvSpPr>
+        <p:spPr>
+          <a:xfrm>
+            <a:off x="9706356" y="4206240"/>
+            <a:ext cx="0" cy="-426720"/>
+          </a:xfrm>
+          <a:prstGeom prst="line">
+            <a:avLst/>
+          </a:prstGeom>
+          <a:noFill/>
+          <a:ln w="9525">
+            <a:solidFill>
+              <a:srgbClr val="6B7280"/>
+            </a:solidFill>
+            <a:prstDash val="solid"/>
+          </a:ln>
+        </p:spPr>
+      </p:sp>
+      <p:sp>
+        <p:nvSpPr>
+          <p:cNvPr id="30" name="Shape 28"/>
+          <p:cNvSpPr/>
+          <p:nvPr/>
+        </p:nvSpPr>
+        <p:spPr>
+          <a:xfrm>
+            <a:off x="9549003" y="3779520"/>
+            <a:ext cx="314706" cy="0"/>
+          </a:xfrm>
+          <a:prstGeom prst="line">
+            <a:avLst/>
+          </a:prstGeom>
+          <a:noFill/>
+          <a:ln w="9525">
+            <a:solidFill>
+              <a:srgbClr val="6B7280"/>
+            </a:solidFill>
+            <a:prstDash val="solid"/>
+          </a:ln>
+        </p:spPr>
+      </p:sp>
+      <p:sp>
+        <p:nvSpPr>
+          <p:cNvPr id="31" name="Shape 29"/>
+          <p:cNvSpPr/>
+          <p:nvPr/>
+        </p:nvSpPr>
+        <p:spPr>
+          <a:xfrm>
+            <a:off x="9391650" y="4206240"/>
+            <a:ext cx="629412" cy="640080"/>
+          </a:xfrm>
+          <a:prstGeom prst="rect">
+            <a:avLst/>
+          </a:prstGeom>
+          <a:solidFill>
+            <a:srgbClr val="FFFFFF"/>
+          </a:solidFill>
+          <a:ln w="12700">
+            <a:solidFill>
+              <a:srgbClr val="0E1729"/>
+            </a:solidFill>
+            <a:prstDash val="solid"/>
+          </a:ln>
+        </p:spPr>
+      </p:sp>
+      <p:sp>
+        <p:nvSpPr>
+          <p:cNvPr id="32" name="Shape 30"/>
+          <p:cNvSpPr/>
+          <p:nvPr/>
+        </p:nvSpPr>
+        <p:spPr>
+          <a:xfrm>
+            <a:off x="9391650" y="4526280"/>
+            <a:ext cx="629412" cy="0"/>
+          </a:xfrm>
+          <a:prstGeom prst="line">
+            <a:avLst/>
+          </a:prstGeom>
+          <a:noFill/>
+          <a:ln w="19050">
+            <a:solidFill>
+              <a:srgbClr val="0E1729"/>
+            </a:solidFill>
+            <a:prstDash val="solid"/>
+          </a:ln>
+        </p:spPr>
+      </p:sp>
+      <p:sp>
+        <p:nvSpPr>
+          <p:cNvPr id="33" name="Text 31"/>
+          <p:cNvSpPr/>
+          <p:nvPr/>
+        </p:nvSpPr>
+        <p:spPr>
+          <a:xfrm>
+            <a:off x="9076944" y="5532120"/>
+            <a:ext cx="1258824" cy="182880"/>
+          </a:xfrm>
+          <a:prstGeom prst="rect">
+            <a:avLst/>
+          </a:prstGeom>
+          <a:noFill/>
+          <a:ln/>
+        </p:spPr>
+        <p:txBody>
+          <a:bodyPr wrap="square" rtlCol="0" anchor="ctr"/>
+          <a:lstStyle/>
+          <a:p>
+            <a:pPr algn="ctr" indent="0" marL="0">
+              <a:buNone/>
+            </a:pPr>
+            <a:r>
+              <a:rPr lang="en-US" sz="800" b="1" dirty="0">
+                <a:solidFill>
+                  <a:srgbClr val="15233F"/>
+                </a:solidFill>
+                <a:latin typeface="Calibri" pitchFamily="34" charset="0"/>
+                <a:ea typeface="Calibri" pitchFamily="34" charset="-122"/>
+                <a:cs typeface="Calibri" pitchFamily="34" charset="-120"/>
+              </a:rPr>
+              <a:t>B</a:t>
+            </a:r>
+            <a:endParaRPr lang="en-US" sz="800" dirty="0"/>
+          </a:p>
+        </p:txBody>
+      </p:sp>
+      <p:sp>
+        <p:nvSpPr>
+          <p:cNvPr id="34" name="Shape 32"/>
+          <p:cNvSpPr/>
+          <p:nvPr/>
+        </p:nvSpPr>
+        <p:spPr>
+          <a:xfrm>
+            <a:off x="10965180" y="5059680"/>
+            <a:ext cx="0" cy="-533400"/>
+          </a:xfrm>
+          <a:prstGeom prst="line">
+            <a:avLst/>
+          </a:prstGeom>
+          <a:noFill/>
+          <a:ln w="9525">
+            <a:solidFill>
+              <a:srgbClr val="6B7280"/>
+            </a:solidFill>
+            <a:prstDash val="solid"/>
+          </a:ln>
+        </p:spPr>
+      </p:sp>
+      <p:sp>
+        <p:nvSpPr>
+          <p:cNvPr id="35" name="Shape 33"/>
+          <p:cNvSpPr/>
+          <p:nvPr/>
+        </p:nvSpPr>
+        <p:spPr>
+          <a:xfrm>
+            <a:off x="10807827" y="5059680"/>
+            <a:ext cx="314706" cy="0"/>
+          </a:xfrm>
+          <a:prstGeom prst="line">
+            <a:avLst/>
+          </a:prstGeom>
+          <a:noFill/>
+          <a:ln w="9525">
+            <a:solidFill>
+              <a:srgbClr val="6B7280"/>
+            </a:solidFill>
+            <a:prstDash val="solid"/>
+          </a:ln>
+        </p:spPr>
+      </p:sp>
+      <p:sp>
+        <p:nvSpPr>
+          <p:cNvPr id="36" name="Shape 34"/>
+          <p:cNvSpPr/>
+          <p:nvPr/>
+        </p:nvSpPr>
+        <p:spPr>
+          <a:xfrm>
+            <a:off x="10965180" y="3779520"/>
+            <a:ext cx="0" cy="-533400"/>
+          </a:xfrm>
+          <a:prstGeom prst="line">
+            <a:avLst/>
+          </a:prstGeom>
+          <a:noFill/>
+          <a:ln w="9525">
+            <a:solidFill>
+              <a:srgbClr val="6B7280"/>
+            </a:solidFill>
+            <a:prstDash val="solid"/>
+          </a:ln>
+        </p:spPr>
+      </p:sp>
+      <p:sp>
+        <p:nvSpPr>
+          <p:cNvPr id="37" name="Shape 35"/>
+          <p:cNvSpPr/>
+          <p:nvPr/>
+        </p:nvSpPr>
+        <p:spPr>
+          <a:xfrm>
+            <a:off x="10807827" y="3246120"/>
+            <a:ext cx="314706" cy="0"/>
+          </a:xfrm>
+          <a:prstGeom prst="line">
+            <a:avLst/>
+          </a:prstGeom>
+          <a:noFill/>
+          <a:ln w="9525">
+            <a:solidFill>
+              <a:srgbClr val="6B7280"/>
+            </a:solidFill>
+            <a:prstDash val="solid"/>
+          </a:ln>
+        </p:spPr>
+      </p:sp>
+      <p:sp>
+        <p:nvSpPr>
+          <p:cNvPr id="38" name="Shape 36"/>
+          <p:cNvSpPr/>
+          <p:nvPr/>
+        </p:nvSpPr>
+        <p:spPr>
+          <a:xfrm>
+            <a:off x="10650474" y="3779520"/>
+            <a:ext cx="629412" cy="746760"/>
+          </a:xfrm>
+          <a:prstGeom prst="rect">
+            <a:avLst/>
+          </a:prstGeom>
+          <a:solidFill>
+            <a:srgbClr val="F09042"/>
+          </a:solidFill>
+          <a:ln w="12700">
+            <a:solidFill>
+              <a:srgbClr val="F09042"/>
+            </a:solidFill>
+            <a:prstDash val="solid"/>
+          </a:ln>
+        </p:spPr>
+      </p:sp>
+      <p:sp>
+        <p:nvSpPr>
+          <p:cNvPr id="39" name="Shape 37"/>
+          <p:cNvSpPr/>
+          <p:nvPr/>
+        </p:nvSpPr>
+        <p:spPr>
+          <a:xfrm>
+            <a:off x="10650474" y="4099560"/>
+            <a:ext cx="629412" cy="0"/>
+          </a:xfrm>
+          <a:prstGeom prst="line">
+            <a:avLst/>
+          </a:prstGeom>
+          <a:noFill/>
+          <a:ln w="19050">
+            <a:solidFill>
+              <a:srgbClr val="F09042"/>
+            </a:solidFill>
+            <a:prstDash val="solid"/>
+          </a:ln>
+        </p:spPr>
+      </p:sp>
+      <p:sp>
+        <p:nvSpPr>
+          <p:cNvPr id="40" name="Text 38"/>
+          <p:cNvSpPr/>
+          <p:nvPr/>
+        </p:nvSpPr>
+        <p:spPr>
+          <a:xfrm>
+            <a:off x="10335768" y="5532120"/>
+            <a:ext cx="1258824" cy="182880"/>
+          </a:xfrm>
+          <a:prstGeom prst="rect">
+            <a:avLst/>
+          </a:prstGeom>
+          <a:noFill/>
+          <a:ln/>
+        </p:spPr>
+        <p:txBody>
+          <a:bodyPr wrap="square" rtlCol="0" anchor="ctr"/>
+          <a:lstStyle/>
+          <a:p>
+            <a:pPr algn="ctr" indent="0" marL="0">
+              <a:buNone/>
+            </a:pPr>
+            <a:r>
+              <a:rPr lang="en-US" sz="800" b="1" dirty="0">
+                <a:solidFill>
+                  <a:srgbClr val="15233F"/>
+                </a:solidFill>
+                <a:latin typeface="Calibri" pitchFamily="34" charset="0"/>
+                <a:ea typeface="Calibri" pitchFamily="34" charset="-122"/>
+                <a:cs typeface="Calibri" pitchFamily="34" charset="-120"/>
+              </a:rPr>
+              <a:t>C</a:t>
+            </a:r>
+            <a:endParaRPr lang="en-US" sz="800" dirty="0"/>
+          </a:p>
+        </p:txBody>
+      </p:sp>
+      <p:sp>
+        <p:nvSpPr>
+          <p:cNvPr id="41" name="Text 39"/>
+          <p:cNvSpPr/>
+          <p:nvPr/>
+        </p:nvSpPr>
+        <p:spPr>
+          <a:xfrm>
+            <a:off x="640080" y="5989320"/>
+            <a:ext cx="10972800" cy="365760"/>
+          </a:xfrm>
+          <a:prstGeom prst="rect">
+            <a:avLst/>
+          </a:prstGeom>
+          <a:noFill/>
+          <a:ln/>
+        </p:spPr>
+        <p:txBody>
+          <a:bodyPr wrap="square" rtlCol="0" anchor="ctr"/>
+          <a:lstStyle/>
+          <a:p>
+            <a:pPr algn="ctr" indent="0" marL="0">
+              <a:buNone/>
+            </a:pPr>
+            <a:r>
+              <a:rPr lang="en-US" sz="1100" i="1" dirty="0">
+                <a:solidFill>
+                  <a:srgbClr val="6B7280"/>
+                </a:solidFill>
+                <a:latin typeface="Calibri" pitchFamily="34" charset="0"/>
+                <a:ea typeface="Calibri" pitchFamily="34" charset="-122"/>
+                <a:cs typeface="Calibri" pitchFamily="34" charset="-120"/>
+              </a:rPr>
+              <a:t>Dunn est l'équivalent de Tukey pour la version non-paramétrique. `method = "bh"` applique BH pour les comparaisons multiples.</a:t>
             </a:r>
             <a:endParaRPr lang="en-US" sz="1100" dirty="0"/>
           </a:p>
@@ -15302,7 +17628,7 @@
         <p:spPr>
           <a:xfrm>
             <a:off x="640080" y="1828800"/>
-            <a:ext cx="10972800" cy="1280160"/>
+            <a:ext cx="10972800" cy="914400"/>
           </a:xfrm>
           <a:prstGeom prst="rect">
             <a:avLst/>
@@ -15343,12 +17669,12 @@
         </p:nvSpPr>
         <p:spPr>
           <a:xfrm>
-            <a:off x="640080" y="3246120"/>
-            <a:ext cx="5486400" cy="2606040"/>
+            <a:off x="640080" y="2926080"/>
+            <a:ext cx="3931920" cy="2926080"/>
           </a:xfrm>
           <a:prstGeom prst="roundRect">
             <a:avLst>
-              <a:gd name="adj" fmla="val 1754"/>
+              <a:gd name="adj" fmla="val 1563"/>
             </a:avLst>
           </a:prstGeom>
           <a:solidFill>
@@ -15370,7 +17696,7 @@
         </p:nvSpPr>
         <p:spPr>
           <a:xfrm>
-            <a:off x="777240" y="3355848"/>
+            <a:off x="777240" y="3035808"/>
             <a:ext cx="365760" cy="256032"/>
           </a:xfrm>
           <a:prstGeom prst="roundRect">
@@ -15392,7 +17718,7 @@
         </p:nvSpPr>
         <p:spPr>
           <a:xfrm>
-            <a:off x="777240" y="3355848"/>
+            <a:off x="777240" y="3035808"/>
             <a:ext cx="365760" cy="256032"/>
           </a:xfrm>
           <a:prstGeom prst="rect">
@@ -15431,8 +17757,8 @@
         </p:nvSpPr>
         <p:spPr>
           <a:xfrm>
-            <a:off x="822960" y="3703320"/>
-            <a:ext cx="5212080" cy="2057400"/>
+            <a:off x="822960" y="3383280"/>
+            <a:ext cx="3657600" cy="2377440"/>
           </a:xfrm>
           <a:prstGeom prst="rect">
             <a:avLst/>
@@ -15479,7 +17805,7 @@
                 <a:ea typeface="Consolas" pitchFamily="34" charset="-122"/>
                 <a:cs typeface="Consolas" pitchFamily="34" charset="-120"/>
               </a:rPr>
-              <a:t>tab &lt;- table(donnees$exposition,</a:t>
+              <a:t>tab &lt;- table(</a:t>
             </a:r>
             <a:endParaRPr lang="en-US" sz="1050" dirty="0"/>
           </a:p>
@@ -15499,17 +17825,8 @@
                 <a:ea typeface="Consolas" pitchFamily="34" charset="-122"/>
                 <a:cs typeface="Consolas" pitchFamily="34" charset="-120"/>
               </a:rPr>
-              <a:t>             donnees$maladie)</a:t>
-            </a:r>
-            <a:endParaRPr lang="en-US" sz="1050" dirty="0"/>
-          </a:p>
-          <a:p>
-            <a:pPr indent="0" marL="0">
-              <a:lnSpc>
-                <a:spcPct val="140000"/>
-              </a:lnSpc>
-              <a:buNone/>
-            </a:pPr>
+              <a:t>  donnees$exposition,</a:t>
+            </a:r>
             <a:endParaRPr lang="en-US" sz="1050" dirty="0"/>
           </a:p>
           <a:p>
@@ -15528,8 +17845,17 @@
                 <a:ea typeface="Consolas" pitchFamily="34" charset="-122"/>
                 <a:cs typeface="Consolas" pitchFamily="34" charset="-120"/>
               </a:rPr>
-              <a:t># Chi² + OR</a:t>
-            </a:r>
+              <a:t>  donnees$maladie)</a:t>
+            </a:r>
+            <a:endParaRPr lang="en-US" sz="1050" dirty="0"/>
+          </a:p>
+          <a:p>
+            <a:pPr indent="0" marL="0">
+              <a:lnSpc>
+                <a:spcPct val="140000"/>
+              </a:lnSpc>
+              <a:buNone/>
+            </a:pPr>
             <a:endParaRPr lang="en-US" sz="1050" dirty="0"/>
           </a:p>
           <a:p>
@@ -15548,7 +17874,7 @@
                 <a:ea typeface="Consolas" pitchFamily="34" charset="-122"/>
                 <a:cs typeface="Consolas" pitchFamily="34" charset="-120"/>
               </a:rPr>
-              <a:t>chisq.test(tab)</a:t>
+              <a:t># Chi² + OR</a:t>
             </a:r>
             <a:endParaRPr lang="en-US" sz="1050" dirty="0"/>
           </a:p>
@@ -15568,7 +17894,7 @@
                 <a:ea typeface="Consolas" pitchFamily="34" charset="-122"/>
                 <a:cs typeface="Consolas" pitchFamily="34" charset="-120"/>
               </a:rPr>
-              <a:t>library(epitools)</a:t>
+              <a:t>chisq.test(tab)</a:t>
             </a:r>
             <a:endParaRPr lang="en-US" sz="1050" dirty="0"/>
           </a:p>
@@ -15588,6 +17914,26 @@
                 <a:ea typeface="Consolas" pitchFamily="34" charset="-122"/>
                 <a:cs typeface="Consolas" pitchFamily="34" charset="-120"/>
               </a:rPr>
+              <a:t>library(epitools)</a:t>
+            </a:r>
+            <a:endParaRPr lang="en-US" sz="1050" dirty="0"/>
+          </a:p>
+          <a:p>
+            <a:pPr indent="0" marL="0">
+              <a:lnSpc>
+                <a:spcPct val="140000"/>
+              </a:lnSpc>
+              <a:buNone/>
+            </a:pPr>
+            <a:r>
+              <a:rPr lang="en-US" sz="1050" dirty="0">
+                <a:solidFill>
+                  <a:srgbClr val="E8EAED"/>
+                </a:solidFill>
+                <a:latin typeface="Consolas" pitchFamily="34" charset="0"/>
+                <a:ea typeface="Consolas" pitchFamily="34" charset="-122"/>
+                <a:cs typeface="Consolas" pitchFamily="34" charset="-120"/>
+              </a:rPr>
               <a:t>oddsratio(tab)</a:t>
             </a:r>
             <a:endParaRPr lang="en-US" sz="1050" dirty="0"/>
@@ -15602,12 +17948,12 @@
         </p:nvSpPr>
         <p:spPr>
           <a:xfrm>
-            <a:off x="6400800" y="3246120"/>
-            <a:ext cx="5330952" cy="2606040"/>
+            <a:off x="4709160" y="2926080"/>
+            <a:ext cx="2560320" cy="2926080"/>
           </a:xfrm>
           <a:prstGeom prst="roundRect">
             <a:avLst>
-              <a:gd name="adj" fmla="val 1754"/>
+              <a:gd name="adj" fmla="val 1786"/>
             </a:avLst>
           </a:prstGeom>
           <a:solidFill>
@@ -15629,7 +17975,7 @@
         </p:nvSpPr>
         <p:spPr>
           <a:xfrm>
-            <a:off x="6537960" y="3337560"/>
+            <a:off x="4846320" y="3017520"/>
             <a:ext cx="914400" cy="228600"/>
           </a:xfrm>
           <a:prstGeom prst="rect">
@@ -15668,8 +18014,8 @@
         </p:nvSpPr>
         <p:spPr>
           <a:xfrm>
-            <a:off x="6583680" y="3611880"/>
-            <a:ext cx="5056632" cy="2148840"/>
+            <a:off x="4892040" y="3291840"/>
+            <a:ext cx="2286000" cy="2468880"/>
           </a:xfrm>
           <a:prstGeom prst="rect">
             <a:avLst/>
@@ -15696,8 +18042,17 @@
                 <a:ea typeface="Consolas" pitchFamily="34" charset="-122"/>
                 <a:cs typeface="Consolas" pitchFamily="34" charset="-120"/>
               </a:rPr>
-              <a:t>Pearson's Chi-squared test</a:t>
-            </a:r>
+              <a:t>Pearson Chi² test</a:t>
+            </a:r>
+            <a:endParaRPr lang="en-US" sz="1050" dirty="0"/>
+          </a:p>
+          <a:p>
+            <a:pPr indent="0" marL="0">
+              <a:lnSpc>
+                <a:spcPct val="130000"/>
+              </a:lnSpc>
+              <a:buNone/>
+            </a:pPr>
             <a:endParaRPr lang="en-US" sz="1050" dirty="0"/>
           </a:p>
           <a:p>
@@ -15716,17 +18071,8 @@
                 <a:ea typeface="Consolas" pitchFamily="34" charset="-122"/>
                 <a:cs typeface="Consolas" pitchFamily="34" charset="-120"/>
               </a:rPr>
-              <a:t>with Yates' continuity correction</a:t>
-            </a:r>
-            <a:endParaRPr lang="en-US" sz="1050" dirty="0"/>
-          </a:p>
-          <a:p>
-            <a:pPr indent="0" marL="0">
-              <a:lnSpc>
-                <a:spcPct val="130000"/>
-              </a:lnSpc>
-              <a:buNone/>
-            </a:pPr>
+              <a:t>X² = 12.3</a:t>
+            </a:r>
             <a:endParaRPr lang="en-US" sz="1050" dirty="0"/>
           </a:p>
           <a:p>
@@ -15745,17 +18091,8 @@
                 <a:ea typeface="Consolas" pitchFamily="34" charset="-122"/>
                 <a:cs typeface="Consolas" pitchFamily="34" charset="-120"/>
               </a:rPr>
-              <a:t>X² = 12.3, df = 1, p = 0.0005</a:t>
-            </a:r>
-            <a:endParaRPr lang="en-US" sz="1050" dirty="0"/>
-          </a:p>
-          <a:p>
-            <a:pPr indent="0" marL="0">
-              <a:lnSpc>
-                <a:spcPct val="130000"/>
-              </a:lnSpc>
-              <a:buNone/>
-            </a:pPr>
+              <a:t>df = 1</a:t>
+            </a:r>
             <a:endParaRPr lang="en-US" sz="1050" dirty="0"/>
           </a:p>
           <a:p>
@@ -15774,8 +18111,17 @@
                 <a:ea typeface="Consolas" pitchFamily="34" charset="-122"/>
                 <a:cs typeface="Consolas" pitchFamily="34" charset="-120"/>
               </a:rPr>
-              <a:t>        Odds Ratio   IC95%</a:t>
-            </a:r>
+              <a:t>p = 0.0005</a:t>
+            </a:r>
+            <a:endParaRPr lang="en-US" sz="1050" dirty="0"/>
+          </a:p>
+          <a:p>
+            <a:pPr indent="0" marL="0">
+              <a:lnSpc>
+                <a:spcPct val="130000"/>
+              </a:lnSpc>
+              <a:buNone/>
+            </a:pPr>
             <a:endParaRPr lang="en-US" sz="1050" dirty="0"/>
           </a:p>
           <a:p>
@@ -15794,17 +18140,8 @@
                 <a:ea typeface="Consolas" pitchFamily="34" charset="-122"/>
                 <a:cs typeface="Consolas" pitchFamily="34" charset="-120"/>
               </a:rPr>
-              <a:t>Maladie    2.45   [1.51, 3.97]</a:t>
-            </a:r>
-            <a:endParaRPr lang="en-US" sz="1050" dirty="0"/>
-          </a:p>
-          <a:p>
-            <a:pPr indent="0" marL="0">
-              <a:lnSpc>
-                <a:spcPct val="130000"/>
-              </a:lnSpc>
-              <a:buNone/>
-            </a:pPr>
+              <a:t>Odds Ratio</a:t>
+            </a:r>
             <a:endParaRPr lang="en-US" sz="1050" dirty="0"/>
           </a:p>
           <a:p>
@@ -15823,7 +18160,7 @@
                 <a:ea typeface="Consolas" pitchFamily="34" charset="-122"/>
                 <a:cs typeface="Consolas" pitchFamily="34" charset="-120"/>
               </a:rPr>
-              <a:t>→ Exposition associée</a:t>
+              <a:t>2.45</a:t>
             </a:r>
             <a:endParaRPr lang="en-US" sz="1050" dirty="0"/>
           </a:p>
@@ -15843,22 +18180,67 @@
                 <a:ea typeface="Consolas" pitchFamily="34" charset="-122"/>
                 <a:cs typeface="Consolas" pitchFamily="34" charset="-120"/>
               </a:rPr>
-              <a:t>  à la maladie.</a:t>
+              <a:t>IC95%</a:t>
             </a:r>
             <a:endParaRPr lang="en-US" sz="1050" dirty="0"/>
           </a:p>
-        </p:txBody>
-      </p:sp>
-      <p:sp>
-        <p:nvSpPr>
-          <p:cNvPr id="14" name="Text 12"/>
-          <p:cNvSpPr/>
-          <p:nvPr/>
-        </p:nvSpPr>
-        <p:spPr>
-          <a:xfrm>
-            <a:off x="640080" y="5989320"/>
-            <a:ext cx="10972800" cy="365760"/>
+          <a:p>
+            <a:pPr indent="0" marL="0">
+              <a:lnSpc>
+                <a:spcPct val="130000"/>
+              </a:lnSpc>
+              <a:buNone/>
+            </a:pPr>
+            <a:r>
+              <a:rPr lang="en-US" sz="1050" dirty="0">
+                <a:solidFill>
+                  <a:srgbClr val="FFFFFF"/>
+                </a:solidFill>
+                <a:latin typeface="Consolas" pitchFamily="34" charset="0"/>
+                <a:ea typeface="Consolas" pitchFamily="34" charset="-122"/>
+                <a:cs typeface="Consolas" pitchFamily="34" charset="-120"/>
+              </a:rPr>
+              <a:t>[1.51, 3.97]</a:t>
+            </a:r>
+            <a:endParaRPr lang="en-US" sz="1050" dirty="0"/>
+          </a:p>
+        </p:txBody>
+      </p:sp>
+      <p:sp>
+        <p:nvSpPr>
+          <p:cNvPr id="14" name="Shape 12"/>
+          <p:cNvSpPr/>
+          <p:nvPr/>
+        </p:nvSpPr>
+        <p:spPr>
+          <a:xfrm>
+            <a:off x="7406640" y="2926080"/>
+            <a:ext cx="4325112" cy="2926080"/>
+          </a:xfrm>
+          <a:prstGeom prst="rect">
+            <a:avLst/>
+          </a:prstGeom>
+          <a:solidFill>
+            <a:srgbClr val="FFFFFF"/>
+          </a:solidFill>
+          <a:ln w="6350">
+            <a:solidFill>
+              <a:srgbClr val="D6CFB8"/>
+            </a:solidFill>
+            <a:prstDash val="solid"/>
+          </a:ln>
+        </p:spPr>
+      </p:sp>
+      <p:sp>
+        <p:nvSpPr>
+          <p:cNvPr id="15" name="Text 13"/>
+          <p:cNvSpPr/>
+          <p:nvPr/>
+        </p:nvSpPr>
+        <p:spPr>
+          <a:xfrm>
+            <a:off x="7498080" y="2962656"/>
+            <a:ext cx="4142232" cy="228600"/>
           </a:xfrm>
           <a:prstGeom prst="rect">
             <a:avLst/>
@@ -15874,15 +18256,2290 @@
               <a:buNone/>
             </a:pPr>
             <a:r>
-              <a:rPr lang="en-US" sz="1100" i="1" dirty="0">
-                <a:solidFill>
-                  <a:srgbClr val="6B7280"/>
+              <a:rPr lang="en-US" sz="900" b="1" dirty="0">
+                <a:solidFill>
+                  <a:srgbClr val="15233F"/>
                 </a:solidFill>
                 <a:latin typeface="Calibri" pitchFamily="34" charset="0"/>
                 <a:ea typeface="Calibri" pitchFamily="34" charset="-122"/>
                 <a:cs typeface="Calibri" pitchFamily="34" charset="-120"/>
               </a:rPr>
-              <a:t>En soutenance : rapporte OR avec IC95%, pas la p-value seule. C'est la mesure d'effet attendue en épidémiologie.</a:t>
+              <a:t>Exposés vs non-exposés (n = 100 chacun)</a:t>
+            </a:r>
+            <a:endParaRPr lang="en-US" sz="900" dirty="0"/>
+          </a:p>
+        </p:txBody>
+      </p:sp>
+      <p:sp>
+        <p:nvSpPr>
+          <p:cNvPr id="16" name="Shape 14"/>
+          <p:cNvSpPr/>
+          <p:nvPr/>
+        </p:nvSpPr>
+        <p:spPr>
+          <a:xfrm>
+            <a:off x="7676571" y="3248589"/>
+            <a:ext cx="139537" cy="139537"/>
+          </a:xfrm>
+          <a:prstGeom prst="ellipse">
+            <a:avLst/>
+          </a:prstGeom>
+          <a:solidFill>
+            <a:srgbClr val="C9CFDC"/>
+          </a:solidFill>
+          <a:ln/>
+        </p:spPr>
+      </p:sp>
+      <p:sp>
+        <p:nvSpPr>
+          <p:cNvPr id="17" name="Shape 15"/>
+          <p:cNvSpPr/>
+          <p:nvPr/>
+        </p:nvSpPr>
+        <p:spPr>
+          <a:xfrm>
+            <a:off x="8081650" y="3248589"/>
+            <a:ext cx="139537" cy="139537"/>
+          </a:xfrm>
+          <a:prstGeom prst="ellipse">
+            <a:avLst/>
+          </a:prstGeom>
+          <a:solidFill>
+            <a:srgbClr val="C9CFDC"/>
+          </a:solidFill>
+          <a:ln/>
+        </p:spPr>
+      </p:sp>
+      <p:sp>
+        <p:nvSpPr>
+          <p:cNvPr id="18" name="Shape 16"/>
+          <p:cNvSpPr/>
+          <p:nvPr/>
+        </p:nvSpPr>
+        <p:spPr>
+          <a:xfrm>
+            <a:off x="8486729" y="3248589"/>
+            <a:ext cx="139537" cy="139537"/>
+          </a:xfrm>
+          <a:prstGeom prst="ellipse">
+            <a:avLst/>
+          </a:prstGeom>
+          <a:solidFill>
+            <a:srgbClr val="C9CFDC"/>
+          </a:solidFill>
+          <a:ln/>
+        </p:spPr>
+      </p:sp>
+      <p:sp>
+        <p:nvSpPr>
+          <p:cNvPr id="19" name="Shape 17"/>
+          <p:cNvSpPr/>
+          <p:nvPr/>
+        </p:nvSpPr>
+        <p:spPr>
+          <a:xfrm>
+            <a:off x="8891808" y="3248589"/>
+            <a:ext cx="139537" cy="139537"/>
+          </a:xfrm>
+          <a:prstGeom prst="ellipse">
+            <a:avLst/>
+          </a:prstGeom>
+          <a:solidFill>
+            <a:srgbClr val="C9CFDC"/>
+          </a:solidFill>
+          <a:ln/>
+        </p:spPr>
+      </p:sp>
+      <p:sp>
+        <p:nvSpPr>
+          <p:cNvPr id="20" name="Shape 18"/>
+          <p:cNvSpPr/>
+          <p:nvPr/>
+        </p:nvSpPr>
+        <p:spPr>
+          <a:xfrm>
+            <a:off x="9296888" y="3248589"/>
+            <a:ext cx="139537" cy="139537"/>
+          </a:xfrm>
+          <a:prstGeom prst="ellipse">
+            <a:avLst/>
+          </a:prstGeom>
+          <a:solidFill>
+            <a:srgbClr val="C9CFDC"/>
+          </a:solidFill>
+          <a:ln/>
+        </p:spPr>
+      </p:sp>
+      <p:sp>
+        <p:nvSpPr>
+          <p:cNvPr id="21" name="Shape 19"/>
+          <p:cNvSpPr/>
+          <p:nvPr/>
+        </p:nvSpPr>
+        <p:spPr>
+          <a:xfrm>
+            <a:off x="9701967" y="3248589"/>
+            <a:ext cx="139537" cy="139537"/>
+          </a:xfrm>
+          <a:prstGeom prst="ellipse">
+            <a:avLst/>
+          </a:prstGeom>
+          <a:solidFill>
+            <a:srgbClr val="C9CFDC"/>
+          </a:solidFill>
+          <a:ln/>
+        </p:spPr>
+      </p:sp>
+      <p:sp>
+        <p:nvSpPr>
+          <p:cNvPr id="22" name="Shape 20"/>
+          <p:cNvSpPr/>
+          <p:nvPr/>
+        </p:nvSpPr>
+        <p:spPr>
+          <a:xfrm>
+            <a:off x="10107046" y="3248589"/>
+            <a:ext cx="139537" cy="139537"/>
+          </a:xfrm>
+          <a:prstGeom prst="ellipse">
+            <a:avLst/>
+          </a:prstGeom>
+          <a:solidFill>
+            <a:srgbClr val="C9CFDC"/>
+          </a:solidFill>
+          <a:ln/>
+        </p:spPr>
+      </p:sp>
+      <p:sp>
+        <p:nvSpPr>
+          <p:cNvPr id="23" name="Shape 21"/>
+          <p:cNvSpPr/>
+          <p:nvPr/>
+        </p:nvSpPr>
+        <p:spPr>
+          <a:xfrm>
+            <a:off x="10512125" y="3248589"/>
+            <a:ext cx="139537" cy="139537"/>
+          </a:xfrm>
+          <a:prstGeom prst="ellipse">
+            <a:avLst/>
+          </a:prstGeom>
+          <a:solidFill>
+            <a:srgbClr val="C9CFDC"/>
+          </a:solidFill>
+          <a:ln/>
+        </p:spPr>
+      </p:sp>
+      <p:sp>
+        <p:nvSpPr>
+          <p:cNvPr id="24" name="Shape 22"/>
+          <p:cNvSpPr/>
+          <p:nvPr/>
+        </p:nvSpPr>
+        <p:spPr>
+          <a:xfrm>
+            <a:off x="10917204" y="3248589"/>
+            <a:ext cx="139537" cy="139537"/>
+          </a:xfrm>
+          <a:prstGeom prst="ellipse">
+            <a:avLst/>
+          </a:prstGeom>
+          <a:solidFill>
+            <a:srgbClr val="C9CFDC"/>
+          </a:solidFill>
+          <a:ln/>
+        </p:spPr>
+      </p:sp>
+      <p:sp>
+        <p:nvSpPr>
+          <p:cNvPr id="25" name="Shape 23"/>
+          <p:cNvSpPr/>
+          <p:nvPr/>
+        </p:nvSpPr>
+        <p:spPr>
+          <a:xfrm>
+            <a:off x="11322284" y="3248589"/>
+            <a:ext cx="139537" cy="139537"/>
+          </a:xfrm>
+          <a:prstGeom prst="ellipse">
+            <a:avLst/>
+          </a:prstGeom>
+          <a:solidFill>
+            <a:srgbClr val="C9CFDC"/>
+          </a:solidFill>
+          <a:ln/>
+        </p:spPr>
+      </p:sp>
+      <p:sp>
+        <p:nvSpPr>
+          <p:cNvPr id="26" name="Shape 24"/>
+          <p:cNvSpPr/>
+          <p:nvPr/>
+        </p:nvSpPr>
+        <p:spPr>
+          <a:xfrm>
+            <a:off x="7676571" y="3447928"/>
+            <a:ext cx="139537" cy="139537"/>
+          </a:xfrm>
+          <a:prstGeom prst="ellipse">
+            <a:avLst/>
+          </a:prstGeom>
+          <a:solidFill>
+            <a:srgbClr val="C9CFDC"/>
+          </a:solidFill>
+          <a:ln/>
+        </p:spPr>
+      </p:sp>
+      <p:sp>
+        <p:nvSpPr>
+          <p:cNvPr id="27" name="Shape 25"/>
+          <p:cNvSpPr/>
+          <p:nvPr/>
+        </p:nvSpPr>
+        <p:spPr>
+          <a:xfrm>
+            <a:off x="8081650" y="3447928"/>
+            <a:ext cx="139537" cy="139537"/>
+          </a:xfrm>
+          <a:prstGeom prst="ellipse">
+            <a:avLst/>
+          </a:prstGeom>
+          <a:solidFill>
+            <a:srgbClr val="C9CFDC"/>
+          </a:solidFill>
+          <a:ln/>
+        </p:spPr>
+      </p:sp>
+      <p:sp>
+        <p:nvSpPr>
+          <p:cNvPr id="28" name="Shape 26"/>
+          <p:cNvSpPr/>
+          <p:nvPr/>
+        </p:nvSpPr>
+        <p:spPr>
+          <a:xfrm>
+            <a:off x="8486729" y="3447928"/>
+            <a:ext cx="139537" cy="139537"/>
+          </a:xfrm>
+          <a:prstGeom prst="ellipse">
+            <a:avLst/>
+          </a:prstGeom>
+          <a:solidFill>
+            <a:srgbClr val="C9CFDC"/>
+          </a:solidFill>
+          <a:ln/>
+        </p:spPr>
+      </p:sp>
+      <p:sp>
+        <p:nvSpPr>
+          <p:cNvPr id="29" name="Shape 27"/>
+          <p:cNvSpPr/>
+          <p:nvPr/>
+        </p:nvSpPr>
+        <p:spPr>
+          <a:xfrm>
+            <a:off x="8891808" y="3447928"/>
+            <a:ext cx="139537" cy="139537"/>
+          </a:xfrm>
+          <a:prstGeom prst="ellipse">
+            <a:avLst/>
+          </a:prstGeom>
+          <a:solidFill>
+            <a:srgbClr val="C9CFDC"/>
+          </a:solidFill>
+          <a:ln/>
+        </p:spPr>
+      </p:sp>
+      <p:sp>
+        <p:nvSpPr>
+          <p:cNvPr id="30" name="Shape 28"/>
+          <p:cNvSpPr/>
+          <p:nvPr/>
+        </p:nvSpPr>
+        <p:spPr>
+          <a:xfrm>
+            <a:off x="9296888" y="3447928"/>
+            <a:ext cx="139537" cy="139537"/>
+          </a:xfrm>
+          <a:prstGeom prst="ellipse">
+            <a:avLst/>
+          </a:prstGeom>
+          <a:solidFill>
+            <a:srgbClr val="C9CFDC"/>
+          </a:solidFill>
+          <a:ln/>
+        </p:spPr>
+      </p:sp>
+      <p:sp>
+        <p:nvSpPr>
+          <p:cNvPr id="31" name="Shape 29"/>
+          <p:cNvSpPr/>
+          <p:nvPr/>
+        </p:nvSpPr>
+        <p:spPr>
+          <a:xfrm>
+            <a:off x="9701967" y="3447928"/>
+            <a:ext cx="139537" cy="139537"/>
+          </a:xfrm>
+          <a:prstGeom prst="ellipse">
+            <a:avLst/>
+          </a:prstGeom>
+          <a:solidFill>
+            <a:srgbClr val="C9CFDC"/>
+          </a:solidFill>
+          <a:ln/>
+        </p:spPr>
+      </p:sp>
+      <p:sp>
+        <p:nvSpPr>
+          <p:cNvPr id="32" name="Shape 30"/>
+          <p:cNvSpPr/>
+          <p:nvPr/>
+        </p:nvSpPr>
+        <p:spPr>
+          <a:xfrm>
+            <a:off x="10107046" y="3447928"/>
+            <a:ext cx="139537" cy="139537"/>
+          </a:xfrm>
+          <a:prstGeom prst="ellipse">
+            <a:avLst/>
+          </a:prstGeom>
+          <a:solidFill>
+            <a:srgbClr val="C9CFDC"/>
+          </a:solidFill>
+          <a:ln/>
+        </p:spPr>
+      </p:sp>
+      <p:sp>
+        <p:nvSpPr>
+          <p:cNvPr id="33" name="Shape 31"/>
+          <p:cNvSpPr/>
+          <p:nvPr/>
+        </p:nvSpPr>
+        <p:spPr>
+          <a:xfrm>
+            <a:off x="10512125" y="3447928"/>
+            <a:ext cx="139537" cy="139537"/>
+          </a:xfrm>
+          <a:prstGeom prst="ellipse">
+            <a:avLst/>
+          </a:prstGeom>
+          <a:solidFill>
+            <a:srgbClr val="C9CFDC"/>
+          </a:solidFill>
+          <a:ln/>
+        </p:spPr>
+      </p:sp>
+      <p:sp>
+        <p:nvSpPr>
+          <p:cNvPr id="34" name="Shape 32"/>
+          <p:cNvSpPr/>
+          <p:nvPr/>
+        </p:nvSpPr>
+        <p:spPr>
+          <a:xfrm>
+            <a:off x="10917204" y="3447928"/>
+            <a:ext cx="139537" cy="139537"/>
+          </a:xfrm>
+          <a:prstGeom prst="ellipse">
+            <a:avLst/>
+          </a:prstGeom>
+          <a:solidFill>
+            <a:srgbClr val="C9CFDC"/>
+          </a:solidFill>
+          <a:ln/>
+        </p:spPr>
+      </p:sp>
+      <p:sp>
+        <p:nvSpPr>
+          <p:cNvPr id="35" name="Shape 33"/>
+          <p:cNvSpPr/>
+          <p:nvPr/>
+        </p:nvSpPr>
+        <p:spPr>
+          <a:xfrm>
+            <a:off x="11322284" y="3447928"/>
+            <a:ext cx="139537" cy="139537"/>
+          </a:xfrm>
+          <a:prstGeom prst="ellipse">
+            <a:avLst/>
+          </a:prstGeom>
+          <a:solidFill>
+            <a:srgbClr val="C9CFDC"/>
+          </a:solidFill>
+          <a:ln/>
+        </p:spPr>
+      </p:sp>
+      <p:sp>
+        <p:nvSpPr>
+          <p:cNvPr id="36" name="Shape 34"/>
+          <p:cNvSpPr/>
+          <p:nvPr/>
+        </p:nvSpPr>
+        <p:spPr>
+          <a:xfrm>
+            <a:off x="7676571" y="3647267"/>
+            <a:ext cx="139537" cy="139537"/>
+          </a:xfrm>
+          <a:prstGeom prst="ellipse">
+            <a:avLst/>
+          </a:prstGeom>
+          <a:solidFill>
+            <a:srgbClr val="C9CFDC"/>
+          </a:solidFill>
+          <a:ln/>
+        </p:spPr>
+      </p:sp>
+      <p:sp>
+        <p:nvSpPr>
+          <p:cNvPr id="37" name="Shape 35"/>
+          <p:cNvSpPr/>
+          <p:nvPr/>
+        </p:nvSpPr>
+        <p:spPr>
+          <a:xfrm>
+            <a:off x="8081650" y="3647267"/>
+            <a:ext cx="139537" cy="139537"/>
+          </a:xfrm>
+          <a:prstGeom prst="ellipse">
+            <a:avLst/>
+          </a:prstGeom>
+          <a:solidFill>
+            <a:srgbClr val="C9CFDC"/>
+          </a:solidFill>
+          <a:ln/>
+        </p:spPr>
+      </p:sp>
+      <p:sp>
+        <p:nvSpPr>
+          <p:cNvPr id="38" name="Shape 36"/>
+          <p:cNvSpPr/>
+          <p:nvPr/>
+        </p:nvSpPr>
+        <p:spPr>
+          <a:xfrm>
+            <a:off x="8486729" y="3647267"/>
+            <a:ext cx="139537" cy="139537"/>
+          </a:xfrm>
+          <a:prstGeom prst="ellipse">
+            <a:avLst/>
+          </a:prstGeom>
+          <a:solidFill>
+            <a:srgbClr val="C9CFDC"/>
+          </a:solidFill>
+          <a:ln/>
+        </p:spPr>
+      </p:sp>
+      <p:sp>
+        <p:nvSpPr>
+          <p:cNvPr id="39" name="Shape 37"/>
+          <p:cNvSpPr/>
+          <p:nvPr/>
+        </p:nvSpPr>
+        <p:spPr>
+          <a:xfrm>
+            <a:off x="8891808" y="3647267"/>
+            <a:ext cx="139537" cy="139537"/>
+          </a:xfrm>
+          <a:prstGeom prst="ellipse">
+            <a:avLst/>
+          </a:prstGeom>
+          <a:solidFill>
+            <a:srgbClr val="C9CFDC"/>
+          </a:solidFill>
+          <a:ln/>
+        </p:spPr>
+      </p:sp>
+      <p:sp>
+        <p:nvSpPr>
+          <p:cNvPr id="40" name="Shape 38"/>
+          <p:cNvSpPr/>
+          <p:nvPr/>
+        </p:nvSpPr>
+        <p:spPr>
+          <a:xfrm>
+            <a:off x="9296888" y="3647267"/>
+            <a:ext cx="139537" cy="139537"/>
+          </a:xfrm>
+          <a:prstGeom prst="ellipse">
+            <a:avLst/>
+          </a:prstGeom>
+          <a:solidFill>
+            <a:srgbClr val="C9CFDC"/>
+          </a:solidFill>
+          <a:ln/>
+        </p:spPr>
+      </p:sp>
+      <p:sp>
+        <p:nvSpPr>
+          <p:cNvPr id="41" name="Shape 39"/>
+          <p:cNvSpPr/>
+          <p:nvPr/>
+        </p:nvSpPr>
+        <p:spPr>
+          <a:xfrm>
+            <a:off x="9701967" y="3647267"/>
+            <a:ext cx="139537" cy="139537"/>
+          </a:xfrm>
+          <a:prstGeom prst="ellipse">
+            <a:avLst/>
+          </a:prstGeom>
+          <a:solidFill>
+            <a:srgbClr val="C9CFDC"/>
+          </a:solidFill>
+          <a:ln/>
+        </p:spPr>
+      </p:sp>
+      <p:sp>
+        <p:nvSpPr>
+          <p:cNvPr id="42" name="Shape 40"/>
+          <p:cNvSpPr/>
+          <p:nvPr/>
+        </p:nvSpPr>
+        <p:spPr>
+          <a:xfrm>
+            <a:off x="10107046" y="3647267"/>
+            <a:ext cx="139537" cy="139537"/>
+          </a:xfrm>
+          <a:prstGeom prst="ellipse">
+            <a:avLst/>
+          </a:prstGeom>
+          <a:solidFill>
+            <a:srgbClr val="C9CFDC"/>
+          </a:solidFill>
+          <a:ln/>
+        </p:spPr>
+      </p:sp>
+      <p:sp>
+        <p:nvSpPr>
+          <p:cNvPr id="43" name="Shape 41"/>
+          <p:cNvSpPr/>
+          <p:nvPr/>
+        </p:nvSpPr>
+        <p:spPr>
+          <a:xfrm>
+            <a:off x="10512125" y="3647267"/>
+            <a:ext cx="139537" cy="139537"/>
+          </a:xfrm>
+          <a:prstGeom prst="ellipse">
+            <a:avLst/>
+          </a:prstGeom>
+          <a:solidFill>
+            <a:srgbClr val="C9CFDC"/>
+          </a:solidFill>
+          <a:ln/>
+        </p:spPr>
+      </p:sp>
+      <p:sp>
+        <p:nvSpPr>
+          <p:cNvPr id="44" name="Shape 42"/>
+          <p:cNvSpPr/>
+          <p:nvPr/>
+        </p:nvSpPr>
+        <p:spPr>
+          <a:xfrm>
+            <a:off x="10917204" y="3647267"/>
+            <a:ext cx="139537" cy="139537"/>
+          </a:xfrm>
+          <a:prstGeom prst="ellipse">
+            <a:avLst/>
+          </a:prstGeom>
+          <a:solidFill>
+            <a:srgbClr val="C9CFDC"/>
+          </a:solidFill>
+          <a:ln/>
+        </p:spPr>
+      </p:sp>
+      <p:sp>
+        <p:nvSpPr>
+          <p:cNvPr id="45" name="Shape 43"/>
+          <p:cNvSpPr/>
+          <p:nvPr/>
+        </p:nvSpPr>
+        <p:spPr>
+          <a:xfrm>
+            <a:off x="11322284" y="3647267"/>
+            <a:ext cx="139537" cy="139537"/>
+          </a:xfrm>
+          <a:prstGeom prst="ellipse">
+            <a:avLst/>
+          </a:prstGeom>
+          <a:solidFill>
+            <a:srgbClr val="C9CFDC"/>
+          </a:solidFill>
+          <a:ln/>
+        </p:spPr>
+      </p:sp>
+      <p:sp>
+        <p:nvSpPr>
+          <p:cNvPr id="46" name="Shape 44"/>
+          <p:cNvSpPr/>
+          <p:nvPr/>
+        </p:nvSpPr>
+        <p:spPr>
+          <a:xfrm>
+            <a:off x="7676571" y="3846606"/>
+            <a:ext cx="139537" cy="139537"/>
+          </a:xfrm>
+          <a:prstGeom prst="ellipse">
+            <a:avLst/>
+          </a:prstGeom>
+          <a:solidFill>
+            <a:srgbClr val="C9CFDC"/>
+          </a:solidFill>
+          <a:ln/>
+        </p:spPr>
+      </p:sp>
+      <p:sp>
+        <p:nvSpPr>
+          <p:cNvPr id="47" name="Shape 45"/>
+          <p:cNvSpPr/>
+          <p:nvPr/>
+        </p:nvSpPr>
+        <p:spPr>
+          <a:xfrm>
+            <a:off x="8081650" y="3846606"/>
+            <a:ext cx="139537" cy="139537"/>
+          </a:xfrm>
+          <a:prstGeom prst="ellipse">
+            <a:avLst/>
+          </a:prstGeom>
+          <a:solidFill>
+            <a:srgbClr val="C9CFDC"/>
+          </a:solidFill>
+          <a:ln/>
+        </p:spPr>
+      </p:sp>
+      <p:sp>
+        <p:nvSpPr>
+          <p:cNvPr id="48" name="Shape 46"/>
+          <p:cNvSpPr/>
+          <p:nvPr/>
+        </p:nvSpPr>
+        <p:spPr>
+          <a:xfrm>
+            <a:off x="8486729" y="3846606"/>
+            <a:ext cx="139537" cy="139537"/>
+          </a:xfrm>
+          <a:prstGeom prst="ellipse">
+            <a:avLst/>
+          </a:prstGeom>
+          <a:solidFill>
+            <a:srgbClr val="C9CFDC"/>
+          </a:solidFill>
+          <a:ln/>
+        </p:spPr>
+      </p:sp>
+      <p:sp>
+        <p:nvSpPr>
+          <p:cNvPr id="49" name="Shape 47"/>
+          <p:cNvSpPr/>
+          <p:nvPr/>
+        </p:nvSpPr>
+        <p:spPr>
+          <a:xfrm>
+            <a:off x="8891808" y="3846606"/>
+            <a:ext cx="139537" cy="139537"/>
+          </a:xfrm>
+          <a:prstGeom prst="ellipse">
+            <a:avLst/>
+          </a:prstGeom>
+          <a:solidFill>
+            <a:srgbClr val="C9CFDC"/>
+          </a:solidFill>
+          <a:ln/>
+        </p:spPr>
+      </p:sp>
+      <p:sp>
+        <p:nvSpPr>
+          <p:cNvPr id="50" name="Shape 48"/>
+          <p:cNvSpPr/>
+          <p:nvPr/>
+        </p:nvSpPr>
+        <p:spPr>
+          <a:xfrm>
+            <a:off x="9296888" y="3846606"/>
+            <a:ext cx="139537" cy="139537"/>
+          </a:xfrm>
+          <a:prstGeom prst="ellipse">
+            <a:avLst/>
+          </a:prstGeom>
+          <a:solidFill>
+            <a:srgbClr val="C9CFDC"/>
+          </a:solidFill>
+          <a:ln/>
+        </p:spPr>
+      </p:sp>
+      <p:sp>
+        <p:nvSpPr>
+          <p:cNvPr id="51" name="Shape 49"/>
+          <p:cNvSpPr/>
+          <p:nvPr/>
+        </p:nvSpPr>
+        <p:spPr>
+          <a:xfrm>
+            <a:off x="9701967" y="3846606"/>
+            <a:ext cx="139537" cy="139537"/>
+          </a:xfrm>
+          <a:prstGeom prst="ellipse">
+            <a:avLst/>
+          </a:prstGeom>
+          <a:solidFill>
+            <a:srgbClr val="C9CFDC"/>
+          </a:solidFill>
+          <a:ln/>
+        </p:spPr>
+      </p:sp>
+      <p:sp>
+        <p:nvSpPr>
+          <p:cNvPr id="52" name="Shape 50"/>
+          <p:cNvSpPr/>
+          <p:nvPr/>
+        </p:nvSpPr>
+        <p:spPr>
+          <a:xfrm>
+            <a:off x="10107046" y="3846606"/>
+            <a:ext cx="139537" cy="139537"/>
+          </a:xfrm>
+          <a:prstGeom prst="ellipse">
+            <a:avLst/>
+          </a:prstGeom>
+          <a:solidFill>
+            <a:srgbClr val="C9CFDC"/>
+          </a:solidFill>
+          <a:ln/>
+        </p:spPr>
+      </p:sp>
+      <p:sp>
+        <p:nvSpPr>
+          <p:cNvPr id="53" name="Shape 51"/>
+          <p:cNvSpPr/>
+          <p:nvPr/>
+        </p:nvSpPr>
+        <p:spPr>
+          <a:xfrm>
+            <a:off x="10512125" y="3846606"/>
+            <a:ext cx="139537" cy="139537"/>
+          </a:xfrm>
+          <a:prstGeom prst="ellipse">
+            <a:avLst/>
+          </a:prstGeom>
+          <a:solidFill>
+            <a:srgbClr val="C9CFDC"/>
+          </a:solidFill>
+          <a:ln/>
+        </p:spPr>
+      </p:sp>
+      <p:sp>
+        <p:nvSpPr>
+          <p:cNvPr id="54" name="Shape 52"/>
+          <p:cNvSpPr/>
+          <p:nvPr/>
+        </p:nvSpPr>
+        <p:spPr>
+          <a:xfrm>
+            <a:off x="10917204" y="3846606"/>
+            <a:ext cx="139537" cy="139537"/>
+          </a:xfrm>
+          <a:prstGeom prst="ellipse">
+            <a:avLst/>
+          </a:prstGeom>
+          <a:solidFill>
+            <a:srgbClr val="C9CFDC"/>
+          </a:solidFill>
+          <a:ln/>
+        </p:spPr>
+      </p:sp>
+      <p:sp>
+        <p:nvSpPr>
+          <p:cNvPr id="55" name="Shape 53"/>
+          <p:cNvSpPr/>
+          <p:nvPr/>
+        </p:nvSpPr>
+        <p:spPr>
+          <a:xfrm>
+            <a:off x="11322284" y="3846606"/>
+            <a:ext cx="139537" cy="139537"/>
+          </a:xfrm>
+          <a:prstGeom prst="ellipse">
+            <a:avLst/>
+          </a:prstGeom>
+          <a:solidFill>
+            <a:srgbClr val="C9CFDC"/>
+          </a:solidFill>
+          <a:ln/>
+        </p:spPr>
+      </p:sp>
+      <p:sp>
+        <p:nvSpPr>
+          <p:cNvPr id="56" name="Shape 54"/>
+          <p:cNvSpPr/>
+          <p:nvPr/>
+        </p:nvSpPr>
+        <p:spPr>
+          <a:xfrm>
+            <a:off x="7676571" y="4045946"/>
+            <a:ext cx="139537" cy="139537"/>
+          </a:xfrm>
+          <a:prstGeom prst="ellipse">
+            <a:avLst/>
+          </a:prstGeom>
+          <a:solidFill>
+            <a:srgbClr val="C9CFDC"/>
+          </a:solidFill>
+          <a:ln/>
+        </p:spPr>
+      </p:sp>
+      <p:sp>
+        <p:nvSpPr>
+          <p:cNvPr id="57" name="Shape 55"/>
+          <p:cNvSpPr/>
+          <p:nvPr/>
+        </p:nvSpPr>
+        <p:spPr>
+          <a:xfrm>
+            <a:off x="8081650" y="4045946"/>
+            <a:ext cx="139537" cy="139537"/>
+          </a:xfrm>
+          <a:prstGeom prst="ellipse">
+            <a:avLst/>
+          </a:prstGeom>
+          <a:solidFill>
+            <a:srgbClr val="C9CFDC"/>
+          </a:solidFill>
+          <a:ln/>
+        </p:spPr>
+      </p:sp>
+      <p:sp>
+        <p:nvSpPr>
+          <p:cNvPr id="58" name="Shape 56"/>
+          <p:cNvSpPr/>
+          <p:nvPr/>
+        </p:nvSpPr>
+        <p:spPr>
+          <a:xfrm>
+            <a:off x="8486729" y="4045946"/>
+            <a:ext cx="139537" cy="139537"/>
+          </a:xfrm>
+          <a:prstGeom prst="ellipse">
+            <a:avLst/>
+          </a:prstGeom>
+          <a:solidFill>
+            <a:srgbClr val="C9CFDC"/>
+          </a:solidFill>
+          <a:ln/>
+        </p:spPr>
+      </p:sp>
+      <p:sp>
+        <p:nvSpPr>
+          <p:cNvPr id="59" name="Shape 57"/>
+          <p:cNvSpPr/>
+          <p:nvPr/>
+        </p:nvSpPr>
+        <p:spPr>
+          <a:xfrm>
+            <a:off x="8891808" y="4045946"/>
+            <a:ext cx="139537" cy="139537"/>
+          </a:xfrm>
+          <a:prstGeom prst="ellipse">
+            <a:avLst/>
+          </a:prstGeom>
+          <a:solidFill>
+            <a:srgbClr val="C9CFDC"/>
+          </a:solidFill>
+          <a:ln/>
+        </p:spPr>
+      </p:sp>
+      <p:sp>
+        <p:nvSpPr>
+          <p:cNvPr id="60" name="Shape 58"/>
+          <p:cNvSpPr/>
+          <p:nvPr/>
+        </p:nvSpPr>
+        <p:spPr>
+          <a:xfrm>
+            <a:off x="9296888" y="4045946"/>
+            <a:ext cx="139537" cy="139537"/>
+          </a:xfrm>
+          <a:prstGeom prst="ellipse">
+            <a:avLst/>
+          </a:prstGeom>
+          <a:solidFill>
+            <a:srgbClr val="C9CFDC"/>
+          </a:solidFill>
+          <a:ln/>
+        </p:spPr>
+      </p:sp>
+      <p:sp>
+        <p:nvSpPr>
+          <p:cNvPr id="61" name="Shape 59"/>
+          <p:cNvSpPr/>
+          <p:nvPr/>
+        </p:nvSpPr>
+        <p:spPr>
+          <a:xfrm>
+            <a:off x="9701967" y="4045946"/>
+            <a:ext cx="139537" cy="139537"/>
+          </a:xfrm>
+          <a:prstGeom prst="ellipse">
+            <a:avLst/>
+          </a:prstGeom>
+          <a:solidFill>
+            <a:srgbClr val="C9CFDC"/>
+          </a:solidFill>
+          <a:ln/>
+        </p:spPr>
+      </p:sp>
+      <p:sp>
+        <p:nvSpPr>
+          <p:cNvPr id="62" name="Shape 60"/>
+          <p:cNvSpPr/>
+          <p:nvPr/>
+        </p:nvSpPr>
+        <p:spPr>
+          <a:xfrm>
+            <a:off x="10107046" y="4045946"/>
+            <a:ext cx="139537" cy="139537"/>
+          </a:xfrm>
+          <a:prstGeom prst="ellipse">
+            <a:avLst/>
+          </a:prstGeom>
+          <a:solidFill>
+            <a:srgbClr val="C9CFDC"/>
+          </a:solidFill>
+          <a:ln/>
+        </p:spPr>
+      </p:sp>
+      <p:sp>
+        <p:nvSpPr>
+          <p:cNvPr id="63" name="Shape 61"/>
+          <p:cNvSpPr/>
+          <p:nvPr/>
+        </p:nvSpPr>
+        <p:spPr>
+          <a:xfrm>
+            <a:off x="10512125" y="4045946"/>
+            <a:ext cx="139537" cy="139537"/>
+          </a:xfrm>
+          <a:prstGeom prst="ellipse">
+            <a:avLst/>
+          </a:prstGeom>
+          <a:solidFill>
+            <a:srgbClr val="C9CFDC"/>
+          </a:solidFill>
+          <a:ln/>
+        </p:spPr>
+      </p:sp>
+      <p:sp>
+        <p:nvSpPr>
+          <p:cNvPr id="64" name="Shape 62"/>
+          <p:cNvSpPr/>
+          <p:nvPr/>
+        </p:nvSpPr>
+        <p:spPr>
+          <a:xfrm>
+            <a:off x="10917204" y="4045946"/>
+            <a:ext cx="139537" cy="139537"/>
+          </a:xfrm>
+          <a:prstGeom prst="ellipse">
+            <a:avLst/>
+          </a:prstGeom>
+          <a:solidFill>
+            <a:srgbClr val="C9CFDC"/>
+          </a:solidFill>
+          <a:ln/>
+        </p:spPr>
+      </p:sp>
+      <p:sp>
+        <p:nvSpPr>
+          <p:cNvPr id="65" name="Shape 63"/>
+          <p:cNvSpPr/>
+          <p:nvPr/>
+        </p:nvSpPr>
+        <p:spPr>
+          <a:xfrm>
+            <a:off x="11322284" y="4045946"/>
+            <a:ext cx="139537" cy="139537"/>
+          </a:xfrm>
+          <a:prstGeom prst="ellipse">
+            <a:avLst/>
+          </a:prstGeom>
+          <a:solidFill>
+            <a:srgbClr val="C9CFDC"/>
+          </a:solidFill>
+          <a:ln/>
+        </p:spPr>
+      </p:sp>
+      <p:sp>
+        <p:nvSpPr>
+          <p:cNvPr id="66" name="Shape 64"/>
+          <p:cNvSpPr/>
+          <p:nvPr/>
+        </p:nvSpPr>
+        <p:spPr>
+          <a:xfrm>
+            <a:off x="7676571" y="4245285"/>
+            <a:ext cx="139537" cy="139537"/>
+          </a:xfrm>
+          <a:prstGeom prst="ellipse">
+            <a:avLst/>
+          </a:prstGeom>
+          <a:solidFill>
+            <a:srgbClr val="C9CFDC"/>
+          </a:solidFill>
+          <a:ln/>
+        </p:spPr>
+      </p:sp>
+      <p:sp>
+        <p:nvSpPr>
+          <p:cNvPr id="67" name="Shape 65"/>
+          <p:cNvSpPr/>
+          <p:nvPr/>
+        </p:nvSpPr>
+        <p:spPr>
+          <a:xfrm>
+            <a:off x="8081650" y="4245285"/>
+            <a:ext cx="139537" cy="139537"/>
+          </a:xfrm>
+          <a:prstGeom prst="ellipse">
+            <a:avLst/>
+          </a:prstGeom>
+          <a:solidFill>
+            <a:srgbClr val="C9CFDC"/>
+          </a:solidFill>
+          <a:ln/>
+        </p:spPr>
+      </p:sp>
+      <p:sp>
+        <p:nvSpPr>
+          <p:cNvPr id="68" name="Shape 66"/>
+          <p:cNvSpPr/>
+          <p:nvPr/>
+        </p:nvSpPr>
+        <p:spPr>
+          <a:xfrm>
+            <a:off x="8486729" y="4245285"/>
+            <a:ext cx="139537" cy="139537"/>
+          </a:xfrm>
+          <a:prstGeom prst="ellipse">
+            <a:avLst/>
+          </a:prstGeom>
+          <a:solidFill>
+            <a:srgbClr val="C9CFDC"/>
+          </a:solidFill>
+          <a:ln/>
+        </p:spPr>
+      </p:sp>
+      <p:sp>
+        <p:nvSpPr>
+          <p:cNvPr id="69" name="Shape 67"/>
+          <p:cNvSpPr/>
+          <p:nvPr/>
+        </p:nvSpPr>
+        <p:spPr>
+          <a:xfrm>
+            <a:off x="8891808" y="4245285"/>
+            <a:ext cx="139537" cy="139537"/>
+          </a:xfrm>
+          <a:prstGeom prst="ellipse">
+            <a:avLst/>
+          </a:prstGeom>
+          <a:solidFill>
+            <a:srgbClr val="C9CFDC"/>
+          </a:solidFill>
+          <a:ln/>
+        </p:spPr>
+      </p:sp>
+      <p:sp>
+        <p:nvSpPr>
+          <p:cNvPr id="70" name="Shape 68"/>
+          <p:cNvSpPr/>
+          <p:nvPr/>
+        </p:nvSpPr>
+        <p:spPr>
+          <a:xfrm>
+            <a:off x="9296888" y="4245285"/>
+            <a:ext cx="139537" cy="139537"/>
+          </a:xfrm>
+          <a:prstGeom prst="ellipse">
+            <a:avLst/>
+          </a:prstGeom>
+          <a:solidFill>
+            <a:srgbClr val="C9CFDC"/>
+          </a:solidFill>
+          <a:ln/>
+        </p:spPr>
+      </p:sp>
+      <p:sp>
+        <p:nvSpPr>
+          <p:cNvPr id="71" name="Shape 69"/>
+          <p:cNvSpPr/>
+          <p:nvPr/>
+        </p:nvSpPr>
+        <p:spPr>
+          <a:xfrm>
+            <a:off x="9701967" y="4245285"/>
+            <a:ext cx="139537" cy="139537"/>
+          </a:xfrm>
+          <a:prstGeom prst="ellipse">
+            <a:avLst/>
+          </a:prstGeom>
+          <a:solidFill>
+            <a:srgbClr val="C9CFDC"/>
+          </a:solidFill>
+          <a:ln/>
+        </p:spPr>
+      </p:sp>
+      <p:sp>
+        <p:nvSpPr>
+          <p:cNvPr id="72" name="Shape 70"/>
+          <p:cNvSpPr/>
+          <p:nvPr/>
+        </p:nvSpPr>
+        <p:spPr>
+          <a:xfrm>
+            <a:off x="10107046" y="4245285"/>
+            <a:ext cx="139537" cy="139537"/>
+          </a:xfrm>
+          <a:prstGeom prst="ellipse">
+            <a:avLst/>
+          </a:prstGeom>
+          <a:solidFill>
+            <a:srgbClr val="C9CFDC"/>
+          </a:solidFill>
+          <a:ln/>
+        </p:spPr>
+      </p:sp>
+      <p:sp>
+        <p:nvSpPr>
+          <p:cNvPr id="73" name="Shape 71"/>
+          <p:cNvSpPr/>
+          <p:nvPr/>
+        </p:nvSpPr>
+        <p:spPr>
+          <a:xfrm>
+            <a:off x="10512125" y="4245285"/>
+            <a:ext cx="139537" cy="139537"/>
+          </a:xfrm>
+          <a:prstGeom prst="ellipse">
+            <a:avLst/>
+          </a:prstGeom>
+          <a:solidFill>
+            <a:srgbClr val="C9CFDC"/>
+          </a:solidFill>
+          <a:ln/>
+        </p:spPr>
+      </p:sp>
+      <p:sp>
+        <p:nvSpPr>
+          <p:cNvPr id="74" name="Shape 72"/>
+          <p:cNvSpPr/>
+          <p:nvPr/>
+        </p:nvSpPr>
+        <p:spPr>
+          <a:xfrm>
+            <a:off x="10917204" y="4245285"/>
+            <a:ext cx="139537" cy="139537"/>
+          </a:xfrm>
+          <a:prstGeom prst="ellipse">
+            <a:avLst/>
+          </a:prstGeom>
+          <a:solidFill>
+            <a:srgbClr val="C9CFDC"/>
+          </a:solidFill>
+          <a:ln/>
+        </p:spPr>
+      </p:sp>
+      <p:sp>
+        <p:nvSpPr>
+          <p:cNvPr id="75" name="Shape 73"/>
+          <p:cNvSpPr/>
+          <p:nvPr/>
+        </p:nvSpPr>
+        <p:spPr>
+          <a:xfrm>
+            <a:off x="11322284" y="4245285"/>
+            <a:ext cx="139537" cy="139537"/>
+          </a:xfrm>
+          <a:prstGeom prst="ellipse">
+            <a:avLst/>
+          </a:prstGeom>
+          <a:solidFill>
+            <a:srgbClr val="C9CFDC"/>
+          </a:solidFill>
+          <a:ln/>
+        </p:spPr>
+      </p:sp>
+      <p:sp>
+        <p:nvSpPr>
+          <p:cNvPr id="76" name="Shape 74"/>
+          <p:cNvSpPr/>
+          <p:nvPr/>
+        </p:nvSpPr>
+        <p:spPr>
+          <a:xfrm>
+            <a:off x="7676571" y="4444624"/>
+            <a:ext cx="139537" cy="139537"/>
+          </a:xfrm>
+          <a:prstGeom prst="ellipse">
+            <a:avLst/>
+          </a:prstGeom>
+          <a:solidFill>
+            <a:srgbClr val="C9CFDC"/>
+          </a:solidFill>
+          <a:ln/>
+        </p:spPr>
+      </p:sp>
+      <p:sp>
+        <p:nvSpPr>
+          <p:cNvPr id="77" name="Shape 75"/>
+          <p:cNvSpPr/>
+          <p:nvPr/>
+        </p:nvSpPr>
+        <p:spPr>
+          <a:xfrm>
+            <a:off x="8081650" y="4444624"/>
+            <a:ext cx="139537" cy="139537"/>
+          </a:xfrm>
+          <a:prstGeom prst="ellipse">
+            <a:avLst/>
+          </a:prstGeom>
+          <a:solidFill>
+            <a:srgbClr val="C9CFDC"/>
+          </a:solidFill>
+          <a:ln/>
+        </p:spPr>
+      </p:sp>
+      <p:sp>
+        <p:nvSpPr>
+          <p:cNvPr id="78" name="Shape 76"/>
+          <p:cNvSpPr/>
+          <p:nvPr/>
+        </p:nvSpPr>
+        <p:spPr>
+          <a:xfrm>
+            <a:off x="8486729" y="4444624"/>
+            <a:ext cx="139537" cy="139537"/>
+          </a:xfrm>
+          <a:prstGeom prst="ellipse">
+            <a:avLst/>
+          </a:prstGeom>
+          <a:solidFill>
+            <a:srgbClr val="C9CFDC"/>
+          </a:solidFill>
+          <a:ln/>
+        </p:spPr>
+      </p:sp>
+      <p:sp>
+        <p:nvSpPr>
+          <p:cNvPr id="79" name="Shape 77"/>
+          <p:cNvSpPr/>
+          <p:nvPr/>
+        </p:nvSpPr>
+        <p:spPr>
+          <a:xfrm>
+            <a:off x="8891808" y="4444624"/>
+            <a:ext cx="139537" cy="139537"/>
+          </a:xfrm>
+          <a:prstGeom prst="ellipse">
+            <a:avLst/>
+          </a:prstGeom>
+          <a:solidFill>
+            <a:srgbClr val="C9CFDC"/>
+          </a:solidFill>
+          <a:ln/>
+        </p:spPr>
+      </p:sp>
+      <p:sp>
+        <p:nvSpPr>
+          <p:cNvPr id="80" name="Shape 78"/>
+          <p:cNvSpPr/>
+          <p:nvPr/>
+        </p:nvSpPr>
+        <p:spPr>
+          <a:xfrm>
+            <a:off x="9296888" y="4444624"/>
+            <a:ext cx="139537" cy="139537"/>
+          </a:xfrm>
+          <a:prstGeom prst="ellipse">
+            <a:avLst/>
+          </a:prstGeom>
+          <a:solidFill>
+            <a:srgbClr val="C9CFDC"/>
+          </a:solidFill>
+          <a:ln/>
+        </p:spPr>
+      </p:sp>
+      <p:sp>
+        <p:nvSpPr>
+          <p:cNvPr id="81" name="Shape 79"/>
+          <p:cNvSpPr/>
+          <p:nvPr/>
+        </p:nvSpPr>
+        <p:spPr>
+          <a:xfrm>
+            <a:off x="9701967" y="4444624"/>
+            <a:ext cx="139537" cy="139537"/>
+          </a:xfrm>
+          <a:prstGeom prst="ellipse">
+            <a:avLst/>
+          </a:prstGeom>
+          <a:solidFill>
+            <a:srgbClr val="0E1729"/>
+          </a:solidFill>
+          <a:ln/>
+        </p:spPr>
+      </p:sp>
+      <p:sp>
+        <p:nvSpPr>
+          <p:cNvPr id="82" name="Shape 80"/>
+          <p:cNvSpPr/>
+          <p:nvPr/>
+        </p:nvSpPr>
+        <p:spPr>
+          <a:xfrm>
+            <a:off x="10107046" y="4444624"/>
+            <a:ext cx="139537" cy="139537"/>
+          </a:xfrm>
+          <a:prstGeom prst="ellipse">
+            <a:avLst/>
+          </a:prstGeom>
+          <a:solidFill>
+            <a:srgbClr val="0E1729"/>
+          </a:solidFill>
+          <a:ln/>
+        </p:spPr>
+      </p:sp>
+      <p:sp>
+        <p:nvSpPr>
+          <p:cNvPr id="83" name="Shape 81"/>
+          <p:cNvSpPr/>
+          <p:nvPr/>
+        </p:nvSpPr>
+        <p:spPr>
+          <a:xfrm>
+            <a:off x="10512125" y="4444624"/>
+            <a:ext cx="139537" cy="139537"/>
+          </a:xfrm>
+          <a:prstGeom prst="ellipse">
+            <a:avLst/>
+          </a:prstGeom>
+          <a:solidFill>
+            <a:srgbClr val="0E1729"/>
+          </a:solidFill>
+          <a:ln/>
+        </p:spPr>
+      </p:sp>
+      <p:sp>
+        <p:nvSpPr>
+          <p:cNvPr id="84" name="Shape 82"/>
+          <p:cNvSpPr/>
+          <p:nvPr/>
+        </p:nvSpPr>
+        <p:spPr>
+          <a:xfrm>
+            <a:off x="10917204" y="4444624"/>
+            <a:ext cx="139537" cy="139537"/>
+          </a:xfrm>
+          <a:prstGeom prst="ellipse">
+            <a:avLst/>
+          </a:prstGeom>
+          <a:solidFill>
+            <a:srgbClr val="0E1729"/>
+          </a:solidFill>
+          <a:ln/>
+        </p:spPr>
+      </p:sp>
+      <p:sp>
+        <p:nvSpPr>
+          <p:cNvPr id="85" name="Shape 83"/>
+          <p:cNvSpPr/>
+          <p:nvPr/>
+        </p:nvSpPr>
+        <p:spPr>
+          <a:xfrm>
+            <a:off x="11322284" y="4444624"/>
+            <a:ext cx="139537" cy="139537"/>
+          </a:xfrm>
+          <a:prstGeom prst="ellipse">
+            <a:avLst/>
+          </a:prstGeom>
+          <a:solidFill>
+            <a:srgbClr val="0E1729"/>
+          </a:solidFill>
+          <a:ln/>
+        </p:spPr>
+      </p:sp>
+      <p:sp>
+        <p:nvSpPr>
+          <p:cNvPr id="86" name="Shape 84"/>
+          <p:cNvSpPr/>
+          <p:nvPr/>
+        </p:nvSpPr>
+        <p:spPr>
+          <a:xfrm>
+            <a:off x="7676571" y="4643963"/>
+            <a:ext cx="139537" cy="139537"/>
+          </a:xfrm>
+          <a:prstGeom prst="ellipse">
+            <a:avLst/>
+          </a:prstGeom>
+          <a:solidFill>
+            <a:srgbClr val="0E1729"/>
+          </a:solidFill>
+          <a:ln/>
+        </p:spPr>
+      </p:sp>
+      <p:sp>
+        <p:nvSpPr>
+          <p:cNvPr id="87" name="Shape 85"/>
+          <p:cNvSpPr/>
+          <p:nvPr/>
+        </p:nvSpPr>
+        <p:spPr>
+          <a:xfrm>
+            <a:off x="8081650" y="4643963"/>
+            <a:ext cx="139537" cy="139537"/>
+          </a:xfrm>
+          <a:prstGeom prst="ellipse">
+            <a:avLst/>
+          </a:prstGeom>
+          <a:solidFill>
+            <a:srgbClr val="0E1729"/>
+          </a:solidFill>
+          <a:ln/>
+        </p:spPr>
+      </p:sp>
+      <p:sp>
+        <p:nvSpPr>
+          <p:cNvPr id="88" name="Shape 86"/>
+          <p:cNvSpPr/>
+          <p:nvPr/>
+        </p:nvSpPr>
+        <p:spPr>
+          <a:xfrm>
+            <a:off x="8486729" y="4643963"/>
+            <a:ext cx="139537" cy="139537"/>
+          </a:xfrm>
+          <a:prstGeom prst="ellipse">
+            <a:avLst/>
+          </a:prstGeom>
+          <a:solidFill>
+            <a:srgbClr val="0E1729"/>
+          </a:solidFill>
+          <a:ln/>
+        </p:spPr>
+      </p:sp>
+      <p:sp>
+        <p:nvSpPr>
+          <p:cNvPr id="89" name="Shape 87"/>
+          <p:cNvSpPr/>
+          <p:nvPr/>
+        </p:nvSpPr>
+        <p:spPr>
+          <a:xfrm>
+            <a:off x="8891808" y="4643963"/>
+            <a:ext cx="139537" cy="139537"/>
+          </a:xfrm>
+          <a:prstGeom prst="ellipse">
+            <a:avLst/>
+          </a:prstGeom>
+          <a:solidFill>
+            <a:srgbClr val="0E1729"/>
+          </a:solidFill>
+          <a:ln/>
+        </p:spPr>
+      </p:sp>
+      <p:sp>
+        <p:nvSpPr>
+          <p:cNvPr id="90" name="Shape 88"/>
+          <p:cNvSpPr/>
+          <p:nvPr/>
+        </p:nvSpPr>
+        <p:spPr>
+          <a:xfrm>
+            <a:off x="9296888" y="4643963"/>
+            <a:ext cx="139537" cy="139537"/>
+          </a:xfrm>
+          <a:prstGeom prst="ellipse">
+            <a:avLst/>
+          </a:prstGeom>
+          <a:solidFill>
+            <a:srgbClr val="0E1729"/>
+          </a:solidFill>
+          <a:ln/>
+        </p:spPr>
+      </p:sp>
+      <p:sp>
+        <p:nvSpPr>
+          <p:cNvPr id="91" name="Shape 89"/>
+          <p:cNvSpPr/>
+          <p:nvPr/>
+        </p:nvSpPr>
+        <p:spPr>
+          <a:xfrm>
+            <a:off x="9701967" y="4643963"/>
+            <a:ext cx="139537" cy="139537"/>
+          </a:xfrm>
+          <a:prstGeom prst="ellipse">
+            <a:avLst/>
+          </a:prstGeom>
+          <a:solidFill>
+            <a:srgbClr val="0E1729"/>
+          </a:solidFill>
+          <a:ln/>
+        </p:spPr>
+      </p:sp>
+      <p:sp>
+        <p:nvSpPr>
+          <p:cNvPr id="92" name="Shape 90"/>
+          <p:cNvSpPr/>
+          <p:nvPr/>
+        </p:nvSpPr>
+        <p:spPr>
+          <a:xfrm>
+            <a:off x="10107046" y="4643963"/>
+            <a:ext cx="139537" cy="139537"/>
+          </a:xfrm>
+          <a:prstGeom prst="ellipse">
+            <a:avLst/>
+          </a:prstGeom>
+          <a:solidFill>
+            <a:srgbClr val="0E1729"/>
+          </a:solidFill>
+          <a:ln/>
+        </p:spPr>
+      </p:sp>
+      <p:sp>
+        <p:nvSpPr>
+          <p:cNvPr id="93" name="Shape 91"/>
+          <p:cNvSpPr/>
+          <p:nvPr/>
+        </p:nvSpPr>
+        <p:spPr>
+          <a:xfrm>
+            <a:off x="10512125" y="4643963"/>
+            <a:ext cx="139537" cy="139537"/>
+          </a:xfrm>
+          <a:prstGeom prst="ellipse">
+            <a:avLst/>
+          </a:prstGeom>
+          <a:solidFill>
+            <a:srgbClr val="0E1729"/>
+          </a:solidFill>
+          <a:ln/>
+        </p:spPr>
+      </p:sp>
+      <p:sp>
+        <p:nvSpPr>
+          <p:cNvPr id="94" name="Shape 92"/>
+          <p:cNvSpPr/>
+          <p:nvPr/>
+        </p:nvSpPr>
+        <p:spPr>
+          <a:xfrm>
+            <a:off x="10917204" y="4643963"/>
+            <a:ext cx="139537" cy="139537"/>
+          </a:xfrm>
+          <a:prstGeom prst="ellipse">
+            <a:avLst/>
+          </a:prstGeom>
+          <a:solidFill>
+            <a:srgbClr val="0E1729"/>
+          </a:solidFill>
+          <a:ln/>
+        </p:spPr>
+      </p:sp>
+      <p:sp>
+        <p:nvSpPr>
+          <p:cNvPr id="95" name="Shape 93"/>
+          <p:cNvSpPr/>
+          <p:nvPr/>
+        </p:nvSpPr>
+        <p:spPr>
+          <a:xfrm>
+            <a:off x="11322284" y="4643963"/>
+            <a:ext cx="139537" cy="139537"/>
+          </a:xfrm>
+          <a:prstGeom prst="ellipse">
+            <a:avLst/>
+          </a:prstGeom>
+          <a:solidFill>
+            <a:srgbClr val="0E1729"/>
+          </a:solidFill>
+          <a:ln/>
+        </p:spPr>
+      </p:sp>
+      <p:sp>
+        <p:nvSpPr>
+          <p:cNvPr id="96" name="Shape 94"/>
+          <p:cNvSpPr/>
+          <p:nvPr/>
+        </p:nvSpPr>
+        <p:spPr>
+          <a:xfrm>
+            <a:off x="7676571" y="4843302"/>
+            <a:ext cx="139537" cy="139537"/>
+          </a:xfrm>
+          <a:prstGeom prst="ellipse">
+            <a:avLst/>
+          </a:prstGeom>
+          <a:solidFill>
+            <a:srgbClr val="0E1729"/>
+          </a:solidFill>
+          <a:ln/>
+        </p:spPr>
+      </p:sp>
+      <p:sp>
+        <p:nvSpPr>
+          <p:cNvPr id="97" name="Shape 95"/>
+          <p:cNvSpPr/>
+          <p:nvPr/>
+        </p:nvSpPr>
+        <p:spPr>
+          <a:xfrm>
+            <a:off x="8081650" y="4843302"/>
+            <a:ext cx="139537" cy="139537"/>
+          </a:xfrm>
+          <a:prstGeom prst="ellipse">
+            <a:avLst/>
+          </a:prstGeom>
+          <a:solidFill>
+            <a:srgbClr val="0E1729"/>
+          </a:solidFill>
+          <a:ln/>
+        </p:spPr>
+      </p:sp>
+      <p:sp>
+        <p:nvSpPr>
+          <p:cNvPr id="98" name="Shape 96"/>
+          <p:cNvSpPr/>
+          <p:nvPr/>
+        </p:nvSpPr>
+        <p:spPr>
+          <a:xfrm>
+            <a:off x="8486729" y="4843302"/>
+            <a:ext cx="139537" cy="139537"/>
+          </a:xfrm>
+          <a:prstGeom prst="ellipse">
+            <a:avLst/>
+          </a:prstGeom>
+          <a:solidFill>
+            <a:srgbClr val="0E1729"/>
+          </a:solidFill>
+          <a:ln/>
+        </p:spPr>
+      </p:sp>
+      <p:sp>
+        <p:nvSpPr>
+          <p:cNvPr id="99" name="Shape 97"/>
+          <p:cNvSpPr/>
+          <p:nvPr/>
+        </p:nvSpPr>
+        <p:spPr>
+          <a:xfrm>
+            <a:off x="8891808" y="4843302"/>
+            <a:ext cx="139537" cy="139537"/>
+          </a:xfrm>
+          <a:prstGeom prst="ellipse">
+            <a:avLst/>
+          </a:prstGeom>
+          <a:solidFill>
+            <a:srgbClr val="0E1729"/>
+          </a:solidFill>
+          <a:ln/>
+        </p:spPr>
+      </p:sp>
+      <p:sp>
+        <p:nvSpPr>
+          <p:cNvPr id="100" name="Shape 98"/>
+          <p:cNvSpPr/>
+          <p:nvPr/>
+        </p:nvSpPr>
+        <p:spPr>
+          <a:xfrm>
+            <a:off x="9296888" y="4843302"/>
+            <a:ext cx="139537" cy="139537"/>
+          </a:xfrm>
+          <a:prstGeom prst="ellipse">
+            <a:avLst/>
+          </a:prstGeom>
+          <a:solidFill>
+            <a:srgbClr val="0E1729"/>
+          </a:solidFill>
+          <a:ln/>
+        </p:spPr>
+      </p:sp>
+      <p:sp>
+        <p:nvSpPr>
+          <p:cNvPr id="101" name="Shape 99"/>
+          <p:cNvSpPr/>
+          <p:nvPr/>
+        </p:nvSpPr>
+        <p:spPr>
+          <a:xfrm>
+            <a:off x="9701967" y="4843302"/>
+            <a:ext cx="139537" cy="139537"/>
+          </a:xfrm>
+          <a:prstGeom prst="ellipse">
+            <a:avLst/>
+          </a:prstGeom>
+          <a:solidFill>
+            <a:srgbClr val="0E1729"/>
+          </a:solidFill>
+          <a:ln/>
+        </p:spPr>
+      </p:sp>
+      <p:sp>
+        <p:nvSpPr>
+          <p:cNvPr id="102" name="Shape 100"/>
+          <p:cNvSpPr/>
+          <p:nvPr/>
+        </p:nvSpPr>
+        <p:spPr>
+          <a:xfrm>
+            <a:off x="10107046" y="4843302"/>
+            <a:ext cx="139537" cy="139537"/>
+          </a:xfrm>
+          <a:prstGeom prst="ellipse">
+            <a:avLst/>
+          </a:prstGeom>
+          <a:solidFill>
+            <a:srgbClr val="0E1729"/>
+          </a:solidFill>
+          <a:ln/>
+        </p:spPr>
+      </p:sp>
+      <p:sp>
+        <p:nvSpPr>
+          <p:cNvPr id="103" name="Shape 101"/>
+          <p:cNvSpPr/>
+          <p:nvPr/>
+        </p:nvSpPr>
+        <p:spPr>
+          <a:xfrm>
+            <a:off x="10512125" y="4843302"/>
+            <a:ext cx="139537" cy="139537"/>
+          </a:xfrm>
+          <a:prstGeom prst="ellipse">
+            <a:avLst/>
+          </a:prstGeom>
+          <a:solidFill>
+            <a:srgbClr val="0E1729"/>
+          </a:solidFill>
+          <a:ln/>
+        </p:spPr>
+      </p:sp>
+      <p:sp>
+        <p:nvSpPr>
+          <p:cNvPr id="104" name="Shape 102"/>
+          <p:cNvSpPr/>
+          <p:nvPr/>
+        </p:nvSpPr>
+        <p:spPr>
+          <a:xfrm>
+            <a:off x="10917204" y="4843302"/>
+            <a:ext cx="139537" cy="139537"/>
+          </a:xfrm>
+          <a:prstGeom prst="ellipse">
+            <a:avLst/>
+          </a:prstGeom>
+          <a:solidFill>
+            <a:srgbClr val="0E1729"/>
+          </a:solidFill>
+          <a:ln/>
+        </p:spPr>
+      </p:sp>
+      <p:sp>
+        <p:nvSpPr>
+          <p:cNvPr id="105" name="Shape 103"/>
+          <p:cNvSpPr/>
+          <p:nvPr/>
+        </p:nvSpPr>
+        <p:spPr>
+          <a:xfrm>
+            <a:off x="11322284" y="4843302"/>
+            <a:ext cx="139537" cy="139537"/>
+          </a:xfrm>
+          <a:prstGeom prst="ellipse">
+            <a:avLst/>
+          </a:prstGeom>
+          <a:solidFill>
+            <a:srgbClr val="0E1729"/>
+          </a:solidFill>
+          <a:ln/>
+        </p:spPr>
+      </p:sp>
+      <p:sp>
+        <p:nvSpPr>
+          <p:cNvPr id="106" name="Shape 104"/>
+          <p:cNvSpPr/>
+          <p:nvPr/>
+        </p:nvSpPr>
+        <p:spPr>
+          <a:xfrm>
+            <a:off x="7676571" y="5042642"/>
+            <a:ext cx="139537" cy="139537"/>
+          </a:xfrm>
+          <a:prstGeom prst="ellipse">
+            <a:avLst/>
+          </a:prstGeom>
+          <a:solidFill>
+            <a:srgbClr val="F09042"/>
+          </a:solidFill>
+          <a:ln/>
+        </p:spPr>
+      </p:sp>
+      <p:sp>
+        <p:nvSpPr>
+          <p:cNvPr id="107" name="Shape 105"/>
+          <p:cNvSpPr/>
+          <p:nvPr/>
+        </p:nvSpPr>
+        <p:spPr>
+          <a:xfrm>
+            <a:off x="8081650" y="5042642"/>
+            <a:ext cx="139537" cy="139537"/>
+          </a:xfrm>
+          <a:prstGeom prst="ellipse">
+            <a:avLst/>
+          </a:prstGeom>
+          <a:solidFill>
+            <a:srgbClr val="F09042"/>
+          </a:solidFill>
+          <a:ln/>
+        </p:spPr>
+      </p:sp>
+      <p:sp>
+        <p:nvSpPr>
+          <p:cNvPr id="108" name="Shape 106"/>
+          <p:cNvSpPr/>
+          <p:nvPr/>
+        </p:nvSpPr>
+        <p:spPr>
+          <a:xfrm>
+            <a:off x="8486729" y="5042642"/>
+            <a:ext cx="139537" cy="139537"/>
+          </a:xfrm>
+          <a:prstGeom prst="ellipse">
+            <a:avLst/>
+          </a:prstGeom>
+          <a:solidFill>
+            <a:srgbClr val="F09042"/>
+          </a:solidFill>
+          <a:ln/>
+        </p:spPr>
+      </p:sp>
+      <p:sp>
+        <p:nvSpPr>
+          <p:cNvPr id="109" name="Shape 107"/>
+          <p:cNvSpPr/>
+          <p:nvPr/>
+        </p:nvSpPr>
+        <p:spPr>
+          <a:xfrm>
+            <a:off x="8891808" y="5042642"/>
+            <a:ext cx="139537" cy="139537"/>
+          </a:xfrm>
+          <a:prstGeom prst="ellipse">
+            <a:avLst/>
+          </a:prstGeom>
+          <a:solidFill>
+            <a:srgbClr val="F09042"/>
+          </a:solidFill>
+          <a:ln/>
+        </p:spPr>
+      </p:sp>
+      <p:sp>
+        <p:nvSpPr>
+          <p:cNvPr id="110" name="Shape 108"/>
+          <p:cNvSpPr/>
+          <p:nvPr/>
+        </p:nvSpPr>
+        <p:spPr>
+          <a:xfrm>
+            <a:off x="9296888" y="5042642"/>
+            <a:ext cx="139537" cy="139537"/>
+          </a:xfrm>
+          <a:prstGeom prst="ellipse">
+            <a:avLst/>
+          </a:prstGeom>
+          <a:solidFill>
+            <a:srgbClr val="F09042"/>
+          </a:solidFill>
+          <a:ln/>
+        </p:spPr>
+      </p:sp>
+      <p:sp>
+        <p:nvSpPr>
+          <p:cNvPr id="111" name="Shape 109"/>
+          <p:cNvSpPr/>
+          <p:nvPr/>
+        </p:nvSpPr>
+        <p:spPr>
+          <a:xfrm>
+            <a:off x="9701967" y="5042642"/>
+            <a:ext cx="139537" cy="139537"/>
+          </a:xfrm>
+          <a:prstGeom prst="ellipse">
+            <a:avLst/>
+          </a:prstGeom>
+          <a:solidFill>
+            <a:srgbClr val="F09042"/>
+          </a:solidFill>
+          <a:ln/>
+        </p:spPr>
+      </p:sp>
+      <p:sp>
+        <p:nvSpPr>
+          <p:cNvPr id="112" name="Shape 110"/>
+          <p:cNvSpPr/>
+          <p:nvPr/>
+        </p:nvSpPr>
+        <p:spPr>
+          <a:xfrm>
+            <a:off x="10107046" y="5042642"/>
+            <a:ext cx="139537" cy="139537"/>
+          </a:xfrm>
+          <a:prstGeom prst="ellipse">
+            <a:avLst/>
+          </a:prstGeom>
+          <a:solidFill>
+            <a:srgbClr val="F09042"/>
+          </a:solidFill>
+          <a:ln/>
+        </p:spPr>
+      </p:sp>
+      <p:sp>
+        <p:nvSpPr>
+          <p:cNvPr id="113" name="Shape 111"/>
+          <p:cNvSpPr/>
+          <p:nvPr/>
+        </p:nvSpPr>
+        <p:spPr>
+          <a:xfrm>
+            <a:off x="10512125" y="5042642"/>
+            <a:ext cx="139537" cy="139537"/>
+          </a:xfrm>
+          <a:prstGeom prst="ellipse">
+            <a:avLst/>
+          </a:prstGeom>
+          <a:solidFill>
+            <a:srgbClr val="F09042"/>
+          </a:solidFill>
+          <a:ln/>
+        </p:spPr>
+      </p:sp>
+      <p:sp>
+        <p:nvSpPr>
+          <p:cNvPr id="114" name="Shape 112"/>
+          <p:cNvSpPr/>
+          <p:nvPr/>
+        </p:nvSpPr>
+        <p:spPr>
+          <a:xfrm>
+            <a:off x="10917204" y="5042642"/>
+            <a:ext cx="139537" cy="139537"/>
+          </a:xfrm>
+          <a:prstGeom prst="ellipse">
+            <a:avLst/>
+          </a:prstGeom>
+          <a:solidFill>
+            <a:srgbClr val="F09042"/>
+          </a:solidFill>
+          <a:ln/>
+        </p:spPr>
+      </p:sp>
+      <p:sp>
+        <p:nvSpPr>
+          <p:cNvPr id="115" name="Shape 113"/>
+          <p:cNvSpPr/>
+          <p:nvPr/>
+        </p:nvSpPr>
+        <p:spPr>
+          <a:xfrm>
+            <a:off x="11322284" y="5042642"/>
+            <a:ext cx="139537" cy="139537"/>
+          </a:xfrm>
+          <a:prstGeom prst="ellipse">
+            <a:avLst/>
+          </a:prstGeom>
+          <a:solidFill>
+            <a:srgbClr val="F09042"/>
+          </a:solidFill>
+          <a:ln/>
+        </p:spPr>
+      </p:sp>
+      <p:sp>
+        <p:nvSpPr>
+          <p:cNvPr id="116" name="Shape 114"/>
+          <p:cNvSpPr/>
+          <p:nvPr/>
+        </p:nvSpPr>
+        <p:spPr>
+          <a:xfrm>
+            <a:off x="7498080" y="5376672"/>
+            <a:ext cx="164592" cy="164592"/>
+          </a:xfrm>
+          <a:prstGeom prst="ellipse">
+            <a:avLst/>
+          </a:prstGeom>
+          <a:solidFill>
+            <a:srgbClr val="C9CFDC"/>
+          </a:solidFill>
+          <a:ln/>
+        </p:spPr>
+      </p:sp>
+      <p:sp>
+        <p:nvSpPr>
+          <p:cNvPr id="117" name="Text 115"/>
+          <p:cNvSpPr/>
+          <p:nvPr/>
+        </p:nvSpPr>
+        <p:spPr>
+          <a:xfrm>
+            <a:off x="7699248" y="5321808"/>
+            <a:ext cx="761238" cy="320040"/>
+          </a:xfrm>
+          <a:prstGeom prst="rect">
+            <a:avLst/>
+          </a:prstGeom>
+          <a:noFill/>
+          <a:ln/>
+        </p:spPr>
+        <p:txBody>
+          <a:bodyPr wrap="square" rtlCol="0" anchor="ctr"/>
+          <a:lstStyle/>
+          <a:p>
+            <a:pPr indent="0" marL="0">
+              <a:buNone/>
+            </a:pPr>
+            <a:r>
+              <a:rPr lang="en-US" sz="900" dirty="0">
+                <a:solidFill>
+                  <a:srgbClr val="15233F"/>
+                </a:solidFill>
+                <a:latin typeface="Calibri" pitchFamily="34" charset="0"/>
+                <a:ea typeface="Calibri" pitchFamily="34" charset="-122"/>
+                <a:cs typeface="Calibri" pitchFamily="34" charset="-120"/>
+              </a:rPr>
+              <a:t>Non-exposés sains (65)</a:t>
+            </a:r>
+            <a:endParaRPr lang="en-US" sz="900" dirty="0"/>
+          </a:p>
+        </p:txBody>
+      </p:sp>
+      <p:sp>
+        <p:nvSpPr>
+          <p:cNvPr id="118" name="Shape 116"/>
+          <p:cNvSpPr/>
+          <p:nvPr/>
+        </p:nvSpPr>
+        <p:spPr>
+          <a:xfrm>
+            <a:off x="8533638" y="5376672"/>
+            <a:ext cx="164592" cy="164592"/>
+          </a:xfrm>
+          <a:prstGeom prst="ellipse">
+            <a:avLst/>
+          </a:prstGeom>
+          <a:solidFill>
+            <a:srgbClr val="0E1729"/>
+          </a:solidFill>
+          <a:ln/>
+        </p:spPr>
+      </p:sp>
+      <p:sp>
+        <p:nvSpPr>
+          <p:cNvPr id="119" name="Text 117"/>
+          <p:cNvSpPr/>
+          <p:nvPr/>
+        </p:nvSpPr>
+        <p:spPr>
+          <a:xfrm>
+            <a:off x="8734806" y="5321808"/>
+            <a:ext cx="761238" cy="320040"/>
+          </a:xfrm>
+          <a:prstGeom prst="rect">
+            <a:avLst/>
+          </a:prstGeom>
+          <a:noFill/>
+          <a:ln/>
+        </p:spPr>
+        <p:txBody>
+          <a:bodyPr wrap="square" rtlCol="0" anchor="ctr"/>
+          <a:lstStyle/>
+          <a:p>
+            <a:pPr indent="0" marL="0">
+              <a:buNone/>
+            </a:pPr>
+            <a:r>
+              <a:rPr lang="en-US" sz="900" dirty="0">
+                <a:solidFill>
+                  <a:srgbClr val="15233F"/>
+                </a:solidFill>
+                <a:latin typeface="Calibri" pitchFamily="34" charset="0"/>
+                <a:ea typeface="Calibri" pitchFamily="34" charset="-122"/>
+                <a:cs typeface="Calibri" pitchFamily="34" charset="-120"/>
+              </a:rPr>
+              <a:t>Non-exposés malades (25)</a:t>
+            </a:r>
+            <a:endParaRPr lang="en-US" sz="900" dirty="0"/>
+          </a:p>
+        </p:txBody>
+      </p:sp>
+      <p:sp>
+        <p:nvSpPr>
+          <p:cNvPr id="120" name="Shape 118"/>
+          <p:cNvSpPr/>
+          <p:nvPr/>
+        </p:nvSpPr>
+        <p:spPr>
+          <a:xfrm>
+            <a:off x="9569196" y="5376672"/>
+            <a:ext cx="164592" cy="164592"/>
+          </a:xfrm>
+          <a:prstGeom prst="ellipse">
+            <a:avLst/>
+          </a:prstGeom>
+          <a:solidFill>
+            <a:srgbClr val="F09042"/>
+          </a:solidFill>
+          <a:ln/>
+        </p:spPr>
+      </p:sp>
+      <p:sp>
+        <p:nvSpPr>
+          <p:cNvPr id="121" name="Text 119"/>
+          <p:cNvSpPr/>
+          <p:nvPr/>
+        </p:nvSpPr>
+        <p:spPr>
+          <a:xfrm>
+            <a:off x="9770364" y="5321808"/>
+            <a:ext cx="761238" cy="320040"/>
+          </a:xfrm>
+          <a:prstGeom prst="rect">
+            <a:avLst/>
+          </a:prstGeom>
+          <a:noFill/>
+          <a:ln/>
+        </p:spPr>
+        <p:txBody>
+          <a:bodyPr wrap="square" rtlCol="0" anchor="ctr"/>
+          <a:lstStyle/>
+          <a:p>
+            <a:pPr indent="0" marL="0">
+              <a:buNone/>
+            </a:pPr>
+            <a:r>
+              <a:rPr lang="en-US" sz="900" dirty="0">
+                <a:solidFill>
+                  <a:srgbClr val="15233F"/>
+                </a:solidFill>
+                <a:latin typeface="Calibri" pitchFamily="34" charset="0"/>
+                <a:ea typeface="Calibri" pitchFamily="34" charset="-122"/>
+                <a:cs typeface="Calibri" pitchFamily="34" charset="-120"/>
+              </a:rPr>
+              <a:t>Exposés malades (25)</a:t>
+            </a:r>
+            <a:endParaRPr lang="en-US" sz="900" dirty="0"/>
+          </a:p>
+        </p:txBody>
+      </p:sp>
+      <p:sp>
+        <p:nvSpPr>
+          <p:cNvPr id="122" name="Shape 120"/>
+          <p:cNvSpPr/>
+          <p:nvPr/>
+        </p:nvSpPr>
+        <p:spPr>
+          <a:xfrm>
+            <a:off x="10604754" y="5376672"/>
+            <a:ext cx="164592" cy="164592"/>
+          </a:xfrm>
+          <a:prstGeom prst="ellipse">
+            <a:avLst/>
+          </a:prstGeom>
+          <a:solidFill>
+            <a:srgbClr val="FFFFFF"/>
+          </a:solidFill>
+          <a:ln/>
+        </p:spPr>
+      </p:sp>
+      <p:sp>
+        <p:nvSpPr>
+          <p:cNvPr id="123" name="Text 121"/>
+          <p:cNvSpPr/>
+          <p:nvPr/>
+        </p:nvSpPr>
+        <p:spPr>
+          <a:xfrm>
+            <a:off x="10805922" y="5321808"/>
+            <a:ext cx="761238" cy="320040"/>
+          </a:xfrm>
+          <a:prstGeom prst="rect">
+            <a:avLst/>
+          </a:prstGeom>
+          <a:noFill/>
+          <a:ln/>
+        </p:spPr>
+        <p:txBody>
+          <a:bodyPr wrap="square" rtlCol="0" anchor="ctr"/>
+          <a:lstStyle/>
+          <a:p>
+            <a:pPr indent="0" marL="0">
+              <a:buNone/>
+            </a:pPr>
+            <a:r>
+              <a:rPr lang="en-US" sz="900" dirty="0">
+                <a:solidFill>
+                  <a:srgbClr val="15233F"/>
+                </a:solidFill>
+                <a:latin typeface="Calibri" pitchFamily="34" charset="0"/>
+                <a:ea typeface="Calibri" pitchFamily="34" charset="-122"/>
+                <a:cs typeface="Calibri" pitchFamily="34" charset="-120"/>
+              </a:rPr>
+              <a:t> (0)</a:t>
+            </a:r>
+            <a:endParaRPr lang="en-US" sz="900" dirty="0"/>
+          </a:p>
+        </p:txBody>
+      </p:sp>
+      <p:sp>
+        <p:nvSpPr>
+          <p:cNvPr id="124" name="Text 122"/>
+          <p:cNvSpPr/>
+          <p:nvPr/>
+        </p:nvSpPr>
+        <p:spPr>
+          <a:xfrm>
+            <a:off x="640080" y="5989320"/>
+            <a:ext cx="10972800" cy="365760"/>
+          </a:xfrm>
+          <a:prstGeom prst="rect">
+            <a:avLst/>
+          </a:prstGeom>
+          <a:noFill/>
+          <a:ln/>
+        </p:spPr>
+        <p:txBody>
+          <a:bodyPr wrap="square" rtlCol="0" anchor="ctr"/>
+          <a:lstStyle/>
+          <a:p>
+            <a:pPr algn="ctr" indent="0" marL="0">
+              <a:buNone/>
+            </a:pPr>
+            <a:r>
+              <a:rPr lang="en-US" sz="1100" i="1" dirty="0">
+                <a:solidFill>
+                  <a:srgbClr val="6B7280"/>
+                </a:solidFill>
+                <a:latin typeface="Calibri" pitchFamily="34" charset="0"/>
+                <a:ea typeface="Calibri" pitchFamily="34" charset="-122"/>
+                <a:cs typeface="Calibri" pitchFamily="34" charset="-120"/>
+              </a:rPr>
+              <a:t>Rapporte OR avec IC95%, pas la p-value seule. C'est la mesure d'effet attendue en épidémiologie.</a:t>
             </a:r>
             <a:endParaRPr lang="en-US" sz="1100" dirty="0"/>
           </a:p>

--- a/formations/output/biostat-module-2-comparaisons.pptx
+++ b/formations/output/biostat-module-2-comparaisons.pptx
@@ -6565,9 +6565,9 @@
           <p:nvPr/>
         </p:nvSpPr>
         <p:spPr>
-          <a:xfrm>
-            <a:off x="8899398" y="5852160"/>
-            <a:ext cx="0" cy="-533400"/>
+          <a:xfrm flipV="1">
+            <a:off x="8899398" y="5318760"/>
+            <a:ext cx="4572" cy="533400"/>
           </a:xfrm>
           <a:prstGeom prst="line">
             <a:avLst/>
@@ -6590,7 +6590,7 @@
         <p:spPr>
           <a:xfrm>
             <a:off x="8674799" y="5852160"/>
-            <a:ext cx="449199" cy="0"/>
+            <a:ext cx="449199" cy="4572"/>
           </a:xfrm>
           <a:prstGeom prst="line">
             <a:avLst/>
@@ -6611,9 +6611,9 @@
           <p:nvPr/>
         </p:nvSpPr>
         <p:spPr>
-          <a:xfrm>
-            <a:off x="8899398" y="4480560"/>
-            <a:ext cx="0" cy="-762000"/>
+          <a:xfrm flipV="1">
+            <a:off x="8899398" y="3718560"/>
+            <a:ext cx="4572" cy="762000"/>
           </a:xfrm>
           <a:prstGeom prst="line">
             <a:avLst/>
@@ -6636,7 +6636,7 @@
         <p:spPr>
           <a:xfrm>
             <a:off x="8674799" y="3718560"/>
-            <a:ext cx="449199" cy="0"/>
+            <a:ext cx="449199" cy="4572"/>
           </a:xfrm>
           <a:prstGeom prst="line">
             <a:avLst/>
@@ -6684,7 +6684,7 @@
         <p:spPr>
           <a:xfrm>
             <a:off x="8450199" y="4861560"/>
-            <a:ext cx="898398" cy="0"/>
+            <a:ext cx="898398" cy="4572"/>
           </a:xfrm>
           <a:prstGeom prst="line">
             <a:avLst/>
@@ -6744,9 +6744,9 @@
           <p:nvPr/>
         </p:nvSpPr>
         <p:spPr>
-          <a:xfrm>
-            <a:off x="10696194" y="5090160"/>
-            <a:ext cx="0" cy="-533400"/>
+          <a:xfrm flipV="1">
+            <a:off x="10696194" y="4556760"/>
+            <a:ext cx="4572" cy="533400"/>
           </a:xfrm>
           <a:prstGeom prst="line">
             <a:avLst/>
@@ -6769,7 +6769,7 @@
         <p:spPr>
           <a:xfrm>
             <a:off x="10471595" y="5090160"/>
-            <a:ext cx="449199" cy="0"/>
+            <a:ext cx="449199" cy="4572"/>
           </a:xfrm>
           <a:prstGeom prst="line">
             <a:avLst/>
@@ -6790,9 +6790,9 @@
           <p:nvPr/>
         </p:nvSpPr>
         <p:spPr>
-          <a:xfrm>
-            <a:off x="10696194" y="3718560"/>
-            <a:ext cx="0" cy="-609600"/>
+          <a:xfrm flipV="1">
+            <a:off x="10696194" y="3108960"/>
+            <a:ext cx="4572" cy="609600"/>
           </a:xfrm>
           <a:prstGeom prst="line">
             <a:avLst/>
@@ -6815,7 +6815,7 @@
         <p:spPr>
           <a:xfrm>
             <a:off x="10471595" y="3108960"/>
-            <a:ext cx="449199" cy="0"/>
+            <a:ext cx="449199" cy="4572"/>
           </a:xfrm>
           <a:prstGeom prst="line">
             <a:avLst/>
@@ -6863,7 +6863,7 @@
         <p:spPr>
           <a:xfrm>
             <a:off x="10246995" y="4175760"/>
-            <a:ext cx="898398" cy="0"/>
+            <a:ext cx="898398" cy="4572"/>
           </a:xfrm>
           <a:prstGeom prst="line">
             <a:avLst/>
@@ -8904,7 +8904,7 @@
         <p:spPr>
           <a:xfrm>
             <a:off x="4200144" y="4366260"/>
-            <a:ext cx="182880" cy="0"/>
+            <a:ext cx="182880" cy="4572"/>
           </a:xfrm>
           <a:prstGeom prst="line">
             <a:avLst/>
@@ -8948,9 +8948,9 @@
           <p:nvPr/>
         </p:nvSpPr>
         <p:spPr>
-          <a:xfrm>
-            <a:off x="4309872" y="4439412"/>
-            <a:ext cx="73152" cy="-73152"/>
+          <a:xfrm flipV="1">
+            <a:off x="4309872" y="4366260"/>
+            <a:ext cx="73152" cy="73152"/>
           </a:xfrm>
           <a:prstGeom prst="line">
             <a:avLst/>
@@ -9124,7 +9124,7 @@
         <p:spPr>
           <a:xfrm>
             <a:off x="7988808" y="4366260"/>
-            <a:ext cx="182880" cy="0"/>
+            <a:ext cx="182880" cy="4572"/>
           </a:xfrm>
           <a:prstGeom prst="line">
             <a:avLst/>
@@ -9168,9 +9168,9 @@
           <p:nvPr/>
         </p:nvSpPr>
         <p:spPr>
-          <a:xfrm>
-            <a:off x="8098536" y="4439412"/>
-            <a:ext cx="73152" cy="-73152"/>
+          <a:xfrm flipV="1">
+            <a:off x="8098536" y="4366260"/>
+            <a:ext cx="73152" cy="73152"/>
           </a:xfrm>
           <a:prstGeom prst="line">
             <a:avLst/>
@@ -11701,9 +11701,9 @@
           <p:nvPr/>
         </p:nvSpPr>
         <p:spPr>
-          <a:xfrm>
-            <a:off x="8762238" y="5486400"/>
-            <a:ext cx="0" cy="-461234"/>
+          <a:xfrm flipV="1">
+            <a:off x="8762238" y="5025166"/>
+            <a:ext cx="4572" cy="461234"/>
           </a:xfrm>
           <a:prstGeom prst="line">
             <a:avLst/>
@@ -11726,7 +11726,7 @@
         <p:spPr>
           <a:xfrm>
             <a:off x="8526209" y="5486400"/>
-            <a:ext cx="472059" cy="0"/>
+            <a:ext cx="472059" cy="4572"/>
           </a:xfrm>
           <a:prstGeom prst="line">
             <a:avLst/>
@@ -11747,9 +11747,9 @@
           <p:nvPr/>
         </p:nvSpPr>
         <p:spPr>
-          <a:xfrm>
-            <a:off x="8762238" y="4432151"/>
-            <a:ext cx="0" cy="-527125"/>
+          <a:xfrm flipV="1">
+            <a:off x="8762238" y="3905026"/>
+            <a:ext cx="4572" cy="527125"/>
           </a:xfrm>
           <a:prstGeom prst="line">
             <a:avLst/>
@@ -11772,7 +11772,7 @@
         <p:spPr>
           <a:xfrm>
             <a:off x="8526209" y="3905026"/>
-            <a:ext cx="472059" cy="0"/>
+            <a:ext cx="472059" cy="4572"/>
           </a:xfrm>
           <a:prstGeom prst="line">
             <a:avLst/>
@@ -11820,7 +11820,7 @@
         <p:spPr>
           <a:xfrm>
             <a:off x="8290179" y="4761604"/>
-            <a:ext cx="944118" cy="0"/>
+            <a:ext cx="944118" cy="4572"/>
           </a:xfrm>
           <a:prstGeom prst="line">
             <a:avLst/>
@@ -11880,9 +11880,9 @@
           <p:nvPr/>
         </p:nvSpPr>
         <p:spPr>
-          <a:xfrm>
-            <a:off x="10650474" y="4893385"/>
-            <a:ext cx="0" cy="-395344"/>
+          <a:xfrm flipV="1">
+            <a:off x="10650474" y="4498041"/>
+            <a:ext cx="4572" cy="395344"/>
           </a:xfrm>
           <a:prstGeom prst="line">
             <a:avLst/>
@@ -11905,7 +11905,7 @@
         <p:spPr>
           <a:xfrm>
             <a:off x="10414445" y="4893385"/>
-            <a:ext cx="472059" cy="0"/>
+            <a:ext cx="472059" cy="4572"/>
           </a:xfrm>
           <a:prstGeom prst="line">
             <a:avLst/>
@@ -11926,9 +11926,9 @@
           <p:nvPr/>
         </p:nvSpPr>
         <p:spPr>
-          <a:xfrm>
-            <a:off x="10650474" y="3839135"/>
-            <a:ext cx="0" cy="-593015"/>
+          <a:xfrm flipV="1">
+            <a:off x="10650474" y="3246120"/>
+            <a:ext cx="4572" cy="593015"/>
           </a:xfrm>
           <a:prstGeom prst="line">
             <a:avLst/>
@@ -11951,7 +11951,7 @@
         <p:spPr>
           <a:xfrm>
             <a:off x="10414445" y="3246120"/>
-            <a:ext cx="472059" cy="0"/>
+            <a:ext cx="472059" cy="4572"/>
           </a:xfrm>
           <a:prstGeom prst="line">
             <a:avLst/>
@@ -11999,7 +11999,7 @@
         <p:spPr>
           <a:xfrm>
             <a:off x="10178415" y="4168588"/>
-            <a:ext cx="944118" cy="0"/>
+            <a:ext cx="944118" cy="4572"/>
           </a:xfrm>
           <a:prstGeom prst="line">
             <a:avLst/>
@@ -13044,9 +13044,9 @@
           <p:nvPr/>
         </p:nvSpPr>
         <p:spPr>
-          <a:xfrm>
-            <a:off x="8762238" y="5486400"/>
-            <a:ext cx="0" cy="-179222"/>
+          <a:xfrm flipV="1">
+            <a:off x="8762238" y="5307178"/>
+            <a:ext cx="4572" cy="179222"/>
           </a:xfrm>
           <a:prstGeom prst="line">
             <a:avLst/>
@@ -13069,7 +13069,7 @@
         <p:spPr>
           <a:xfrm>
             <a:off x="8526209" y="5486400"/>
-            <a:ext cx="472059" cy="0"/>
+            <a:ext cx="472059" cy="4572"/>
           </a:xfrm>
           <a:prstGeom prst="line">
             <a:avLst/>
@@ -13090,9 +13090,9 @@
           <p:nvPr/>
         </p:nvSpPr>
         <p:spPr>
-          <a:xfrm>
-            <a:off x="8762238" y="4702302"/>
-            <a:ext cx="0" cy="-1008126"/>
+          <a:xfrm flipV="1">
+            <a:off x="8762238" y="3694176"/>
+            <a:ext cx="4572" cy="1008126"/>
           </a:xfrm>
           <a:prstGeom prst="line">
             <a:avLst/>
@@ -13115,7 +13115,7 @@
         <p:spPr>
           <a:xfrm>
             <a:off x="8526209" y="3694176"/>
-            <a:ext cx="472059" cy="0"/>
+            <a:ext cx="472059" cy="4572"/>
           </a:xfrm>
           <a:prstGeom prst="line">
             <a:avLst/>
@@ -13163,7 +13163,7 @@
         <p:spPr>
           <a:xfrm>
             <a:off x="8290179" y="5150358"/>
-            <a:ext cx="944118" cy="0"/>
+            <a:ext cx="944118" cy="4572"/>
           </a:xfrm>
           <a:prstGeom prst="line">
             <a:avLst/>
@@ -13223,9 +13223,9 @@
           <p:nvPr/>
         </p:nvSpPr>
         <p:spPr>
-          <a:xfrm>
-            <a:off x="10650474" y="5374386"/>
-            <a:ext cx="0" cy="-291236"/>
+          <a:xfrm flipV="1">
+            <a:off x="10650474" y="5083150"/>
+            <a:ext cx="4572" cy="291236"/>
           </a:xfrm>
           <a:prstGeom prst="line">
             <a:avLst/>
@@ -13248,7 +13248,7 @@
         <p:spPr>
           <a:xfrm>
             <a:off x="10414445" y="5374386"/>
-            <a:ext cx="472059" cy="0"/>
+            <a:ext cx="472059" cy="4572"/>
           </a:xfrm>
           <a:prstGeom prst="line">
             <a:avLst/>
@@ -13269,9 +13269,9 @@
           <p:nvPr/>
         </p:nvSpPr>
         <p:spPr>
-          <a:xfrm>
-            <a:off x="10650474" y="4254246"/>
-            <a:ext cx="0" cy="-1008126"/>
+          <a:xfrm flipV="1">
+            <a:off x="10650474" y="3246120"/>
+            <a:ext cx="4572" cy="1008126"/>
           </a:xfrm>
           <a:prstGeom prst="line">
             <a:avLst/>
@@ -13294,7 +13294,7 @@
         <p:spPr>
           <a:xfrm>
             <a:off x="10414445" y="3246120"/>
-            <a:ext cx="472059" cy="0"/>
+            <a:ext cx="472059" cy="4572"/>
           </a:xfrm>
           <a:prstGeom prst="line">
             <a:avLst/>
@@ -13342,7 +13342,7 @@
         <p:spPr>
           <a:xfrm>
             <a:off x="10178415" y="4814316"/>
-            <a:ext cx="944118" cy="0"/>
+            <a:ext cx="944118" cy="4572"/>
           </a:xfrm>
           <a:prstGeom prst="line">
             <a:avLst/>
@@ -15317,9 +15317,9 @@
           <p:nvPr/>
         </p:nvSpPr>
         <p:spPr>
-          <a:xfrm>
-            <a:off x="8447532" y="5486400"/>
-            <a:ext cx="0" cy="-373380"/>
+          <a:xfrm flipV="1">
+            <a:off x="8447532" y="5113020"/>
+            <a:ext cx="4572" cy="373380"/>
           </a:xfrm>
           <a:prstGeom prst="line">
             <a:avLst/>
@@ -15342,7 +15342,7 @@
         <p:spPr>
           <a:xfrm>
             <a:off x="8290179" y="5486400"/>
-            <a:ext cx="314706" cy="0"/>
+            <a:ext cx="314706" cy="4572"/>
           </a:xfrm>
           <a:prstGeom prst="line">
             <a:avLst/>
@@ -15363,9 +15363,9 @@
           <p:nvPr/>
         </p:nvSpPr>
         <p:spPr>
-          <a:xfrm>
-            <a:off x="8447532" y="4573693"/>
-            <a:ext cx="0" cy="-331893"/>
+          <a:xfrm flipV="1">
+            <a:off x="8447532" y="4241800"/>
+            <a:ext cx="4572" cy="331893"/>
           </a:xfrm>
           <a:prstGeom prst="line">
             <a:avLst/>
@@ -15388,7 +15388,7 @@
         <p:spPr>
           <a:xfrm>
             <a:off x="8290179" y="4241800"/>
-            <a:ext cx="314706" cy="0"/>
+            <a:ext cx="314706" cy="4572"/>
           </a:xfrm>
           <a:prstGeom prst="line">
             <a:avLst/>
@@ -15436,7 +15436,7 @@
         <p:spPr>
           <a:xfrm>
             <a:off x="8132826" y="4864100"/>
-            <a:ext cx="629412" cy="0"/>
+            <a:ext cx="629412" cy="4572"/>
           </a:xfrm>
           <a:prstGeom prst="line">
             <a:avLst/>
@@ -15496,9 +15496,9 @@
           <p:nvPr/>
         </p:nvSpPr>
         <p:spPr>
-          <a:xfrm>
-            <a:off x="9706356" y="5071533"/>
-            <a:ext cx="0" cy="-414867"/>
+          <a:xfrm flipV="1">
+            <a:off x="9706356" y="4656667"/>
+            <a:ext cx="4572" cy="414867"/>
           </a:xfrm>
           <a:prstGeom prst="line">
             <a:avLst/>
@@ -15521,7 +15521,7 @@
         <p:spPr>
           <a:xfrm>
             <a:off x="9549003" y="5071533"/>
-            <a:ext cx="314706" cy="0"/>
+            <a:ext cx="314706" cy="4572"/>
           </a:xfrm>
           <a:prstGeom prst="line">
             <a:avLst/>
@@ -15542,9 +15542,9 @@
           <p:nvPr/>
         </p:nvSpPr>
         <p:spPr>
-          <a:xfrm>
-            <a:off x="9706356" y="4034367"/>
-            <a:ext cx="0" cy="-331893"/>
+          <a:xfrm flipV="1">
+            <a:off x="9706356" y="3702473"/>
+            <a:ext cx="4572" cy="331893"/>
           </a:xfrm>
           <a:prstGeom prst="line">
             <a:avLst/>
@@ -15567,7 +15567,7 @@
         <p:spPr>
           <a:xfrm>
             <a:off x="9549003" y="3702473"/>
-            <a:ext cx="314706" cy="0"/>
+            <a:ext cx="314706" cy="4572"/>
           </a:xfrm>
           <a:prstGeom prst="line">
             <a:avLst/>
@@ -15615,7 +15615,7 @@
         <p:spPr>
           <a:xfrm>
             <a:off x="9391650" y="4366260"/>
-            <a:ext cx="629412" cy="0"/>
+            <a:ext cx="629412" cy="4572"/>
           </a:xfrm>
           <a:prstGeom prst="line">
             <a:avLst/>
@@ -15675,9 +15675,9 @@
           <p:nvPr/>
         </p:nvSpPr>
         <p:spPr>
-          <a:xfrm>
-            <a:off x="10965180" y="4656667"/>
-            <a:ext cx="0" cy="-497840"/>
+          <a:xfrm flipV="1">
+            <a:off x="10965180" y="4158827"/>
+            <a:ext cx="4572" cy="497840"/>
           </a:xfrm>
           <a:prstGeom prst="line">
             <a:avLst/>
@@ -15700,7 +15700,7 @@
         <p:spPr>
           <a:xfrm>
             <a:off x="10807827" y="4656667"/>
-            <a:ext cx="314706" cy="0"/>
+            <a:ext cx="314706" cy="4572"/>
           </a:xfrm>
           <a:prstGeom prst="line">
             <a:avLst/>
@@ -15721,9 +15721,9 @@
           <p:nvPr/>
         </p:nvSpPr>
         <p:spPr>
-          <a:xfrm>
-            <a:off x="10965180" y="3578013"/>
-            <a:ext cx="0" cy="-331893"/>
+          <a:xfrm flipV="1">
+            <a:off x="10965180" y="3246120"/>
+            <a:ext cx="4572" cy="331893"/>
           </a:xfrm>
           <a:prstGeom prst="line">
             <a:avLst/>
@@ -15746,7 +15746,7 @@
         <p:spPr>
           <a:xfrm>
             <a:off x="10807827" y="3246120"/>
-            <a:ext cx="314706" cy="0"/>
+            <a:ext cx="314706" cy="4572"/>
           </a:xfrm>
           <a:prstGeom prst="line">
             <a:avLst/>
@@ -15794,7 +15794,7 @@
         <p:spPr>
           <a:xfrm>
             <a:off x="10650474" y="3868420"/>
-            <a:ext cx="629412" cy="0"/>
+            <a:ext cx="629412" cy="4572"/>
           </a:xfrm>
           <a:prstGeom prst="line">
             <a:avLst/>
@@ -16859,9 +16859,9 @@
           <p:nvPr/>
         </p:nvSpPr>
         <p:spPr>
-          <a:xfrm>
-            <a:off x="8447532" y="5486400"/>
-            <a:ext cx="0" cy="-320040"/>
+          <a:xfrm flipV="1">
+            <a:off x="8447532" y="5166360"/>
+            <a:ext cx="4572" cy="320040"/>
           </a:xfrm>
           <a:prstGeom prst="line">
             <a:avLst/>
@@ -16884,7 +16884,7 @@
         <p:spPr>
           <a:xfrm>
             <a:off x="8290179" y="5486400"/>
-            <a:ext cx="314706" cy="0"/>
+            <a:ext cx="314706" cy="4572"/>
           </a:xfrm>
           <a:prstGeom prst="line">
             <a:avLst/>
@@ -16905,9 +16905,9 @@
           <p:nvPr/>
         </p:nvSpPr>
         <p:spPr>
-          <a:xfrm>
-            <a:off x="8447532" y="4632960"/>
-            <a:ext cx="0" cy="-746760"/>
+          <a:xfrm flipV="1">
+            <a:off x="8447532" y="3886200"/>
+            <a:ext cx="4572" cy="746760"/>
           </a:xfrm>
           <a:prstGeom prst="line">
             <a:avLst/>
@@ -16930,7 +16930,7 @@
         <p:spPr>
           <a:xfrm>
             <a:off x="8290179" y="3886200"/>
-            <a:ext cx="314706" cy="0"/>
+            <a:ext cx="314706" cy="4572"/>
           </a:xfrm>
           <a:prstGeom prst="line">
             <a:avLst/>
@@ -16978,7 +16978,7 @@
         <p:spPr>
           <a:xfrm>
             <a:off x="8132826" y="4953000"/>
-            <a:ext cx="629412" cy="0"/>
+            <a:ext cx="629412" cy="4572"/>
           </a:xfrm>
           <a:prstGeom prst="line">
             <a:avLst/>
@@ -17038,9 +17038,9 @@
           <p:nvPr/>
         </p:nvSpPr>
         <p:spPr>
-          <a:xfrm>
-            <a:off x="9706356" y="5273040"/>
-            <a:ext cx="0" cy="-426720"/>
+          <a:xfrm flipV="1">
+            <a:off x="9706356" y="4846320"/>
+            <a:ext cx="4572" cy="426720"/>
           </a:xfrm>
           <a:prstGeom prst="line">
             <a:avLst/>
@@ -17063,7 +17063,7 @@
         <p:spPr>
           <a:xfrm>
             <a:off x="9549003" y="5273040"/>
-            <a:ext cx="314706" cy="0"/>
+            <a:ext cx="314706" cy="4572"/>
           </a:xfrm>
           <a:prstGeom prst="line">
             <a:avLst/>
@@ -17084,9 +17084,9 @@
           <p:nvPr/>
         </p:nvSpPr>
         <p:spPr>
-          <a:xfrm>
-            <a:off x="9706356" y="4206240"/>
-            <a:ext cx="0" cy="-426720"/>
+          <a:xfrm flipV="1">
+            <a:off x="9706356" y="3779520"/>
+            <a:ext cx="4572" cy="426720"/>
           </a:xfrm>
           <a:prstGeom prst="line">
             <a:avLst/>
@@ -17109,7 +17109,7 @@
         <p:spPr>
           <a:xfrm>
             <a:off x="9549003" y="3779520"/>
-            <a:ext cx="314706" cy="0"/>
+            <a:ext cx="314706" cy="4572"/>
           </a:xfrm>
           <a:prstGeom prst="line">
             <a:avLst/>
@@ -17157,7 +17157,7 @@
         <p:spPr>
           <a:xfrm>
             <a:off x="9391650" y="4526280"/>
-            <a:ext cx="629412" cy="0"/>
+            <a:ext cx="629412" cy="4572"/>
           </a:xfrm>
           <a:prstGeom prst="line">
             <a:avLst/>
@@ -17217,9 +17217,9 @@
           <p:nvPr/>
         </p:nvSpPr>
         <p:spPr>
-          <a:xfrm>
-            <a:off x="10965180" y="5059680"/>
-            <a:ext cx="0" cy="-533400"/>
+          <a:xfrm flipV="1">
+            <a:off x="10965180" y="4526280"/>
+            <a:ext cx="4572" cy="533400"/>
           </a:xfrm>
           <a:prstGeom prst="line">
             <a:avLst/>
@@ -17242,7 +17242,7 @@
         <p:spPr>
           <a:xfrm>
             <a:off x="10807827" y="5059680"/>
-            <a:ext cx="314706" cy="0"/>
+            <a:ext cx="314706" cy="4572"/>
           </a:xfrm>
           <a:prstGeom prst="line">
             <a:avLst/>
@@ -17263,9 +17263,9 @@
           <p:nvPr/>
         </p:nvSpPr>
         <p:spPr>
-          <a:xfrm>
-            <a:off x="10965180" y="3779520"/>
-            <a:ext cx="0" cy="-533400"/>
+          <a:xfrm flipV="1">
+            <a:off x="10965180" y="3246120"/>
+            <a:ext cx="4572" cy="533400"/>
           </a:xfrm>
           <a:prstGeom prst="line">
             <a:avLst/>
@@ -17288,7 +17288,7 @@
         <p:spPr>
           <a:xfrm>
             <a:off x="10807827" y="3246120"/>
-            <a:ext cx="314706" cy="0"/>
+            <a:ext cx="314706" cy="4572"/>
           </a:xfrm>
           <a:prstGeom prst="line">
             <a:avLst/>
@@ -17336,7 +17336,7 @@
         <p:spPr>
           <a:xfrm>
             <a:off x="10650474" y="4099560"/>
-            <a:ext cx="629412" cy="0"/>
+            <a:ext cx="629412" cy="4572"/>
           </a:xfrm>
           <a:prstGeom prst="line">
             <a:avLst/>

--- a/formations/output/biostat-module-2-comparaisons.pptx
+++ b/formations/output/biostat-module-2-comparaisons.pptx
@@ -6443,7 +6443,7 @@
         <p:spPr>
           <a:xfrm>
             <a:off x="8001000" y="5852160"/>
-            <a:ext cx="3593592" cy="0"/>
+            <a:ext cx="3593592" cy="9144"/>
           </a:xfrm>
           <a:prstGeom prst="line">
             <a:avLst/>
@@ -6466,7 +6466,7 @@
         <p:spPr>
           <a:xfrm>
             <a:off x="8001000" y="3108960"/>
-            <a:ext cx="0" cy="2743200"/>
+            <a:ext cx="9144" cy="2743200"/>
           </a:xfrm>
           <a:prstGeom prst="line">
             <a:avLst/>
@@ -6567,7 +6567,7 @@
         <p:spPr>
           <a:xfrm flipV="1">
             <a:off x="8899398" y="5318760"/>
-            <a:ext cx="4572" cy="533400"/>
+            <a:ext cx="9144" cy="533400"/>
           </a:xfrm>
           <a:prstGeom prst="line">
             <a:avLst/>
@@ -6590,7 +6590,7 @@
         <p:spPr>
           <a:xfrm>
             <a:off x="8674799" y="5852160"/>
-            <a:ext cx="449199" cy="4572"/>
+            <a:ext cx="449199" cy="9144"/>
           </a:xfrm>
           <a:prstGeom prst="line">
             <a:avLst/>
@@ -6613,7 +6613,7 @@
         <p:spPr>
           <a:xfrm flipV="1">
             <a:off x="8899398" y="3718560"/>
-            <a:ext cx="4572" cy="762000"/>
+            <a:ext cx="9144" cy="762000"/>
           </a:xfrm>
           <a:prstGeom prst="line">
             <a:avLst/>
@@ -6636,7 +6636,7 @@
         <p:spPr>
           <a:xfrm>
             <a:off x="8674799" y="3718560"/>
-            <a:ext cx="449199" cy="4572"/>
+            <a:ext cx="449199" cy="9144"/>
           </a:xfrm>
           <a:prstGeom prst="line">
             <a:avLst/>
@@ -6684,7 +6684,7 @@
         <p:spPr>
           <a:xfrm>
             <a:off x="8450199" y="4861560"/>
-            <a:ext cx="898398" cy="4572"/>
+            <a:ext cx="898398" cy="9144"/>
           </a:xfrm>
           <a:prstGeom prst="line">
             <a:avLst/>
@@ -6746,7 +6746,7 @@
         <p:spPr>
           <a:xfrm flipV="1">
             <a:off x="10696194" y="4556760"/>
-            <a:ext cx="4572" cy="533400"/>
+            <a:ext cx="9144" cy="533400"/>
           </a:xfrm>
           <a:prstGeom prst="line">
             <a:avLst/>
@@ -6769,7 +6769,7 @@
         <p:spPr>
           <a:xfrm>
             <a:off x="10471595" y="5090160"/>
-            <a:ext cx="449199" cy="4572"/>
+            <a:ext cx="449199" cy="9144"/>
           </a:xfrm>
           <a:prstGeom prst="line">
             <a:avLst/>
@@ -6792,7 +6792,7 @@
         <p:spPr>
           <a:xfrm flipV="1">
             <a:off x="10696194" y="3108960"/>
-            <a:ext cx="4572" cy="609600"/>
+            <a:ext cx="9144" cy="609600"/>
           </a:xfrm>
           <a:prstGeom prst="line">
             <a:avLst/>
@@ -6815,7 +6815,7 @@
         <p:spPr>
           <a:xfrm>
             <a:off x="10471595" y="3108960"/>
-            <a:ext cx="449199" cy="4572"/>
+            <a:ext cx="449199" cy="9144"/>
           </a:xfrm>
           <a:prstGeom prst="line">
             <a:avLst/>
@@ -6863,7 +6863,7 @@
         <p:spPr>
           <a:xfrm>
             <a:off x="10246995" y="4175760"/>
-            <a:ext cx="898398" cy="4572"/>
+            <a:ext cx="898398" cy="9144"/>
           </a:xfrm>
           <a:prstGeom prst="line">
             <a:avLst/>
@@ -8904,7 +8904,7 @@
         <p:spPr>
           <a:xfrm>
             <a:off x="4200144" y="4366260"/>
-            <a:ext cx="182880" cy="4572"/>
+            <a:ext cx="182880" cy="9144"/>
           </a:xfrm>
           <a:prstGeom prst="line">
             <a:avLst/>
@@ -9124,7 +9124,7 @@
         <p:spPr>
           <a:xfrm>
             <a:off x="7988808" y="4366260"/>
-            <a:ext cx="182880" cy="4572"/>
+            <a:ext cx="182880" cy="9144"/>
           </a:xfrm>
           <a:prstGeom prst="line">
             <a:avLst/>
@@ -11579,7 +11579,7 @@
         <p:spPr>
           <a:xfrm>
             <a:off x="7818120" y="5486400"/>
-            <a:ext cx="3776472" cy="0"/>
+            <a:ext cx="3776472" cy="9144"/>
           </a:xfrm>
           <a:prstGeom prst="line">
             <a:avLst/>
@@ -11602,7 +11602,7 @@
         <p:spPr>
           <a:xfrm>
             <a:off x="7818120" y="3246120"/>
-            <a:ext cx="0" cy="2240280"/>
+            <a:ext cx="9144" cy="2240280"/>
           </a:xfrm>
           <a:prstGeom prst="line">
             <a:avLst/>
@@ -11703,7 +11703,7 @@
         <p:spPr>
           <a:xfrm flipV="1">
             <a:off x="8762238" y="5025166"/>
-            <a:ext cx="4572" cy="461234"/>
+            <a:ext cx="9144" cy="461234"/>
           </a:xfrm>
           <a:prstGeom prst="line">
             <a:avLst/>
@@ -11726,7 +11726,7 @@
         <p:spPr>
           <a:xfrm>
             <a:off x="8526209" y="5486400"/>
-            <a:ext cx="472059" cy="4572"/>
+            <a:ext cx="472059" cy="9144"/>
           </a:xfrm>
           <a:prstGeom prst="line">
             <a:avLst/>
@@ -11749,7 +11749,7 @@
         <p:spPr>
           <a:xfrm flipV="1">
             <a:off x="8762238" y="3905026"/>
-            <a:ext cx="4572" cy="527125"/>
+            <a:ext cx="9144" cy="527125"/>
           </a:xfrm>
           <a:prstGeom prst="line">
             <a:avLst/>
@@ -11772,7 +11772,7 @@
         <p:spPr>
           <a:xfrm>
             <a:off x="8526209" y="3905026"/>
-            <a:ext cx="472059" cy="4572"/>
+            <a:ext cx="472059" cy="9144"/>
           </a:xfrm>
           <a:prstGeom prst="line">
             <a:avLst/>
@@ -11820,7 +11820,7 @@
         <p:spPr>
           <a:xfrm>
             <a:off x="8290179" y="4761604"/>
-            <a:ext cx="944118" cy="4572"/>
+            <a:ext cx="944118" cy="9144"/>
           </a:xfrm>
           <a:prstGeom prst="line">
             <a:avLst/>
@@ -11882,7 +11882,7 @@
         <p:spPr>
           <a:xfrm flipV="1">
             <a:off x="10650474" y="4498041"/>
-            <a:ext cx="4572" cy="395344"/>
+            <a:ext cx="9144" cy="395344"/>
           </a:xfrm>
           <a:prstGeom prst="line">
             <a:avLst/>
@@ -11905,7 +11905,7 @@
         <p:spPr>
           <a:xfrm>
             <a:off x="10414445" y="4893385"/>
-            <a:ext cx="472059" cy="4572"/>
+            <a:ext cx="472059" cy="9144"/>
           </a:xfrm>
           <a:prstGeom prst="line">
             <a:avLst/>
@@ -11928,7 +11928,7 @@
         <p:spPr>
           <a:xfrm flipV="1">
             <a:off x="10650474" y="3246120"/>
-            <a:ext cx="4572" cy="593015"/>
+            <a:ext cx="9144" cy="593015"/>
           </a:xfrm>
           <a:prstGeom prst="line">
             <a:avLst/>
@@ -11951,7 +11951,7 @@
         <p:spPr>
           <a:xfrm>
             <a:off x="10414445" y="3246120"/>
-            <a:ext cx="472059" cy="4572"/>
+            <a:ext cx="472059" cy="9144"/>
           </a:xfrm>
           <a:prstGeom prst="line">
             <a:avLst/>
@@ -11999,7 +11999,7 @@
         <p:spPr>
           <a:xfrm>
             <a:off x="10178415" y="4168588"/>
-            <a:ext cx="944118" cy="4572"/>
+            <a:ext cx="944118" cy="9144"/>
           </a:xfrm>
           <a:prstGeom prst="line">
             <a:avLst/>
@@ -12922,7 +12922,7 @@
         <p:spPr>
           <a:xfrm>
             <a:off x="7818120" y="5486400"/>
-            <a:ext cx="3776472" cy="0"/>
+            <a:ext cx="3776472" cy="9144"/>
           </a:xfrm>
           <a:prstGeom prst="line">
             <a:avLst/>
@@ -12945,7 +12945,7 @@
         <p:spPr>
           <a:xfrm>
             <a:off x="7818120" y="3246120"/>
-            <a:ext cx="0" cy="2240280"/>
+            <a:ext cx="9144" cy="2240280"/>
           </a:xfrm>
           <a:prstGeom prst="line">
             <a:avLst/>
@@ -13046,7 +13046,7 @@
         <p:spPr>
           <a:xfrm flipV="1">
             <a:off x="8762238" y="5307178"/>
-            <a:ext cx="4572" cy="179222"/>
+            <a:ext cx="9144" cy="179222"/>
           </a:xfrm>
           <a:prstGeom prst="line">
             <a:avLst/>
@@ -13069,7 +13069,7 @@
         <p:spPr>
           <a:xfrm>
             <a:off x="8526209" y="5486400"/>
-            <a:ext cx="472059" cy="4572"/>
+            <a:ext cx="472059" cy="9144"/>
           </a:xfrm>
           <a:prstGeom prst="line">
             <a:avLst/>
@@ -13092,7 +13092,7 @@
         <p:spPr>
           <a:xfrm flipV="1">
             <a:off x="8762238" y="3694176"/>
-            <a:ext cx="4572" cy="1008126"/>
+            <a:ext cx="9144" cy="1008126"/>
           </a:xfrm>
           <a:prstGeom prst="line">
             <a:avLst/>
@@ -13115,7 +13115,7 @@
         <p:spPr>
           <a:xfrm>
             <a:off x="8526209" y="3694176"/>
-            <a:ext cx="472059" cy="4572"/>
+            <a:ext cx="472059" cy="9144"/>
           </a:xfrm>
           <a:prstGeom prst="line">
             <a:avLst/>
@@ -13163,7 +13163,7 @@
         <p:spPr>
           <a:xfrm>
             <a:off x="8290179" y="5150358"/>
-            <a:ext cx="944118" cy="4572"/>
+            <a:ext cx="944118" cy="9144"/>
           </a:xfrm>
           <a:prstGeom prst="line">
             <a:avLst/>
@@ -13225,7 +13225,7 @@
         <p:spPr>
           <a:xfrm flipV="1">
             <a:off x="10650474" y="5083150"/>
-            <a:ext cx="4572" cy="291236"/>
+            <a:ext cx="9144" cy="291236"/>
           </a:xfrm>
           <a:prstGeom prst="line">
             <a:avLst/>
@@ -13248,7 +13248,7 @@
         <p:spPr>
           <a:xfrm>
             <a:off x="10414445" y="5374386"/>
-            <a:ext cx="472059" cy="4572"/>
+            <a:ext cx="472059" cy="9144"/>
           </a:xfrm>
           <a:prstGeom prst="line">
             <a:avLst/>
@@ -13271,7 +13271,7 @@
         <p:spPr>
           <a:xfrm flipV="1">
             <a:off x="10650474" y="3246120"/>
-            <a:ext cx="4572" cy="1008126"/>
+            <a:ext cx="9144" cy="1008126"/>
           </a:xfrm>
           <a:prstGeom prst="line">
             <a:avLst/>
@@ -13294,7 +13294,7 @@
         <p:spPr>
           <a:xfrm>
             <a:off x="10414445" y="3246120"/>
-            <a:ext cx="472059" cy="4572"/>
+            <a:ext cx="472059" cy="9144"/>
           </a:xfrm>
           <a:prstGeom prst="line">
             <a:avLst/>
@@ -13342,7 +13342,7 @@
         <p:spPr>
           <a:xfrm>
             <a:off x="10178415" y="4814316"/>
-            <a:ext cx="944118" cy="4572"/>
+            <a:ext cx="944118" cy="9144"/>
           </a:xfrm>
           <a:prstGeom prst="line">
             <a:avLst/>
@@ -15195,7 +15195,7 @@
         <p:spPr>
           <a:xfrm>
             <a:off x="7818120" y="5486400"/>
-            <a:ext cx="3776472" cy="0"/>
+            <a:ext cx="3776472" cy="9144"/>
           </a:xfrm>
           <a:prstGeom prst="line">
             <a:avLst/>
@@ -15218,7 +15218,7 @@
         <p:spPr>
           <a:xfrm>
             <a:off x="7818120" y="3246120"/>
-            <a:ext cx="0" cy="2240280"/>
+            <a:ext cx="9144" cy="2240280"/>
           </a:xfrm>
           <a:prstGeom prst="line">
             <a:avLst/>
@@ -15319,7 +15319,7 @@
         <p:spPr>
           <a:xfrm flipV="1">
             <a:off x="8447532" y="5113020"/>
-            <a:ext cx="4572" cy="373380"/>
+            <a:ext cx="9144" cy="373380"/>
           </a:xfrm>
           <a:prstGeom prst="line">
             <a:avLst/>
@@ -15342,7 +15342,7 @@
         <p:spPr>
           <a:xfrm>
             <a:off x="8290179" y="5486400"/>
-            <a:ext cx="314706" cy="4572"/>
+            <a:ext cx="314706" cy="9144"/>
           </a:xfrm>
           <a:prstGeom prst="line">
             <a:avLst/>
@@ -15365,7 +15365,7 @@
         <p:spPr>
           <a:xfrm flipV="1">
             <a:off x="8447532" y="4241800"/>
-            <a:ext cx="4572" cy="331893"/>
+            <a:ext cx="9144" cy="331893"/>
           </a:xfrm>
           <a:prstGeom prst="line">
             <a:avLst/>
@@ -15388,7 +15388,7 @@
         <p:spPr>
           <a:xfrm>
             <a:off x="8290179" y="4241800"/>
-            <a:ext cx="314706" cy="4572"/>
+            <a:ext cx="314706" cy="9144"/>
           </a:xfrm>
           <a:prstGeom prst="line">
             <a:avLst/>
@@ -15436,7 +15436,7 @@
         <p:spPr>
           <a:xfrm>
             <a:off x="8132826" y="4864100"/>
-            <a:ext cx="629412" cy="4572"/>
+            <a:ext cx="629412" cy="9144"/>
           </a:xfrm>
           <a:prstGeom prst="line">
             <a:avLst/>
@@ -15498,7 +15498,7 @@
         <p:spPr>
           <a:xfrm flipV="1">
             <a:off x="9706356" y="4656667"/>
-            <a:ext cx="4572" cy="414867"/>
+            <a:ext cx="9144" cy="414867"/>
           </a:xfrm>
           <a:prstGeom prst="line">
             <a:avLst/>
@@ -15521,7 +15521,7 @@
         <p:spPr>
           <a:xfrm>
             <a:off x="9549003" y="5071533"/>
-            <a:ext cx="314706" cy="4572"/>
+            <a:ext cx="314706" cy="9144"/>
           </a:xfrm>
           <a:prstGeom prst="line">
             <a:avLst/>
@@ -15544,7 +15544,7 @@
         <p:spPr>
           <a:xfrm flipV="1">
             <a:off x="9706356" y="3702473"/>
-            <a:ext cx="4572" cy="331893"/>
+            <a:ext cx="9144" cy="331893"/>
           </a:xfrm>
           <a:prstGeom prst="line">
             <a:avLst/>
@@ -15567,7 +15567,7 @@
         <p:spPr>
           <a:xfrm>
             <a:off x="9549003" y="3702473"/>
-            <a:ext cx="314706" cy="4572"/>
+            <a:ext cx="314706" cy="9144"/>
           </a:xfrm>
           <a:prstGeom prst="line">
             <a:avLst/>
@@ -15615,7 +15615,7 @@
         <p:spPr>
           <a:xfrm>
             <a:off x="9391650" y="4366260"/>
-            <a:ext cx="629412" cy="4572"/>
+            <a:ext cx="629412" cy="9144"/>
           </a:xfrm>
           <a:prstGeom prst="line">
             <a:avLst/>
@@ -15677,7 +15677,7 @@
         <p:spPr>
           <a:xfrm flipV="1">
             <a:off x="10965180" y="4158827"/>
-            <a:ext cx="4572" cy="497840"/>
+            <a:ext cx="9144" cy="497840"/>
           </a:xfrm>
           <a:prstGeom prst="line">
             <a:avLst/>
@@ -15700,7 +15700,7 @@
         <p:spPr>
           <a:xfrm>
             <a:off x="10807827" y="4656667"/>
-            <a:ext cx="314706" cy="4572"/>
+            <a:ext cx="314706" cy="9144"/>
           </a:xfrm>
           <a:prstGeom prst="line">
             <a:avLst/>
@@ -15723,7 +15723,7 @@
         <p:spPr>
           <a:xfrm flipV="1">
             <a:off x="10965180" y="3246120"/>
-            <a:ext cx="4572" cy="331893"/>
+            <a:ext cx="9144" cy="331893"/>
           </a:xfrm>
           <a:prstGeom prst="line">
             <a:avLst/>
@@ -15746,7 +15746,7 @@
         <p:spPr>
           <a:xfrm>
             <a:off x="10807827" y="3246120"/>
-            <a:ext cx="314706" cy="4572"/>
+            <a:ext cx="314706" cy="9144"/>
           </a:xfrm>
           <a:prstGeom prst="line">
             <a:avLst/>
@@ -15794,7 +15794,7 @@
         <p:spPr>
           <a:xfrm>
             <a:off x="10650474" y="3868420"/>
-            <a:ext cx="629412" cy="4572"/>
+            <a:ext cx="629412" cy="9144"/>
           </a:xfrm>
           <a:prstGeom prst="line">
             <a:avLst/>
@@ -16737,7 +16737,7 @@
         <p:spPr>
           <a:xfrm>
             <a:off x="7818120" y="5486400"/>
-            <a:ext cx="3776472" cy="0"/>
+            <a:ext cx="3776472" cy="9144"/>
           </a:xfrm>
           <a:prstGeom prst="line">
             <a:avLst/>
@@ -16760,7 +16760,7 @@
         <p:spPr>
           <a:xfrm>
             <a:off x="7818120" y="3246120"/>
-            <a:ext cx="0" cy="2240280"/>
+            <a:ext cx="9144" cy="2240280"/>
           </a:xfrm>
           <a:prstGeom prst="line">
             <a:avLst/>
@@ -16861,7 +16861,7 @@
         <p:spPr>
           <a:xfrm flipV="1">
             <a:off x="8447532" y="5166360"/>
-            <a:ext cx="4572" cy="320040"/>
+            <a:ext cx="9144" cy="320040"/>
           </a:xfrm>
           <a:prstGeom prst="line">
             <a:avLst/>
@@ -16884,7 +16884,7 @@
         <p:spPr>
           <a:xfrm>
             <a:off x="8290179" y="5486400"/>
-            <a:ext cx="314706" cy="4572"/>
+            <a:ext cx="314706" cy="9144"/>
           </a:xfrm>
           <a:prstGeom prst="line">
             <a:avLst/>
@@ -16907,7 +16907,7 @@
         <p:spPr>
           <a:xfrm flipV="1">
             <a:off x="8447532" y="3886200"/>
-            <a:ext cx="4572" cy="746760"/>
+            <a:ext cx="9144" cy="746760"/>
           </a:xfrm>
           <a:prstGeom prst="line">
             <a:avLst/>
@@ -16930,7 +16930,7 @@
         <p:spPr>
           <a:xfrm>
             <a:off x="8290179" y="3886200"/>
-            <a:ext cx="314706" cy="4572"/>
+            <a:ext cx="314706" cy="9144"/>
           </a:xfrm>
           <a:prstGeom prst="line">
             <a:avLst/>
@@ -16978,7 +16978,7 @@
         <p:spPr>
           <a:xfrm>
             <a:off x="8132826" y="4953000"/>
-            <a:ext cx="629412" cy="4572"/>
+            <a:ext cx="629412" cy="9144"/>
           </a:xfrm>
           <a:prstGeom prst="line">
             <a:avLst/>
@@ -17040,7 +17040,7 @@
         <p:spPr>
           <a:xfrm flipV="1">
             <a:off x="9706356" y="4846320"/>
-            <a:ext cx="4572" cy="426720"/>
+            <a:ext cx="9144" cy="426720"/>
           </a:xfrm>
           <a:prstGeom prst="line">
             <a:avLst/>
@@ -17063,7 +17063,7 @@
         <p:spPr>
           <a:xfrm>
             <a:off x="9549003" y="5273040"/>
-            <a:ext cx="314706" cy="4572"/>
+            <a:ext cx="314706" cy="9144"/>
           </a:xfrm>
           <a:prstGeom prst="line">
             <a:avLst/>
@@ -17086,7 +17086,7 @@
         <p:spPr>
           <a:xfrm flipV="1">
             <a:off x="9706356" y="3779520"/>
-            <a:ext cx="4572" cy="426720"/>
+            <a:ext cx="9144" cy="426720"/>
           </a:xfrm>
           <a:prstGeom prst="line">
             <a:avLst/>
@@ -17109,7 +17109,7 @@
         <p:spPr>
           <a:xfrm>
             <a:off x="9549003" y="3779520"/>
-            <a:ext cx="314706" cy="4572"/>
+            <a:ext cx="314706" cy="9144"/>
           </a:xfrm>
           <a:prstGeom prst="line">
             <a:avLst/>
@@ -17157,7 +17157,7 @@
         <p:spPr>
           <a:xfrm>
             <a:off x="9391650" y="4526280"/>
-            <a:ext cx="629412" cy="4572"/>
+            <a:ext cx="629412" cy="9144"/>
           </a:xfrm>
           <a:prstGeom prst="line">
             <a:avLst/>
@@ -17219,7 +17219,7 @@
         <p:spPr>
           <a:xfrm flipV="1">
             <a:off x="10965180" y="4526280"/>
-            <a:ext cx="4572" cy="533400"/>
+            <a:ext cx="9144" cy="533400"/>
           </a:xfrm>
           <a:prstGeom prst="line">
             <a:avLst/>
@@ -17242,7 +17242,7 @@
         <p:spPr>
           <a:xfrm>
             <a:off x="10807827" y="5059680"/>
-            <a:ext cx="314706" cy="4572"/>
+            <a:ext cx="314706" cy="9144"/>
           </a:xfrm>
           <a:prstGeom prst="line">
             <a:avLst/>
@@ -17265,7 +17265,7 @@
         <p:spPr>
           <a:xfrm flipV="1">
             <a:off x="10965180" y="3246120"/>
-            <a:ext cx="4572" cy="533400"/>
+            <a:ext cx="9144" cy="533400"/>
           </a:xfrm>
           <a:prstGeom prst="line">
             <a:avLst/>
@@ -17288,7 +17288,7 @@
         <p:spPr>
           <a:xfrm>
             <a:off x="10807827" y="3246120"/>
-            <a:ext cx="314706" cy="4572"/>
+            <a:ext cx="314706" cy="9144"/>
           </a:xfrm>
           <a:prstGeom prst="line">
             <a:avLst/>
@@ -17336,7 +17336,7 @@
         <p:spPr>
           <a:xfrm>
             <a:off x="10650474" y="4099560"/>
-            <a:ext cx="629412" cy="4572"/>
+            <a:ext cx="629412" cy="9144"/>
           </a:xfrm>
           <a:prstGeom prst="line">
             <a:avLst/>
